--- a/scicom/skeleton_presentation.pptx
+++ b/scicom/skeleton_presentation.pptx
@@ -116,6 +116,11 @@
       </a:defRPr>
     </a:lvl9pPr>
   </p:defaultTextStyle>
+  <p:extLst>
+    <p:ext uri="{EFAFB233-063F-42B5-8137-9DF3F51BA10A}">
+      <p15:sldGuideLst xmlns:p15="http://schemas.microsoft.com/office/powerpoint/2012/main"/>
+    </p:ext>
+  </p:extLst>
 </p:presentation>
 </file>
 
@@ -266,7 +271,7 @@
           <a:p>
             <a:fld id="{42A0533D-F09C-441E-936C-5A7061C2C138}" type="datetimeFigureOut">
               <a:rPr lang="de-DE" smtClean="0"/>
-              <a:t>06.05.2026</a:t>
+              <a:t>11.05.2026</a:t>
             </a:fld>
             <a:endParaRPr lang="de-DE"/>
           </a:p>
@@ -464,7 +469,7 @@
           <a:p>
             <a:fld id="{42A0533D-F09C-441E-936C-5A7061C2C138}" type="datetimeFigureOut">
               <a:rPr lang="de-DE" smtClean="0"/>
-              <a:t>06.05.2026</a:t>
+              <a:t>11.05.2026</a:t>
             </a:fld>
             <a:endParaRPr lang="de-DE"/>
           </a:p>
@@ -672,7 +677,7 @@
           <a:p>
             <a:fld id="{42A0533D-F09C-441E-936C-5A7061C2C138}" type="datetimeFigureOut">
               <a:rPr lang="de-DE" smtClean="0"/>
-              <a:t>06.05.2026</a:t>
+              <a:t>11.05.2026</a:t>
             </a:fld>
             <a:endParaRPr lang="de-DE"/>
           </a:p>
@@ -870,7 +875,7 @@
           <a:p>
             <a:fld id="{42A0533D-F09C-441E-936C-5A7061C2C138}" type="datetimeFigureOut">
               <a:rPr lang="de-DE" smtClean="0"/>
-              <a:t>06.05.2026</a:t>
+              <a:t>11.05.2026</a:t>
             </a:fld>
             <a:endParaRPr lang="de-DE"/>
           </a:p>
@@ -1145,7 +1150,7 @@
           <a:p>
             <a:fld id="{42A0533D-F09C-441E-936C-5A7061C2C138}" type="datetimeFigureOut">
               <a:rPr lang="de-DE" smtClean="0"/>
-              <a:t>06.05.2026</a:t>
+              <a:t>11.05.2026</a:t>
             </a:fld>
             <a:endParaRPr lang="de-DE"/>
           </a:p>
@@ -1410,7 +1415,7 @@
           <a:p>
             <a:fld id="{42A0533D-F09C-441E-936C-5A7061C2C138}" type="datetimeFigureOut">
               <a:rPr lang="de-DE" smtClean="0"/>
-              <a:t>06.05.2026</a:t>
+              <a:t>11.05.2026</a:t>
             </a:fld>
             <a:endParaRPr lang="de-DE"/>
           </a:p>
@@ -1822,7 +1827,7 @@
           <a:p>
             <a:fld id="{42A0533D-F09C-441E-936C-5A7061C2C138}" type="datetimeFigureOut">
               <a:rPr lang="de-DE" smtClean="0"/>
-              <a:t>06.05.2026</a:t>
+              <a:t>11.05.2026</a:t>
             </a:fld>
             <a:endParaRPr lang="de-DE"/>
           </a:p>
@@ -1963,7 +1968,7 @@
           <a:p>
             <a:fld id="{42A0533D-F09C-441E-936C-5A7061C2C138}" type="datetimeFigureOut">
               <a:rPr lang="de-DE" smtClean="0"/>
-              <a:t>06.05.2026</a:t>
+              <a:t>11.05.2026</a:t>
             </a:fld>
             <a:endParaRPr lang="de-DE"/>
           </a:p>
@@ -2076,7 +2081,7 @@
           <a:p>
             <a:fld id="{42A0533D-F09C-441E-936C-5A7061C2C138}" type="datetimeFigureOut">
               <a:rPr lang="de-DE" smtClean="0"/>
-              <a:t>06.05.2026</a:t>
+              <a:t>11.05.2026</a:t>
             </a:fld>
             <a:endParaRPr lang="de-DE"/>
           </a:p>
@@ -2387,7 +2392,7 @@
           <a:p>
             <a:fld id="{42A0533D-F09C-441E-936C-5A7061C2C138}" type="datetimeFigureOut">
               <a:rPr lang="de-DE" smtClean="0"/>
-              <a:t>06.05.2026</a:t>
+              <a:t>11.05.2026</a:t>
             </a:fld>
             <a:endParaRPr lang="de-DE"/>
           </a:p>
@@ -2675,7 +2680,7 @@
           <a:p>
             <a:fld id="{42A0533D-F09C-441E-936C-5A7061C2C138}" type="datetimeFigureOut">
               <a:rPr lang="de-DE" smtClean="0"/>
-              <a:t>06.05.2026</a:t>
+              <a:t>11.05.2026</a:t>
             </a:fld>
             <a:endParaRPr lang="de-DE"/>
           </a:p>
@@ -2916,7 +2921,7 @@
           <a:p>
             <a:fld id="{42A0533D-F09C-441E-936C-5A7061C2C138}" type="datetimeFigureOut">
               <a:rPr lang="de-DE" smtClean="0"/>
-              <a:t>06.05.2026</a:t>
+              <a:t>11.05.2026</a:t>
             </a:fld>
             <a:endParaRPr lang="de-DE"/>
           </a:p>
@@ -4893,7 +4898,7 @@
         </p:nvSpPr>
         <p:spPr>
           <a:xfrm>
-            <a:off x="2857500" y="2628900"/>
+            <a:off x="955426" y="1325201"/>
             <a:ext cx="5140574" cy="369332"/>
           </a:xfrm>
           <a:prstGeom prst="rect">
@@ -4978,6 +4983,109 @@
           </a:p>
         </p:txBody>
       </p:sp>
+      <p:sp>
+        <p:nvSpPr>
+          <p:cNvPr id="3" name="Textfeld 2">
+            <a:extLst>
+              <a:ext uri="{FF2B5EF4-FFF2-40B4-BE49-F238E27FC236}">
+                <a16:creationId xmlns:a16="http://schemas.microsoft.com/office/drawing/2014/main" id="{4967ADF7-314F-D965-009A-9301567912C0}"/>
+              </a:ext>
+            </a:extLst>
+          </p:cNvPr>
+          <p:cNvSpPr txBox="1"/>
+          <p:nvPr/>
+        </p:nvSpPr>
+        <p:spPr>
+          <a:xfrm>
+            <a:off x="9739265" y="6460577"/>
+            <a:ext cx="2292790" cy="261610"/>
+          </a:xfrm>
+          <a:prstGeom prst="rect">
+            <a:avLst/>
+          </a:prstGeom>
+          <a:noFill/>
+        </p:spPr>
+        <p:txBody>
+          <a:bodyPr wrap="square">
+            <a:spAutoFit/>
+          </a:bodyPr>
+          <a:lstStyle/>
+          <a:p>
+            <a:r>
+              <a:rPr lang="de-DE" sz="1050" dirty="0" err="1"/>
+              <a:t>Photo</a:t>
+            </a:r>
+            <a:r>
+              <a:rPr lang="de-DE" sz="1050" dirty="0"/>
+              <a:t> </a:t>
+            </a:r>
+            <a:r>
+              <a:rPr lang="de-DE" sz="1050" dirty="0" err="1"/>
+              <a:t>by</a:t>
+            </a:r>
+            <a:r>
+              <a:rPr lang="de-DE" sz="1050" dirty="0"/>
+              <a:t> </a:t>
+            </a:r>
+            <a:r>
+              <a:rPr lang="de-DE" sz="1050" dirty="0">
+                <a:hlinkClick r:id="rId2"/>
+              </a:rPr>
+              <a:t>Ronan Furuta</a:t>
+            </a:r>
+            <a:r>
+              <a:rPr lang="de-DE" sz="1050" dirty="0"/>
+              <a:t> on </a:t>
+            </a:r>
+            <a:r>
+              <a:rPr lang="de-DE" sz="1050" dirty="0" err="1">
+                <a:hlinkClick r:id="rId3"/>
+              </a:rPr>
+              <a:t>Unsplash</a:t>
+            </a:r>
+            <a:r>
+              <a:rPr lang="de-DE" sz="1050" dirty="0"/>
+              <a:t> </a:t>
+            </a:r>
+          </a:p>
+        </p:txBody>
+      </p:sp>
+      <p:pic>
+        <p:nvPicPr>
+          <p:cNvPr id="6" name="Grafik 5">
+            <a:extLst>
+              <a:ext uri="{FF2B5EF4-FFF2-40B4-BE49-F238E27FC236}">
+                <a16:creationId xmlns:a16="http://schemas.microsoft.com/office/drawing/2014/main" id="{7473C84E-445B-BACD-6861-7F15FC414262}"/>
+              </a:ext>
+            </a:extLst>
+          </p:cNvPr>
+          <p:cNvPicPr>
+            <a:picLocks noChangeAspect="1"/>
+          </p:cNvPicPr>
+          <p:nvPr/>
+        </p:nvPicPr>
+        <p:blipFill>
+          <a:blip r:embed="rId4">
+            <a:extLst>
+              <a:ext uri="{28A0092B-C50C-407E-A947-70E740481C1C}">
+                <a14:useLocalDpi xmlns:a14="http://schemas.microsoft.com/office/drawing/2010/main" val="0"/>
+              </a:ext>
+            </a:extLst>
+          </a:blip>
+          <a:stretch>
+            <a:fillRect/>
+          </a:stretch>
+        </p:blipFill>
+        <p:spPr>
+          <a:xfrm>
+            <a:off x="7043596" y="962334"/>
+            <a:ext cx="3530851" cy="4707801"/>
+          </a:xfrm>
+          <a:prstGeom prst="rect">
+            <a:avLst/>
+          </a:prstGeom>
+        </p:spPr>
+      </p:pic>
     </p:spTree>
     <p:extLst>
       <p:ext uri="{BB962C8B-B14F-4D97-AF65-F5344CB8AC3E}">
@@ -5022,8 +5130,8 @@
         </p:nvSpPr>
         <p:spPr>
           <a:xfrm>
-            <a:off x="3124200" y="2393950"/>
-            <a:ext cx="5024452" cy="923330"/>
+            <a:off x="1071548" y="900129"/>
+            <a:ext cx="2952347" cy="369332"/>
           </a:xfrm>
           <a:prstGeom prst="rect">
             <a:avLst/>
@@ -5064,63 +5172,88 @@
               <a:rPr lang="de-DE" dirty="0"/>
               <a:t>:</a:t>
             </a:r>
-            <a:br>
-              <a:rPr lang="de-DE" dirty="0"/>
-            </a:br>
-            <a:br>
-              <a:rPr lang="de-DE" dirty="0"/>
-            </a:br>
-            <a:r>
-              <a:rPr lang="de-DE" dirty="0"/>
+          </a:p>
+        </p:txBody>
+      </p:sp>
+      <p:sp>
+        <p:nvSpPr>
+          <p:cNvPr id="4" name="Textfeld 3">
+            <a:extLst>
+              <a:ext uri="{FF2B5EF4-FFF2-40B4-BE49-F238E27FC236}">
+                <a16:creationId xmlns:a16="http://schemas.microsoft.com/office/drawing/2014/main" id="{3C3071AE-6EDF-A2C9-A890-5A1575E675A5}"/>
+              </a:ext>
+            </a:extLst>
+          </p:cNvPr>
+          <p:cNvSpPr txBox="1"/>
+          <p:nvPr/>
+        </p:nvSpPr>
+        <p:spPr>
+          <a:xfrm>
+            <a:off x="1301435" y="2802977"/>
+            <a:ext cx="9390708" cy="523220"/>
+          </a:xfrm>
+          <a:prstGeom prst="rect">
+            <a:avLst/>
+          </a:prstGeom>
+          <a:noFill/>
+        </p:spPr>
+        <p:txBody>
+          <a:bodyPr wrap="square">
+            <a:spAutoFit/>
+          </a:bodyPr>
+          <a:lstStyle/>
+          <a:p>
+            <a:r>
+              <a:rPr lang="de-DE" sz="2800" b="1" dirty="0"/>
               <a:t>The </a:t>
             </a:r>
             <a:r>
-              <a:rPr lang="de-DE" dirty="0" err="1"/>
+              <a:rPr lang="de-DE" sz="2800" b="1" dirty="0" err="1"/>
               <a:t>weather</a:t>
             </a:r>
             <a:r>
-              <a:rPr lang="de-DE" dirty="0"/>
+              <a:rPr lang="de-DE" sz="2800" b="1" dirty="0"/>
               <a:t> outside </a:t>
             </a:r>
             <a:r>
-              <a:rPr lang="de-DE" dirty="0" err="1"/>
+              <a:rPr lang="de-DE" sz="2800" b="1" dirty="0" err="1"/>
               <a:t>is</a:t>
             </a:r>
             <a:r>
-              <a:rPr lang="de-DE" dirty="0"/>
+              <a:rPr lang="de-DE" sz="2800" b="1" dirty="0"/>
               <a:t> nice </a:t>
             </a:r>
             <a:r>
-              <a:rPr lang="de-DE" dirty="0" err="1"/>
+              <a:rPr lang="de-DE" sz="2800" b="1" dirty="0" err="1"/>
               <a:t>today</a:t>
             </a:r>
             <a:r>
-              <a:rPr lang="de-DE" dirty="0"/>
+              <a:rPr lang="de-DE" sz="2800" b="1" dirty="0"/>
               <a:t>, </a:t>
             </a:r>
             <a:r>
-              <a:rPr lang="de-DE" dirty="0" err="1"/>
+              <a:rPr lang="de-DE" sz="2800" b="1" dirty="0" err="1"/>
               <a:t>the</a:t>
             </a:r>
             <a:r>
-              <a:rPr lang="de-DE" dirty="0"/>
-              <a:t> </a:t>
-            </a:r>
-            <a:r>
-              <a:rPr lang="de-DE" dirty="0" err="1"/>
+              <a:rPr lang="de-DE" sz="2800" b="1" dirty="0"/>
+              <a:t> </a:t>
+            </a:r>
+            <a:r>
+              <a:rPr lang="de-DE" sz="2800" b="1" dirty="0" err="1"/>
               <a:t>sky</a:t>
             </a:r>
             <a:r>
-              <a:rPr lang="de-DE" dirty="0"/>
-              <a:t> </a:t>
-            </a:r>
-            <a:r>
-              <a:rPr lang="de-DE" dirty="0" err="1"/>
+              <a:rPr lang="de-DE" sz="2800" b="1" dirty="0"/>
+              <a:t> </a:t>
+            </a:r>
+            <a:r>
+              <a:rPr lang="de-DE" sz="2800" b="1" dirty="0" err="1"/>
               <a:t>is</a:t>
             </a:r>
             <a:r>
-              <a:rPr lang="de-DE" dirty="0"/>
-              <a:t> ____.</a:t>
+              <a:rPr lang="de-DE" sz="2800" b="1" dirty="0"/>
+              <a:t> ________.</a:t>
             </a:r>
           </a:p>
         </p:txBody>
@@ -5169,8 +5302,8 @@
         </p:nvSpPr>
         <p:spPr>
           <a:xfrm>
-            <a:off x="3282950" y="2901950"/>
-            <a:ext cx="5806782" cy="369332"/>
+            <a:off x="548803" y="756279"/>
+            <a:ext cx="4553682" cy="369332"/>
           </a:xfrm>
           <a:prstGeom prst="rect">
             <a:avLst/>
@@ -5185,15 +5318,7 @@
           <a:p>
             <a:r>
               <a:rPr lang="de-DE" dirty="0"/>
-              <a:t>3 – Think </a:t>
-            </a:r>
-            <a:r>
-              <a:rPr lang="de-DE" dirty="0" err="1"/>
-              <a:t>of</a:t>
-            </a:r>
-            <a:r>
-              <a:rPr lang="de-DE" dirty="0"/>
-              <a:t> </a:t>
+              <a:t>3 – Find </a:t>
             </a:r>
             <a:r>
               <a:rPr lang="de-DE" dirty="0" err="1"/>
@@ -5205,68 +5330,83 @@
             </a:r>
             <a:r>
               <a:rPr lang="de-DE" dirty="0" err="1"/>
-              <a:t>directions</a:t>
-            </a:r>
-            <a:r>
-              <a:rPr lang="de-DE" dirty="0"/>
-              <a:t> </a:t>
-            </a:r>
-            <a:r>
-              <a:rPr lang="de-DE" dirty="0" err="1"/>
-              <a:t>you</a:t>
-            </a:r>
-            <a:r>
-              <a:rPr lang="de-DE" dirty="0"/>
-              <a:t> </a:t>
-            </a:r>
-            <a:r>
-              <a:rPr lang="de-DE" dirty="0" err="1"/>
-              <a:t>took</a:t>
-            </a:r>
-            <a:r>
-              <a:rPr lang="de-DE" dirty="0"/>
-              <a:t> </a:t>
-            </a:r>
-            <a:r>
-              <a:rPr lang="de-DE" dirty="0" err="1"/>
-              <a:t>from</a:t>
-            </a:r>
-            <a:r>
-              <a:rPr lang="de-DE" dirty="0"/>
-              <a:t> </a:t>
-            </a:r>
-            <a:r>
-              <a:rPr lang="de-DE" dirty="0" err="1"/>
-              <a:t>home</a:t>
-            </a:r>
-            <a:r>
-              <a:rPr lang="de-DE" dirty="0"/>
-              <a:t> </a:t>
-            </a:r>
-            <a:r>
-              <a:rPr lang="de-DE" dirty="0" err="1"/>
-              <a:t>to</a:t>
-            </a:r>
-            <a:r>
-              <a:rPr lang="de-DE" dirty="0"/>
-              <a:t> </a:t>
-            </a:r>
-            <a:r>
-              <a:rPr lang="de-DE" dirty="0" err="1"/>
-              <a:t>get</a:t>
-            </a:r>
-            <a:r>
-              <a:rPr lang="de-DE" dirty="0"/>
-              <a:t> </a:t>
-            </a:r>
-            <a:r>
-              <a:rPr lang="de-DE" dirty="0" err="1"/>
-              <a:t>here</a:t>
-            </a:r>
-            <a:endParaRPr lang="de-DE" dirty="0"/>
-          </a:p>
-        </p:txBody>
-      </p:sp>
+              <a:t>shortest</a:t>
+            </a:r>
+            <a:r>
+              <a:rPr lang="de-DE" dirty="0"/>
+              <a:t> </a:t>
+            </a:r>
+            <a:r>
+              <a:rPr lang="de-DE" dirty="0" err="1"/>
+              <a:t>path</a:t>
+            </a:r>
+            <a:r>
+              <a:rPr lang="de-DE" dirty="0"/>
+              <a:t> </a:t>
+            </a:r>
+            <a:r>
+              <a:rPr lang="de-DE" dirty="0" err="1"/>
+              <a:t>through</a:t>
+            </a:r>
+            <a:r>
+              <a:rPr lang="de-DE" dirty="0"/>
+              <a:t> </a:t>
+            </a:r>
+            <a:r>
+              <a:rPr lang="de-DE" dirty="0" err="1"/>
+              <a:t>this</a:t>
+            </a:r>
+            <a:r>
+              <a:rPr lang="de-DE" dirty="0"/>
+              <a:t> </a:t>
+            </a:r>
+            <a:r>
+              <a:rPr lang="de-DE" dirty="0" err="1"/>
+              <a:t>maze</a:t>
+            </a:r>
+            <a:r>
+              <a:rPr lang="de-DE" dirty="0"/>
+              <a:t>.</a:t>
+            </a:r>
+          </a:p>
+        </p:txBody>
+      </p:sp>
+      <p:pic>
+        <p:nvPicPr>
+          <p:cNvPr id="15" name="Grafik 14">
+            <a:extLst>
+              <a:ext uri="{FF2B5EF4-FFF2-40B4-BE49-F238E27FC236}">
+                <a16:creationId xmlns:a16="http://schemas.microsoft.com/office/drawing/2014/main" id="{9503983C-3D62-6428-B7F2-2A9BE9ADFD7D}"/>
+              </a:ext>
+            </a:extLst>
+          </p:cNvPr>
+          <p:cNvPicPr>
+            <a:picLocks noChangeAspect="1"/>
+          </p:cNvPicPr>
+          <p:nvPr/>
+        </p:nvPicPr>
+        <p:blipFill>
+          <a:blip r:embed="rId2">
+            <a:extLst>
+              <a:ext uri="{28A0092B-C50C-407E-A947-70E740481C1C}">
+                <a14:useLocalDpi xmlns:a14="http://schemas.microsoft.com/office/drawing/2010/main" val="0"/>
+              </a:ext>
+            </a:extLst>
+          </a:blip>
+          <a:stretch>
+            <a:fillRect/>
+          </a:stretch>
+        </p:blipFill>
+        <p:spPr>
+          <a:xfrm>
+            <a:off x="3763753" y="1437227"/>
+            <a:ext cx="4664494" cy="4664494"/>
+          </a:xfrm>
+          <a:prstGeom prst="rect">
+            <a:avLst/>
+          </a:prstGeom>
+        </p:spPr>
+      </p:pic>
     </p:spTree>
     <p:extLst>
       <p:ext uri="{BB962C8B-B14F-4D97-AF65-F5344CB8AC3E}">
@@ -5311,8 +5451,8 @@
         </p:nvSpPr>
         <p:spPr>
           <a:xfrm>
-            <a:off x="3581465" y="558800"/>
-            <a:ext cx="5029069" cy="1200329"/>
+            <a:off x="3644271" y="248257"/>
+            <a:ext cx="5317033" cy="1200329"/>
           </a:xfrm>
           <a:prstGeom prst="rect">
             <a:avLst/>
@@ -5325,86 +5465,90 @@
           </a:bodyPr>
           <a:lstStyle/>
           <a:p>
-            <a:r>
-              <a:rPr lang="de-DE" dirty="0"/>
+            <a:pPr algn="ctr"/>
+            <a:r>
+              <a:rPr lang="de-DE" b="1" dirty="0"/>
               <a:t>Why </a:t>
             </a:r>
             <a:r>
-              <a:rPr lang="de-DE" dirty="0" err="1"/>
+              <a:rPr lang="de-DE" b="1" dirty="0" err="1"/>
               <a:t>are</a:t>
             </a:r>
             <a:r>
-              <a:rPr lang="de-DE" dirty="0"/>
-              <a:t> </a:t>
-            </a:r>
-            <a:r>
-              <a:rPr lang="de-DE" dirty="0" err="1"/>
+              <a:rPr lang="de-DE" b="1" dirty="0"/>
+              <a:t> </a:t>
+            </a:r>
+            <a:r>
+              <a:rPr lang="de-DE" b="1" dirty="0" err="1"/>
               <a:t>brains</a:t>
             </a:r>
             <a:r>
-              <a:rPr lang="de-DE" dirty="0"/>
+              <a:rPr lang="de-DE" b="1" dirty="0"/>
               <a:t> so </a:t>
             </a:r>
             <a:r>
-              <a:rPr lang="de-DE" dirty="0" err="1"/>
+              <a:rPr lang="de-DE" b="1" dirty="0" err="1"/>
               <a:t>good</a:t>
             </a:r>
             <a:r>
-              <a:rPr lang="de-DE" dirty="0"/>
+              <a:rPr lang="de-DE" b="1" dirty="0"/>
               <a:t> at flexible </a:t>
             </a:r>
             <a:r>
-              <a:rPr lang="de-DE" dirty="0" err="1"/>
+              <a:rPr lang="de-DE" b="1" dirty="0" err="1"/>
               <a:t>generalization</a:t>
             </a:r>
             <a:r>
-              <a:rPr lang="de-DE" dirty="0"/>
+              <a:rPr lang="de-DE" b="1" dirty="0"/>
               <a:t>?</a:t>
             </a:r>
           </a:p>
           <a:p>
-            <a:endParaRPr lang="de-DE" dirty="0"/>
-          </a:p>
-          <a:p>
-            <a:r>
-              <a:rPr lang="de-DE" dirty="0"/>
+            <a:pPr algn="ctr"/>
+            <a:endParaRPr lang="de-DE" b="1" dirty="0"/>
+          </a:p>
+          <a:p>
+            <a:pPr algn="ctr"/>
+            <a:r>
+              <a:rPr lang="de-DE" b="1" dirty="0"/>
               <a:t>Why </a:t>
             </a:r>
             <a:r>
-              <a:rPr lang="de-DE" dirty="0" err="1"/>
+              <a:rPr lang="de-DE" b="1" dirty="0" err="1"/>
               <a:t>can‘t</a:t>
             </a:r>
             <a:r>
-              <a:rPr lang="de-DE" dirty="0"/>
-              <a:t> </a:t>
-            </a:r>
-            <a:r>
-              <a:rPr lang="de-DE" dirty="0" err="1"/>
+              <a:rPr lang="de-DE" b="1" dirty="0"/>
+              <a:t> </a:t>
+            </a:r>
+            <a:r>
+              <a:rPr lang="de-DE" b="1" dirty="0" err="1"/>
               <a:t>we</a:t>
             </a:r>
             <a:r>
-              <a:rPr lang="de-DE" dirty="0"/>
-              <a:t> </a:t>
-            </a:r>
-            <a:r>
-              <a:rPr lang="de-DE" dirty="0" err="1"/>
+              <a:rPr lang="de-DE" b="1" dirty="0"/>
+              <a:t> </a:t>
+            </a:r>
+            <a:r>
+              <a:rPr lang="de-DE" b="1" dirty="0" err="1"/>
               <a:t>explain</a:t>
             </a:r>
             <a:r>
-              <a:rPr lang="de-DE" dirty="0"/>
-              <a:t> </a:t>
-            </a:r>
-            <a:r>
-              <a:rPr lang="de-DE" dirty="0" err="1"/>
+              <a:rPr lang="de-DE" b="1" dirty="0"/>
+              <a:t> </a:t>
+            </a:r>
+            <a:r>
+              <a:rPr lang="de-DE" b="1" dirty="0" err="1"/>
               <a:t>it</a:t>
             </a:r>
             <a:r>
-              <a:rPr lang="de-DE" dirty="0"/>
+              <a:rPr lang="de-DE" b="1" dirty="0"/>
               <a:t>?</a:t>
             </a:r>
           </a:p>
           <a:p>
-            <a:endParaRPr lang="de-DE" dirty="0"/>
+            <a:pPr algn="ctr"/>
+            <a:endParaRPr lang="de-DE" b="1" dirty="0"/>
           </a:p>
         </p:txBody>
       </p:sp>
@@ -5417,13 +5561,15 @@
               </a:ext>
             </a:extLst>
           </p:cNvPr>
-          <p:cNvCxnSpPr/>
+          <p:cNvCxnSpPr>
+            <a:cxnSpLocks/>
+          </p:cNvCxnSpPr>
           <p:nvPr/>
         </p:nvCxnSpPr>
         <p:spPr>
           <a:xfrm>
-            <a:off x="1219200" y="4425950"/>
-            <a:ext cx="9480550" cy="88900"/>
+            <a:off x="0" y="5323557"/>
+            <a:ext cx="12045950" cy="33891"/>
           </a:xfrm>
           <a:prstGeom prst="straightConnector1">
             <a:avLst/>
@@ -5461,8 +5607,8 @@
         </p:nvSpPr>
         <p:spPr>
           <a:xfrm>
-            <a:off x="1562100" y="2795369"/>
-            <a:ext cx="850900" cy="646331"/>
+            <a:off x="31745" y="1569045"/>
+            <a:ext cx="2298698" cy="1477328"/>
           </a:xfrm>
           <a:prstGeom prst="rect">
             <a:avLst/>
@@ -5477,14 +5623,41 @@
           <a:p>
             <a:r>
               <a:rPr lang="de-DE" dirty="0"/>
-              <a:t>19XX</a:t>
+              <a:t>350 BCE</a:t>
             </a:r>
             <a:br>
               <a:rPr lang="de-DE" dirty="0"/>
             </a:br>
             <a:r>
-              <a:rPr lang="de-DE" dirty="0" err="1"/>
-              <a:t>turing</a:t>
+              <a:rPr lang="de-DE" dirty="0"/>
+              <a:t>Aristotle in </a:t>
+            </a:r>
+            <a:r>
+              <a:rPr lang="de-DE" i="1" dirty="0"/>
+              <a:t>De Anima</a:t>
+            </a:r>
+            <a:br>
+              <a:rPr lang="de-DE" dirty="0"/>
+            </a:br>
+            <a:r>
+              <a:rPr lang="de-DE" dirty="0" err="1"/>
+              <a:t>substrate-independece</a:t>
+            </a:r>
+            <a:r>
+              <a:rPr lang="de-DE" dirty="0"/>
+              <a:t> </a:t>
+            </a:r>
+            <a:r>
+              <a:rPr lang="de-DE" dirty="0" err="1"/>
+              <a:t>of</a:t>
+            </a:r>
+            <a:r>
+              <a:rPr lang="de-DE" dirty="0"/>
+              <a:t> </a:t>
+            </a:r>
+            <a:r>
+              <a:rPr lang="de-DE" dirty="0" err="1"/>
+              <a:t>thought</a:t>
             </a:r>
             <a:endParaRPr lang="de-DE" dirty="0"/>
           </a:p>
@@ -5504,8 +5677,8 @@
         </p:nvSpPr>
         <p:spPr>
           <a:xfrm>
-            <a:off x="3498850" y="2808069"/>
-            <a:ext cx="1092200" cy="646331"/>
+            <a:off x="879477" y="3035828"/>
+            <a:ext cx="2298699" cy="923330"/>
           </a:xfrm>
           <a:prstGeom prst="rect">
             <a:avLst/>
@@ -5520,16 +5693,46 @@
           <a:p>
             <a:r>
               <a:rPr lang="de-DE" dirty="0"/>
-              <a:t>19XX</a:t>
-            </a:r>
-            <a:br>
-              <a:rPr lang="de-DE" dirty="0"/>
-            </a:br>
-            <a:r>
-              <a:rPr lang="de-DE" dirty="0" err="1"/>
-              <a:t>hopfield</a:t>
-            </a:r>
-            <a:endParaRPr lang="de-DE" dirty="0"/>
+              <a:t>1859 Darwin</a:t>
+            </a:r>
+          </a:p>
+          <a:p>
+            <a:r>
+              <a:rPr lang="de-DE" dirty="0"/>
+              <a:t>‚</a:t>
+            </a:r>
+            <a:r>
+              <a:rPr lang="de-DE" dirty="0" err="1"/>
+              <a:t>brains</a:t>
+            </a:r>
+            <a:r>
+              <a:rPr lang="de-DE" dirty="0"/>
+              <a:t> </a:t>
+            </a:r>
+            <a:r>
+              <a:rPr lang="de-DE" dirty="0" err="1"/>
+              <a:t>that</a:t>
+            </a:r>
+            <a:r>
+              <a:rPr lang="de-DE" dirty="0"/>
+              <a:t> </a:t>
+            </a:r>
+            <a:r>
+              <a:rPr lang="de-DE" dirty="0" err="1"/>
+              <a:t>generalize</a:t>
+            </a:r>
+            <a:r>
+              <a:rPr lang="de-DE" dirty="0"/>
+              <a:t> </a:t>
+            </a:r>
+            <a:r>
+              <a:rPr lang="de-DE" dirty="0" err="1"/>
+              <a:t>survive</a:t>
+            </a:r>
+            <a:r>
+              <a:rPr lang="de-DE" dirty="0"/>
+              <a:t>‘</a:t>
+            </a:r>
           </a:p>
         </p:txBody>
       </p:sp>
@@ -5547,8 +5750,8 @@
         </p:nvSpPr>
         <p:spPr>
           <a:xfrm>
-            <a:off x="5959475" y="2808069"/>
-            <a:ext cx="1092200" cy="646331"/>
+            <a:off x="2549524" y="2281314"/>
+            <a:ext cx="1495419" cy="923330"/>
           </a:xfrm>
           <a:prstGeom prst="rect">
             <a:avLst/>
@@ -5563,15 +5766,32 @@
           <a:p>
             <a:r>
               <a:rPr lang="de-DE" dirty="0"/>
-              <a:t>20XX</a:t>
+              <a:t>1890s Cajal</a:t>
             </a:r>
             <a:br>
               <a:rPr lang="de-DE" dirty="0"/>
             </a:br>
             <a:r>
-              <a:rPr lang="de-DE" dirty="0"/>
-              <a:t>de Beer</a:t>
-            </a:r>
+              <a:rPr lang="de-DE" dirty="0" err="1"/>
+              <a:t>Importance</a:t>
+            </a:r>
+            <a:r>
+              <a:rPr lang="de-DE" dirty="0"/>
+              <a:t> </a:t>
+            </a:r>
+            <a:r>
+              <a:rPr lang="de-DE" dirty="0" err="1"/>
+              <a:t>of</a:t>
+            </a:r>
+            <a:r>
+              <a:rPr lang="de-DE" dirty="0"/>
+              <a:t> </a:t>
+            </a:r>
+            <a:r>
+              <a:rPr lang="de-DE" dirty="0" err="1"/>
+              <a:t>plasticity</a:t>
+            </a:r>
+            <a:endParaRPr lang="de-DE" dirty="0"/>
           </a:p>
         </p:txBody>
       </p:sp>
@@ -5589,8 +5809,8 @@
         </p:nvSpPr>
         <p:spPr>
           <a:xfrm>
-            <a:off x="7988300" y="2808069"/>
-            <a:ext cx="1092200" cy="646331"/>
+            <a:off x="6056189" y="1496640"/>
+            <a:ext cx="2905119" cy="1477328"/>
           </a:xfrm>
           <a:prstGeom prst="rect">
             <a:avLst/>
@@ -5605,15 +5825,47 @@
           <a:p>
             <a:r>
               <a:rPr lang="de-DE" dirty="0"/>
-              <a:t>20XX</a:t>
+              <a:t>1943 </a:t>
+            </a:r>
+            <a:r>
+              <a:rPr lang="de-DE" dirty="0" err="1"/>
+              <a:t>Mc</a:t>
+            </a:r>
+            <a:r>
+              <a:rPr lang="de-DE" dirty="0"/>
+              <a:t> Culloch and Pitts</a:t>
             </a:r>
             <a:br>
               <a:rPr lang="de-DE" dirty="0"/>
             </a:br>
             <a:r>
               <a:rPr lang="de-DE" dirty="0"/>
-              <a:t>Bongard</a:t>
-            </a:r>
+              <a:t>immense </a:t>
+            </a:r>
+            <a:r>
+              <a:rPr lang="de-DE" dirty="0" err="1"/>
+              <a:t>computational</a:t>
+            </a:r>
+            <a:r>
+              <a:rPr lang="de-DE" dirty="0"/>
+              <a:t> power </a:t>
+            </a:r>
+            <a:r>
+              <a:rPr lang="de-DE" dirty="0" err="1"/>
+              <a:t>of</a:t>
+            </a:r>
+            <a:r>
+              <a:rPr lang="de-DE" dirty="0"/>
+              <a:t> simple neuronal </a:t>
+            </a:r>
+            <a:r>
+              <a:rPr lang="de-DE" dirty="0" err="1"/>
+              <a:t>networks</a:t>
+            </a:r>
+            <a:br>
+              <a:rPr lang="de-DE" dirty="0"/>
+            </a:br>
+            <a:endParaRPr lang="de-DE" dirty="0"/>
           </a:p>
         </p:txBody>
       </p:sp>
@@ -5626,13 +5878,15 @@
               </a:ext>
             </a:extLst>
           </p:cNvPr>
-          <p:cNvCxnSpPr/>
+          <p:cNvCxnSpPr>
+            <a:cxnSpLocks/>
+          </p:cNvCxnSpPr>
           <p:nvPr/>
         </p:nvCxnSpPr>
         <p:spPr>
           <a:xfrm>
-            <a:off x="1835150" y="3524250"/>
-            <a:ext cx="0" cy="901700"/>
+            <a:off x="146050" y="3110376"/>
+            <a:ext cx="0" cy="2238710"/>
           </a:xfrm>
           <a:prstGeom prst="line">
             <a:avLst/>
@@ -5662,13 +5916,15 @@
               </a:ext>
             </a:extLst>
           </p:cNvPr>
-          <p:cNvCxnSpPr/>
+          <p:cNvCxnSpPr>
+            <a:cxnSpLocks/>
+          </p:cNvCxnSpPr>
           <p:nvPr/>
         </p:nvCxnSpPr>
         <p:spPr>
           <a:xfrm>
-            <a:off x="3987800" y="3568700"/>
-            <a:ext cx="0" cy="901700"/>
+            <a:off x="1676400" y="4216760"/>
+            <a:ext cx="0" cy="1157856"/>
           </a:xfrm>
           <a:prstGeom prst="line">
             <a:avLst/>
@@ -5698,13 +5954,15 @@
               </a:ext>
             </a:extLst>
           </p:cNvPr>
-          <p:cNvCxnSpPr/>
+          <p:cNvCxnSpPr>
+            <a:cxnSpLocks/>
+          </p:cNvCxnSpPr>
           <p:nvPr/>
         </p:nvCxnSpPr>
         <p:spPr>
           <a:xfrm>
-            <a:off x="6375400" y="3568700"/>
-            <a:ext cx="0" cy="901700"/>
+            <a:off x="3297233" y="3429000"/>
+            <a:ext cx="0" cy="1894557"/>
           </a:xfrm>
           <a:prstGeom prst="line">
             <a:avLst/>
@@ -5734,13 +5992,550 @@
               </a:ext>
             </a:extLst>
           </p:cNvPr>
-          <p:cNvCxnSpPr/>
+          <p:cNvCxnSpPr>
+            <a:cxnSpLocks/>
+          </p:cNvCxnSpPr>
           <p:nvPr/>
         </p:nvCxnSpPr>
         <p:spPr>
           <a:xfrm>
-            <a:off x="8509000" y="3568700"/>
-            <a:ext cx="0" cy="901700"/>
+            <a:off x="6845300" y="4902960"/>
+            <a:ext cx="0" cy="446126"/>
+          </a:xfrm>
+          <a:prstGeom prst="line">
+            <a:avLst/>
+          </a:prstGeom>
+        </p:spPr>
+        <p:style>
+          <a:lnRef idx="2">
+            <a:schemeClr val="accent1"/>
+          </a:lnRef>
+          <a:fillRef idx="0">
+            <a:schemeClr val="accent1"/>
+          </a:fillRef>
+          <a:effectRef idx="1">
+            <a:schemeClr val="accent1"/>
+          </a:effectRef>
+          <a:fontRef idx="minor">
+            <a:schemeClr val="tx1"/>
+          </a:fontRef>
+        </p:style>
+      </p:cxnSp>
+      <p:sp>
+        <p:nvSpPr>
+          <p:cNvPr id="11" name="Textfeld 10">
+            <a:extLst>
+              <a:ext uri="{FF2B5EF4-FFF2-40B4-BE49-F238E27FC236}">
+                <a16:creationId xmlns:a16="http://schemas.microsoft.com/office/drawing/2014/main" id="{367E3794-57D9-5D89-0D73-95E4F798EA65}"/>
+              </a:ext>
+            </a:extLst>
+          </p:cNvPr>
+          <p:cNvSpPr txBox="1"/>
+          <p:nvPr/>
+        </p:nvSpPr>
+        <p:spPr>
+          <a:xfrm>
+            <a:off x="4337052" y="2967335"/>
+            <a:ext cx="1589023" cy="923330"/>
+          </a:xfrm>
+          <a:prstGeom prst="rect">
+            <a:avLst/>
+          </a:prstGeom>
+          <a:noFill/>
+        </p:spPr>
+        <p:txBody>
+          <a:bodyPr wrap="square" rtlCol="0">
+            <a:spAutoFit/>
+          </a:bodyPr>
+          <a:lstStyle/>
+          <a:p>
+            <a:r>
+              <a:rPr lang="de-DE" dirty="0"/>
+              <a:t>1930s Alan Turing</a:t>
+            </a:r>
+            <a:br>
+              <a:rPr lang="de-DE" dirty="0"/>
+            </a:br>
+            <a:r>
+              <a:rPr lang="de-DE" dirty="0" err="1"/>
+              <a:t>Computability</a:t>
+            </a:r>
+            <a:endParaRPr lang="de-DE" dirty="0"/>
+          </a:p>
+        </p:txBody>
+      </p:sp>
+      <p:sp>
+        <p:nvSpPr>
+          <p:cNvPr id="12" name="Textfeld 11">
+            <a:extLst>
+              <a:ext uri="{FF2B5EF4-FFF2-40B4-BE49-F238E27FC236}">
+                <a16:creationId xmlns:a16="http://schemas.microsoft.com/office/drawing/2014/main" id="{998ADDA6-F112-68B2-B6B7-6F95A5C020E7}"/>
+              </a:ext>
+            </a:extLst>
+          </p:cNvPr>
+          <p:cNvSpPr txBox="1"/>
+          <p:nvPr/>
+        </p:nvSpPr>
+        <p:spPr>
+          <a:xfrm>
+            <a:off x="9033210" y="1628362"/>
+            <a:ext cx="1472399" cy="1477328"/>
+          </a:xfrm>
+          <a:prstGeom prst="rect">
+            <a:avLst/>
+          </a:prstGeom>
+          <a:noFill/>
+        </p:spPr>
+        <p:txBody>
+          <a:bodyPr wrap="square" rtlCol="0">
+            <a:spAutoFit/>
+          </a:bodyPr>
+          <a:lstStyle/>
+          <a:p>
+            <a:r>
+              <a:rPr lang="de-DE" dirty="0"/>
+              <a:t>1982 </a:t>
+            </a:r>
+            <a:r>
+              <a:rPr lang="de-DE" dirty="0" err="1"/>
+              <a:t>Hopfield</a:t>
+            </a:r>
+            <a:br>
+              <a:rPr lang="de-DE" dirty="0"/>
+            </a:br>
+            <a:r>
+              <a:rPr lang="de-DE" dirty="0" err="1"/>
+              <a:t>Associative</a:t>
+            </a:r>
+            <a:r>
+              <a:rPr lang="de-DE" dirty="0"/>
+              <a:t> neuronal </a:t>
+            </a:r>
+            <a:r>
+              <a:rPr lang="de-DE" dirty="0" err="1"/>
+              <a:t>networks</a:t>
+            </a:r>
+            <a:endParaRPr lang="de-DE" dirty="0"/>
+          </a:p>
+        </p:txBody>
+      </p:sp>
+      <p:sp>
+        <p:nvSpPr>
+          <p:cNvPr id="13" name="Textfeld 12">
+            <a:extLst>
+              <a:ext uri="{FF2B5EF4-FFF2-40B4-BE49-F238E27FC236}">
+                <a16:creationId xmlns:a16="http://schemas.microsoft.com/office/drawing/2014/main" id="{85E86178-8AB5-1631-D072-E8EA050673F7}"/>
+              </a:ext>
+            </a:extLst>
+          </p:cNvPr>
+          <p:cNvSpPr txBox="1"/>
+          <p:nvPr/>
+        </p:nvSpPr>
+        <p:spPr>
+          <a:xfrm>
+            <a:off x="6056189" y="2808855"/>
+            <a:ext cx="2905115" cy="646331"/>
+          </a:xfrm>
+          <a:prstGeom prst="rect">
+            <a:avLst/>
+          </a:prstGeom>
+          <a:noFill/>
+        </p:spPr>
+        <p:txBody>
+          <a:bodyPr wrap="square" rtlCol="0">
+            <a:spAutoFit/>
+          </a:bodyPr>
+          <a:lstStyle/>
+          <a:p>
+            <a:r>
+              <a:rPr lang="de-DE" dirty="0"/>
+              <a:t>1949 Hebb</a:t>
+            </a:r>
+            <a:br>
+              <a:rPr lang="de-DE" dirty="0"/>
+            </a:br>
+            <a:r>
+              <a:rPr lang="de-DE" dirty="0" err="1"/>
+              <a:t>plasticity</a:t>
+            </a:r>
+            <a:r>
+              <a:rPr lang="de-DE" dirty="0"/>
+              <a:t> </a:t>
+            </a:r>
+            <a:r>
+              <a:rPr lang="de-DE" dirty="0" err="1"/>
+              <a:t>mechanism</a:t>
+            </a:r>
+            <a:endParaRPr lang="de-DE" dirty="0"/>
+          </a:p>
+        </p:txBody>
+      </p:sp>
+      <p:sp>
+        <p:nvSpPr>
+          <p:cNvPr id="18" name="Textfeld 17">
+            <a:extLst>
+              <a:ext uri="{FF2B5EF4-FFF2-40B4-BE49-F238E27FC236}">
+                <a16:creationId xmlns:a16="http://schemas.microsoft.com/office/drawing/2014/main" id="{CA3095A3-8778-65B6-64F6-3DB8A6C48E08}"/>
+              </a:ext>
+            </a:extLst>
+          </p:cNvPr>
+          <p:cNvSpPr txBox="1"/>
+          <p:nvPr/>
+        </p:nvSpPr>
+        <p:spPr>
+          <a:xfrm>
+            <a:off x="6153052" y="3616596"/>
+            <a:ext cx="1803400" cy="1200329"/>
+          </a:xfrm>
+          <a:prstGeom prst="rect">
+            <a:avLst/>
+          </a:prstGeom>
+          <a:noFill/>
+        </p:spPr>
+        <p:txBody>
+          <a:bodyPr wrap="square" rtlCol="0">
+            <a:spAutoFit/>
+          </a:bodyPr>
+          <a:lstStyle/>
+          <a:p>
+            <a:r>
+              <a:rPr lang="de-DE" dirty="0"/>
+              <a:t>1948 Wiener</a:t>
+            </a:r>
+            <a:br>
+              <a:rPr lang="de-DE" dirty="0"/>
+            </a:br>
+            <a:r>
+              <a:rPr lang="de-DE" dirty="0" err="1"/>
+              <a:t>information</a:t>
+            </a:r>
+            <a:r>
+              <a:rPr lang="de-DE" dirty="0"/>
+              <a:t> </a:t>
+            </a:r>
+            <a:r>
+              <a:rPr lang="de-DE" dirty="0" err="1"/>
+              <a:t>processing</a:t>
+            </a:r>
+            <a:r>
+              <a:rPr lang="de-DE" dirty="0"/>
+              <a:t> and </a:t>
+            </a:r>
+            <a:r>
+              <a:rPr lang="de-DE" dirty="0" err="1"/>
+              <a:t>feedback</a:t>
+            </a:r>
+            <a:endParaRPr lang="de-DE" dirty="0"/>
+          </a:p>
+        </p:txBody>
+      </p:sp>
+      <p:sp>
+        <p:nvSpPr>
+          <p:cNvPr id="19" name="Textfeld 18">
+            <a:extLst>
+              <a:ext uri="{FF2B5EF4-FFF2-40B4-BE49-F238E27FC236}">
+                <a16:creationId xmlns:a16="http://schemas.microsoft.com/office/drawing/2014/main" id="{E75B8176-6099-F77E-8E55-AE57C4B2DFA4}"/>
+              </a:ext>
+            </a:extLst>
+          </p:cNvPr>
+          <p:cNvSpPr txBox="1"/>
+          <p:nvPr/>
+        </p:nvSpPr>
+        <p:spPr>
+          <a:xfrm>
+            <a:off x="9736894" y="3220494"/>
+            <a:ext cx="1535115" cy="1477328"/>
+          </a:xfrm>
+          <a:prstGeom prst="rect">
+            <a:avLst/>
+          </a:prstGeom>
+          <a:noFill/>
+        </p:spPr>
+        <p:txBody>
+          <a:bodyPr wrap="square" rtlCol="0">
+            <a:spAutoFit/>
+          </a:bodyPr>
+          <a:lstStyle/>
+          <a:p>
+            <a:r>
+              <a:rPr lang="de-DE" dirty="0"/>
+              <a:t>1990 Randall Beer</a:t>
+            </a:r>
+            <a:br>
+              <a:rPr lang="de-DE" dirty="0"/>
+            </a:br>
+            <a:r>
+              <a:rPr lang="de-DE" dirty="0" err="1"/>
+              <a:t>Intelligence</a:t>
+            </a:r>
+            <a:r>
+              <a:rPr lang="de-DE" dirty="0"/>
+              <a:t> </a:t>
+            </a:r>
+            <a:r>
+              <a:rPr lang="de-DE" dirty="0" err="1"/>
+              <a:t>as</a:t>
+            </a:r>
+            <a:r>
+              <a:rPr lang="de-DE" dirty="0"/>
+              <a:t> Adaptive </a:t>
+            </a:r>
+            <a:r>
+              <a:rPr lang="de-DE" dirty="0" err="1"/>
+              <a:t>Behavior</a:t>
+            </a:r>
+            <a:endParaRPr lang="de-DE" dirty="0"/>
+          </a:p>
+        </p:txBody>
+      </p:sp>
+      <p:cxnSp>
+        <p:nvCxnSpPr>
+          <p:cNvPr id="21" name="Gerader Verbinder 20">
+            <a:extLst>
+              <a:ext uri="{FF2B5EF4-FFF2-40B4-BE49-F238E27FC236}">
+                <a16:creationId xmlns:a16="http://schemas.microsoft.com/office/drawing/2014/main" id="{2F22C57F-0549-0A40-716B-5DF367C7D267}"/>
+              </a:ext>
+            </a:extLst>
+          </p:cNvPr>
+          <p:cNvCxnSpPr>
+            <a:cxnSpLocks/>
+          </p:cNvCxnSpPr>
+          <p:nvPr/>
+        </p:nvCxnSpPr>
+        <p:spPr>
+          <a:xfrm>
+            <a:off x="4978400" y="3969703"/>
+            <a:ext cx="0" cy="1379383"/>
+          </a:xfrm>
+          <a:prstGeom prst="line">
+            <a:avLst/>
+          </a:prstGeom>
+        </p:spPr>
+        <p:style>
+          <a:lnRef idx="2">
+            <a:schemeClr val="accent1"/>
+          </a:lnRef>
+          <a:fillRef idx="0">
+            <a:schemeClr val="accent1"/>
+          </a:fillRef>
+          <a:effectRef idx="1">
+            <a:schemeClr val="accent1"/>
+          </a:effectRef>
+          <a:fontRef idx="minor">
+            <a:schemeClr val="tx1"/>
+          </a:fontRef>
+        </p:style>
+      </p:cxnSp>
+      <p:sp>
+        <p:nvSpPr>
+          <p:cNvPr id="22" name="Textfeld 21">
+            <a:extLst>
+              <a:ext uri="{FF2B5EF4-FFF2-40B4-BE49-F238E27FC236}">
+                <a16:creationId xmlns:a16="http://schemas.microsoft.com/office/drawing/2014/main" id="{4B0D44BF-7AF3-9D14-53A8-44081AE3946D}"/>
+              </a:ext>
+            </a:extLst>
+          </p:cNvPr>
+          <p:cNvSpPr txBox="1"/>
+          <p:nvPr/>
+        </p:nvSpPr>
+        <p:spPr>
+          <a:xfrm>
+            <a:off x="2952257" y="5497678"/>
+            <a:ext cx="8535190" cy="1477328"/>
+          </a:xfrm>
+          <a:prstGeom prst="rect">
+            <a:avLst/>
+          </a:prstGeom>
+          <a:noFill/>
+        </p:spPr>
+        <p:txBody>
+          <a:bodyPr wrap="square" rtlCol="0">
+            <a:spAutoFit/>
+          </a:bodyPr>
+          <a:lstStyle/>
+          <a:p>
+            <a:pPr algn="r"/>
+            <a:r>
+              <a:rPr lang="de-DE" dirty="0"/>
+              <a:t>Today – </a:t>
+            </a:r>
+            <a:r>
+              <a:rPr lang="de-DE" dirty="0" err="1"/>
+              <a:t>we</a:t>
+            </a:r>
+            <a:r>
+              <a:rPr lang="de-DE" dirty="0"/>
+              <a:t> still </a:t>
+            </a:r>
+            <a:r>
+              <a:rPr lang="de-DE" dirty="0" err="1"/>
+              <a:t>don‘t</a:t>
+            </a:r>
+            <a:r>
+              <a:rPr lang="de-DE" dirty="0"/>
+              <a:t> </a:t>
+            </a:r>
+            <a:r>
+              <a:rPr lang="de-DE" dirty="0" err="1"/>
+              <a:t>know</a:t>
+            </a:r>
+            <a:r>
+              <a:rPr lang="de-DE" dirty="0"/>
+              <a:t>:</a:t>
+            </a:r>
+            <a:br>
+              <a:rPr lang="de-DE" dirty="0"/>
+            </a:br>
+            <a:r>
+              <a:rPr lang="de-DE" dirty="0"/>
+              <a:t>Rolf Pfeifer, Josh Bongard Embedded </a:t>
+            </a:r>
+            <a:r>
+              <a:rPr lang="de-DE" dirty="0" err="1"/>
+              <a:t>cognition</a:t>
+            </a:r>
+            <a:endParaRPr lang="de-DE" dirty="0"/>
+          </a:p>
+          <a:p>
+            <a:pPr algn="r"/>
+            <a:r>
+              <a:rPr lang="de-DE" dirty="0"/>
+              <a:t>Kenneth Stanley NEAT </a:t>
+            </a:r>
+            <a:r>
+              <a:rPr lang="de-DE" dirty="0" err="1"/>
+              <a:t>algorithm</a:t>
+            </a:r>
+            <a:endParaRPr lang="de-DE" dirty="0"/>
+          </a:p>
+          <a:p>
+            <a:pPr algn="r"/>
+            <a:r>
+              <a:rPr lang="de-DE" dirty="0"/>
+              <a:t>Izquierdo, Di Paolo Egbert – </a:t>
+            </a:r>
+            <a:r>
+              <a:rPr lang="de-DE" dirty="0" err="1"/>
+              <a:t>chemotaxis</a:t>
+            </a:r>
+            <a:r>
+              <a:rPr lang="de-DE" dirty="0"/>
+              <a:t> </a:t>
+            </a:r>
+            <a:r>
+              <a:rPr lang="de-DE" dirty="0" err="1"/>
+              <a:t>models</a:t>
+            </a:r>
+            <a:r>
+              <a:rPr lang="de-DE" dirty="0"/>
+              <a:t> / minimal </a:t>
+            </a:r>
+            <a:r>
+              <a:rPr lang="de-DE" dirty="0" err="1"/>
+              <a:t>life</a:t>
+            </a:r>
+            <a:endParaRPr lang="de-DE" dirty="0"/>
+          </a:p>
+          <a:p>
+            <a:pPr algn="r"/>
+            <a:endParaRPr lang="de-DE" dirty="0"/>
+          </a:p>
+        </p:txBody>
+      </p:sp>
+      <p:cxnSp>
+        <p:nvCxnSpPr>
+          <p:cNvPr id="26" name="Gerader Verbinder 25">
+            <a:extLst>
+              <a:ext uri="{FF2B5EF4-FFF2-40B4-BE49-F238E27FC236}">
+                <a16:creationId xmlns:a16="http://schemas.microsoft.com/office/drawing/2014/main" id="{2EE525FE-8203-A89A-A34E-2EFFF9902AE8}"/>
+              </a:ext>
+            </a:extLst>
+          </p:cNvPr>
+          <p:cNvCxnSpPr>
+            <a:cxnSpLocks/>
+          </p:cNvCxnSpPr>
+          <p:nvPr/>
+        </p:nvCxnSpPr>
+        <p:spPr>
+          <a:xfrm>
+            <a:off x="9499600" y="3204644"/>
+            <a:ext cx="0" cy="2118913"/>
+          </a:xfrm>
+          <a:prstGeom prst="line">
+            <a:avLst/>
+          </a:prstGeom>
+        </p:spPr>
+        <p:style>
+          <a:lnRef idx="2">
+            <a:schemeClr val="accent1"/>
+          </a:lnRef>
+          <a:fillRef idx="0">
+            <a:schemeClr val="accent1"/>
+          </a:fillRef>
+          <a:effectRef idx="1">
+            <a:schemeClr val="accent1"/>
+          </a:effectRef>
+          <a:fontRef idx="minor">
+            <a:schemeClr val="tx1"/>
+          </a:fontRef>
+        </p:style>
+      </p:cxnSp>
+      <p:cxnSp>
+        <p:nvCxnSpPr>
+          <p:cNvPr id="28" name="Gerader Verbinder 27">
+            <a:extLst>
+              <a:ext uri="{FF2B5EF4-FFF2-40B4-BE49-F238E27FC236}">
+                <a16:creationId xmlns:a16="http://schemas.microsoft.com/office/drawing/2014/main" id="{B8939105-A446-17A8-A54F-E1FFBC8DA441}"/>
+              </a:ext>
+            </a:extLst>
+          </p:cNvPr>
+          <p:cNvCxnSpPr>
+            <a:cxnSpLocks/>
+          </p:cNvCxnSpPr>
+          <p:nvPr/>
+        </p:nvCxnSpPr>
+        <p:spPr>
+          <a:xfrm>
+            <a:off x="10274300" y="4816925"/>
+            <a:ext cx="0" cy="506632"/>
+          </a:xfrm>
+          <a:prstGeom prst="line">
+            <a:avLst/>
+          </a:prstGeom>
+        </p:spPr>
+        <p:style>
+          <a:lnRef idx="2">
+            <a:schemeClr val="accent1"/>
+          </a:lnRef>
+          <a:fillRef idx="0">
+            <a:schemeClr val="accent1"/>
+          </a:fillRef>
+          <a:effectRef idx="1">
+            <a:schemeClr val="accent1"/>
+          </a:effectRef>
+          <a:fontRef idx="minor">
+            <a:schemeClr val="tx1"/>
+          </a:fontRef>
+        </p:style>
+      </p:cxnSp>
+      <p:cxnSp>
+        <p:nvCxnSpPr>
+          <p:cNvPr id="41" name="Gerader Verbinder 40">
+            <a:extLst>
+              <a:ext uri="{FF2B5EF4-FFF2-40B4-BE49-F238E27FC236}">
+                <a16:creationId xmlns:a16="http://schemas.microsoft.com/office/drawing/2014/main" id="{502FF7C3-A2A3-CF23-E852-B0CE07EE9398}"/>
+              </a:ext>
+            </a:extLst>
+          </p:cNvPr>
+          <p:cNvCxnSpPr>
+            <a:cxnSpLocks/>
+          </p:cNvCxnSpPr>
+          <p:nvPr/>
+        </p:nvCxnSpPr>
+        <p:spPr>
+          <a:xfrm>
+            <a:off x="11442700" y="5349086"/>
+            <a:ext cx="0" cy="506632"/>
           </a:xfrm>
           <a:prstGeom prst="line">
             <a:avLst/>

--- a/scicom/skeleton_presentation.pptx
+++ b/scicom/skeleton_presentation.pptx
@@ -2,7 +2,7 @@
 <file path=ppt/presentation.xml><?xml version="1.0" encoding="utf-8"?>
 <p:presentation xmlns:a="http://schemas.openxmlformats.org/drawingml/2006/main" xmlns:r="http://schemas.openxmlformats.org/officeDocument/2006/relationships" xmlns:p="http://schemas.openxmlformats.org/presentationml/2006/main" saveSubsetFonts="1">
   <p:sldMasterIdLst>
-    <p:sldMasterId id="2147483648" r:id="rId1"/>
+    <p:sldMasterId id="2147483672" r:id="rId1"/>
   </p:sldMasterIdLst>
   <p:sldIdLst>
     <p:sldId id="256" r:id="rId2"/>
@@ -23,9 +23,9 @@
   <p:notesSz cx="6858000" cy="9144000"/>
   <p:defaultTextStyle>
     <a:defPPr>
-      <a:defRPr lang="de-DE"/>
+      <a:defRPr lang="en-US"/>
     </a:defPPr>
-    <a:lvl1pPr marL="0" algn="l" defTabSz="914400" rtl="0" eaLnBrk="1" latinLnBrk="0" hangingPunct="1">
+    <a:lvl1pPr marL="0" algn="l" defTabSz="457200" rtl="0" eaLnBrk="1" latinLnBrk="0" hangingPunct="1">
       <a:defRPr sz="1800" kern="1200">
         <a:solidFill>
           <a:schemeClr val="tx1"/>
@@ -35,7 +35,7 @@
         <a:cs typeface="+mn-cs"/>
       </a:defRPr>
     </a:lvl1pPr>
-    <a:lvl2pPr marL="457200" algn="l" defTabSz="914400" rtl="0" eaLnBrk="1" latinLnBrk="0" hangingPunct="1">
+    <a:lvl2pPr marL="457200" algn="l" defTabSz="457200" rtl="0" eaLnBrk="1" latinLnBrk="0" hangingPunct="1">
       <a:defRPr sz="1800" kern="1200">
         <a:solidFill>
           <a:schemeClr val="tx1"/>
@@ -45,7 +45,7 @@
         <a:cs typeface="+mn-cs"/>
       </a:defRPr>
     </a:lvl2pPr>
-    <a:lvl3pPr marL="914400" algn="l" defTabSz="914400" rtl="0" eaLnBrk="1" latinLnBrk="0" hangingPunct="1">
+    <a:lvl3pPr marL="914400" algn="l" defTabSz="457200" rtl="0" eaLnBrk="1" latinLnBrk="0" hangingPunct="1">
       <a:defRPr sz="1800" kern="1200">
         <a:solidFill>
           <a:schemeClr val="tx1"/>
@@ -55,7 +55,7 @@
         <a:cs typeface="+mn-cs"/>
       </a:defRPr>
     </a:lvl3pPr>
-    <a:lvl4pPr marL="1371600" algn="l" defTabSz="914400" rtl="0" eaLnBrk="1" latinLnBrk="0" hangingPunct="1">
+    <a:lvl4pPr marL="1371600" algn="l" defTabSz="457200" rtl="0" eaLnBrk="1" latinLnBrk="0" hangingPunct="1">
       <a:defRPr sz="1800" kern="1200">
         <a:solidFill>
           <a:schemeClr val="tx1"/>
@@ -65,7 +65,7 @@
         <a:cs typeface="+mn-cs"/>
       </a:defRPr>
     </a:lvl4pPr>
-    <a:lvl5pPr marL="1828800" algn="l" defTabSz="914400" rtl="0" eaLnBrk="1" latinLnBrk="0" hangingPunct="1">
+    <a:lvl5pPr marL="1828800" algn="l" defTabSz="457200" rtl="0" eaLnBrk="1" latinLnBrk="0" hangingPunct="1">
       <a:defRPr sz="1800" kern="1200">
         <a:solidFill>
           <a:schemeClr val="tx1"/>
@@ -75,7 +75,7 @@
         <a:cs typeface="+mn-cs"/>
       </a:defRPr>
     </a:lvl5pPr>
-    <a:lvl6pPr marL="2286000" algn="l" defTabSz="914400" rtl="0" eaLnBrk="1" latinLnBrk="0" hangingPunct="1">
+    <a:lvl6pPr marL="2286000" algn="l" defTabSz="457200" rtl="0" eaLnBrk="1" latinLnBrk="0" hangingPunct="1">
       <a:defRPr sz="1800" kern="1200">
         <a:solidFill>
           <a:schemeClr val="tx1"/>
@@ -85,7 +85,7 @@
         <a:cs typeface="+mn-cs"/>
       </a:defRPr>
     </a:lvl6pPr>
-    <a:lvl7pPr marL="2743200" algn="l" defTabSz="914400" rtl="0" eaLnBrk="1" latinLnBrk="0" hangingPunct="1">
+    <a:lvl7pPr marL="2743200" algn="l" defTabSz="457200" rtl="0" eaLnBrk="1" latinLnBrk="0" hangingPunct="1">
       <a:defRPr sz="1800" kern="1200">
         <a:solidFill>
           <a:schemeClr val="tx1"/>
@@ -95,7 +95,7 @@
         <a:cs typeface="+mn-cs"/>
       </a:defRPr>
     </a:lvl7pPr>
-    <a:lvl8pPr marL="3200400" algn="l" defTabSz="914400" rtl="0" eaLnBrk="1" latinLnBrk="0" hangingPunct="1">
+    <a:lvl8pPr marL="3200400" algn="l" defTabSz="457200" rtl="0" eaLnBrk="1" latinLnBrk="0" hangingPunct="1">
       <a:defRPr sz="1800" kern="1200">
         <a:solidFill>
           <a:schemeClr val="tx1"/>
@@ -105,7 +105,7 @@
         <a:cs typeface="+mn-cs"/>
       </a:defRPr>
     </a:lvl8pPr>
-    <a:lvl9pPr marL="3657600" algn="l" defTabSz="914400" rtl="0" eaLnBrk="1" latinLnBrk="0" hangingPunct="1">
+    <a:lvl9pPr marL="3657600" algn="l" defTabSz="457200" rtl="0" eaLnBrk="1" latinLnBrk="0" hangingPunct="1">
       <a:defRPr sz="1800" kern="1200">
         <a:solidFill>
           <a:schemeClr val="tx1"/>
@@ -143,13 +143,7 @@
       </p:grpSpPr>
       <p:sp>
         <p:nvSpPr>
-          <p:cNvPr id="2" name="Titel 1">
-            <a:extLst>
-              <a:ext uri="{FF2B5EF4-FFF2-40B4-BE49-F238E27FC236}">
-                <a16:creationId xmlns:a16="http://schemas.microsoft.com/office/drawing/2014/main" id="{BA27E916-C75D-9C2B-6665-95E9CF2C87F9}"/>
-              </a:ext>
-            </a:extLst>
-          </p:cNvPr>
+          <p:cNvPr id="2" name="Title 1"/>
           <p:cNvSpPr>
             <a:spLocks noGrp="1"/>
           </p:cNvSpPr>
@@ -175,18 +169,13 @@
               <a:rPr lang="de-DE"/>
               <a:t>Mastertitelformat bearbeiten</a:t>
             </a:r>
-          </a:p>
-        </p:txBody>
-      </p:sp>
-      <p:sp>
-        <p:nvSpPr>
-          <p:cNvPr id="3" name="Untertitel 2">
-            <a:extLst>
-              <a:ext uri="{FF2B5EF4-FFF2-40B4-BE49-F238E27FC236}">
-                <a16:creationId xmlns:a16="http://schemas.microsoft.com/office/drawing/2014/main" id="{836C911A-B715-559D-C127-965F783C8048}"/>
-              </a:ext>
-            </a:extLst>
-          </p:cNvPr>
+            <a:endParaRPr lang="en-US" dirty="0"/>
+          </a:p>
+        </p:txBody>
+      </p:sp>
+      <p:sp>
+        <p:nvSpPr>
+          <p:cNvPr id="3" name="Subtitle 2"/>
           <p:cNvSpPr>
             <a:spLocks noGrp="1"/>
           </p:cNvSpPr>
@@ -245,18 +234,13 @@
               <a:rPr lang="de-DE"/>
               <a:t>Master-Untertitelformat bearbeiten</a:t>
             </a:r>
-          </a:p>
-        </p:txBody>
-      </p:sp>
-      <p:sp>
-        <p:nvSpPr>
-          <p:cNvPr id="4" name="Datumsplatzhalter 3">
-            <a:extLst>
-              <a:ext uri="{FF2B5EF4-FFF2-40B4-BE49-F238E27FC236}">
-                <a16:creationId xmlns:a16="http://schemas.microsoft.com/office/drawing/2014/main" id="{F5688E09-5377-230C-C6E3-EAD2820B911A}"/>
-              </a:ext>
-            </a:extLst>
-          </p:cNvPr>
+            <a:endParaRPr lang="en-US" dirty="0"/>
+          </a:p>
+        </p:txBody>
+      </p:sp>
+      <p:sp>
+        <p:nvSpPr>
+          <p:cNvPr id="4" name="Date Placeholder 3"/>
           <p:cNvSpPr>
             <a:spLocks noGrp="1"/>
           </p:cNvSpPr>
@@ -271,7 +255,7 @@
           <a:p>
             <a:fld id="{42A0533D-F09C-441E-936C-5A7061C2C138}" type="datetimeFigureOut">
               <a:rPr lang="de-DE" smtClean="0"/>
-              <a:t>11.05.2026</a:t>
+              <a:t>21.05.2026</a:t>
             </a:fld>
             <a:endParaRPr lang="de-DE"/>
           </a:p>
@@ -279,13 +263,7 @@
       </p:sp>
       <p:sp>
         <p:nvSpPr>
-          <p:cNvPr id="5" name="Fußzeilenplatzhalter 4">
-            <a:extLst>
-              <a:ext uri="{FF2B5EF4-FFF2-40B4-BE49-F238E27FC236}">
-                <a16:creationId xmlns:a16="http://schemas.microsoft.com/office/drawing/2014/main" id="{C3D88C20-1C3D-4330-0F42-728FE3559B5E}"/>
-              </a:ext>
-            </a:extLst>
-          </p:cNvPr>
+          <p:cNvPr id="5" name="Footer Placeholder 4"/>
           <p:cNvSpPr>
             <a:spLocks noGrp="1"/>
           </p:cNvSpPr>
@@ -304,13 +282,7 @@
       </p:sp>
       <p:sp>
         <p:nvSpPr>
-          <p:cNvPr id="6" name="Foliennummernplatzhalter 5">
-            <a:extLst>
-              <a:ext uri="{FF2B5EF4-FFF2-40B4-BE49-F238E27FC236}">
-                <a16:creationId xmlns:a16="http://schemas.microsoft.com/office/drawing/2014/main" id="{8F8C86E6-E0A8-492C-CE3A-D6075E8913E0}"/>
-              </a:ext>
-            </a:extLst>
-          </p:cNvPr>
+          <p:cNvPr id="6" name="Slide Number Placeholder 5"/>
           <p:cNvSpPr>
             <a:spLocks noGrp="1"/>
           </p:cNvSpPr>
@@ -334,7 +306,7 @@
     </p:spTree>
     <p:extLst>
       <p:ext uri="{BB962C8B-B14F-4D97-AF65-F5344CB8AC3E}">
-        <p14:creationId xmlns:p14="http://schemas.microsoft.com/office/powerpoint/2010/main" val="575769722"/>
+        <p14:creationId xmlns:p14="http://schemas.microsoft.com/office/powerpoint/2010/main" val="3382683657"/>
       </p:ext>
     </p:extLst>
   </p:cSld>
@@ -363,13 +335,7 @@
       </p:grpSpPr>
       <p:sp>
         <p:nvSpPr>
-          <p:cNvPr id="2" name="Titel 1">
-            <a:extLst>
-              <a:ext uri="{FF2B5EF4-FFF2-40B4-BE49-F238E27FC236}">
-                <a16:creationId xmlns:a16="http://schemas.microsoft.com/office/drawing/2014/main" id="{F522F862-EFDF-C5EB-166E-87EDE9615330}"/>
-              </a:ext>
-            </a:extLst>
-          </p:cNvPr>
+          <p:cNvPr id="2" name="Title 1"/>
           <p:cNvSpPr>
             <a:spLocks noGrp="1"/>
           </p:cNvSpPr>
@@ -386,18 +352,13 @@
               <a:rPr lang="de-DE"/>
               <a:t>Mastertitelformat bearbeiten</a:t>
             </a:r>
-          </a:p>
-        </p:txBody>
-      </p:sp>
-      <p:sp>
-        <p:nvSpPr>
-          <p:cNvPr id="3" name="Vertikaler Textplatzhalter 2">
-            <a:extLst>
-              <a:ext uri="{FF2B5EF4-FFF2-40B4-BE49-F238E27FC236}">
-                <a16:creationId xmlns:a16="http://schemas.microsoft.com/office/drawing/2014/main" id="{33C4DDDA-7266-6231-D9F5-47D70A81AEE4}"/>
-              </a:ext>
-            </a:extLst>
-          </p:cNvPr>
+            <a:endParaRPr lang="en-US" dirty="0"/>
+          </a:p>
+        </p:txBody>
+      </p:sp>
+      <p:sp>
+        <p:nvSpPr>
+          <p:cNvPr id="3" name="Vertical Text Placeholder 2"/>
           <p:cNvSpPr>
             <a:spLocks noGrp="1"/>
           </p:cNvSpPr>
@@ -443,18 +404,13 @@
               <a:rPr lang="de-DE"/>
               <a:t>Fünfte Ebene</a:t>
             </a:r>
-          </a:p>
-        </p:txBody>
-      </p:sp>
-      <p:sp>
-        <p:nvSpPr>
-          <p:cNvPr id="4" name="Datumsplatzhalter 3">
-            <a:extLst>
-              <a:ext uri="{FF2B5EF4-FFF2-40B4-BE49-F238E27FC236}">
-                <a16:creationId xmlns:a16="http://schemas.microsoft.com/office/drawing/2014/main" id="{1ABA2675-595F-92BD-894A-78AEE13FC5C7}"/>
-              </a:ext>
-            </a:extLst>
-          </p:cNvPr>
+            <a:endParaRPr lang="en-US" dirty="0"/>
+          </a:p>
+        </p:txBody>
+      </p:sp>
+      <p:sp>
+        <p:nvSpPr>
+          <p:cNvPr id="4" name="Date Placeholder 3"/>
           <p:cNvSpPr>
             <a:spLocks noGrp="1"/>
           </p:cNvSpPr>
@@ -469,7 +425,7 @@
           <a:p>
             <a:fld id="{42A0533D-F09C-441E-936C-5A7061C2C138}" type="datetimeFigureOut">
               <a:rPr lang="de-DE" smtClean="0"/>
-              <a:t>11.05.2026</a:t>
+              <a:t>21.05.2026</a:t>
             </a:fld>
             <a:endParaRPr lang="de-DE"/>
           </a:p>
@@ -477,13 +433,7 @@
       </p:sp>
       <p:sp>
         <p:nvSpPr>
-          <p:cNvPr id="5" name="Fußzeilenplatzhalter 4">
-            <a:extLst>
-              <a:ext uri="{FF2B5EF4-FFF2-40B4-BE49-F238E27FC236}">
-                <a16:creationId xmlns:a16="http://schemas.microsoft.com/office/drawing/2014/main" id="{FFF3026B-1179-3C9C-E9B8-0E2F737FCEB1}"/>
-              </a:ext>
-            </a:extLst>
-          </p:cNvPr>
+          <p:cNvPr id="5" name="Footer Placeholder 4"/>
           <p:cNvSpPr>
             <a:spLocks noGrp="1"/>
           </p:cNvSpPr>
@@ -502,13 +452,7 @@
       </p:sp>
       <p:sp>
         <p:nvSpPr>
-          <p:cNvPr id="6" name="Foliennummernplatzhalter 5">
-            <a:extLst>
-              <a:ext uri="{FF2B5EF4-FFF2-40B4-BE49-F238E27FC236}">
-                <a16:creationId xmlns:a16="http://schemas.microsoft.com/office/drawing/2014/main" id="{857F486B-64FF-F3D3-EE4B-677591FC6A9A}"/>
-              </a:ext>
-            </a:extLst>
-          </p:cNvPr>
+          <p:cNvPr id="6" name="Slide Number Placeholder 5"/>
           <p:cNvSpPr>
             <a:spLocks noGrp="1"/>
           </p:cNvSpPr>
@@ -532,7 +476,7 @@
     </p:spTree>
     <p:extLst>
       <p:ext uri="{BB962C8B-B14F-4D97-AF65-F5344CB8AC3E}">
-        <p14:creationId xmlns:p14="http://schemas.microsoft.com/office/powerpoint/2010/main" val="3800693137"/>
+        <p14:creationId xmlns:p14="http://schemas.microsoft.com/office/powerpoint/2010/main" val="2934220190"/>
       </p:ext>
     </p:extLst>
   </p:cSld>
@@ -561,13 +505,7 @@
       </p:grpSpPr>
       <p:sp>
         <p:nvSpPr>
-          <p:cNvPr id="2" name="Vertikaler Titel 1">
-            <a:extLst>
-              <a:ext uri="{FF2B5EF4-FFF2-40B4-BE49-F238E27FC236}">
-                <a16:creationId xmlns:a16="http://schemas.microsoft.com/office/drawing/2014/main" id="{65990D56-7320-25A8-9542-A6CED4BC997E}"/>
-              </a:ext>
-            </a:extLst>
-          </p:cNvPr>
+          <p:cNvPr id="2" name="Vertical Title 1"/>
           <p:cNvSpPr>
             <a:spLocks noGrp="1"/>
           </p:cNvSpPr>
@@ -589,18 +527,13 @@
               <a:rPr lang="de-DE"/>
               <a:t>Mastertitelformat bearbeiten</a:t>
             </a:r>
-          </a:p>
-        </p:txBody>
-      </p:sp>
-      <p:sp>
-        <p:nvSpPr>
-          <p:cNvPr id="3" name="Vertikaler Textplatzhalter 2">
-            <a:extLst>
-              <a:ext uri="{FF2B5EF4-FFF2-40B4-BE49-F238E27FC236}">
-                <a16:creationId xmlns:a16="http://schemas.microsoft.com/office/drawing/2014/main" id="{9DCFC3AF-E876-08C8-D39A-7A32A40B1780}"/>
-              </a:ext>
-            </a:extLst>
-          </p:cNvPr>
+            <a:endParaRPr lang="en-US" dirty="0"/>
+          </a:p>
+        </p:txBody>
+      </p:sp>
+      <p:sp>
+        <p:nvSpPr>
+          <p:cNvPr id="3" name="Vertical Text Placeholder 2"/>
           <p:cNvSpPr>
             <a:spLocks noGrp="1"/>
           </p:cNvSpPr>
@@ -651,18 +584,13 @@
               <a:rPr lang="de-DE"/>
               <a:t>Fünfte Ebene</a:t>
             </a:r>
-          </a:p>
-        </p:txBody>
-      </p:sp>
-      <p:sp>
-        <p:nvSpPr>
-          <p:cNvPr id="4" name="Datumsplatzhalter 3">
-            <a:extLst>
-              <a:ext uri="{FF2B5EF4-FFF2-40B4-BE49-F238E27FC236}">
-                <a16:creationId xmlns:a16="http://schemas.microsoft.com/office/drawing/2014/main" id="{AC8D3FFA-B7A0-94FE-247D-FA698C0C7757}"/>
-              </a:ext>
-            </a:extLst>
-          </p:cNvPr>
+            <a:endParaRPr lang="en-US" dirty="0"/>
+          </a:p>
+        </p:txBody>
+      </p:sp>
+      <p:sp>
+        <p:nvSpPr>
+          <p:cNvPr id="4" name="Date Placeholder 3"/>
           <p:cNvSpPr>
             <a:spLocks noGrp="1"/>
           </p:cNvSpPr>
@@ -677,7 +605,7 @@
           <a:p>
             <a:fld id="{42A0533D-F09C-441E-936C-5A7061C2C138}" type="datetimeFigureOut">
               <a:rPr lang="de-DE" smtClean="0"/>
-              <a:t>11.05.2026</a:t>
+              <a:t>21.05.2026</a:t>
             </a:fld>
             <a:endParaRPr lang="de-DE"/>
           </a:p>
@@ -685,13 +613,7 @@
       </p:sp>
       <p:sp>
         <p:nvSpPr>
-          <p:cNvPr id="5" name="Fußzeilenplatzhalter 4">
-            <a:extLst>
-              <a:ext uri="{FF2B5EF4-FFF2-40B4-BE49-F238E27FC236}">
-                <a16:creationId xmlns:a16="http://schemas.microsoft.com/office/drawing/2014/main" id="{33ECDCED-5AD4-6072-0AAB-158DD6BA0D06}"/>
-              </a:ext>
-            </a:extLst>
-          </p:cNvPr>
+          <p:cNvPr id="5" name="Footer Placeholder 4"/>
           <p:cNvSpPr>
             <a:spLocks noGrp="1"/>
           </p:cNvSpPr>
@@ -710,13 +632,7 @@
       </p:sp>
       <p:sp>
         <p:nvSpPr>
-          <p:cNvPr id="6" name="Foliennummernplatzhalter 5">
-            <a:extLst>
-              <a:ext uri="{FF2B5EF4-FFF2-40B4-BE49-F238E27FC236}">
-                <a16:creationId xmlns:a16="http://schemas.microsoft.com/office/drawing/2014/main" id="{9255A1D1-9CEF-4777-9589-A938C6651812}"/>
-              </a:ext>
-            </a:extLst>
-          </p:cNvPr>
+          <p:cNvPr id="6" name="Slide Number Placeholder 5"/>
           <p:cNvSpPr>
             <a:spLocks noGrp="1"/>
           </p:cNvSpPr>
@@ -740,7 +656,7 @@
     </p:spTree>
     <p:extLst>
       <p:ext uri="{BB962C8B-B14F-4D97-AF65-F5344CB8AC3E}">
-        <p14:creationId xmlns:p14="http://schemas.microsoft.com/office/powerpoint/2010/main" val="2445155744"/>
+        <p14:creationId xmlns:p14="http://schemas.microsoft.com/office/powerpoint/2010/main" val="2541582053"/>
       </p:ext>
     </p:extLst>
   </p:cSld>
@@ -769,13 +685,7 @@
       </p:grpSpPr>
       <p:sp>
         <p:nvSpPr>
-          <p:cNvPr id="2" name="Titel 1">
-            <a:extLst>
-              <a:ext uri="{FF2B5EF4-FFF2-40B4-BE49-F238E27FC236}">
-                <a16:creationId xmlns:a16="http://schemas.microsoft.com/office/drawing/2014/main" id="{E5CB162A-CD58-DAFB-1805-A0F0EDC43555}"/>
-              </a:ext>
-            </a:extLst>
-          </p:cNvPr>
+          <p:cNvPr id="2" name="Title 1"/>
           <p:cNvSpPr>
             <a:spLocks noGrp="1"/>
           </p:cNvSpPr>
@@ -792,18 +702,13 @@
               <a:rPr lang="de-DE"/>
               <a:t>Mastertitelformat bearbeiten</a:t>
             </a:r>
-          </a:p>
-        </p:txBody>
-      </p:sp>
-      <p:sp>
-        <p:nvSpPr>
-          <p:cNvPr id="3" name="Inhaltsplatzhalter 2">
-            <a:extLst>
-              <a:ext uri="{FF2B5EF4-FFF2-40B4-BE49-F238E27FC236}">
-                <a16:creationId xmlns:a16="http://schemas.microsoft.com/office/drawing/2014/main" id="{4EC9CA43-25B9-6C39-459C-D1C161CD8F86}"/>
-              </a:ext>
-            </a:extLst>
-          </p:cNvPr>
+            <a:endParaRPr lang="en-US" dirty="0"/>
+          </a:p>
+        </p:txBody>
+      </p:sp>
+      <p:sp>
+        <p:nvSpPr>
+          <p:cNvPr id="3" name="Content Placeholder 2"/>
           <p:cNvSpPr>
             <a:spLocks noGrp="1"/>
           </p:cNvSpPr>
@@ -849,18 +754,13 @@
               <a:rPr lang="de-DE"/>
               <a:t>Fünfte Ebene</a:t>
             </a:r>
-          </a:p>
-        </p:txBody>
-      </p:sp>
-      <p:sp>
-        <p:nvSpPr>
-          <p:cNvPr id="4" name="Datumsplatzhalter 3">
-            <a:extLst>
-              <a:ext uri="{FF2B5EF4-FFF2-40B4-BE49-F238E27FC236}">
-                <a16:creationId xmlns:a16="http://schemas.microsoft.com/office/drawing/2014/main" id="{E340DF17-C67E-F880-595E-8E613EC3AD50}"/>
-              </a:ext>
-            </a:extLst>
-          </p:cNvPr>
+            <a:endParaRPr lang="en-US" dirty="0"/>
+          </a:p>
+        </p:txBody>
+      </p:sp>
+      <p:sp>
+        <p:nvSpPr>
+          <p:cNvPr id="4" name="Date Placeholder 3"/>
           <p:cNvSpPr>
             <a:spLocks noGrp="1"/>
           </p:cNvSpPr>
@@ -875,7 +775,7 @@
           <a:p>
             <a:fld id="{42A0533D-F09C-441E-936C-5A7061C2C138}" type="datetimeFigureOut">
               <a:rPr lang="de-DE" smtClean="0"/>
-              <a:t>11.05.2026</a:t>
+              <a:t>21.05.2026</a:t>
             </a:fld>
             <a:endParaRPr lang="de-DE"/>
           </a:p>
@@ -883,13 +783,7 @@
       </p:sp>
       <p:sp>
         <p:nvSpPr>
-          <p:cNvPr id="5" name="Fußzeilenplatzhalter 4">
-            <a:extLst>
-              <a:ext uri="{FF2B5EF4-FFF2-40B4-BE49-F238E27FC236}">
-                <a16:creationId xmlns:a16="http://schemas.microsoft.com/office/drawing/2014/main" id="{ADE495E8-063A-E658-94D3-C04D49906BC8}"/>
-              </a:ext>
-            </a:extLst>
-          </p:cNvPr>
+          <p:cNvPr id="5" name="Footer Placeholder 4"/>
           <p:cNvSpPr>
             <a:spLocks noGrp="1"/>
           </p:cNvSpPr>
@@ -908,13 +802,7 @@
       </p:sp>
       <p:sp>
         <p:nvSpPr>
-          <p:cNvPr id="6" name="Foliennummernplatzhalter 5">
-            <a:extLst>
-              <a:ext uri="{FF2B5EF4-FFF2-40B4-BE49-F238E27FC236}">
-                <a16:creationId xmlns:a16="http://schemas.microsoft.com/office/drawing/2014/main" id="{F7C0FAE0-3615-F942-0D58-6EB5069218F1}"/>
-              </a:ext>
-            </a:extLst>
-          </p:cNvPr>
+          <p:cNvPr id="6" name="Slide Number Placeholder 5"/>
           <p:cNvSpPr>
             <a:spLocks noGrp="1"/>
           </p:cNvSpPr>
@@ -938,7 +826,7 @@
     </p:spTree>
     <p:extLst>
       <p:ext uri="{BB962C8B-B14F-4D97-AF65-F5344CB8AC3E}">
-        <p14:creationId xmlns:p14="http://schemas.microsoft.com/office/powerpoint/2010/main" val="1017680328"/>
+        <p14:creationId xmlns:p14="http://schemas.microsoft.com/office/powerpoint/2010/main" val="1017057204"/>
       </p:ext>
     </p:extLst>
   </p:cSld>
@@ -967,13 +855,7 @@
       </p:grpSpPr>
       <p:sp>
         <p:nvSpPr>
-          <p:cNvPr id="2" name="Titel 1">
-            <a:extLst>
-              <a:ext uri="{FF2B5EF4-FFF2-40B4-BE49-F238E27FC236}">
-                <a16:creationId xmlns:a16="http://schemas.microsoft.com/office/drawing/2014/main" id="{F46667EE-9ABC-EEB9-E205-9F7BD080AC4F}"/>
-              </a:ext>
-            </a:extLst>
-          </p:cNvPr>
+          <p:cNvPr id="2" name="Title 1"/>
           <p:cNvSpPr>
             <a:spLocks noGrp="1"/>
           </p:cNvSpPr>
@@ -999,18 +881,13 @@
               <a:rPr lang="de-DE"/>
               <a:t>Mastertitelformat bearbeiten</a:t>
             </a:r>
-          </a:p>
-        </p:txBody>
-      </p:sp>
-      <p:sp>
-        <p:nvSpPr>
-          <p:cNvPr id="3" name="Textplatzhalter 2">
-            <a:extLst>
-              <a:ext uri="{FF2B5EF4-FFF2-40B4-BE49-F238E27FC236}">
-                <a16:creationId xmlns:a16="http://schemas.microsoft.com/office/drawing/2014/main" id="{E497200F-1969-E5E8-87B2-06C4AC365FE6}"/>
-              </a:ext>
-            </a:extLst>
-          </p:cNvPr>
+            <a:endParaRPr lang="en-US" dirty="0"/>
+          </a:p>
+        </p:txBody>
+      </p:sp>
+      <p:sp>
+        <p:nvSpPr>
+          <p:cNvPr id="3" name="Text Placeholder 2"/>
           <p:cNvSpPr>
             <a:spLocks noGrp="1"/>
           </p:cNvSpPr>
@@ -1129,13 +1006,7 @@
       </p:sp>
       <p:sp>
         <p:nvSpPr>
-          <p:cNvPr id="4" name="Datumsplatzhalter 3">
-            <a:extLst>
-              <a:ext uri="{FF2B5EF4-FFF2-40B4-BE49-F238E27FC236}">
-                <a16:creationId xmlns:a16="http://schemas.microsoft.com/office/drawing/2014/main" id="{C3A4C9C6-B43C-64C3-9FE6-323E23553BBD}"/>
-              </a:ext>
-            </a:extLst>
-          </p:cNvPr>
+          <p:cNvPr id="4" name="Date Placeholder 3"/>
           <p:cNvSpPr>
             <a:spLocks noGrp="1"/>
           </p:cNvSpPr>
@@ -1150,7 +1021,7 @@
           <a:p>
             <a:fld id="{42A0533D-F09C-441E-936C-5A7061C2C138}" type="datetimeFigureOut">
               <a:rPr lang="de-DE" smtClean="0"/>
-              <a:t>11.05.2026</a:t>
+              <a:t>21.05.2026</a:t>
             </a:fld>
             <a:endParaRPr lang="de-DE"/>
           </a:p>
@@ -1158,13 +1029,7 @@
       </p:sp>
       <p:sp>
         <p:nvSpPr>
-          <p:cNvPr id="5" name="Fußzeilenplatzhalter 4">
-            <a:extLst>
-              <a:ext uri="{FF2B5EF4-FFF2-40B4-BE49-F238E27FC236}">
-                <a16:creationId xmlns:a16="http://schemas.microsoft.com/office/drawing/2014/main" id="{E36E6D20-C15E-9A4B-E7C4-B48CA56495ED}"/>
-              </a:ext>
-            </a:extLst>
-          </p:cNvPr>
+          <p:cNvPr id="5" name="Footer Placeholder 4"/>
           <p:cNvSpPr>
             <a:spLocks noGrp="1"/>
           </p:cNvSpPr>
@@ -1183,13 +1048,7 @@
       </p:sp>
       <p:sp>
         <p:nvSpPr>
-          <p:cNvPr id="6" name="Foliennummernplatzhalter 5">
-            <a:extLst>
-              <a:ext uri="{FF2B5EF4-FFF2-40B4-BE49-F238E27FC236}">
-                <a16:creationId xmlns:a16="http://schemas.microsoft.com/office/drawing/2014/main" id="{ECD58647-ED64-B26F-8FA9-258F0409BC76}"/>
-              </a:ext>
-            </a:extLst>
-          </p:cNvPr>
+          <p:cNvPr id="6" name="Slide Number Placeholder 5"/>
           <p:cNvSpPr>
             <a:spLocks noGrp="1"/>
           </p:cNvSpPr>
@@ -1213,7 +1072,7 @@
     </p:spTree>
     <p:extLst>
       <p:ext uri="{BB962C8B-B14F-4D97-AF65-F5344CB8AC3E}">
-        <p14:creationId xmlns:p14="http://schemas.microsoft.com/office/powerpoint/2010/main" val="1245382920"/>
+        <p14:creationId xmlns:p14="http://schemas.microsoft.com/office/powerpoint/2010/main" val="273759818"/>
       </p:ext>
     </p:extLst>
   </p:cSld>
@@ -1242,13 +1101,7 @@
       </p:grpSpPr>
       <p:sp>
         <p:nvSpPr>
-          <p:cNvPr id="2" name="Titel 1">
-            <a:extLst>
-              <a:ext uri="{FF2B5EF4-FFF2-40B4-BE49-F238E27FC236}">
-                <a16:creationId xmlns:a16="http://schemas.microsoft.com/office/drawing/2014/main" id="{0B867456-CE41-7F1A-F976-585AEB959CF8}"/>
-              </a:ext>
-            </a:extLst>
-          </p:cNvPr>
+          <p:cNvPr id="2" name="Title 1"/>
           <p:cNvSpPr>
             <a:spLocks noGrp="1"/>
           </p:cNvSpPr>
@@ -1265,18 +1118,13 @@
               <a:rPr lang="de-DE"/>
               <a:t>Mastertitelformat bearbeiten</a:t>
             </a:r>
-          </a:p>
-        </p:txBody>
-      </p:sp>
-      <p:sp>
-        <p:nvSpPr>
-          <p:cNvPr id="3" name="Inhaltsplatzhalter 2">
-            <a:extLst>
-              <a:ext uri="{FF2B5EF4-FFF2-40B4-BE49-F238E27FC236}">
-                <a16:creationId xmlns:a16="http://schemas.microsoft.com/office/drawing/2014/main" id="{EC09C2F1-2368-3FAE-949C-28AD90AC7F81}"/>
-              </a:ext>
-            </a:extLst>
-          </p:cNvPr>
+            <a:endParaRPr lang="en-US" dirty="0"/>
+          </a:p>
+        </p:txBody>
+      </p:sp>
+      <p:sp>
+        <p:nvSpPr>
+          <p:cNvPr id="3" name="Content Placeholder 2"/>
           <p:cNvSpPr>
             <a:spLocks noGrp="1"/>
           </p:cNvSpPr>
@@ -1327,18 +1175,13 @@
               <a:rPr lang="de-DE"/>
               <a:t>Fünfte Ebene</a:t>
             </a:r>
-          </a:p>
-        </p:txBody>
-      </p:sp>
-      <p:sp>
-        <p:nvSpPr>
-          <p:cNvPr id="4" name="Inhaltsplatzhalter 3">
-            <a:extLst>
-              <a:ext uri="{FF2B5EF4-FFF2-40B4-BE49-F238E27FC236}">
-                <a16:creationId xmlns:a16="http://schemas.microsoft.com/office/drawing/2014/main" id="{C30CAA5B-5B72-8C19-14E0-829E3D265380}"/>
-              </a:ext>
-            </a:extLst>
-          </p:cNvPr>
+            <a:endParaRPr lang="en-US" dirty="0"/>
+          </a:p>
+        </p:txBody>
+      </p:sp>
+      <p:sp>
+        <p:nvSpPr>
+          <p:cNvPr id="4" name="Content Placeholder 3"/>
           <p:cNvSpPr>
             <a:spLocks noGrp="1"/>
           </p:cNvSpPr>
@@ -1389,18 +1232,13 @@
               <a:rPr lang="de-DE"/>
               <a:t>Fünfte Ebene</a:t>
             </a:r>
-          </a:p>
-        </p:txBody>
-      </p:sp>
-      <p:sp>
-        <p:nvSpPr>
-          <p:cNvPr id="5" name="Datumsplatzhalter 4">
-            <a:extLst>
-              <a:ext uri="{FF2B5EF4-FFF2-40B4-BE49-F238E27FC236}">
-                <a16:creationId xmlns:a16="http://schemas.microsoft.com/office/drawing/2014/main" id="{B66DE57E-9AF3-1A7A-680D-54D58C1412C2}"/>
-              </a:ext>
-            </a:extLst>
-          </p:cNvPr>
+            <a:endParaRPr lang="en-US" dirty="0"/>
+          </a:p>
+        </p:txBody>
+      </p:sp>
+      <p:sp>
+        <p:nvSpPr>
+          <p:cNvPr id="5" name="Date Placeholder 4"/>
           <p:cNvSpPr>
             <a:spLocks noGrp="1"/>
           </p:cNvSpPr>
@@ -1415,7 +1253,7 @@
           <a:p>
             <a:fld id="{42A0533D-F09C-441E-936C-5A7061C2C138}" type="datetimeFigureOut">
               <a:rPr lang="de-DE" smtClean="0"/>
-              <a:t>11.05.2026</a:t>
+              <a:t>21.05.2026</a:t>
             </a:fld>
             <a:endParaRPr lang="de-DE"/>
           </a:p>
@@ -1423,13 +1261,7 @@
       </p:sp>
       <p:sp>
         <p:nvSpPr>
-          <p:cNvPr id="6" name="Fußzeilenplatzhalter 5">
-            <a:extLst>
-              <a:ext uri="{FF2B5EF4-FFF2-40B4-BE49-F238E27FC236}">
-                <a16:creationId xmlns:a16="http://schemas.microsoft.com/office/drawing/2014/main" id="{708E8690-61EC-8FA1-3D58-6A43E638FB58}"/>
-              </a:ext>
-            </a:extLst>
-          </p:cNvPr>
+          <p:cNvPr id="6" name="Footer Placeholder 5"/>
           <p:cNvSpPr>
             <a:spLocks noGrp="1"/>
           </p:cNvSpPr>
@@ -1448,13 +1280,7 @@
       </p:sp>
       <p:sp>
         <p:nvSpPr>
-          <p:cNvPr id="7" name="Foliennummernplatzhalter 6">
-            <a:extLst>
-              <a:ext uri="{FF2B5EF4-FFF2-40B4-BE49-F238E27FC236}">
-                <a16:creationId xmlns:a16="http://schemas.microsoft.com/office/drawing/2014/main" id="{0A39A715-AD94-4E37-2FB9-DD956B904773}"/>
-              </a:ext>
-            </a:extLst>
-          </p:cNvPr>
+          <p:cNvPr id="7" name="Slide Number Placeholder 6"/>
           <p:cNvSpPr>
             <a:spLocks noGrp="1"/>
           </p:cNvSpPr>
@@ -1478,7 +1304,7 @@
     </p:spTree>
     <p:extLst>
       <p:ext uri="{BB962C8B-B14F-4D97-AF65-F5344CB8AC3E}">
-        <p14:creationId xmlns:p14="http://schemas.microsoft.com/office/powerpoint/2010/main" val="3516043398"/>
+        <p14:creationId xmlns:p14="http://schemas.microsoft.com/office/powerpoint/2010/main" val="2967338252"/>
       </p:ext>
     </p:extLst>
   </p:cSld>
@@ -1507,13 +1333,7 @@
       </p:grpSpPr>
       <p:sp>
         <p:nvSpPr>
-          <p:cNvPr id="2" name="Titel 1">
-            <a:extLst>
-              <a:ext uri="{FF2B5EF4-FFF2-40B4-BE49-F238E27FC236}">
-                <a16:creationId xmlns:a16="http://schemas.microsoft.com/office/drawing/2014/main" id="{012897A3-BBE2-0178-D3B6-A2F4470C08E8}"/>
-              </a:ext>
-            </a:extLst>
-          </p:cNvPr>
+          <p:cNvPr id="2" name="Title 1"/>
           <p:cNvSpPr>
             <a:spLocks noGrp="1"/>
           </p:cNvSpPr>
@@ -1535,18 +1355,13 @@
               <a:rPr lang="de-DE"/>
               <a:t>Mastertitelformat bearbeiten</a:t>
             </a:r>
-          </a:p>
-        </p:txBody>
-      </p:sp>
-      <p:sp>
-        <p:nvSpPr>
-          <p:cNvPr id="3" name="Textplatzhalter 2">
-            <a:extLst>
-              <a:ext uri="{FF2B5EF4-FFF2-40B4-BE49-F238E27FC236}">
-                <a16:creationId xmlns:a16="http://schemas.microsoft.com/office/drawing/2014/main" id="{79AFBFAD-CCD5-C466-C3C2-0778C021FCB8}"/>
-              </a:ext>
-            </a:extLst>
-          </p:cNvPr>
+            <a:endParaRPr lang="en-US" dirty="0"/>
+          </a:p>
+        </p:txBody>
+      </p:sp>
+      <p:sp>
+        <p:nvSpPr>
+          <p:cNvPr id="3" name="Text Placeholder 2"/>
           <p:cNvSpPr>
             <a:spLocks noGrp="1"/>
           </p:cNvSpPr>
@@ -1611,13 +1426,7 @@
       </p:sp>
       <p:sp>
         <p:nvSpPr>
-          <p:cNvPr id="4" name="Inhaltsplatzhalter 3">
-            <a:extLst>
-              <a:ext uri="{FF2B5EF4-FFF2-40B4-BE49-F238E27FC236}">
-                <a16:creationId xmlns:a16="http://schemas.microsoft.com/office/drawing/2014/main" id="{18E4BB46-2A14-ED1E-FBAC-818FEAC423D2}"/>
-              </a:ext>
-            </a:extLst>
-          </p:cNvPr>
+          <p:cNvPr id="4" name="Content Placeholder 3"/>
           <p:cNvSpPr>
             <a:spLocks noGrp="1"/>
           </p:cNvSpPr>
@@ -1668,18 +1477,13 @@
               <a:rPr lang="de-DE"/>
               <a:t>Fünfte Ebene</a:t>
             </a:r>
-          </a:p>
-        </p:txBody>
-      </p:sp>
-      <p:sp>
-        <p:nvSpPr>
-          <p:cNvPr id="5" name="Textplatzhalter 4">
-            <a:extLst>
-              <a:ext uri="{FF2B5EF4-FFF2-40B4-BE49-F238E27FC236}">
-                <a16:creationId xmlns:a16="http://schemas.microsoft.com/office/drawing/2014/main" id="{5259A10A-5871-6450-B1EA-D950DC23DD15}"/>
-              </a:ext>
-            </a:extLst>
-          </p:cNvPr>
+            <a:endParaRPr lang="en-US" dirty="0"/>
+          </a:p>
+        </p:txBody>
+      </p:sp>
+      <p:sp>
+        <p:nvSpPr>
+          <p:cNvPr id="5" name="Text Placeholder 4"/>
           <p:cNvSpPr>
             <a:spLocks noGrp="1"/>
           </p:cNvSpPr>
@@ -1744,13 +1548,7 @@
       </p:sp>
       <p:sp>
         <p:nvSpPr>
-          <p:cNvPr id="6" name="Inhaltsplatzhalter 5">
-            <a:extLst>
-              <a:ext uri="{FF2B5EF4-FFF2-40B4-BE49-F238E27FC236}">
-                <a16:creationId xmlns:a16="http://schemas.microsoft.com/office/drawing/2014/main" id="{11596505-DA20-DEDA-71C3-FDFF053047E1}"/>
-              </a:ext>
-            </a:extLst>
-          </p:cNvPr>
+          <p:cNvPr id="6" name="Content Placeholder 5"/>
           <p:cNvSpPr>
             <a:spLocks noGrp="1"/>
           </p:cNvSpPr>
@@ -1801,18 +1599,13 @@
               <a:rPr lang="de-DE"/>
               <a:t>Fünfte Ebene</a:t>
             </a:r>
-          </a:p>
-        </p:txBody>
-      </p:sp>
-      <p:sp>
-        <p:nvSpPr>
-          <p:cNvPr id="7" name="Datumsplatzhalter 6">
-            <a:extLst>
-              <a:ext uri="{FF2B5EF4-FFF2-40B4-BE49-F238E27FC236}">
-                <a16:creationId xmlns:a16="http://schemas.microsoft.com/office/drawing/2014/main" id="{5F298891-3462-9432-D3A7-F7CED2C3C9AE}"/>
-              </a:ext>
-            </a:extLst>
-          </p:cNvPr>
+            <a:endParaRPr lang="en-US" dirty="0"/>
+          </a:p>
+        </p:txBody>
+      </p:sp>
+      <p:sp>
+        <p:nvSpPr>
+          <p:cNvPr id="7" name="Date Placeholder 6"/>
           <p:cNvSpPr>
             <a:spLocks noGrp="1"/>
           </p:cNvSpPr>
@@ -1827,7 +1620,7 @@
           <a:p>
             <a:fld id="{42A0533D-F09C-441E-936C-5A7061C2C138}" type="datetimeFigureOut">
               <a:rPr lang="de-DE" smtClean="0"/>
-              <a:t>11.05.2026</a:t>
+              <a:t>21.05.2026</a:t>
             </a:fld>
             <a:endParaRPr lang="de-DE"/>
           </a:p>
@@ -1835,13 +1628,7 @@
       </p:sp>
       <p:sp>
         <p:nvSpPr>
-          <p:cNvPr id="8" name="Fußzeilenplatzhalter 7">
-            <a:extLst>
-              <a:ext uri="{FF2B5EF4-FFF2-40B4-BE49-F238E27FC236}">
-                <a16:creationId xmlns:a16="http://schemas.microsoft.com/office/drawing/2014/main" id="{1F2AFBA9-7B01-47C9-9A16-B4E338599B86}"/>
-              </a:ext>
-            </a:extLst>
-          </p:cNvPr>
+          <p:cNvPr id="8" name="Footer Placeholder 7"/>
           <p:cNvSpPr>
             <a:spLocks noGrp="1"/>
           </p:cNvSpPr>
@@ -1860,13 +1647,7 @@
       </p:sp>
       <p:sp>
         <p:nvSpPr>
-          <p:cNvPr id="9" name="Foliennummernplatzhalter 8">
-            <a:extLst>
-              <a:ext uri="{FF2B5EF4-FFF2-40B4-BE49-F238E27FC236}">
-                <a16:creationId xmlns:a16="http://schemas.microsoft.com/office/drawing/2014/main" id="{68FA5641-62D1-9FF5-689E-D559DA6EA446}"/>
-              </a:ext>
-            </a:extLst>
-          </p:cNvPr>
+          <p:cNvPr id="9" name="Slide Number Placeholder 8"/>
           <p:cNvSpPr>
             <a:spLocks noGrp="1"/>
           </p:cNvSpPr>
@@ -1890,7 +1671,7 @@
     </p:spTree>
     <p:extLst>
       <p:ext uri="{BB962C8B-B14F-4D97-AF65-F5344CB8AC3E}">
-        <p14:creationId xmlns:p14="http://schemas.microsoft.com/office/powerpoint/2010/main" val="2555580076"/>
+        <p14:creationId xmlns:p14="http://schemas.microsoft.com/office/powerpoint/2010/main" val="682845374"/>
       </p:ext>
     </p:extLst>
   </p:cSld>
@@ -1919,13 +1700,7 @@
       </p:grpSpPr>
       <p:sp>
         <p:nvSpPr>
-          <p:cNvPr id="2" name="Titel 1">
-            <a:extLst>
-              <a:ext uri="{FF2B5EF4-FFF2-40B4-BE49-F238E27FC236}">
-                <a16:creationId xmlns:a16="http://schemas.microsoft.com/office/drawing/2014/main" id="{69531508-165D-9017-7E5A-16ADD8006FE2}"/>
-              </a:ext>
-            </a:extLst>
-          </p:cNvPr>
+          <p:cNvPr id="2" name="Title 1"/>
           <p:cNvSpPr>
             <a:spLocks noGrp="1"/>
           </p:cNvSpPr>
@@ -1942,18 +1717,13 @@
               <a:rPr lang="de-DE"/>
               <a:t>Mastertitelformat bearbeiten</a:t>
             </a:r>
-          </a:p>
-        </p:txBody>
-      </p:sp>
-      <p:sp>
-        <p:nvSpPr>
-          <p:cNvPr id="3" name="Datumsplatzhalter 2">
-            <a:extLst>
-              <a:ext uri="{FF2B5EF4-FFF2-40B4-BE49-F238E27FC236}">
-                <a16:creationId xmlns:a16="http://schemas.microsoft.com/office/drawing/2014/main" id="{67DCC3F3-597F-1CA5-C9DC-63DBBD1596BB}"/>
-              </a:ext>
-            </a:extLst>
-          </p:cNvPr>
+            <a:endParaRPr lang="en-US" dirty="0"/>
+          </a:p>
+        </p:txBody>
+      </p:sp>
+      <p:sp>
+        <p:nvSpPr>
+          <p:cNvPr id="3" name="Date Placeholder 2"/>
           <p:cNvSpPr>
             <a:spLocks noGrp="1"/>
           </p:cNvSpPr>
@@ -1968,7 +1738,7 @@
           <a:p>
             <a:fld id="{42A0533D-F09C-441E-936C-5A7061C2C138}" type="datetimeFigureOut">
               <a:rPr lang="de-DE" smtClean="0"/>
-              <a:t>11.05.2026</a:t>
+              <a:t>21.05.2026</a:t>
             </a:fld>
             <a:endParaRPr lang="de-DE"/>
           </a:p>
@@ -1976,13 +1746,7 @@
       </p:sp>
       <p:sp>
         <p:nvSpPr>
-          <p:cNvPr id="4" name="Fußzeilenplatzhalter 3">
-            <a:extLst>
-              <a:ext uri="{FF2B5EF4-FFF2-40B4-BE49-F238E27FC236}">
-                <a16:creationId xmlns:a16="http://schemas.microsoft.com/office/drawing/2014/main" id="{3B80327D-32D6-7007-E74E-13D3E17D80A4}"/>
-              </a:ext>
-            </a:extLst>
-          </p:cNvPr>
+          <p:cNvPr id="4" name="Footer Placeholder 3"/>
           <p:cNvSpPr>
             <a:spLocks noGrp="1"/>
           </p:cNvSpPr>
@@ -2001,13 +1765,7 @@
       </p:sp>
       <p:sp>
         <p:nvSpPr>
-          <p:cNvPr id="5" name="Foliennummernplatzhalter 4">
-            <a:extLst>
-              <a:ext uri="{FF2B5EF4-FFF2-40B4-BE49-F238E27FC236}">
-                <a16:creationId xmlns:a16="http://schemas.microsoft.com/office/drawing/2014/main" id="{F085E929-7B40-CEB8-D14D-60BF3D170BC4}"/>
-              </a:ext>
-            </a:extLst>
-          </p:cNvPr>
+          <p:cNvPr id="5" name="Slide Number Placeholder 4"/>
           <p:cNvSpPr>
             <a:spLocks noGrp="1"/>
           </p:cNvSpPr>
@@ -2031,7 +1789,7 @@
     </p:spTree>
     <p:extLst>
       <p:ext uri="{BB962C8B-B14F-4D97-AF65-F5344CB8AC3E}">
-        <p14:creationId xmlns:p14="http://schemas.microsoft.com/office/powerpoint/2010/main" val="1363973727"/>
+        <p14:creationId xmlns:p14="http://schemas.microsoft.com/office/powerpoint/2010/main" val="422746737"/>
       </p:ext>
     </p:extLst>
   </p:cSld>
@@ -2060,13 +1818,7 @@
       </p:grpSpPr>
       <p:sp>
         <p:nvSpPr>
-          <p:cNvPr id="2" name="Datumsplatzhalter 1">
-            <a:extLst>
-              <a:ext uri="{FF2B5EF4-FFF2-40B4-BE49-F238E27FC236}">
-                <a16:creationId xmlns:a16="http://schemas.microsoft.com/office/drawing/2014/main" id="{5C90DB18-04BE-5056-4475-1000350929DC}"/>
-              </a:ext>
-            </a:extLst>
-          </p:cNvPr>
+          <p:cNvPr id="2" name="Date Placeholder 1"/>
           <p:cNvSpPr>
             <a:spLocks noGrp="1"/>
           </p:cNvSpPr>
@@ -2081,7 +1833,7 @@
           <a:p>
             <a:fld id="{42A0533D-F09C-441E-936C-5A7061C2C138}" type="datetimeFigureOut">
               <a:rPr lang="de-DE" smtClean="0"/>
-              <a:t>11.05.2026</a:t>
+              <a:t>21.05.2026</a:t>
             </a:fld>
             <a:endParaRPr lang="de-DE"/>
           </a:p>
@@ -2089,13 +1841,7 @@
       </p:sp>
       <p:sp>
         <p:nvSpPr>
-          <p:cNvPr id="3" name="Fußzeilenplatzhalter 2">
-            <a:extLst>
-              <a:ext uri="{FF2B5EF4-FFF2-40B4-BE49-F238E27FC236}">
-                <a16:creationId xmlns:a16="http://schemas.microsoft.com/office/drawing/2014/main" id="{DE078228-42F4-E236-61BB-4F693E8D9131}"/>
-              </a:ext>
-            </a:extLst>
-          </p:cNvPr>
+          <p:cNvPr id="3" name="Footer Placeholder 2"/>
           <p:cNvSpPr>
             <a:spLocks noGrp="1"/>
           </p:cNvSpPr>
@@ -2114,13 +1860,7 @@
       </p:sp>
       <p:sp>
         <p:nvSpPr>
-          <p:cNvPr id="4" name="Foliennummernplatzhalter 3">
-            <a:extLst>
-              <a:ext uri="{FF2B5EF4-FFF2-40B4-BE49-F238E27FC236}">
-                <a16:creationId xmlns:a16="http://schemas.microsoft.com/office/drawing/2014/main" id="{62F97A12-9A22-D2AC-2F64-31569A7F9C74}"/>
-              </a:ext>
-            </a:extLst>
-          </p:cNvPr>
+          <p:cNvPr id="4" name="Slide Number Placeholder 3"/>
           <p:cNvSpPr>
             <a:spLocks noGrp="1"/>
           </p:cNvSpPr>
@@ -2144,7 +1884,7 @@
     </p:spTree>
     <p:extLst>
       <p:ext uri="{BB962C8B-B14F-4D97-AF65-F5344CB8AC3E}">
-        <p14:creationId xmlns:p14="http://schemas.microsoft.com/office/powerpoint/2010/main" val="3333631385"/>
+        <p14:creationId xmlns:p14="http://schemas.microsoft.com/office/powerpoint/2010/main" val="3272121786"/>
       </p:ext>
     </p:extLst>
   </p:cSld>
@@ -2173,13 +1913,7 @@
       </p:grpSpPr>
       <p:sp>
         <p:nvSpPr>
-          <p:cNvPr id="2" name="Titel 1">
-            <a:extLst>
-              <a:ext uri="{FF2B5EF4-FFF2-40B4-BE49-F238E27FC236}">
-                <a16:creationId xmlns:a16="http://schemas.microsoft.com/office/drawing/2014/main" id="{8C1BB630-BF5A-9032-5984-1B2246D96640}"/>
-              </a:ext>
-            </a:extLst>
-          </p:cNvPr>
+          <p:cNvPr id="2" name="Title 1"/>
           <p:cNvSpPr>
             <a:spLocks noGrp="1"/>
           </p:cNvSpPr>
@@ -2205,18 +1939,13 @@
               <a:rPr lang="de-DE"/>
               <a:t>Mastertitelformat bearbeiten</a:t>
             </a:r>
-          </a:p>
-        </p:txBody>
-      </p:sp>
-      <p:sp>
-        <p:nvSpPr>
-          <p:cNvPr id="3" name="Inhaltsplatzhalter 2">
-            <a:extLst>
-              <a:ext uri="{FF2B5EF4-FFF2-40B4-BE49-F238E27FC236}">
-                <a16:creationId xmlns:a16="http://schemas.microsoft.com/office/drawing/2014/main" id="{0BEB9898-4742-5563-88ED-EE8FB8A04D70}"/>
-              </a:ext>
-            </a:extLst>
-          </p:cNvPr>
+            <a:endParaRPr lang="en-US" dirty="0"/>
+          </a:p>
+        </p:txBody>
+      </p:sp>
+      <p:sp>
+        <p:nvSpPr>
+          <p:cNvPr id="3" name="Content Placeholder 2"/>
           <p:cNvSpPr>
             <a:spLocks noGrp="1"/>
           </p:cNvSpPr>
@@ -2295,18 +2024,13 @@
               <a:rPr lang="de-DE"/>
               <a:t>Fünfte Ebene</a:t>
             </a:r>
-          </a:p>
-        </p:txBody>
-      </p:sp>
-      <p:sp>
-        <p:nvSpPr>
-          <p:cNvPr id="4" name="Textplatzhalter 3">
-            <a:extLst>
-              <a:ext uri="{FF2B5EF4-FFF2-40B4-BE49-F238E27FC236}">
-                <a16:creationId xmlns:a16="http://schemas.microsoft.com/office/drawing/2014/main" id="{2E0F5BA3-2937-EDF1-14B0-307ECFD64E82}"/>
-              </a:ext>
-            </a:extLst>
-          </p:cNvPr>
+            <a:endParaRPr lang="en-US" dirty="0"/>
+          </a:p>
+        </p:txBody>
+      </p:sp>
+      <p:sp>
+        <p:nvSpPr>
+          <p:cNvPr id="4" name="Text Placeholder 3"/>
           <p:cNvSpPr>
             <a:spLocks noGrp="1"/>
           </p:cNvSpPr>
@@ -2371,13 +2095,7 @@
       </p:sp>
       <p:sp>
         <p:nvSpPr>
-          <p:cNvPr id="5" name="Datumsplatzhalter 4">
-            <a:extLst>
-              <a:ext uri="{FF2B5EF4-FFF2-40B4-BE49-F238E27FC236}">
-                <a16:creationId xmlns:a16="http://schemas.microsoft.com/office/drawing/2014/main" id="{DB6C7E50-BAAE-7DD6-49AF-F78B764BE77B}"/>
-              </a:ext>
-            </a:extLst>
-          </p:cNvPr>
+          <p:cNvPr id="5" name="Date Placeholder 4"/>
           <p:cNvSpPr>
             <a:spLocks noGrp="1"/>
           </p:cNvSpPr>
@@ -2392,7 +2110,7 @@
           <a:p>
             <a:fld id="{42A0533D-F09C-441E-936C-5A7061C2C138}" type="datetimeFigureOut">
               <a:rPr lang="de-DE" smtClean="0"/>
-              <a:t>11.05.2026</a:t>
+              <a:t>21.05.2026</a:t>
             </a:fld>
             <a:endParaRPr lang="de-DE"/>
           </a:p>
@@ -2400,13 +2118,7 @@
       </p:sp>
       <p:sp>
         <p:nvSpPr>
-          <p:cNvPr id="6" name="Fußzeilenplatzhalter 5">
-            <a:extLst>
-              <a:ext uri="{FF2B5EF4-FFF2-40B4-BE49-F238E27FC236}">
-                <a16:creationId xmlns:a16="http://schemas.microsoft.com/office/drawing/2014/main" id="{DAD678E0-68D3-2A8A-BDAB-F07709B6EA5E}"/>
-              </a:ext>
-            </a:extLst>
-          </p:cNvPr>
+          <p:cNvPr id="6" name="Footer Placeholder 5"/>
           <p:cNvSpPr>
             <a:spLocks noGrp="1"/>
           </p:cNvSpPr>
@@ -2425,13 +2137,7 @@
       </p:sp>
       <p:sp>
         <p:nvSpPr>
-          <p:cNvPr id="7" name="Foliennummernplatzhalter 6">
-            <a:extLst>
-              <a:ext uri="{FF2B5EF4-FFF2-40B4-BE49-F238E27FC236}">
-                <a16:creationId xmlns:a16="http://schemas.microsoft.com/office/drawing/2014/main" id="{3E423B8A-F9C1-1539-4183-E0480930DF7C}"/>
-              </a:ext>
-            </a:extLst>
-          </p:cNvPr>
+          <p:cNvPr id="7" name="Slide Number Placeholder 6"/>
           <p:cNvSpPr>
             <a:spLocks noGrp="1"/>
           </p:cNvSpPr>
@@ -2455,7 +2161,7 @@
     </p:spTree>
     <p:extLst>
       <p:ext uri="{BB962C8B-B14F-4D97-AF65-F5344CB8AC3E}">
-        <p14:creationId xmlns:p14="http://schemas.microsoft.com/office/powerpoint/2010/main" val="1917436711"/>
+        <p14:creationId xmlns:p14="http://schemas.microsoft.com/office/powerpoint/2010/main" val="3077493395"/>
       </p:ext>
     </p:extLst>
   </p:cSld>
@@ -2484,13 +2190,7 @@
       </p:grpSpPr>
       <p:sp>
         <p:nvSpPr>
-          <p:cNvPr id="2" name="Titel 1">
-            <a:extLst>
-              <a:ext uri="{FF2B5EF4-FFF2-40B4-BE49-F238E27FC236}">
-                <a16:creationId xmlns:a16="http://schemas.microsoft.com/office/drawing/2014/main" id="{E2BD6DA6-511F-8F1A-9987-234F961B8E0D}"/>
-              </a:ext>
-            </a:extLst>
-          </p:cNvPr>
+          <p:cNvPr id="2" name="Title 1"/>
           <p:cNvSpPr>
             <a:spLocks noGrp="1"/>
           </p:cNvSpPr>
@@ -2516,20 +2216,15 @@
               <a:rPr lang="de-DE"/>
               <a:t>Mastertitelformat bearbeiten</a:t>
             </a:r>
-          </a:p>
-        </p:txBody>
-      </p:sp>
-      <p:sp>
-        <p:nvSpPr>
-          <p:cNvPr id="3" name="Bildplatzhalter 2">
-            <a:extLst>
-              <a:ext uri="{FF2B5EF4-FFF2-40B4-BE49-F238E27FC236}">
-                <a16:creationId xmlns:a16="http://schemas.microsoft.com/office/drawing/2014/main" id="{0D718EE9-9344-AD32-876D-E325B6A167EA}"/>
-              </a:ext>
-            </a:extLst>
-          </p:cNvPr>
+            <a:endParaRPr lang="en-US" dirty="0"/>
+          </a:p>
+        </p:txBody>
+      </p:sp>
+      <p:sp>
+        <p:nvSpPr>
+          <p:cNvPr id="3" name="Picture Placeholder 2"/>
           <p:cNvSpPr>
-            <a:spLocks noGrp="1"/>
+            <a:spLocks noGrp="1" noChangeAspect="1"/>
           </p:cNvSpPr>
           <p:nvPr>
             <p:ph type="pic" idx="1"/>
@@ -2542,7 +2237,7 @@
           </a:xfrm>
         </p:spPr>
         <p:txBody>
-          <a:bodyPr/>
+          <a:bodyPr anchor="t"/>
           <a:lstStyle>
             <a:lvl1pPr marL="0" indent="0">
               <a:buNone/>
@@ -2582,19 +2277,17 @@
             </a:lvl9pPr>
           </a:lstStyle>
           <a:p>
-            <a:endParaRPr lang="de-DE"/>
-          </a:p>
-        </p:txBody>
-      </p:sp>
-      <p:sp>
-        <p:nvSpPr>
-          <p:cNvPr id="4" name="Textplatzhalter 3">
-            <a:extLst>
-              <a:ext uri="{FF2B5EF4-FFF2-40B4-BE49-F238E27FC236}">
-                <a16:creationId xmlns:a16="http://schemas.microsoft.com/office/drawing/2014/main" id="{B7F6FFB3-C257-EDBB-E48C-6BCC52685EF7}"/>
-              </a:ext>
-            </a:extLst>
-          </p:cNvPr>
+            <a:r>
+              <a:rPr lang="de-DE"/>
+              <a:t>Bild durch Klicken auf Symbol hinzufügen</a:t>
+            </a:r>
+            <a:endParaRPr lang="en-US" dirty="0"/>
+          </a:p>
+        </p:txBody>
+      </p:sp>
+      <p:sp>
+        <p:nvSpPr>
+          <p:cNvPr id="4" name="Text Placeholder 3"/>
           <p:cNvSpPr>
             <a:spLocks noGrp="1"/>
           </p:cNvSpPr>
@@ -2659,13 +2352,7 @@
       </p:sp>
       <p:sp>
         <p:nvSpPr>
-          <p:cNvPr id="5" name="Datumsplatzhalter 4">
-            <a:extLst>
-              <a:ext uri="{FF2B5EF4-FFF2-40B4-BE49-F238E27FC236}">
-                <a16:creationId xmlns:a16="http://schemas.microsoft.com/office/drawing/2014/main" id="{ABD67272-E47E-CE0A-55D0-7A50A72D4BB4}"/>
-              </a:ext>
-            </a:extLst>
-          </p:cNvPr>
+          <p:cNvPr id="5" name="Date Placeholder 4"/>
           <p:cNvSpPr>
             <a:spLocks noGrp="1"/>
           </p:cNvSpPr>
@@ -2680,7 +2367,7 @@
           <a:p>
             <a:fld id="{42A0533D-F09C-441E-936C-5A7061C2C138}" type="datetimeFigureOut">
               <a:rPr lang="de-DE" smtClean="0"/>
-              <a:t>11.05.2026</a:t>
+              <a:t>21.05.2026</a:t>
             </a:fld>
             <a:endParaRPr lang="de-DE"/>
           </a:p>
@@ -2688,13 +2375,7 @@
       </p:sp>
       <p:sp>
         <p:nvSpPr>
-          <p:cNvPr id="6" name="Fußzeilenplatzhalter 5">
-            <a:extLst>
-              <a:ext uri="{FF2B5EF4-FFF2-40B4-BE49-F238E27FC236}">
-                <a16:creationId xmlns:a16="http://schemas.microsoft.com/office/drawing/2014/main" id="{4C8FE082-EDE7-A7C7-E3C9-817E195FB6DC}"/>
-              </a:ext>
-            </a:extLst>
-          </p:cNvPr>
+          <p:cNvPr id="6" name="Footer Placeholder 5"/>
           <p:cNvSpPr>
             <a:spLocks noGrp="1"/>
           </p:cNvSpPr>
@@ -2713,13 +2394,7 @@
       </p:sp>
       <p:sp>
         <p:nvSpPr>
-          <p:cNvPr id="7" name="Foliennummernplatzhalter 6">
-            <a:extLst>
-              <a:ext uri="{FF2B5EF4-FFF2-40B4-BE49-F238E27FC236}">
-                <a16:creationId xmlns:a16="http://schemas.microsoft.com/office/drawing/2014/main" id="{BEF85447-0B83-6F1A-B160-9B1D93F61C1A}"/>
-              </a:ext>
-            </a:extLst>
-          </p:cNvPr>
+          <p:cNvPr id="7" name="Slide Number Placeholder 6"/>
           <p:cNvSpPr>
             <a:spLocks noGrp="1"/>
           </p:cNvSpPr>
@@ -2743,7 +2418,7 @@
     </p:spTree>
     <p:extLst>
       <p:ext uri="{BB962C8B-B14F-4D97-AF65-F5344CB8AC3E}">
-        <p14:creationId xmlns:p14="http://schemas.microsoft.com/office/powerpoint/2010/main" val="1390291760"/>
+        <p14:creationId xmlns:p14="http://schemas.microsoft.com/office/powerpoint/2010/main" val="1468469020"/>
       </p:ext>
     </p:extLst>
   </p:cSld>
@@ -2775,15 +2450,45 @@
           <a:chExt cx="0" cy="0"/>
         </a:xfrm>
       </p:grpSpPr>
-      <p:sp>
-        <p:nvSpPr>
-          <p:cNvPr id="2" name="Titelplatzhalter 1">
+      <p:pic>
+        <p:nvPicPr>
+          <p:cNvPr id="10" name="Grafik 9">
             <a:extLst>
               <a:ext uri="{FF2B5EF4-FFF2-40B4-BE49-F238E27FC236}">
-                <a16:creationId xmlns:a16="http://schemas.microsoft.com/office/drawing/2014/main" id="{7A1950D5-9FBE-8E49-A139-4078C1EF10F9}"/>
+                <a16:creationId xmlns:a16="http://schemas.microsoft.com/office/drawing/2014/main" id="{FA8876D6-4F88-2181-559B-F9C528A6BB93}"/>
               </a:ext>
             </a:extLst>
           </p:cNvPr>
+          <p:cNvPicPr>
+            <a:picLocks noChangeAspect="1"/>
+          </p:cNvPicPr>
+          <p:nvPr userDrawn="1"/>
+        </p:nvPicPr>
+        <p:blipFill>
+          <a:blip r:embed="rId13">
+            <a:extLst>
+              <a:ext uri="{28A0092B-C50C-407E-A947-70E740481C1C}">
+                <a14:useLocalDpi xmlns:a14="http://schemas.microsoft.com/office/drawing/2010/main" val="0"/>
+              </a:ext>
+            </a:extLst>
+          </a:blip>
+          <a:stretch>
+            <a:fillRect/>
+          </a:stretch>
+        </p:blipFill>
+        <p:spPr>
+          <a:xfrm>
+            <a:off x="0" y="0"/>
+            <a:ext cx="12192000" cy="6858000"/>
+          </a:xfrm>
+          <a:prstGeom prst="rect">
+            <a:avLst/>
+          </a:prstGeom>
+        </p:spPr>
+      </p:pic>
+      <p:sp>
+        <p:nvSpPr>
+          <p:cNvPr id="2" name="Title Placeholder 1"/>
           <p:cNvSpPr>
             <a:spLocks noGrp="1"/>
           </p:cNvSpPr>
@@ -2810,18 +2515,13 @@
               <a:rPr lang="de-DE"/>
               <a:t>Mastertitelformat bearbeiten</a:t>
             </a:r>
-          </a:p>
-        </p:txBody>
-      </p:sp>
-      <p:sp>
-        <p:nvSpPr>
-          <p:cNvPr id="3" name="Textplatzhalter 2">
-            <a:extLst>
-              <a:ext uri="{FF2B5EF4-FFF2-40B4-BE49-F238E27FC236}">
-                <a16:creationId xmlns:a16="http://schemas.microsoft.com/office/drawing/2014/main" id="{90AF363B-9155-F59F-39EE-90CB0BE518FD}"/>
-              </a:ext>
-            </a:extLst>
-          </p:cNvPr>
+            <a:endParaRPr lang="en-US" dirty="0"/>
+          </a:p>
+        </p:txBody>
+      </p:sp>
+      <p:sp>
+        <p:nvSpPr>
+          <p:cNvPr id="3" name="Text Placeholder 2"/>
           <p:cNvSpPr>
             <a:spLocks noGrp="1"/>
           </p:cNvSpPr>
@@ -2877,18 +2577,13 @@
               <a:rPr lang="de-DE"/>
               <a:t>Fünfte Ebene</a:t>
             </a:r>
-          </a:p>
-        </p:txBody>
-      </p:sp>
-      <p:sp>
-        <p:nvSpPr>
-          <p:cNvPr id="4" name="Datumsplatzhalter 3">
-            <a:extLst>
-              <a:ext uri="{FF2B5EF4-FFF2-40B4-BE49-F238E27FC236}">
-                <a16:creationId xmlns:a16="http://schemas.microsoft.com/office/drawing/2014/main" id="{ECF512EA-0863-63EE-2C4F-B04A2BC1F105}"/>
-              </a:ext>
-            </a:extLst>
-          </p:cNvPr>
+            <a:endParaRPr lang="en-US" dirty="0"/>
+          </a:p>
+        </p:txBody>
+      </p:sp>
+      <p:sp>
+        <p:nvSpPr>
+          <p:cNvPr id="4" name="Date Placeholder 3"/>
           <p:cNvSpPr>
             <a:spLocks noGrp="1"/>
           </p:cNvSpPr>
@@ -2921,7 +2616,7 @@
           <a:p>
             <a:fld id="{42A0533D-F09C-441E-936C-5A7061C2C138}" type="datetimeFigureOut">
               <a:rPr lang="de-DE" smtClean="0"/>
-              <a:t>11.05.2026</a:t>
+              <a:t>21.05.2026</a:t>
             </a:fld>
             <a:endParaRPr lang="de-DE"/>
           </a:p>
@@ -2929,13 +2624,7 @@
       </p:sp>
       <p:sp>
         <p:nvSpPr>
-          <p:cNvPr id="5" name="Fußzeilenplatzhalter 4">
-            <a:extLst>
-              <a:ext uri="{FF2B5EF4-FFF2-40B4-BE49-F238E27FC236}">
-                <a16:creationId xmlns:a16="http://schemas.microsoft.com/office/drawing/2014/main" id="{D0DD8B73-9711-F3FF-2368-31865764F068}"/>
-              </a:ext>
-            </a:extLst>
-          </p:cNvPr>
+          <p:cNvPr id="5" name="Footer Placeholder 4"/>
           <p:cNvSpPr>
             <a:spLocks noGrp="1"/>
           </p:cNvSpPr>
@@ -2972,13 +2661,7 @@
       </p:sp>
       <p:sp>
         <p:nvSpPr>
-          <p:cNvPr id="6" name="Foliennummernplatzhalter 5">
-            <a:extLst>
-              <a:ext uri="{FF2B5EF4-FFF2-40B4-BE49-F238E27FC236}">
-                <a16:creationId xmlns:a16="http://schemas.microsoft.com/office/drawing/2014/main" id="{BCDE3201-B355-7E23-5DC2-91F07C40C8EC}"/>
-              </a:ext>
-            </a:extLst>
-          </p:cNvPr>
+          <p:cNvPr id="6" name="Slide Number Placeholder 5"/>
           <p:cNvSpPr>
             <a:spLocks noGrp="1"/>
           </p:cNvSpPr>
@@ -3020,23 +2703,23 @@
     </p:spTree>
     <p:extLst>
       <p:ext uri="{BB962C8B-B14F-4D97-AF65-F5344CB8AC3E}">
-        <p14:creationId xmlns:p14="http://schemas.microsoft.com/office/powerpoint/2010/main" val="41717682"/>
+        <p14:creationId xmlns:p14="http://schemas.microsoft.com/office/powerpoint/2010/main" val="2537605024"/>
       </p:ext>
     </p:extLst>
   </p:cSld>
   <p:clrMap bg1="lt1" tx1="dk1" bg2="lt2" tx2="dk2" accent1="accent1" accent2="accent2" accent3="accent3" accent4="accent4" accent5="accent5" accent6="accent6" hlink="hlink" folHlink="folHlink"/>
   <p:sldLayoutIdLst>
-    <p:sldLayoutId id="2147483649" r:id="rId1"/>
-    <p:sldLayoutId id="2147483650" r:id="rId2"/>
-    <p:sldLayoutId id="2147483651" r:id="rId3"/>
-    <p:sldLayoutId id="2147483652" r:id="rId4"/>
-    <p:sldLayoutId id="2147483653" r:id="rId5"/>
-    <p:sldLayoutId id="2147483654" r:id="rId6"/>
-    <p:sldLayoutId id="2147483655" r:id="rId7"/>
-    <p:sldLayoutId id="2147483656" r:id="rId8"/>
-    <p:sldLayoutId id="2147483657" r:id="rId9"/>
-    <p:sldLayoutId id="2147483658" r:id="rId10"/>
-    <p:sldLayoutId id="2147483659" r:id="rId11"/>
+    <p:sldLayoutId id="2147483673" r:id="rId1"/>
+    <p:sldLayoutId id="2147483674" r:id="rId2"/>
+    <p:sldLayoutId id="2147483675" r:id="rId3"/>
+    <p:sldLayoutId id="2147483676" r:id="rId4"/>
+    <p:sldLayoutId id="2147483677" r:id="rId5"/>
+    <p:sldLayoutId id="2147483678" r:id="rId6"/>
+    <p:sldLayoutId id="2147483679" r:id="rId7"/>
+    <p:sldLayoutId id="2147483680" r:id="rId8"/>
+    <p:sldLayoutId id="2147483681" r:id="rId9"/>
+    <p:sldLayoutId id="2147483682" r:id="rId10"/>
+    <p:sldLayoutId id="2147483683" r:id="rId11"/>
   </p:sldLayoutIdLst>
   <p:txStyles>
     <p:titleStyle>
@@ -3224,7 +2907,7 @@
     </p:bodyStyle>
     <p:otherStyle>
       <a:defPPr>
-        <a:defRPr lang="de-DE"/>
+        <a:defRPr lang="en-US"/>
       </a:defPPr>
       <a:lvl1pPr marL="0" algn="l" defTabSz="914400" rtl="0" eaLnBrk="1" latinLnBrk="0" hangingPunct="1">
         <a:defRPr sz="1800" kern="1200">
@@ -3352,7 +3035,7 @@
         </p:nvSpPr>
         <p:spPr>
           <a:xfrm>
-            <a:off x="901700" y="2505670"/>
+            <a:off x="901700" y="2505672"/>
             <a:ext cx="10179050" cy="1200329"/>
           </a:xfrm>
           <a:prstGeom prst="rect">
@@ -3435,6 +3118,53 @@
           </a:p>
         </p:txBody>
       </p:sp>
+      <p:pic>
+        <p:nvPicPr>
+          <p:cNvPr id="1026" name="Picture 2">
+            <a:extLst>
+              <a:ext uri="{FF2B5EF4-FFF2-40B4-BE49-F238E27FC236}">
+                <a16:creationId xmlns:a16="http://schemas.microsoft.com/office/drawing/2014/main" id="{E14D0FB2-EC5C-F189-F212-AE1123632138}"/>
+              </a:ext>
+            </a:extLst>
+          </p:cNvPr>
+          <p:cNvPicPr>
+            <a:picLocks noChangeAspect="1" noChangeArrowheads="1"/>
+          </p:cNvPicPr>
+          <p:nvPr/>
+        </p:nvPicPr>
+        <p:blipFill>
+          <a:blip r:embed="rId2">
+            <a:extLst>
+              <a:ext uri="{28A0092B-C50C-407E-A947-70E740481C1C}">
+                <a14:useLocalDpi xmlns:a14="http://schemas.microsoft.com/office/drawing/2010/main" val="0"/>
+              </a:ext>
+            </a:extLst>
+          </a:blip>
+          <a:srcRect/>
+          <a:stretch>
+            <a:fillRect/>
+          </a:stretch>
+        </p:blipFill>
+        <p:spPr bwMode="auto">
+          <a:xfrm>
+            <a:off x="390698" y="329383"/>
+            <a:ext cx="2812058" cy="1349788"/>
+          </a:xfrm>
+          <a:prstGeom prst="rect">
+            <a:avLst/>
+          </a:prstGeom>
+          <a:noFill/>
+          <a:extLst>
+            <a:ext uri="{909E8E84-426E-40DD-AFC4-6F175D3DCCD1}">
+              <a14:hiddenFill xmlns:a14="http://schemas.microsoft.com/office/drawing/2010/main">
+                <a:solidFill>
+                  <a:srgbClr val="FFFFFF"/>
+                </a:solidFill>
+              </a14:hiddenFill>
+            </a:ext>
+          </a:extLst>
+        </p:spPr>
+      </p:pic>
     </p:spTree>
     <p:extLst>
       <p:ext uri="{BB962C8B-B14F-4D97-AF65-F5344CB8AC3E}">
@@ -3591,7 +3321,7 @@
         </p:nvCxnSpPr>
         <p:spPr>
           <a:xfrm>
-            <a:off x="5753100" y="1078905"/>
+            <a:off x="5753100" y="1078907"/>
             <a:ext cx="0" cy="1448395"/>
           </a:xfrm>
           <a:prstGeom prst="straightConnector1">
@@ -3630,7 +3360,7 @@
         </p:nvSpPr>
         <p:spPr>
           <a:xfrm>
-            <a:off x="1880219" y="3092450"/>
+            <a:off x="1880221" y="3092450"/>
             <a:ext cx="4865819" cy="2308324"/>
           </a:xfrm>
           <a:prstGeom prst="rect">
@@ -4009,7 +3739,7 @@
         </p:nvSpPr>
         <p:spPr>
           <a:xfrm>
-            <a:off x="2362200" y="2717800"/>
+            <a:off x="2362202" y="2717800"/>
             <a:ext cx="4296625" cy="923330"/>
           </a:xfrm>
           <a:prstGeom prst="rect">
@@ -4436,7 +4166,7 @@
         </p:nvSpPr>
         <p:spPr>
           <a:xfrm>
-            <a:off x="5114641" y="495300"/>
+            <a:off x="5114643" y="495300"/>
             <a:ext cx="981359" cy="369332"/>
           </a:xfrm>
           <a:prstGeom prst="rect">
@@ -5078,7 +4808,7 @@
         </p:blipFill>
         <p:spPr>
           <a:xfrm>
-            <a:off x="7043596" y="962334"/>
+            <a:off x="7043598" y="962336"/>
             <a:ext cx="3530851" cy="4707801"/>
           </a:xfrm>
           <a:prstGeom prst="rect">
@@ -5130,7 +4860,7 @@
         </p:nvSpPr>
         <p:spPr>
           <a:xfrm>
-            <a:off x="1071548" y="900129"/>
+            <a:off x="1071549" y="900129"/>
             <a:ext cx="2952347" cy="369332"/>
           </a:xfrm>
           <a:prstGeom prst="rect">
@@ -5451,7 +5181,7 @@
         </p:nvSpPr>
         <p:spPr>
           <a:xfrm>
-            <a:off x="3644271" y="248257"/>
+            <a:off x="3644273" y="248259"/>
             <a:ext cx="5317033" cy="1200329"/>
           </a:xfrm>
           <a:prstGeom prst="rect">
@@ -5568,7 +5298,7 @@
         </p:nvCxnSpPr>
         <p:spPr>
           <a:xfrm>
-            <a:off x="0" y="5323557"/>
+            <a:off x="0" y="5323559"/>
             <a:ext cx="12045950" cy="33891"/>
           </a:xfrm>
           <a:prstGeom prst="straightConnector1">
@@ -5677,7 +5407,7 @@
         </p:nvSpPr>
         <p:spPr>
           <a:xfrm>
-            <a:off x="879477" y="3035828"/>
+            <a:off x="879478" y="3035828"/>
             <a:ext cx="2298699" cy="923330"/>
           </a:xfrm>
           <a:prstGeom prst="rect">
@@ -5750,7 +5480,7 @@
         </p:nvSpPr>
         <p:spPr>
           <a:xfrm>
-            <a:off x="2549524" y="2281314"/>
+            <a:off x="2549526" y="2281314"/>
             <a:ext cx="1495419" cy="923330"/>
           </a:xfrm>
           <a:prstGeom prst="rect">
@@ -5809,7 +5539,7 @@
         </p:nvSpPr>
         <p:spPr>
           <a:xfrm>
-            <a:off x="6056189" y="1496640"/>
+            <a:off x="6056191" y="1496640"/>
             <a:ext cx="2905119" cy="1477328"/>
           </a:xfrm>
           <a:prstGeom prst="rect">
@@ -5885,7 +5615,7 @@
         </p:nvCxnSpPr>
         <p:spPr>
           <a:xfrm>
-            <a:off x="146050" y="3110376"/>
+            <a:off x="-1377950" y="3110376"/>
             <a:ext cx="0" cy="2238710"/>
           </a:xfrm>
           <a:prstGeom prst="line">
@@ -5961,7 +5691,7 @@
         </p:nvCxnSpPr>
         <p:spPr>
           <a:xfrm>
-            <a:off x="3297233" y="3429000"/>
+            <a:off x="3297233" y="3429002"/>
             <a:ext cx="0" cy="1894557"/>
           </a:xfrm>
           <a:prstGeom prst="line">
@@ -6035,7 +5765,7 @@
         </p:nvSpPr>
         <p:spPr>
           <a:xfrm>
-            <a:off x="4337052" y="2967335"/>
+            <a:off x="4337054" y="2967335"/>
             <a:ext cx="1589023" cy="923330"/>
           </a:xfrm>
           <a:prstGeom prst="rect">
@@ -6078,7 +5808,7 @@
         </p:nvSpPr>
         <p:spPr>
           <a:xfrm>
-            <a:off x="9033210" y="1628362"/>
+            <a:off x="9033212" y="1628362"/>
             <a:ext cx="1472399" cy="1477328"/>
           </a:xfrm>
           <a:prstGeom prst="rect">
@@ -6133,7 +5863,7 @@
         </p:nvSpPr>
         <p:spPr>
           <a:xfrm>
-            <a:off x="6056189" y="2808855"/>
+            <a:off x="6056191" y="2808857"/>
             <a:ext cx="2905115" cy="646331"/>
           </a:xfrm>
           <a:prstGeom prst="rect">
@@ -6184,7 +5914,7 @@
         </p:nvSpPr>
         <p:spPr>
           <a:xfrm>
-            <a:off x="6153052" y="3616596"/>
+            <a:off x="6153052" y="3616598"/>
             <a:ext cx="1803400" cy="1200329"/>
           </a:xfrm>
           <a:prstGeom prst="rect">
@@ -6243,7 +5973,7 @@
         </p:nvSpPr>
         <p:spPr>
           <a:xfrm>
-            <a:off x="9736894" y="3220494"/>
+            <a:off x="9736896" y="3220494"/>
             <a:ext cx="1535115" cy="1477328"/>
           </a:xfrm>
           <a:prstGeom prst="rect">
@@ -6304,7 +6034,7 @@
         </p:nvCxnSpPr>
         <p:spPr>
           <a:xfrm>
-            <a:off x="4978400" y="3969703"/>
+            <a:off x="4978400" y="3969705"/>
             <a:ext cx="0" cy="1379383"/>
           </a:xfrm>
           <a:prstGeom prst="line">
@@ -6458,7 +6188,7 @@
         </p:nvCxnSpPr>
         <p:spPr>
           <a:xfrm>
-            <a:off x="9499600" y="3204644"/>
+            <a:off x="9499600" y="3204646"/>
             <a:ext cx="0" cy="2118913"/>
           </a:xfrm>
           <a:prstGeom prst="line">
@@ -6534,7 +6264,7 @@
         </p:nvCxnSpPr>
         <p:spPr>
           <a:xfrm>
-            <a:off x="11442700" y="5349086"/>
+            <a:off x="12966700" y="5349086"/>
             <a:ext cx="0" cy="506632"/>
           </a:xfrm>
           <a:prstGeom prst="line">
@@ -6606,7 +6336,7 @@
         </p:nvSpPr>
         <p:spPr>
           <a:xfrm>
-            <a:off x="3581465" y="558800"/>
+            <a:off x="3581467" y="558802"/>
             <a:ext cx="5029069" cy="1200329"/>
           </a:xfrm>
           <a:prstGeom prst="rect">
@@ -6872,7 +6602,7 @@
         </p:blipFill>
         <p:spPr bwMode="auto">
           <a:xfrm>
-            <a:off x="7900989" y="2044329"/>
+            <a:off x="7900989" y="2044331"/>
             <a:ext cx="3040062" cy="2769341"/>
           </a:xfrm>
           <a:prstGeom prst="rect">
@@ -6940,7 +6670,7 @@
         </p:nvSpPr>
         <p:spPr>
           <a:xfrm>
-            <a:off x="3581465" y="558800"/>
+            <a:off x="3581467" y="558802"/>
             <a:ext cx="5029069" cy="1200329"/>
           </a:xfrm>
           <a:prstGeom prst="rect">
@@ -7274,7 +7004,7 @@
         </p:nvSpPr>
         <p:spPr>
           <a:xfrm>
-            <a:off x="984251" y="2440543"/>
+            <a:off x="984251" y="2440545"/>
             <a:ext cx="4845050" cy="1431161"/>
           </a:xfrm>
           <a:prstGeom prst="rect">
@@ -7421,7 +7151,7 @@
         </p:blipFill>
         <p:spPr bwMode="auto">
           <a:xfrm>
-            <a:off x="9690100" y="5276060"/>
+            <a:off x="9690102" y="5276060"/>
             <a:ext cx="552449" cy="603386"/>
           </a:xfrm>
           <a:prstGeom prst="rect">
@@ -7453,7 +7183,7 @@
         </p:nvSpPr>
         <p:spPr>
           <a:xfrm>
-            <a:off x="4456806" y="5648613"/>
+            <a:off x="4456806" y="5648615"/>
             <a:ext cx="4667876" cy="461665"/>
           </a:xfrm>
           <a:prstGeom prst="rect">
@@ -7934,7 +7664,7 @@
         </p:nvSpPr>
         <p:spPr>
           <a:xfrm>
-            <a:off x="2413000" y="2527300"/>
+            <a:off x="2413002" y="2527302"/>
             <a:ext cx="7980711" cy="1200329"/>
           </a:xfrm>
           <a:prstGeom prst="rect">

--- a/scicom/skeleton_presentation.pptx
+++ b/scicom/skeleton_presentation.pptx
@@ -5,7 +5,7 @@
     <p:sldMasterId id="2147483672" r:id="rId1"/>
   </p:sldMasterIdLst>
   <p:notesMasterIdLst>
-    <p:notesMasterId r:id="rId16"/>
+    <p:notesMasterId r:id="rId19"/>
   </p:notesMasterIdLst>
   <p:sldIdLst>
     <p:sldId id="256" r:id="rId2"/>
@@ -20,8 +20,11 @@
     <p:sldId id="264" r:id="rId11"/>
     <p:sldId id="265" r:id="rId12"/>
     <p:sldId id="266" r:id="rId13"/>
-    <p:sldId id="267" r:id="rId14"/>
-    <p:sldId id="268" r:id="rId15"/>
+    <p:sldId id="274" r:id="rId14"/>
+    <p:sldId id="275" r:id="rId15"/>
+    <p:sldId id="276" r:id="rId16"/>
+    <p:sldId id="267" r:id="rId17"/>
+    <p:sldId id="268" r:id="rId18"/>
   </p:sldIdLst>
   <p:sldSz cx="12192000" cy="6858000"/>
   <p:notesSz cx="6858000" cy="9144000"/>
@@ -210,7 +213,7 @@
           <a:p>
             <a:fld id="{D45AE30C-70B0-42A3-87DE-9CC4A3E6D756}" type="datetimeFigureOut">
               <a:rPr lang="de-DE" smtClean="0"/>
-              <a:t>21.05.2026</a:t>
+              <a:t>22.05.2026</a:t>
             </a:fld>
             <a:endParaRPr lang="de-DE"/>
           </a:p>
@@ -606,7 +609,7 @@
       </p:sp>
       <p:sp>
         <p:nvSpPr>
-          <p:cNvPr id="11" name="Freihandform: Form 10">
+          <p:cNvPr id="11" name="Bildplatzhalter 10">
             <a:extLst>
               <a:ext uri="{FF2B5EF4-FFF2-40B4-BE49-F238E27FC236}">
                 <a16:creationId xmlns:a16="http://schemas.microsoft.com/office/drawing/2014/main" id="{0BE99575-E147-F93F-806D-EFBBEA19C613}"/>
@@ -2966,42 +2969,6 @@
       </p:sp>
       <p:sp>
         <p:nvSpPr>
-          <p:cNvPr id="4" name="Fußzeilenplatzhalter 3">
-            <a:extLst>
-              <a:ext uri="{FF2B5EF4-FFF2-40B4-BE49-F238E27FC236}">
-                <a16:creationId xmlns:a16="http://schemas.microsoft.com/office/drawing/2014/main" id="{E0C68328-73DA-E0F1-F32F-FA77A9035546}"/>
-              </a:ext>
-            </a:extLst>
-          </p:cNvPr>
-          <p:cNvSpPr>
-            <a:spLocks noGrp="1"/>
-          </p:cNvSpPr>
-          <p:nvPr>
-            <p:ph type="ftr" sz="quarter" idx="4294967295"/>
-          </p:nvPr>
-        </p:nvSpPr>
-        <p:spPr>
-          <a:xfrm>
-            <a:off x="4038600" y="6356350"/>
-            <a:ext cx="4114800" cy="365125"/>
-          </a:xfrm>
-          <a:prstGeom prst="rect">
-            <a:avLst/>
-          </a:prstGeom>
-        </p:spPr>
-        <p:txBody>
-          <a:bodyPr/>
-          <a:lstStyle/>
-          <a:p>
-            <a:r>
-              <a:rPr lang="de-DE"/>
-              <a:t>Dr. Jana Dahlmanns – Jana.Dahlmanns@fau.de</a:t>
-            </a:r>
-          </a:p>
-        </p:txBody>
-      </p:sp>
-      <p:sp>
-        <p:nvSpPr>
           <p:cNvPr id="5" name="Foliennummernplatzhalter 4">
             <a:extLst>
               <a:ext uri="{FF2B5EF4-FFF2-40B4-BE49-F238E27FC236}">
@@ -3048,6 +3015,1716 @@
 </file>
 
 <file path=ppt/slides/slide13.xml><?xml version="1.0" encoding="utf-8"?>
+<p:sld xmlns:a="http://schemas.openxmlformats.org/drawingml/2006/main" xmlns:r="http://schemas.openxmlformats.org/officeDocument/2006/relationships" xmlns:p="http://schemas.openxmlformats.org/presentationml/2006/main">
+  <p:cSld>
+    <p:spTree>
+      <p:nvGrpSpPr>
+        <p:cNvPr id="1" name=""/>
+        <p:cNvGrpSpPr/>
+        <p:nvPr/>
+      </p:nvGrpSpPr>
+      <p:grpSpPr>
+        <a:xfrm>
+          <a:off x="0" y="0"/>
+          <a:ext cx="0" cy="0"/>
+          <a:chOff x="0" y="0"/>
+          <a:chExt cx="0" cy="0"/>
+        </a:xfrm>
+      </p:grpSpPr>
+      <p:sp>
+        <p:nvSpPr>
+          <p:cNvPr id="2" name="Freihandform: Form 1">
+            <a:extLst>
+              <a:ext uri="{FF2B5EF4-FFF2-40B4-BE49-F238E27FC236}">
+                <a16:creationId xmlns:a16="http://schemas.microsoft.com/office/drawing/2014/main" id="{80F24036-86EB-92D8-75F6-99D5EE080D6F}"/>
+              </a:ext>
+            </a:extLst>
+          </p:cNvPr>
+          <p:cNvSpPr/>
+          <p:nvPr/>
+        </p:nvSpPr>
+        <p:spPr>
+          <a:xfrm flipH="1">
+            <a:off x="8657661" y="-2930196"/>
+            <a:ext cx="6300782" cy="3481390"/>
+          </a:xfrm>
+          <a:custGeom>
+            <a:avLst/>
+            <a:gdLst>
+              <a:gd name="csX0" fmla="*/ 0 w 6300782"/>
+              <a:gd name="csY0" fmla="*/ 0 h 3481390"/>
+              <a:gd name="csX1" fmla="*/ 4560087 w 6300782"/>
+              <a:gd name="csY1" fmla="*/ 0 h 3481390"/>
+              <a:gd name="csX2" fmla="*/ 4562473 w 6300782"/>
+              <a:gd name="csY2" fmla="*/ 0 h 3481390"/>
+              <a:gd name="csX3" fmla="*/ 4562473 w 6300782"/>
+              <a:gd name="csY3" fmla="*/ 121 h 3481390"/>
+              <a:gd name="csX4" fmla="*/ 4738063 w 6300782"/>
+              <a:gd name="csY4" fmla="*/ 8987 h 3481390"/>
+              <a:gd name="csX5" fmla="*/ 6300782 w 6300782"/>
+              <a:gd name="csY5" fmla="*/ 1740695 h 3481390"/>
+              <a:gd name="csX6" fmla="*/ 4738063 w 6300782"/>
+              <a:gd name="csY6" fmla="*/ 3472403 h 3481390"/>
+              <a:gd name="csX7" fmla="*/ 4562473 w 6300782"/>
+              <a:gd name="csY7" fmla="*/ 3481270 h 3481390"/>
+              <a:gd name="csX8" fmla="*/ 4562473 w 6300782"/>
+              <a:gd name="csY8" fmla="*/ 3481390 h 3481390"/>
+              <a:gd name="csX9" fmla="*/ 4560087 w 6300782"/>
+              <a:gd name="csY9" fmla="*/ 3481390 h 3481390"/>
+              <a:gd name="csX10" fmla="*/ 0 w 6300782"/>
+              <a:gd name="csY10" fmla="*/ 3481390 h 3481390"/>
+            </a:gdLst>
+            <a:ahLst/>
+            <a:cxnLst>
+              <a:cxn ang="0">
+                <a:pos x="csX0" y="csY0"/>
+              </a:cxn>
+              <a:cxn ang="0">
+                <a:pos x="csX1" y="csY1"/>
+              </a:cxn>
+              <a:cxn ang="0">
+                <a:pos x="csX2" y="csY2"/>
+              </a:cxn>
+              <a:cxn ang="0">
+                <a:pos x="csX3" y="csY3"/>
+              </a:cxn>
+              <a:cxn ang="0">
+                <a:pos x="csX4" y="csY4"/>
+              </a:cxn>
+              <a:cxn ang="0">
+                <a:pos x="csX5" y="csY5"/>
+              </a:cxn>
+              <a:cxn ang="0">
+                <a:pos x="csX6" y="csY6"/>
+              </a:cxn>
+              <a:cxn ang="0">
+                <a:pos x="csX7" y="csY7"/>
+              </a:cxn>
+              <a:cxn ang="0">
+                <a:pos x="csX8" y="csY8"/>
+              </a:cxn>
+              <a:cxn ang="0">
+                <a:pos x="csX9" y="csY9"/>
+              </a:cxn>
+              <a:cxn ang="0">
+                <a:pos x="csX10" y="csY10"/>
+              </a:cxn>
+            </a:cxnLst>
+            <a:rect l="l" t="t" r="r" b="b"/>
+            <a:pathLst>
+              <a:path w="6300782" h="3481390">
+                <a:moveTo>
+                  <a:pt x="0" y="0"/>
+                </a:moveTo>
+                <a:lnTo>
+                  <a:pt x="4560087" y="0"/>
+                </a:lnTo>
+                <a:lnTo>
+                  <a:pt x="4562473" y="0"/>
+                </a:lnTo>
+                <a:lnTo>
+                  <a:pt x="4562473" y="121"/>
+                </a:lnTo>
+                <a:lnTo>
+                  <a:pt x="4738063" y="8987"/>
+                </a:lnTo>
+                <a:cubicBezTo>
+                  <a:pt x="5615819" y="98128"/>
+                  <a:pt x="6300782" y="839421"/>
+                  <a:pt x="6300782" y="1740695"/>
+                </a:cubicBezTo>
+                <a:cubicBezTo>
+                  <a:pt x="6300782" y="2641969"/>
+                  <a:pt x="5615819" y="3383262"/>
+                  <a:pt x="4738063" y="3472403"/>
+                </a:cubicBezTo>
+                <a:lnTo>
+                  <a:pt x="4562473" y="3481270"/>
+                </a:lnTo>
+                <a:lnTo>
+                  <a:pt x="4562473" y="3481390"/>
+                </a:lnTo>
+                <a:lnTo>
+                  <a:pt x="4560087" y="3481390"/>
+                </a:lnTo>
+                <a:lnTo>
+                  <a:pt x="0" y="3481390"/>
+                </a:lnTo>
+                <a:close/>
+              </a:path>
+            </a:pathLst>
+          </a:custGeom>
+          <a:solidFill>
+            <a:srgbClr val="E3E9EA"/>
+          </a:solidFill>
+          <a:ln>
+            <a:noFill/>
+          </a:ln>
+        </p:spPr>
+        <p:style>
+          <a:lnRef idx="2">
+            <a:schemeClr val="accent1">
+              <a:shade val="15000"/>
+            </a:schemeClr>
+          </a:lnRef>
+          <a:fillRef idx="1">
+            <a:schemeClr val="accent1"/>
+          </a:fillRef>
+          <a:effectRef idx="0">
+            <a:schemeClr val="accent1"/>
+          </a:effectRef>
+          <a:fontRef idx="minor">
+            <a:schemeClr val="lt1"/>
+          </a:fontRef>
+        </p:style>
+        <p:txBody>
+          <a:bodyPr lIns="0" tIns="0" rIns="0" bIns="0" rtlCol="0" anchor="ctr"/>
+          <a:lstStyle/>
+          <a:p>
+            <a:pPr algn="ctr"/>
+            <a:endParaRPr lang="de-DE" sz="1600" b="1">
+              <a:solidFill>
+                <a:schemeClr val="tx1"/>
+              </a:solidFill>
+            </a:endParaRPr>
+          </a:p>
+        </p:txBody>
+      </p:sp>
+      <p:sp>
+        <p:nvSpPr>
+          <p:cNvPr id="3" name="Textfeld 2">
+            <a:extLst>
+              <a:ext uri="{FF2B5EF4-FFF2-40B4-BE49-F238E27FC236}">
+                <a16:creationId xmlns:a16="http://schemas.microsoft.com/office/drawing/2014/main" id="{0A253A0D-1AD4-85BB-B175-E77C4442F053}"/>
+              </a:ext>
+            </a:extLst>
+          </p:cNvPr>
+          <p:cNvSpPr txBox="1"/>
+          <p:nvPr/>
+        </p:nvSpPr>
+        <p:spPr>
+          <a:xfrm>
+            <a:off x="10287922" y="153126"/>
+            <a:ext cx="1904078" cy="461665"/>
+          </a:xfrm>
+          <a:prstGeom prst="rect">
+            <a:avLst/>
+          </a:prstGeom>
+          <a:noFill/>
+        </p:spPr>
+        <p:txBody>
+          <a:bodyPr wrap="square" rtlCol="0">
+            <a:spAutoFit/>
+          </a:bodyPr>
+          <a:lstStyle/>
+          <a:p>
+            <a:pPr algn="ctr"/>
+            <a:r>
+              <a:rPr lang="de-DE" sz="2400" dirty="0">
+                <a:solidFill>
+                  <a:srgbClr val="00336E"/>
+                </a:solidFill>
+                <a:ea typeface="Cormorant Garamond" pitchFamily="2" charset="0"/>
+                <a:cs typeface="Cormorant Garamond" pitchFamily="2" charset="0"/>
+              </a:rPr>
+              <a:t>First </a:t>
+            </a:r>
+            <a:r>
+              <a:rPr lang="de-DE" sz="2400" dirty="0" err="1">
+                <a:solidFill>
+                  <a:srgbClr val="00336E"/>
+                </a:solidFill>
+                <a:ea typeface="Cormorant Garamond" pitchFamily="2" charset="0"/>
+                <a:cs typeface="Cormorant Garamond" pitchFamily="2" charset="0"/>
+              </a:rPr>
+              <a:t>results</a:t>
+            </a:r>
+            <a:endParaRPr lang="de-DE" sz="2400" b="1" dirty="0">
+              <a:solidFill>
+                <a:srgbClr val="00336E"/>
+              </a:solidFill>
+              <a:ea typeface="Cormorant Garamond" pitchFamily="2" charset="0"/>
+              <a:cs typeface="Cormorant Garamond" pitchFamily="2" charset="0"/>
+            </a:endParaRPr>
+          </a:p>
+        </p:txBody>
+      </p:sp>
+      <p:pic>
+        <p:nvPicPr>
+          <p:cNvPr id="5" name="Grafik 4">
+            <a:extLst>
+              <a:ext uri="{FF2B5EF4-FFF2-40B4-BE49-F238E27FC236}">
+                <a16:creationId xmlns:a16="http://schemas.microsoft.com/office/drawing/2014/main" id="{E1D48006-8B7F-A500-8300-9AA2D1B461A6}"/>
+              </a:ext>
+            </a:extLst>
+          </p:cNvPr>
+          <p:cNvPicPr>
+            <a:picLocks noChangeAspect="1"/>
+          </p:cNvPicPr>
+          <p:nvPr/>
+        </p:nvPicPr>
+        <p:blipFill>
+          <a:blip r:embed="rId2">
+            <a:extLst>
+              <a:ext uri="{28A0092B-C50C-407E-A947-70E740481C1C}">
+                <a14:useLocalDpi xmlns:a14="http://schemas.microsoft.com/office/drawing/2010/main" val="0"/>
+              </a:ext>
+            </a:extLst>
+          </a:blip>
+          <a:stretch>
+            <a:fillRect/>
+          </a:stretch>
+        </p:blipFill>
+        <p:spPr>
+          <a:xfrm>
+            <a:off x="1545536" y="745367"/>
+            <a:ext cx="9100927" cy="4494284"/>
+          </a:xfrm>
+          <a:prstGeom prst="rect">
+            <a:avLst/>
+          </a:prstGeom>
+        </p:spPr>
+      </p:pic>
+      <p:sp>
+        <p:nvSpPr>
+          <p:cNvPr id="7" name="Textfeld 6">
+            <a:extLst>
+              <a:ext uri="{FF2B5EF4-FFF2-40B4-BE49-F238E27FC236}">
+                <a16:creationId xmlns:a16="http://schemas.microsoft.com/office/drawing/2014/main" id="{1B6950D7-4A94-4227-75D2-A44BA0FB54EA}"/>
+              </a:ext>
+            </a:extLst>
+          </p:cNvPr>
+          <p:cNvSpPr txBox="1"/>
+          <p:nvPr/>
+        </p:nvSpPr>
+        <p:spPr>
+          <a:xfrm>
+            <a:off x="3119757" y="5239651"/>
+            <a:ext cx="8120204" cy="1149097"/>
+          </a:xfrm>
+          <a:prstGeom prst="rect">
+            <a:avLst/>
+          </a:prstGeom>
+          <a:noFill/>
+        </p:spPr>
+        <p:txBody>
+          <a:bodyPr wrap="square">
+            <a:spAutoFit/>
+          </a:bodyPr>
+          <a:lstStyle/>
+          <a:p>
+            <a:pPr>
+              <a:lnSpc>
+                <a:spcPct val="115000"/>
+              </a:lnSpc>
+              <a:spcAft>
+                <a:spcPts val="1000"/>
+              </a:spcAft>
+              <a:buNone/>
+            </a:pPr>
+            <a:r>
+              <a:rPr lang="en-US" sz="1800" dirty="0">
+                <a:effectLst/>
+                <a:ea typeface="MS Mincho" panose="02020609040205080304" pitchFamily="49" charset="-128"/>
+                <a:cs typeface="Times New Roman" panose="02020603050405020304" pitchFamily="18" charset="0"/>
+              </a:rPr>
+              <a:t>EA evolved from random network initialization. Population size = 250, elite = 10</a:t>
+            </a:r>
+            <a:endParaRPr lang="en-US" dirty="0">
+              <a:ea typeface="MS Mincho" panose="02020609040205080304" pitchFamily="49" charset="-128"/>
+              <a:cs typeface="Times New Roman" panose="02020603050405020304" pitchFamily="18" charset="0"/>
+            </a:endParaRPr>
+          </a:p>
+          <a:p>
+            <a:pPr>
+              <a:lnSpc>
+                <a:spcPct val="115000"/>
+              </a:lnSpc>
+              <a:spcAft>
+                <a:spcPts val="1000"/>
+              </a:spcAft>
+              <a:buNone/>
+            </a:pPr>
+            <a:r>
+              <a:rPr lang="en-US" sz="1800" dirty="0">
+                <a:effectLst/>
+                <a:ea typeface="MS Mincho" panose="02020609040205080304" pitchFamily="49" charset="-128"/>
+                <a:cs typeface="Times New Roman" panose="02020603050405020304" pitchFamily="18" charset="0"/>
+              </a:rPr>
+              <a:t>In generation 0:	mean = 19.5,	median = 19.2,	max = 29.7</a:t>
+            </a:r>
+            <a:br>
+              <a:rPr lang="en-US" sz="1800" dirty="0">
+                <a:effectLst/>
+                <a:ea typeface="MS Mincho" panose="02020609040205080304" pitchFamily="49" charset="-128"/>
+                <a:cs typeface="Times New Roman" panose="02020603050405020304" pitchFamily="18" charset="0"/>
+              </a:rPr>
+            </a:br>
+            <a:r>
+              <a:rPr lang="en-US" sz="1800" dirty="0">
+                <a:effectLst/>
+                <a:ea typeface="MS Mincho" panose="02020609040205080304" pitchFamily="49" charset="-128"/>
+                <a:cs typeface="Times New Roman" panose="02020603050405020304" pitchFamily="18" charset="0"/>
+              </a:rPr>
+              <a:t>In generation 50:	mean = 69.0,	median = 74.22,	max = 131.59</a:t>
+            </a:r>
+            <a:endParaRPr lang="de-DE" sz="1800" dirty="0">
+              <a:effectLst/>
+              <a:ea typeface="MS Mincho" panose="02020609040205080304" pitchFamily="49" charset="-128"/>
+              <a:cs typeface="Times New Roman" panose="02020603050405020304" pitchFamily="18" charset="0"/>
+            </a:endParaRPr>
+          </a:p>
+        </p:txBody>
+      </p:sp>
+    </p:spTree>
+    <p:extLst>
+      <p:ext uri="{BB962C8B-B14F-4D97-AF65-F5344CB8AC3E}">
+        <p14:creationId xmlns:p14="http://schemas.microsoft.com/office/powerpoint/2010/main" val="487920200"/>
+      </p:ext>
+    </p:extLst>
+  </p:cSld>
+  <p:clrMapOvr>
+    <a:masterClrMapping/>
+  </p:clrMapOvr>
+</p:sld>
+</file>
+
+<file path=ppt/slides/slide14.xml><?xml version="1.0" encoding="utf-8"?>
+<p:sld xmlns:a="http://schemas.openxmlformats.org/drawingml/2006/main" xmlns:r="http://schemas.openxmlformats.org/officeDocument/2006/relationships" xmlns:p="http://schemas.openxmlformats.org/presentationml/2006/main">
+  <p:cSld>
+    <p:spTree>
+      <p:nvGrpSpPr>
+        <p:cNvPr id="1" name="">
+          <a:extLst>
+            <a:ext uri="{FF2B5EF4-FFF2-40B4-BE49-F238E27FC236}">
+              <a16:creationId xmlns:a16="http://schemas.microsoft.com/office/drawing/2014/main" id="{A8994726-CD7B-F7EB-CA98-E91B156BA6E0}"/>
+            </a:ext>
+          </a:extLst>
+        </p:cNvPr>
+        <p:cNvGrpSpPr/>
+        <p:nvPr/>
+      </p:nvGrpSpPr>
+      <p:grpSpPr>
+        <a:xfrm>
+          <a:off x="0" y="0"/>
+          <a:ext cx="0" cy="0"/>
+          <a:chOff x="0" y="0"/>
+          <a:chExt cx="0" cy="0"/>
+        </a:xfrm>
+      </p:grpSpPr>
+      <p:sp>
+        <p:nvSpPr>
+          <p:cNvPr id="2" name="Freihandform: Form 1">
+            <a:extLst>
+              <a:ext uri="{FF2B5EF4-FFF2-40B4-BE49-F238E27FC236}">
+                <a16:creationId xmlns:a16="http://schemas.microsoft.com/office/drawing/2014/main" id="{52F93A49-5049-7E4C-7F4F-9C5919C4B5A5}"/>
+              </a:ext>
+            </a:extLst>
+          </p:cNvPr>
+          <p:cNvSpPr/>
+          <p:nvPr/>
+        </p:nvSpPr>
+        <p:spPr>
+          <a:xfrm flipH="1">
+            <a:off x="8657661" y="-2930196"/>
+            <a:ext cx="6300782" cy="3481390"/>
+          </a:xfrm>
+          <a:custGeom>
+            <a:avLst/>
+            <a:gdLst>
+              <a:gd name="csX0" fmla="*/ 0 w 6300782"/>
+              <a:gd name="csY0" fmla="*/ 0 h 3481390"/>
+              <a:gd name="csX1" fmla="*/ 4560087 w 6300782"/>
+              <a:gd name="csY1" fmla="*/ 0 h 3481390"/>
+              <a:gd name="csX2" fmla="*/ 4562473 w 6300782"/>
+              <a:gd name="csY2" fmla="*/ 0 h 3481390"/>
+              <a:gd name="csX3" fmla="*/ 4562473 w 6300782"/>
+              <a:gd name="csY3" fmla="*/ 121 h 3481390"/>
+              <a:gd name="csX4" fmla="*/ 4738063 w 6300782"/>
+              <a:gd name="csY4" fmla="*/ 8987 h 3481390"/>
+              <a:gd name="csX5" fmla="*/ 6300782 w 6300782"/>
+              <a:gd name="csY5" fmla="*/ 1740695 h 3481390"/>
+              <a:gd name="csX6" fmla="*/ 4738063 w 6300782"/>
+              <a:gd name="csY6" fmla="*/ 3472403 h 3481390"/>
+              <a:gd name="csX7" fmla="*/ 4562473 w 6300782"/>
+              <a:gd name="csY7" fmla="*/ 3481270 h 3481390"/>
+              <a:gd name="csX8" fmla="*/ 4562473 w 6300782"/>
+              <a:gd name="csY8" fmla="*/ 3481390 h 3481390"/>
+              <a:gd name="csX9" fmla="*/ 4560087 w 6300782"/>
+              <a:gd name="csY9" fmla="*/ 3481390 h 3481390"/>
+              <a:gd name="csX10" fmla="*/ 0 w 6300782"/>
+              <a:gd name="csY10" fmla="*/ 3481390 h 3481390"/>
+            </a:gdLst>
+            <a:ahLst/>
+            <a:cxnLst>
+              <a:cxn ang="0">
+                <a:pos x="csX0" y="csY0"/>
+              </a:cxn>
+              <a:cxn ang="0">
+                <a:pos x="csX1" y="csY1"/>
+              </a:cxn>
+              <a:cxn ang="0">
+                <a:pos x="csX2" y="csY2"/>
+              </a:cxn>
+              <a:cxn ang="0">
+                <a:pos x="csX3" y="csY3"/>
+              </a:cxn>
+              <a:cxn ang="0">
+                <a:pos x="csX4" y="csY4"/>
+              </a:cxn>
+              <a:cxn ang="0">
+                <a:pos x="csX5" y="csY5"/>
+              </a:cxn>
+              <a:cxn ang="0">
+                <a:pos x="csX6" y="csY6"/>
+              </a:cxn>
+              <a:cxn ang="0">
+                <a:pos x="csX7" y="csY7"/>
+              </a:cxn>
+              <a:cxn ang="0">
+                <a:pos x="csX8" y="csY8"/>
+              </a:cxn>
+              <a:cxn ang="0">
+                <a:pos x="csX9" y="csY9"/>
+              </a:cxn>
+              <a:cxn ang="0">
+                <a:pos x="csX10" y="csY10"/>
+              </a:cxn>
+            </a:cxnLst>
+            <a:rect l="l" t="t" r="r" b="b"/>
+            <a:pathLst>
+              <a:path w="6300782" h="3481390">
+                <a:moveTo>
+                  <a:pt x="0" y="0"/>
+                </a:moveTo>
+                <a:lnTo>
+                  <a:pt x="4560087" y="0"/>
+                </a:lnTo>
+                <a:lnTo>
+                  <a:pt x="4562473" y="0"/>
+                </a:lnTo>
+                <a:lnTo>
+                  <a:pt x="4562473" y="121"/>
+                </a:lnTo>
+                <a:lnTo>
+                  <a:pt x="4738063" y="8987"/>
+                </a:lnTo>
+                <a:cubicBezTo>
+                  <a:pt x="5615819" y="98128"/>
+                  <a:pt x="6300782" y="839421"/>
+                  <a:pt x="6300782" y="1740695"/>
+                </a:cubicBezTo>
+                <a:cubicBezTo>
+                  <a:pt x="6300782" y="2641969"/>
+                  <a:pt x="5615819" y="3383262"/>
+                  <a:pt x="4738063" y="3472403"/>
+                </a:cubicBezTo>
+                <a:lnTo>
+                  <a:pt x="4562473" y="3481270"/>
+                </a:lnTo>
+                <a:lnTo>
+                  <a:pt x="4562473" y="3481390"/>
+                </a:lnTo>
+                <a:lnTo>
+                  <a:pt x="4560087" y="3481390"/>
+                </a:lnTo>
+                <a:lnTo>
+                  <a:pt x="0" y="3481390"/>
+                </a:lnTo>
+                <a:close/>
+              </a:path>
+            </a:pathLst>
+          </a:custGeom>
+          <a:solidFill>
+            <a:srgbClr val="E3E9EA"/>
+          </a:solidFill>
+          <a:ln>
+            <a:noFill/>
+          </a:ln>
+        </p:spPr>
+        <p:style>
+          <a:lnRef idx="2">
+            <a:schemeClr val="accent1">
+              <a:shade val="15000"/>
+            </a:schemeClr>
+          </a:lnRef>
+          <a:fillRef idx="1">
+            <a:schemeClr val="accent1"/>
+          </a:fillRef>
+          <a:effectRef idx="0">
+            <a:schemeClr val="accent1"/>
+          </a:effectRef>
+          <a:fontRef idx="minor">
+            <a:schemeClr val="lt1"/>
+          </a:fontRef>
+        </p:style>
+        <p:txBody>
+          <a:bodyPr lIns="0" tIns="0" rIns="0" bIns="0" rtlCol="0" anchor="ctr"/>
+          <a:lstStyle/>
+          <a:p>
+            <a:pPr algn="ctr"/>
+            <a:endParaRPr lang="de-DE" sz="1600" b="1">
+              <a:solidFill>
+                <a:schemeClr val="tx1"/>
+              </a:solidFill>
+            </a:endParaRPr>
+          </a:p>
+        </p:txBody>
+      </p:sp>
+      <p:sp>
+        <p:nvSpPr>
+          <p:cNvPr id="3" name="Textfeld 2">
+            <a:extLst>
+              <a:ext uri="{FF2B5EF4-FFF2-40B4-BE49-F238E27FC236}">
+                <a16:creationId xmlns:a16="http://schemas.microsoft.com/office/drawing/2014/main" id="{8D75CC9B-9E4B-B18B-A128-5BA123A97C84}"/>
+              </a:ext>
+            </a:extLst>
+          </p:cNvPr>
+          <p:cNvSpPr txBox="1"/>
+          <p:nvPr/>
+        </p:nvSpPr>
+        <p:spPr>
+          <a:xfrm>
+            <a:off x="10287922" y="153126"/>
+            <a:ext cx="1904078" cy="461665"/>
+          </a:xfrm>
+          <a:prstGeom prst="rect">
+            <a:avLst/>
+          </a:prstGeom>
+          <a:noFill/>
+        </p:spPr>
+        <p:txBody>
+          <a:bodyPr wrap="square" rtlCol="0">
+            <a:spAutoFit/>
+          </a:bodyPr>
+          <a:lstStyle/>
+          <a:p>
+            <a:pPr algn="ctr"/>
+            <a:r>
+              <a:rPr lang="de-DE" sz="2400" dirty="0">
+                <a:solidFill>
+                  <a:srgbClr val="00336E"/>
+                </a:solidFill>
+                <a:ea typeface="Cormorant Garamond" pitchFamily="2" charset="0"/>
+                <a:cs typeface="Cormorant Garamond" pitchFamily="2" charset="0"/>
+              </a:rPr>
+              <a:t>First </a:t>
+            </a:r>
+            <a:r>
+              <a:rPr lang="de-DE" sz="2400" dirty="0" err="1">
+                <a:solidFill>
+                  <a:srgbClr val="00336E"/>
+                </a:solidFill>
+                <a:ea typeface="Cormorant Garamond" pitchFamily="2" charset="0"/>
+                <a:cs typeface="Cormorant Garamond" pitchFamily="2" charset="0"/>
+              </a:rPr>
+              <a:t>results</a:t>
+            </a:r>
+            <a:endParaRPr lang="de-DE" sz="2400" b="1" dirty="0">
+              <a:solidFill>
+                <a:srgbClr val="00336E"/>
+              </a:solidFill>
+              <a:ea typeface="Cormorant Garamond" pitchFamily="2" charset="0"/>
+              <a:cs typeface="Cormorant Garamond" pitchFamily="2" charset="0"/>
+            </a:endParaRPr>
+          </a:p>
+        </p:txBody>
+      </p:sp>
+      <p:sp>
+        <p:nvSpPr>
+          <p:cNvPr id="7" name="Textfeld 6">
+            <a:extLst>
+              <a:ext uri="{FF2B5EF4-FFF2-40B4-BE49-F238E27FC236}">
+                <a16:creationId xmlns:a16="http://schemas.microsoft.com/office/drawing/2014/main" id="{462CA17C-D3A2-BD63-7ACB-E8ABDA6D8657}"/>
+              </a:ext>
+            </a:extLst>
+          </p:cNvPr>
+          <p:cNvSpPr txBox="1"/>
+          <p:nvPr/>
+        </p:nvSpPr>
+        <p:spPr>
+          <a:xfrm>
+            <a:off x="304129" y="957362"/>
+            <a:ext cx="5674176" cy="2179315"/>
+          </a:xfrm>
+          <a:prstGeom prst="rect">
+            <a:avLst/>
+          </a:prstGeom>
+          <a:noFill/>
+        </p:spPr>
+        <p:txBody>
+          <a:bodyPr wrap="square">
+            <a:spAutoFit/>
+          </a:bodyPr>
+          <a:lstStyle/>
+          <a:p>
+            <a:pPr>
+              <a:lnSpc>
+                <a:spcPct val="115000"/>
+              </a:lnSpc>
+              <a:spcAft>
+                <a:spcPts val="1000"/>
+              </a:spcAft>
+              <a:buNone/>
+            </a:pPr>
+            <a:r>
+              <a:rPr lang="en-US" sz="1800" dirty="0">
+                <a:effectLst/>
+                <a:ea typeface="MS Mincho" panose="02020609040205080304" pitchFamily="49" charset="-128"/>
+                <a:cs typeface="Times New Roman" panose="02020603050405020304" pitchFamily="18" charset="0"/>
+              </a:rPr>
+              <a:t>Optimal solution?</a:t>
+            </a:r>
+          </a:p>
+          <a:p>
+            <a:pPr>
+              <a:lnSpc>
+                <a:spcPct val="115000"/>
+              </a:lnSpc>
+              <a:spcAft>
+                <a:spcPts val="1000"/>
+              </a:spcAft>
+              <a:buNone/>
+            </a:pPr>
+            <a:endParaRPr lang="en-US" dirty="0">
+              <a:ea typeface="MS Mincho" panose="02020609040205080304" pitchFamily="49" charset="-128"/>
+              <a:cs typeface="Times New Roman" panose="02020603050405020304" pitchFamily="18" charset="0"/>
+            </a:endParaRPr>
+          </a:p>
+          <a:p>
+            <a:pPr>
+              <a:lnSpc>
+                <a:spcPct val="115000"/>
+              </a:lnSpc>
+              <a:spcAft>
+                <a:spcPts val="1000"/>
+              </a:spcAft>
+              <a:buNone/>
+            </a:pPr>
+            <a:r>
+              <a:rPr lang="en-US" sz="1800" dirty="0">
+                <a:effectLst/>
+                <a:ea typeface="MS Mincho" panose="02020609040205080304" pitchFamily="49" charset="-128"/>
+                <a:cs typeface="Times New Roman" panose="02020603050405020304" pitchFamily="18" charset="0"/>
+              </a:rPr>
+              <a:t>If on food → stay and eat</a:t>
+            </a:r>
+          </a:p>
+          <a:p>
+            <a:pPr>
+              <a:lnSpc>
+                <a:spcPct val="115000"/>
+              </a:lnSpc>
+              <a:spcAft>
+                <a:spcPts val="1000"/>
+              </a:spcAft>
+              <a:buNone/>
+            </a:pPr>
+            <a:r>
+              <a:rPr lang="en-US" sz="1800" dirty="0">
+                <a:effectLst/>
+                <a:ea typeface="MS Mincho" panose="02020609040205080304" pitchFamily="49" charset="-128"/>
+                <a:cs typeface="Times New Roman" panose="02020603050405020304" pitchFamily="18" charset="0"/>
+              </a:rPr>
+              <a:t>If sensing food in </a:t>
+            </a:r>
+            <a:r>
+              <a:rPr lang="en-US" dirty="0">
+                <a:ea typeface="MS Mincho" panose="02020609040205080304" pitchFamily="49" charset="-128"/>
+                <a:cs typeface="Times New Roman" panose="02020603050405020304" pitchFamily="18" charset="0"/>
+              </a:rPr>
+              <a:t>one direction → move in that direction</a:t>
+            </a:r>
+          </a:p>
+          <a:p>
+            <a:pPr>
+              <a:lnSpc>
+                <a:spcPct val="115000"/>
+              </a:lnSpc>
+              <a:spcAft>
+                <a:spcPts val="1000"/>
+              </a:spcAft>
+              <a:buNone/>
+            </a:pPr>
+            <a:r>
+              <a:rPr lang="en-US" dirty="0">
+                <a:ea typeface="MS Mincho" panose="02020609040205080304" pitchFamily="49" charset="-128"/>
+                <a:cs typeface="Times New Roman" panose="02020603050405020304" pitchFamily="18" charset="0"/>
+              </a:rPr>
+              <a:t>If not sensing any food → move away  </a:t>
+            </a:r>
+            <a:endParaRPr lang="de-DE" sz="1800" dirty="0">
+              <a:effectLst/>
+              <a:ea typeface="MS Mincho" panose="02020609040205080304" pitchFamily="49" charset="-128"/>
+              <a:cs typeface="Times New Roman" panose="02020603050405020304" pitchFamily="18" charset="0"/>
+            </a:endParaRPr>
+          </a:p>
+        </p:txBody>
+      </p:sp>
+      <p:pic>
+        <p:nvPicPr>
+          <p:cNvPr id="9" name="Grafik 8">
+            <a:extLst>
+              <a:ext uri="{FF2B5EF4-FFF2-40B4-BE49-F238E27FC236}">
+                <a16:creationId xmlns:a16="http://schemas.microsoft.com/office/drawing/2014/main" id="{2CDF4BD9-04AD-868F-5E50-A05E5AF09D15}"/>
+              </a:ext>
+            </a:extLst>
+          </p:cNvPr>
+          <p:cNvPicPr>
+            <a:picLocks noChangeAspect="1"/>
+          </p:cNvPicPr>
+          <p:nvPr/>
+        </p:nvPicPr>
+        <p:blipFill>
+          <a:blip r:embed="rId2">
+            <a:extLst>
+              <a:ext uri="{28A0092B-C50C-407E-A947-70E740481C1C}">
+                <a14:useLocalDpi xmlns:a14="http://schemas.microsoft.com/office/drawing/2010/main" val="0"/>
+              </a:ext>
+            </a:extLst>
+          </a:blip>
+          <a:stretch>
+            <a:fillRect/>
+          </a:stretch>
+        </p:blipFill>
+        <p:spPr>
+          <a:xfrm>
+            <a:off x="5978305" y="857873"/>
+            <a:ext cx="5797649" cy="5289430"/>
+          </a:xfrm>
+          <a:prstGeom prst="rect">
+            <a:avLst/>
+          </a:prstGeom>
+        </p:spPr>
+      </p:pic>
+      <p:sp>
+        <p:nvSpPr>
+          <p:cNvPr id="10" name="Textfeld 9">
+            <a:extLst>
+              <a:ext uri="{FF2B5EF4-FFF2-40B4-BE49-F238E27FC236}">
+                <a16:creationId xmlns:a16="http://schemas.microsoft.com/office/drawing/2014/main" id="{3BE16239-1F16-68AE-0F57-A3946EFBB65B}"/>
+              </a:ext>
+            </a:extLst>
+          </p:cNvPr>
+          <p:cNvSpPr txBox="1"/>
+          <p:nvPr/>
+        </p:nvSpPr>
+        <p:spPr>
+          <a:xfrm>
+            <a:off x="6096000" y="5105227"/>
+            <a:ext cx="736099" cy="369332"/>
+          </a:xfrm>
+          <a:prstGeom prst="rect">
+            <a:avLst/>
+          </a:prstGeom>
+          <a:noFill/>
+        </p:spPr>
+        <p:txBody>
+          <a:bodyPr wrap="none" rtlCol="0">
+            <a:spAutoFit/>
+          </a:bodyPr>
+          <a:lstStyle/>
+          <a:p>
+            <a:r>
+              <a:rPr lang="de-DE" dirty="0" err="1">
+                <a:latin typeface="Courier New" panose="02070309020205020404" pitchFamily="49" charset="0"/>
+                <a:cs typeface="Courier New" panose="02070309020205020404" pitchFamily="49" charset="0"/>
+              </a:rPr>
+              <a:t>stay</a:t>
+            </a:r>
+            <a:endParaRPr lang="de-DE" dirty="0">
+              <a:latin typeface="Courier New" panose="02070309020205020404" pitchFamily="49" charset="0"/>
+              <a:cs typeface="Courier New" panose="02070309020205020404" pitchFamily="49" charset="0"/>
+            </a:endParaRPr>
+          </a:p>
+        </p:txBody>
+      </p:sp>
+      <p:sp>
+        <p:nvSpPr>
+          <p:cNvPr id="11" name="Textfeld 10">
+            <a:extLst>
+              <a:ext uri="{FF2B5EF4-FFF2-40B4-BE49-F238E27FC236}">
+                <a16:creationId xmlns:a16="http://schemas.microsoft.com/office/drawing/2014/main" id="{75587D1E-BB4D-2FFE-382F-9A73D4BE4336}"/>
+              </a:ext>
+            </a:extLst>
+          </p:cNvPr>
+          <p:cNvSpPr txBox="1"/>
+          <p:nvPr/>
+        </p:nvSpPr>
+        <p:spPr>
+          <a:xfrm>
+            <a:off x="7161042" y="5105227"/>
+            <a:ext cx="1011815" cy="369332"/>
+          </a:xfrm>
+          <a:prstGeom prst="rect">
+            <a:avLst/>
+          </a:prstGeom>
+          <a:noFill/>
+        </p:spPr>
+        <p:txBody>
+          <a:bodyPr wrap="none" rtlCol="0">
+            <a:spAutoFit/>
+          </a:bodyPr>
+          <a:lstStyle/>
+          <a:p>
+            <a:r>
+              <a:rPr lang="de-DE" dirty="0" err="1">
+                <a:latin typeface="Courier New" panose="02070309020205020404" pitchFamily="49" charset="0"/>
+                <a:cs typeface="Courier New" panose="02070309020205020404" pitchFamily="49" charset="0"/>
+              </a:rPr>
+              <a:t>move</a:t>
+            </a:r>
+            <a:r>
+              <a:rPr lang="de-DE" dirty="0">
+                <a:latin typeface="Courier New" panose="02070309020205020404" pitchFamily="49" charset="0"/>
+                <a:cs typeface="Courier New" panose="02070309020205020404" pitchFamily="49" charset="0"/>
+              </a:rPr>
+              <a:t> N</a:t>
+            </a:r>
+          </a:p>
+        </p:txBody>
+      </p:sp>
+      <p:sp>
+        <p:nvSpPr>
+          <p:cNvPr id="12" name="Textfeld 11">
+            <a:extLst>
+              <a:ext uri="{FF2B5EF4-FFF2-40B4-BE49-F238E27FC236}">
+                <a16:creationId xmlns:a16="http://schemas.microsoft.com/office/drawing/2014/main" id="{ADDA3C6D-4D64-984D-082E-A43517FF916D}"/>
+              </a:ext>
+            </a:extLst>
+          </p:cNvPr>
+          <p:cNvSpPr txBox="1"/>
+          <p:nvPr/>
+        </p:nvSpPr>
+        <p:spPr>
+          <a:xfrm>
+            <a:off x="8381661" y="5105227"/>
+            <a:ext cx="1011815" cy="369332"/>
+          </a:xfrm>
+          <a:prstGeom prst="rect">
+            <a:avLst/>
+          </a:prstGeom>
+          <a:noFill/>
+        </p:spPr>
+        <p:txBody>
+          <a:bodyPr wrap="none" rtlCol="0">
+            <a:spAutoFit/>
+          </a:bodyPr>
+          <a:lstStyle/>
+          <a:p>
+            <a:r>
+              <a:rPr lang="de-DE" dirty="0" err="1">
+                <a:latin typeface="Courier New" panose="02070309020205020404" pitchFamily="49" charset="0"/>
+                <a:cs typeface="Courier New" panose="02070309020205020404" pitchFamily="49" charset="0"/>
+              </a:rPr>
+              <a:t>move</a:t>
+            </a:r>
+            <a:r>
+              <a:rPr lang="de-DE" dirty="0">
+                <a:latin typeface="Courier New" panose="02070309020205020404" pitchFamily="49" charset="0"/>
+                <a:cs typeface="Courier New" panose="02070309020205020404" pitchFamily="49" charset="0"/>
+              </a:rPr>
+              <a:t> E</a:t>
+            </a:r>
+          </a:p>
+        </p:txBody>
+      </p:sp>
+      <p:sp>
+        <p:nvSpPr>
+          <p:cNvPr id="13" name="Textfeld 12">
+            <a:extLst>
+              <a:ext uri="{FF2B5EF4-FFF2-40B4-BE49-F238E27FC236}">
+                <a16:creationId xmlns:a16="http://schemas.microsoft.com/office/drawing/2014/main" id="{97E61C76-8072-88C4-6EBC-CB651B477053}"/>
+              </a:ext>
+            </a:extLst>
+          </p:cNvPr>
+          <p:cNvSpPr txBox="1"/>
+          <p:nvPr/>
+        </p:nvSpPr>
+        <p:spPr>
+          <a:xfrm>
+            <a:off x="9613021" y="5105227"/>
+            <a:ext cx="1011815" cy="369332"/>
+          </a:xfrm>
+          <a:prstGeom prst="rect">
+            <a:avLst/>
+          </a:prstGeom>
+          <a:noFill/>
+        </p:spPr>
+        <p:txBody>
+          <a:bodyPr wrap="none" rtlCol="0">
+            <a:spAutoFit/>
+          </a:bodyPr>
+          <a:lstStyle/>
+          <a:p>
+            <a:r>
+              <a:rPr lang="de-DE" dirty="0" err="1">
+                <a:latin typeface="Courier New" panose="02070309020205020404" pitchFamily="49" charset="0"/>
+                <a:cs typeface="Courier New" panose="02070309020205020404" pitchFamily="49" charset="0"/>
+              </a:rPr>
+              <a:t>move</a:t>
+            </a:r>
+            <a:r>
+              <a:rPr lang="de-DE" dirty="0">
+                <a:latin typeface="Courier New" panose="02070309020205020404" pitchFamily="49" charset="0"/>
+                <a:cs typeface="Courier New" panose="02070309020205020404" pitchFamily="49" charset="0"/>
+              </a:rPr>
+              <a:t> S</a:t>
+            </a:r>
+          </a:p>
+        </p:txBody>
+      </p:sp>
+      <p:sp>
+        <p:nvSpPr>
+          <p:cNvPr id="14" name="Textfeld 13">
+            <a:extLst>
+              <a:ext uri="{FF2B5EF4-FFF2-40B4-BE49-F238E27FC236}">
+                <a16:creationId xmlns:a16="http://schemas.microsoft.com/office/drawing/2014/main" id="{E12D5DC5-7A66-E0FC-B75F-AB1E87413F17}"/>
+              </a:ext>
+            </a:extLst>
+          </p:cNvPr>
+          <p:cNvSpPr txBox="1"/>
+          <p:nvPr/>
+        </p:nvSpPr>
+        <p:spPr>
+          <a:xfrm>
+            <a:off x="10744365" y="5105227"/>
+            <a:ext cx="1011815" cy="369332"/>
+          </a:xfrm>
+          <a:prstGeom prst="rect">
+            <a:avLst/>
+          </a:prstGeom>
+          <a:noFill/>
+        </p:spPr>
+        <p:txBody>
+          <a:bodyPr wrap="none" rtlCol="0">
+            <a:spAutoFit/>
+          </a:bodyPr>
+          <a:lstStyle/>
+          <a:p>
+            <a:r>
+              <a:rPr lang="de-DE" dirty="0" err="1">
+                <a:latin typeface="Courier New" panose="02070309020205020404" pitchFamily="49" charset="0"/>
+                <a:cs typeface="Courier New" panose="02070309020205020404" pitchFamily="49" charset="0"/>
+              </a:rPr>
+              <a:t>move</a:t>
+            </a:r>
+            <a:r>
+              <a:rPr lang="de-DE" dirty="0">
+                <a:latin typeface="Courier New" panose="02070309020205020404" pitchFamily="49" charset="0"/>
+                <a:cs typeface="Courier New" panose="02070309020205020404" pitchFamily="49" charset="0"/>
+              </a:rPr>
+              <a:t> W</a:t>
+            </a:r>
+          </a:p>
+        </p:txBody>
+      </p:sp>
+      <p:sp>
+        <p:nvSpPr>
+          <p:cNvPr id="15" name="Textfeld 14">
+            <a:extLst>
+              <a:ext uri="{FF2B5EF4-FFF2-40B4-BE49-F238E27FC236}">
+                <a16:creationId xmlns:a16="http://schemas.microsoft.com/office/drawing/2014/main" id="{F1353E1B-0D72-EB8B-A6A2-A31D3D463054}"/>
+              </a:ext>
+            </a:extLst>
+          </p:cNvPr>
+          <p:cNvSpPr txBox="1"/>
+          <p:nvPr/>
+        </p:nvSpPr>
+        <p:spPr>
+          <a:xfrm>
+            <a:off x="6025042" y="1356282"/>
+            <a:ext cx="1149674" cy="369332"/>
+          </a:xfrm>
+          <a:prstGeom prst="rect">
+            <a:avLst/>
+          </a:prstGeom>
+          <a:noFill/>
+        </p:spPr>
+        <p:txBody>
+          <a:bodyPr wrap="none" rtlCol="0">
+            <a:spAutoFit/>
+          </a:bodyPr>
+          <a:lstStyle/>
+          <a:p>
+            <a:r>
+              <a:rPr lang="de-DE" dirty="0">
+                <a:latin typeface="Courier New" panose="02070309020205020404" pitchFamily="49" charset="0"/>
+                <a:cs typeface="Courier New" panose="02070309020205020404" pitchFamily="49" charset="0"/>
+              </a:rPr>
+              <a:t>on </a:t>
+            </a:r>
+            <a:r>
+              <a:rPr lang="de-DE" dirty="0" err="1">
+                <a:latin typeface="Courier New" panose="02070309020205020404" pitchFamily="49" charset="0"/>
+                <a:cs typeface="Courier New" panose="02070309020205020404" pitchFamily="49" charset="0"/>
+              </a:rPr>
+              <a:t>food</a:t>
+            </a:r>
+            <a:endParaRPr lang="de-DE" dirty="0">
+              <a:latin typeface="Courier New" panose="02070309020205020404" pitchFamily="49" charset="0"/>
+              <a:cs typeface="Courier New" panose="02070309020205020404" pitchFamily="49" charset="0"/>
+            </a:endParaRPr>
+          </a:p>
+        </p:txBody>
+      </p:sp>
+      <p:sp>
+        <p:nvSpPr>
+          <p:cNvPr id="16" name="Textfeld 15">
+            <a:extLst>
+              <a:ext uri="{FF2B5EF4-FFF2-40B4-BE49-F238E27FC236}">
+                <a16:creationId xmlns:a16="http://schemas.microsoft.com/office/drawing/2014/main" id="{C330CB92-1783-94C1-A8C6-EFE912692C6F}"/>
+              </a:ext>
+            </a:extLst>
+          </p:cNvPr>
+          <p:cNvSpPr txBox="1"/>
+          <p:nvPr/>
+        </p:nvSpPr>
+        <p:spPr>
+          <a:xfrm>
+            <a:off x="7281837" y="1356282"/>
+            <a:ext cx="1011815" cy="369332"/>
+          </a:xfrm>
+          <a:prstGeom prst="rect">
+            <a:avLst/>
+          </a:prstGeom>
+          <a:noFill/>
+        </p:spPr>
+        <p:txBody>
+          <a:bodyPr wrap="none" rtlCol="0">
+            <a:spAutoFit/>
+          </a:bodyPr>
+          <a:lstStyle/>
+          <a:p>
+            <a:r>
+              <a:rPr lang="de-DE" dirty="0" err="1">
+                <a:latin typeface="Courier New" panose="02070309020205020404" pitchFamily="49" charset="0"/>
+                <a:cs typeface="Courier New" panose="02070309020205020404" pitchFamily="49" charset="0"/>
+              </a:rPr>
+              <a:t>food</a:t>
+            </a:r>
+            <a:r>
+              <a:rPr lang="de-DE" dirty="0">
+                <a:latin typeface="Courier New" panose="02070309020205020404" pitchFamily="49" charset="0"/>
+                <a:cs typeface="Courier New" panose="02070309020205020404" pitchFamily="49" charset="0"/>
+              </a:rPr>
+              <a:t> N</a:t>
+            </a:r>
+          </a:p>
+        </p:txBody>
+      </p:sp>
+      <p:sp>
+        <p:nvSpPr>
+          <p:cNvPr id="17" name="Textfeld 16">
+            <a:extLst>
+              <a:ext uri="{FF2B5EF4-FFF2-40B4-BE49-F238E27FC236}">
+                <a16:creationId xmlns:a16="http://schemas.microsoft.com/office/drawing/2014/main" id="{942A1F51-9153-0948-FD60-C38605FA4317}"/>
+              </a:ext>
+            </a:extLst>
+          </p:cNvPr>
+          <p:cNvSpPr txBox="1"/>
+          <p:nvPr/>
+        </p:nvSpPr>
+        <p:spPr>
+          <a:xfrm>
+            <a:off x="8455099" y="1356282"/>
+            <a:ext cx="1011815" cy="369332"/>
+          </a:xfrm>
+          <a:prstGeom prst="rect">
+            <a:avLst/>
+          </a:prstGeom>
+          <a:noFill/>
+        </p:spPr>
+        <p:txBody>
+          <a:bodyPr wrap="none" rtlCol="0">
+            <a:spAutoFit/>
+          </a:bodyPr>
+          <a:lstStyle/>
+          <a:p>
+            <a:r>
+              <a:rPr lang="de-DE" dirty="0" err="1">
+                <a:latin typeface="Courier New" panose="02070309020205020404" pitchFamily="49" charset="0"/>
+                <a:cs typeface="Courier New" panose="02070309020205020404" pitchFamily="49" charset="0"/>
+              </a:rPr>
+              <a:t>food</a:t>
+            </a:r>
+            <a:r>
+              <a:rPr lang="de-DE" dirty="0">
+                <a:latin typeface="Courier New" panose="02070309020205020404" pitchFamily="49" charset="0"/>
+                <a:cs typeface="Courier New" panose="02070309020205020404" pitchFamily="49" charset="0"/>
+              </a:rPr>
+              <a:t> E</a:t>
+            </a:r>
+          </a:p>
+        </p:txBody>
+      </p:sp>
+      <p:sp>
+        <p:nvSpPr>
+          <p:cNvPr id="18" name="Textfeld 17">
+            <a:extLst>
+              <a:ext uri="{FF2B5EF4-FFF2-40B4-BE49-F238E27FC236}">
+                <a16:creationId xmlns:a16="http://schemas.microsoft.com/office/drawing/2014/main" id="{0654D465-8DF4-5FFE-6158-6FAD28C5C9C3}"/>
+              </a:ext>
+            </a:extLst>
+          </p:cNvPr>
+          <p:cNvSpPr txBox="1"/>
+          <p:nvPr/>
+        </p:nvSpPr>
+        <p:spPr>
+          <a:xfrm>
+            <a:off x="9597184" y="1356282"/>
+            <a:ext cx="1011815" cy="369332"/>
+          </a:xfrm>
+          <a:prstGeom prst="rect">
+            <a:avLst/>
+          </a:prstGeom>
+          <a:noFill/>
+        </p:spPr>
+        <p:txBody>
+          <a:bodyPr wrap="none" rtlCol="0">
+            <a:spAutoFit/>
+          </a:bodyPr>
+          <a:lstStyle/>
+          <a:p>
+            <a:r>
+              <a:rPr lang="de-DE" dirty="0" err="1">
+                <a:latin typeface="Courier New" panose="02070309020205020404" pitchFamily="49" charset="0"/>
+                <a:cs typeface="Courier New" panose="02070309020205020404" pitchFamily="49" charset="0"/>
+              </a:rPr>
+              <a:t>food</a:t>
+            </a:r>
+            <a:r>
+              <a:rPr lang="de-DE" dirty="0">
+                <a:latin typeface="Courier New" panose="02070309020205020404" pitchFamily="49" charset="0"/>
+                <a:cs typeface="Courier New" panose="02070309020205020404" pitchFamily="49" charset="0"/>
+              </a:rPr>
+              <a:t> S</a:t>
+            </a:r>
+          </a:p>
+        </p:txBody>
+      </p:sp>
+      <p:sp>
+        <p:nvSpPr>
+          <p:cNvPr id="19" name="Textfeld 18">
+            <a:extLst>
+              <a:ext uri="{FF2B5EF4-FFF2-40B4-BE49-F238E27FC236}">
+                <a16:creationId xmlns:a16="http://schemas.microsoft.com/office/drawing/2014/main" id="{BD475DCA-C9D5-BE70-081A-B8D088EFAD7F}"/>
+              </a:ext>
+            </a:extLst>
+          </p:cNvPr>
+          <p:cNvSpPr txBox="1"/>
+          <p:nvPr/>
+        </p:nvSpPr>
+        <p:spPr>
+          <a:xfrm>
+            <a:off x="10686569" y="1356282"/>
+            <a:ext cx="1011815" cy="369332"/>
+          </a:xfrm>
+          <a:prstGeom prst="rect">
+            <a:avLst/>
+          </a:prstGeom>
+          <a:noFill/>
+        </p:spPr>
+        <p:txBody>
+          <a:bodyPr wrap="none" rtlCol="0">
+            <a:spAutoFit/>
+          </a:bodyPr>
+          <a:lstStyle/>
+          <a:p>
+            <a:r>
+              <a:rPr lang="de-DE" dirty="0" err="1">
+                <a:latin typeface="Courier New" panose="02070309020205020404" pitchFamily="49" charset="0"/>
+                <a:cs typeface="Courier New" panose="02070309020205020404" pitchFamily="49" charset="0"/>
+              </a:rPr>
+              <a:t>food</a:t>
+            </a:r>
+            <a:r>
+              <a:rPr lang="de-DE" dirty="0">
+                <a:latin typeface="Courier New" panose="02070309020205020404" pitchFamily="49" charset="0"/>
+                <a:cs typeface="Courier New" panose="02070309020205020404" pitchFamily="49" charset="0"/>
+              </a:rPr>
+              <a:t> W</a:t>
+            </a:r>
+          </a:p>
+        </p:txBody>
+      </p:sp>
+    </p:spTree>
+    <p:extLst>
+      <p:ext uri="{BB962C8B-B14F-4D97-AF65-F5344CB8AC3E}">
+        <p14:creationId xmlns:p14="http://schemas.microsoft.com/office/powerpoint/2010/main" val="2547762634"/>
+      </p:ext>
+    </p:extLst>
+  </p:cSld>
+  <p:clrMapOvr>
+    <a:masterClrMapping/>
+  </p:clrMapOvr>
+</p:sld>
+</file>
+
+<file path=ppt/slides/slide15.xml><?xml version="1.0" encoding="utf-8"?>
+<p:sld xmlns:a="http://schemas.openxmlformats.org/drawingml/2006/main" xmlns:r="http://schemas.openxmlformats.org/officeDocument/2006/relationships" xmlns:p="http://schemas.openxmlformats.org/presentationml/2006/main">
+  <p:cSld>
+    <p:spTree>
+      <p:nvGrpSpPr>
+        <p:cNvPr id="1" name="">
+          <a:extLst>
+            <a:ext uri="{FF2B5EF4-FFF2-40B4-BE49-F238E27FC236}">
+              <a16:creationId xmlns:a16="http://schemas.microsoft.com/office/drawing/2014/main" id="{C192ACF1-A625-E91A-426D-0FB1CB25D58A}"/>
+            </a:ext>
+          </a:extLst>
+        </p:cNvPr>
+        <p:cNvGrpSpPr/>
+        <p:nvPr/>
+      </p:nvGrpSpPr>
+      <p:grpSpPr>
+        <a:xfrm>
+          <a:off x="0" y="0"/>
+          <a:ext cx="0" cy="0"/>
+          <a:chOff x="0" y="0"/>
+          <a:chExt cx="0" cy="0"/>
+        </a:xfrm>
+      </p:grpSpPr>
+      <p:sp>
+        <p:nvSpPr>
+          <p:cNvPr id="2" name="Freihandform: Form 1">
+            <a:extLst>
+              <a:ext uri="{FF2B5EF4-FFF2-40B4-BE49-F238E27FC236}">
+                <a16:creationId xmlns:a16="http://schemas.microsoft.com/office/drawing/2014/main" id="{6C65E094-D373-3EC1-CA69-7C3E3FB3F81F}"/>
+              </a:ext>
+            </a:extLst>
+          </p:cNvPr>
+          <p:cNvSpPr/>
+          <p:nvPr/>
+        </p:nvSpPr>
+        <p:spPr>
+          <a:xfrm flipH="1">
+            <a:off x="8657661" y="-2930196"/>
+            <a:ext cx="6300782" cy="3481390"/>
+          </a:xfrm>
+          <a:custGeom>
+            <a:avLst/>
+            <a:gdLst>
+              <a:gd name="csX0" fmla="*/ 0 w 6300782"/>
+              <a:gd name="csY0" fmla="*/ 0 h 3481390"/>
+              <a:gd name="csX1" fmla="*/ 4560087 w 6300782"/>
+              <a:gd name="csY1" fmla="*/ 0 h 3481390"/>
+              <a:gd name="csX2" fmla="*/ 4562473 w 6300782"/>
+              <a:gd name="csY2" fmla="*/ 0 h 3481390"/>
+              <a:gd name="csX3" fmla="*/ 4562473 w 6300782"/>
+              <a:gd name="csY3" fmla="*/ 121 h 3481390"/>
+              <a:gd name="csX4" fmla="*/ 4738063 w 6300782"/>
+              <a:gd name="csY4" fmla="*/ 8987 h 3481390"/>
+              <a:gd name="csX5" fmla="*/ 6300782 w 6300782"/>
+              <a:gd name="csY5" fmla="*/ 1740695 h 3481390"/>
+              <a:gd name="csX6" fmla="*/ 4738063 w 6300782"/>
+              <a:gd name="csY6" fmla="*/ 3472403 h 3481390"/>
+              <a:gd name="csX7" fmla="*/ 4562473 w 6300782"/>
+              <a:gd name="csY7" fmla="*/ 3481270 h 3481390"/>
+              <a:gd name="csX8" fmla="*/ 4562473 w 6300782"/>
+              <a:gd name="csY8" fmla="*/ 3481390 h 3481390"/>
+              <a:gd name="csX9" fmla="*/ 4560087 w 6300782"/>
+              <a:gd name="csY9" fmla="*/ 3481390 h 3481390"/>
+              <a:gd name="csX10" fmla="*/ 0 w 6300782"/>
+              <a:gd name="csY10" fmla="*/ 3481390 h 3481390"/>
+            </a:gdLst>
+            <a:ahLst/>
+            <a:cxnLst>
+              <a:cxn ang="0">
+                <a:pos x="csX0" y="csY0"/>
+              </a:cxn>
+              <a:cxn ang="0">
+                <a:pos x="csX1" y="csY1"/>
+              </a:cxn>
+              <a:cxn ang="0">
+                <a:pos x="csX2" y="csY2"/>
+              </a:cxn>
+              <a:cxn ang="0">
+                <a:pos x="csX3" y="csY3"/>
+              </a:cxn>
+              <a:cxn ang="0">
+                <a:pos x="csX4" y="csY4"/>
+              </a:cxn>
+              <a:cxn ang="0">
+                <a:pos x="csX5" y="csY5"/>
+              </a:cxn>
+              <a:cxn ang="0">
+                <a:pos x="csX6" y="csY6"/>
+              </a:cxn>
+              <a:cxn ang="0">
+                <a:pos x="csX7" y="csY7"/>
+              </a:cxn>
+              <a:cxn ang="0">
+                <a:pos x="csX8" y="csY8"/>
+              </a:cxn>
+              <a:cxn ang="0">
+                <a:pos x="csX9" y="csY9"/>
+              </a:cxn>
+              <a:cxn ang="0">
+                <a:pos x="csX10" y="csY10"/>
+              </a:cxn>
+            </a:cxnLst>
+            <a:rect l="l" t="t" r="r" b="b"/>
+            <a:pathLst>
+              <a:path w="6300782" h="3481390">
+                <a:moveTo>
+                  <a:pt x="0" y="0"/>
+                </a:moveTo>
+                <a:lnTo>
+                  <a:pt x="4560087" y="0"/>
+                </a:lnTo>
+                <a:lnTo>
+                  <a:pt x="4562473" y="0"/>
+                </a:lnTo>
+                <a:lnTo>
+                  <a:pt x="4562473" y="121"/>
+                </a:lnTo>
+                <a:lnTo>
+                  <a:pt x="4738063" y="8987"/>
+                </a:lnTo>
+                <a:cubicBezTo>
+                  <a:pt x="5615819" y="98128"/>
+                  <a:pt x="6300782" y="839421"/>
+                  <a:pt x="6300782" y="1740695"/>
+                </a:cubicBezTo>
+                <a:cubicBezTo>
+                  <a:pt x="6300782" y="2641969"/>
+                  <a:pt x="5615819" y="3383262"/>
+                  <a:pt x="4738063" y="3472403"/>
+                </a:cubicBezTo>
+                <a:lnTo>
+                  <a:pt x="4562473" y="3481270"/>
+                </a:lnTo>
+                <a:lnTo>
+                  <a:pt x="4562473" y="3481390"/>
+                </a:lnTo>
+                <a:lnTo>
+                  <a:pt x="4560087" y="3481390"/>
+                </a:lnTo>
+                <a:lnTo>
+                  <a:pt x="0" y="3481390"/>
+                </a:lnTo>
+                <a:close/>
+              </a:path>
+            </a:pathLst>
+          </a:custGeom>
+          <a:solidFill>
+            <a:srgbClr val="E3E9EA"/>
+          </a:solidFill>
+          <a:ln>
+            <a:noFill/>
+          </a:ln>
+        </p:spPr>
+        <p:style>
+          <a:lnRef idx="2">
+            <a:schemeClr val="accent1">
+              <a:shade val="15000"/>
+            </a:schemeClr>
+          </a:lnRef>
+          <a:fillRef idx="1">
+            <a:schemeClr val="accent1"/>
+          </a:fillRef>
+          <a:effectRef idx="0">
+            <a:schemeClr val="accent1"/>
+          </a:effectRef>
+          <a:fontRef idx="minor">
+            <a:schemeClr val="lt1"/>
+          </a:fontRef>
+        </p:style>
+        <p:txBody>
+          <a:bodyPr lIns="0" tIns="0" rIns="0" bIns="0" rtlCol="0" anchor="ctr"/>
+          <a:lstStyle/>
+          <a:p>
+            <a:pPr algn="ctr"/>
+            <a:endParaRPr lang="de-DE" sz="1600" b="1">
+              <a:solidFill>
+                <a:schemeClr val="tx1"/>
+              </a:solidFill>
+            </a:endParaRPr>
+          </a:p>
+        </p:txBody>
+      </p:sp>
+      <p:sp>
+        <p:nvSpPr>
+          <p:cNvPr id="3" name="Textfeld 2">
+            <a:extLst>
+              <a:ext uri="{FF2B5EF4-FFF2-40B4-BE49-F238E27FC236}">
+                <a16:creationId xmlns:a16="http://schemas.microsoft.com/office/drawing/2014/main" id="{D27CF4BF-86ED-A0D7-3D85-662FDB7CC8DF}"/>
+              </a:ext>
+            </a:extLst>
+          </p:cNvPr>
+          <p:cNvSpPr txBox="1"/>
+          <p:nvPr/>
+        </p:nvSpPr>
+        <p:spPr>
+          <a:xfrm>
+            <a:off x="10287922" y="153126"/>
+            <a:ext cx="1904078" cy="461665"/>
+          </a:xfrm>
+          <a:prstGeom prst="rect">
+            <a:avLst/>
+          </a:prstGeom>
+          <a:noFill/>
+        </p:spPr>
+        <p:txBody>
+          <a:bodyPr wrap="square" rtlCol="0">
+            <a:spAutoFit/>
+          </a:bodyPr>
+          <a:lstStyle/>
+          <a:p>
+            <a:pPr algn="ctr"/>
+            <a:r>
+              <a:rPr lang="de-DE" sz="2400" dirty="0">
+                <a:solidFill>
+                  <a:srgbClr val="00336E"/>
+                </a:solidFill>
+                <a:ea typeface="Cormorant Garamond" pitchFamily="2" charset="0"/>
+                <a:cs typeface="Cormorant Garamond" pitchFamily="2" charset="0"/>
+              </a:rPr>
+              <a:t>First </a:t>
+            </a:r>
+            <a:r>
+              <a:rPr lang="de-DE" sz="2400" dirty="0" err="1">
+                <a:solidFill>
+                  <a:srgbClr val="00336E"/>
+                </a:solidFill>
+                <a:ea typeface="Cormorant Garamond" pitchFamily="2" charset="0"/>
+                <a:cs typeface="Cormorant Garamond" pitchFamily="2" charset="0"/>
+              </a:rPr>
+              <a:t>results</a:t>
+            </a:r>
+            <a:endParaRPr lang="de-DE" sz="2400" b="1" dirty="0">
+              <a:solidFill>
+                <a:srgbClr val="00336E"/>
+              </a:solidFill>
+              <a:ea typeface="Cormorant Garamond" pitchFamily="2" charset="0"/>
+              <a:cs typeface="Cormorant Garamond" pitchFamily="2" charset="0"/>
+            </a:endParaRPr>
+          </a:p>
+        </p:txBody>
+      </p:sp>
+      <p:sp>
+        <p:nvSpPr>
+          <p:cNvPr id="7" name="Textfeld 6">
+            <a:extLst>
+              <a:ext uri="{FF2B5EF4-FFF2-40B4-BE49-F238E27FC236}">
+                <a16:creationId xmlns:a16="http://schemas.microsoft.com/office/drawing/2014/main" id="{5375FF69-E05C-B6D4-58CC-B60D0A366EE3}"/>
+              </a:ext>
+            </a:extLst>
+          </p:cNvPr>
+          <p:cNvSpPr txBox="1"/>
+          <p:nvPr/>
+        </p:nvSpPr>
+        <p:spPr>
+          <a:xfrm>
+            <a:off x="304129" y="957362"/>
+            <a:ext cx="5674176" cy="1285737"/>
+          </a:xfrm>
+          <a:prstGeom prst="rect">
+            <a:avLst/>
+          </a:prstGeom>
+          <a:noFill/>
+        </p:spPr>
+        <p:txBody>
+          <a:bodyPr wrap="square">
+            <a:spAutoFit/>
+          </a:bodyPr>
+          <a:lstStyle/>
+          <a:p>
+            <a:pPr>
+              <a:lnSpc>
+                <a:spcPct val="115000"/>
+              </a:lnSpc>
+              <a:spcAft>
+                <a:spcPts val="1000"/>
+              </a:spcAft>
+              <a:buNone/>
+            </a:pPr>
+            <a:r>
+              <a:rPr lang="en-US" sz="1800" dirty="0">
+                <a:effectLst/>
+                <a:ea typeface="MS Mincho" panose="02020609040205080304" pitchFamily="49" charset="-128"/>
+                <a:cs typeface="Times New Roman" panose="02020603050405020304" pitchFamily="18" charset="0"/>
+              </a:rPr>
+              <a:t>Optimal solution?</a:t>
+            </a:r>
+          </a:p>
+          <a:p>
+            <a:pPr>
+              <a:lnSpc>
+                <a:spcPct val="115000"/>
+              </a:lnSpc>
+              <a:spcAft>
+                <a:spcPts val="1000"/>
+              </a:spcAft>
+              <a:buNone/>
+            </a:pPr>
+            <a:endParaRPr lang="en-US" dirty="0">
+              <a:ea typeface="MS Mincho" panose="02020609040205080304" pitchFamily="49" charset="-128"/>
+              <a:cs typeface="Times New Roman" panose="02020603050405020304" pitchFamily="18" charset="0"/>
+            </a:endParaRPr>
+          </a:p>
+          <a:p>
+            <a:pPr>
+              <a:lnSpc>
+                <a:spcPct val="115000"/>
+              </a:lnSpc>
+              <a:spcAft>
+                <a:spcPts val="1000"/>
+              </a:spcAft>
+              <a:buNone/>
+            </a:pPr>
+            <a:r>
+              <a:rPr lang="en-US" sz="1800" dirty="0">
+                <a:effectLst/>
+                <a:ea typeface="MS Mincho" panose="02020609040205080304" pitchFamily="49" charset="-128"/>
+                <a:cs typeface="Times New Roman" panose="02020603050405020304" pitchFamily="18" charset="0"/>
+              </a:rPr>
+              <a:t>No! </a:t>
+            </a:r>
+            <a:r>
+              <a:rPr lang="en-US" dirty="0">
+                <a:ea typeface="MS Mincho" panose="02020609040205080304" pitchFamily="49" charset="-128"/>
+                <a:cs typeface="Times New Roman" panose="02020603050405020304" pitchFamily="18" charset="0"/>
+              </a:rPr>
+              <a:t>Why?</a:t>
+            </a:r>
+            <a:endParaRPr lang="de-DE" sz="1800" dirty="0">
+              <a:effectLst/>
+              <a:ea typeface="MS Mincho" panose="02020609040205080304" pitchFamily="49" charset="-128"/>
+              <a:cs typeface="Times New Roman" panose="02020603050405020304" pitchFamily="18" charset="0"/>
+            </a:endParaRPr>
+          </a:p>
+        </p:txBody>
+      </p:sp>
+      <p:pic>
+        <p:nvPicPr>
+          <p:cNvPr id="5" name="Grafik 4">
+            <a:extLst>
+              <a:ext uri="{FF2B5EF4-FFF2-40B4-BE49-F238E27FC236}">
+                <a16:creationId xmlns:a16="http://schemas.microsoft.com/office/drawing/2014/main" id="{5A6EBD22-5AEA-EC11-6FD8-B3D2E33611D7}"/>
+              </a:ext>
+            </a:extLst>
+          </p:cNvPr>
+          <p:cNvPicPr>
+            <a:picLocks noChangeAspect="1"/>
+          </p:cNvPicPr>
+          <p:nvPr/>
+        </p:nvPicPr>
+        <p:blipFill>
+          <a:blip r:embed="rId2">
+            <a:extLst>
+              <a:ext uri="{28A0092B-C50C-407E-A947-70E740481C1C}">
+                <a14:useLocalDpi xmlns:a14="http://schemas.microsoft.com/office/drawing/2010/main" val="0"/>
+              </a:ext>
+            </a:extLst>
+          </a:blip>
+          <a:stretch>
+            <a:fillRect/>
+          </a:stretch>
+        </p:blipFill>
+        <p:spPr>
+          <a:xfrm>
+            <a:off x="4381500" y="1157736"/>
+            <a:ext cx="7152505" cy="4742902"/>
+          </a:xfrm>
+          <a:prstGeom prst="rect">
+            <a:avLst/>
+          </a:prstGeom>
+        </p:spPr>
+      </p:pic>
+    </p:spTree>
+    <p:extLst>
+      <p:ext uri="{BB962C8B-B14F-4D97-AF65-F5344CB8AC3E}">
+        <p14:creationId xmlns:p14="http://schemas.microsoft.com/office/powerpoint/2010/main" val="2806308508"/>
+      </p:ext>
+    </p:extLst>
+  </p:cSld>
+  <p:clrMapOvr>
+    <a:masterClrMapping/>
+  </p:clrMapOvr>
+  <p:timing>
+    <p:tnLst>
+      <p:par>
+        <p:cTn id="1" dur="indefinite" restart="never" nodeType="tmRoot">
+          <p:childTnLst>
+            <p:seq concurrent="1" nextAc="seek">
+              <p:cTn id="2" dur="indefinite" nodeType="mainSeq">
+                <p:childTnLst>
+                  <p:par>
+                    <p:cTn id="3" fill="hold">
+                      <p:stCondLst>
+                        <p:cond delay="indefinite"/>
+                      </p:stCondLst>
+                      <p:childTnLst>
+                        <p:par>
+                          <p:cTn id="4" fill="hold">
+                            <p:stCondLst>
+                              <p:cond delay="0"/>
+                            </p:stCondLst>
+                            <p:childTnLst>
+                              <p:par>
+                                <p:cTn id="5" presetID="1" presetClass="entr" presetSubtype="0" fill="hold" nodeType="clickEffect">
+                                  <p:stCondLst>
+                                    <p:cond delay="0"/>
+                                  </p:stCondLst>
+                                  <p:childTnLst>
+                                    <p:set>
+                                      <p:cBhvr>
+                                        <p:cTn id="6" dur="1" fill="hold">
+                                          <p:stCondLst>
+                                            <p:cond delay="0"/>
+                                          </p:stCondLst>
+                                        </p:cTn>
+                                        <p:tgtEl>
+                                          <p:spTgt spid="7">
+                                            <p:txEl>
+                                              <p:pRg st="2" end="2"/>
+                                            </p:txEl>
+                                          </p:spTgt>
+                                        </p:tgtEl>
+                                        <p:attrNameLst>
+                                          <p:attrName>style.visibility</p:attrName>
+                                        </p:attrNameLst>
+                                      </p:cBhvr>
+                                      <p:to>
+                                        <p:strVal val="visible"/>
+                                      </p:to>
+                                    </p:set>
+                                  </p:childTnLst>
+                                </p:cTn>
+                              </p:par>
+                            </p:childTnLst>
+                          </p:cTn>
+                        </p:par>
+                      </p:childTnLst>
+                    </p:cTn>
+                  </p:par>
+                </p:childTnLst>
+              </p:cTn>
+              <p:prevCondLst>
+                <p:cond evt="onPrev" delay="0">
+                  <p:tgtEl>
+                    <p:sldTgt/>
+                  </p:tgtEl>
+                </p:cond>
+              </p:prevCondLst>
+              <p:nextCondLst>
+                <p:cond evt="onNext" delay="0">
+                  <p:tgtEl>
+                    <p:sldTgt/>
+                  </p:tgtEl>
+                </p:cond>
+              </p:nextCondLst>
+            </p:seq>
+          </p:childTnLst>
+        </p:cTn>
+      </p:par>
+    </p:tnLst>
+  </p:timing>
+</p:sld>
+</file>
+
+<file path=ppt/slides/slide16.xml><?xml version="1.0" encoding="utf-8"?>
 <p:sld xmlns:a="http://schemas.openxmlformats.org/drawingml/2006/main" xmlns:r="http://schemas.openxmlformats.org/officeDocument/2006/relationships" xmlns:p="http://schemas.openxmlformats.org/presentationml/2006/main">
   <p:cSld>
     <p:spTree>
@@ -3382,7 +5059,7 @@
           <a:p>
             <a:fld id="{001D04CD-A18E-4C48-A0D4-2F175BEDACF1}" type="slidenum">
               <a:rPr lang="de-DE" smtClean="0"/>
-              <a:t>13</a:t>
+              <a:t>16</a:t>
             </a:fld>
             <a:endParaRPr lang="de-DE"/>
           </a:p>
@@ -3401,7 +5078,7 @@
 </p:sld>
 </file>
 
-<file path=ppt/slides/slide14.xml><?xml version="1.0" encoding="utf-8"?>
+<file path=ppt/slides/slide17.xml><?xml version="1.0" encoding="utf-8"?>
 <p:sld xmlns:a="http://schemas.openxmlformats.org/drawingml/2006/main" xmlns:r="http://schemas.openxmlformats.org/officeDocument/2006/relationships" xmlns:p="http://schemas.openxmlformats.org/presentationml/2006/main">
   <p:cSld>
     <p:spTree>
@@ -3914,7 +5591,7 @@
           <a:p>
             <a:fld id="{001D04CD-A18E-4C48-A0D4-2F175BEDACF1}" type="slidenum">
               <a:rPr lang="de-DE" smtClean="0"/>
-              <a:t>14</a:t>
+              <a:t>17</a:t>
             </a:fld>
             <a:endParaRPr lang="de-DE"/>
           </a:p>
@@ -6575,7 +8252,7 @@
         <p:spPr>
           <a:xfrm>
             <a:off x="-11904" y="2045078"/>
-            <a:ext cx="2847973" cy="2677656"/>
+            <a:ext cx="2847973" cy="2308324"/>
           </a:xfrm>
           <a:prstGeom prst="rect">
             <a:avLst/>
@@ -6705,47 +8382,7 @@
           </a:p>
           <a:p>
             <a:pPr algn="ctr"/>
-            <a:r>
-              <a:rPr lang="de-DE" sz="2400" dirty="0">
-                <a:solidFill>
-                  <a:srgbClr val="00336E"/>
-                </a:solidFill>
-                <a:ea typeface="Cormorant Garamond" pitchFamily="2" charset="0"/>
-                <a:cs typeface="Cormorant Garamond" pitchFamily="2" charset="0"/>
-              </a:rPr>
-              <a:t>An </a:t>
-            </a:r>
-            <a:r>
-              <a:rPr lang="de-DE" sz="2400" dirty="0" err="1">
-                <a:solidFill>
-                  <a:srgbClr val="00336E"/>
-                </a:solidFill>
-                <a:ea typeface="Cormorant Garamond" pitchFamily="2" charset="0"/>
-                <a:cs typeface="Cormorant Garamond" pitchFamily="2" charset="0"/>
-              </a:rPr>
-              <a:t>age-old</a:t>
-            </a:r>
-            <a:r>
-              <a:rPr lang="de-DE" sz="2400" dirty="0">
-                <a:solidFill>
-                  <a:srgbClr val="00336E"/>
-                </a:solidFill>
-                <a:ea typeface="Cormorant Garamond" pitchFamily="2" charset="0"/>
-                <a:cs typeface="Cormorant Garamond" pitchFamily="2" charset="0"/>
-              </a:rPr>
-              <a:t> </a:t>
-            </a:r>
-            <a:r>
-              <a:rPr lang="de-DE" sz="2400" dirty="0" err="1">
-                <a:solidFill>
-                  <a:srgbClr val="00336E"/>
-                </a:solidFill>
-                <a:ea typeface="Cormorant Garamond" pitchFamily="2" charset="0"/>
-                <a:cs typeface="Cormorant Garamond" pitchFamily="2" charset="0"/>
-              </a:rPr>
-              <a:t>question</a:t>
-            </a:r>
-            <a:endParaRPr lang="de-DE" sz="2400" dirty="0">
+            <a:endParaRPr lang="de-DE" sz="2400" b="1" dirty="0">
               <a:solidFill>
                 <a:srgbClr val="00336E"/>
               </a:solidFill>

--- a/scicom/skeleton_presentation.pptx
+++ b/scicom/skeleton_presentation.pptx
@@ -5,7 +5,7 @@
     <p:sldMasterId id="2147483672" r:id="rId1"/>
   </p:sldMasterIdLst>
   <p:notesMasterIdLst>
-    <p:notesMasterId r:id="rId19"/>
+    <p:notesMasterId r:id="rId22"/>
   </p:notesMasterIdLst>
   <p:sldIdLst>
     <p:sldId id="256" r:id="rId2"/>
@@ -19,12 +19,15 @@
     <p:sldId id="263" r:id="rId10"/>
     <p:sldId id="264" r:id="rId11"/>
     <p:sldId id="265" r:id="rId12"/>
-    <p:sldId id="266" r:id="rId13"/>
+    <p:sldId id="278" r:id="rId13"/>
     <p:sldId id="274" r:id="rId14"/>
     <p:sldId id="275" r:id="rId15"/>
     <p:sldId id="276" r:id="rId16"/>
-    <p:sldId id="267" r:id="rId17"/>
-    <p:sldId id="268" r:id="rId18"/>
+    <p:sldId id="280" r:id="rId17"/>
+    <p:sldId id="281" r:id="rId18"/>
+    <p:sldId id="282" r:id="rId19"/>
+    <p:sldId id="284" r:id="rId20"/>
+    <p:sldId id="268" r:id="rId21"/>
   </p:sldIdLst>
   <p:sldSz cx="12192000" cy="6858000"/>
   <p:notesSz cx="6858000" cy="9144000"/>
@@ -213,7 +216,7 @@
           <a:p>
             <a:fld id="{D45AE30C-70B0-42A3-87DE-9CC4A3E6D756}" type="datetimeFigureOut">
               <a:rPr lang="de-DE" smtClean="0"/>
-              <a:t>22.05.2026</a:t>
+              <a:t>26.05.2026</a:t>
             </a:fld>
             <a:endParaRPr lang="de-DE"/>
           </a:p>
@@ -478,6 +481,414 @@
     </a:lvl9pPr>
   </p:notesStyle>
 </p:notesMaster>
+</file>
+
+<file path=ppt/notesSlides/notesSlide1.xml><?xml version="1.0" encoding="utf-8"?>
+<p:notes xmlns:a="http://schemas.openxmlformats.org/drawingml/2006/main" xmlns:r="http://schemas.openxmlformats.org/officeDocument/2006/relationships" xmlns:p="http://schemas.openxmlformats.org/presentationml/2006/main">
+  <p:cSld>
+    <p:spTree>
+      <p:nvGrpSpPr>
+        <p:cNvPr id="1" name=""/>
+        <p:cNvGrpSpPr/>
+        <p:nvPr/>
+      </p:nvGrpSpPr>
+      <p:grpSpPr>
+        <a:xfrm>
+          <a:off x="0" y="0"/>
+          <a:ext cx="0" cy="0"/>
+          <a:chOff x="0" y="0"/>
+          <a:chExt cx="0" cy="0"/>
+        </a:xfrm>
+      </p:grpSpPr>
+      <p:sp>
+        <p:nvSpPr>
+          <p:cNvPr id="2" name="Folienbildplatzhalter 1"/>
+          <p:cNvSpPr>
+            <a:spLocks noGrp="1" noRot="1" noChangeAspect="1"/>
+          </p:cNvSpPr>
+          <p:nvPr>
+            <p:ph type="sldImg"/>
+          </p:nvPr>
+        </p:nvSpPr>
+        <p:spPr/>
+      </p:sp>
+      <p:sp>
+        <p:nvSpPr>
+          <p:cNvPr id="3" name="Notizenplatzhalter 2"/>
+          <p:cNvSpPr>
+            <a:spLocks noGrp="1"/>
+          </p:cNvSpPr>
+          <p:nvPr>
+            <p:ph type="body" idx="1"/>
+          </p:nvPr>
+        </p:nvSpPr>
+        <p:spPr/>
+        <p:txBody>
+          <a:bodyPr/>
+          <a:lstStyle/>
+          <a:p>
+            <a:endParaRPr lang="de-DE" dirty="0"/>
+          </a:p>
+        </p:txBody>
+      </p:sp>
+      <p:sp>
+        <p:nvSpPr>
+          <p:cNvPr id="4" name="Foliennummernplatzhalter 3"/>
+          <p:cNvSpPr>
+            <a:spLocks noGrp="1"/>
+          </p:cNvSpPr>
+          <p:nvPr>
+            <p:ph type="sldNum" sz="quarter" idx="5"/>
+          </p:nvPr>
+        </p:nvSpPr>
+        <p:spPr/>
+        <p:txBody>
+          <a:bodyPr/>
+          <a:lstStyle/>
+          <a:p>
+            <a:fld id="{BD810619-8C86-4E95-A074-DA0A2010136C}" type="slidenum">
+              <a:rPr lang="de-DE" smtClean="0"/>
+              <a:t>16</a:t>
+            </a:fld>
+            <a:endParaRPr lang="de-DE"/>
+          </a:p>
+        </p:txBody>
+      </p:sp>
+    </p:spTree>
+    <p:extLst>
+      <p:ext uri="{BB962C8B-B14F-4D97-AF65-F5344CB8AC3E}">
+        <p14:creationId xmlns:p14="http://schemas.microsoft.com/office/powerpoint/2010/main" val="4193238493"/>
+      </p:ext>
+    </p:extLst>
+  </p:cSld>
+  <p:clrMapOvr>
+    <a:masterClrMapping/>
+  </p:clrMapOvr>
+</p:notes>
+</file>
+
+<file path=ppt/notesSlides/notesSlide2.xml><?xml version="1.0" encoding="utf-8"?>
+<p:notes xmlns:a="http://schemas.openxmlformats.org/drawingml/2006/main" xmlns:r="http://schemas.openxmlformats.org/officeDocument/2006/relationships" xmlns:p="http://schemas.openxmlformats.org/presentationml/2006/main">
+  <p:cSld>
+    <p:spTree>
+      <p:nvGrpSpPr>
+        <p:cNvPr id="1" name="">
+          <a:extLst>
+            <a:ext uri="{FF2B5EF4-FFF2-40B4-BE49-F238E27FC236}">
+              <a16:creationId xmlns:a16="http://schemas.microsoft.com/office/drawing/2014/main" id="{D8A70A18-4078-83D1-B218-F36BDBD17D6D}"/>
+            </a:ext>
+          </a:extLst>
+        </p:cNvPr>
+        <p:cNvGrpSpPr/>
+        <p:nvPr/>
+      </p:nvGrpSpPr>
+      <p:grpSpPr>
+        <a:xfrm>
+          <a:off x="0" y="0"/>
+          <a:ext cx="0" cy="0"/>
+          <a:chOff x="0" y="0"/>
+          <a:chExt cx="0" cy="0"/>
+        </a:xfrm>
+      </p:grpSpPr>
+      <p:sp>
+        <p:nvSpPr>
+          <p:cNvPr id="2" name="Folienbildplatzhalter 1">
+            <a:extLst>
+              <a:ext uri="{FF2B5EF4-FFF2-40B4-BE49-F238E27FC236}">
+                <a16:creationId xmlns:a16="http://schemas.microsoft.com/office/drawing/2014/main" id="{FEE29E17-4DDA-11F6-3646-6707D6F9149A}"/>
+              </a:ext>
+            </a:extLst>
+          </p:cNvPr>
+          <p:cNvSpPr>
+            <a:spLocks noGrp="1" noRot="1" noChangeAspect="1"/>
+          </p:cNvSpPr>
+          <p:nvPr>
+            <p:ph type="sldImg"/>
+          </p:nvPr>
+        </p:nvSpPr>
+        <p:spPr/>
+      </p:sp>
+      <p:sp>
+        <p:nvSpPr>
+          <p:cNvPr id="3" name="Notizenplatzhalter 2">
+            <a:extLst>
+              <a:ext uri="{FF2B5EF4-FFF2-40B4-BE49-F238E27FC236}">
+                <a16:creationId xmlns:a16="http://schemas.microsoft.com/office/drawing/2014/main" id="{8FB99742-7CAF-4561-57B8-59E788562EB3}"/>
+              </a:ext>
+            </a:extLst>
+          </p:cNvPr>
+          <p:cNvSpPr>
+            <a:spLocks noGrp="1"/>
+          </p:cNvSpPr>
+          <p:nvPr>
+            <p:ph type="body" idx="1"/>
+          </p:nvPr>
+        </p:nvSpPr>
+        <p:spPr/>
+        <p:txBody>
+          <a:bodyPr/>
+          <a:lstStyle/>
+          <a:p>
+            <a:endParaRPr lang="de-DE" dirty="0"/>
+          </a:p>
+        </p:txBody>
+      </p:sp>
+      <p:sp>
+        <p:nvSpPr>
+          <p:cNvPr id="4" name="Foliennummernplatzhalter 3">
+            <a:extLst>
+              <a:ext uri="{FF2B5EF4-FFF2-40B4-BE49-F238E27FC236}">
+                <a16:creationId xmlns:a16="http://schemas.microsoft.com/office/drawing/2014/main" id="{43897533-B574-20EE-9118-6D57A58088D6}"/>
+              </a:ext>
+            </a:extLst>
+          </p:cNvPr>
+          <p:cNvSpPr>
+            <a:spLocks noGrp="1"/>
+          </p:cNvSpPr>
+          <p:nvPr>
+            <p:ph type="sldNum" sz="quarter" idx="5"/>
+          </p:nvPr>
+        </p:nvSpPr>
+        <p:spPr/>
+        <p:txBody>
+          <a:bodyPr/>
+          <a:lstStyle/>
+          <a:p>
+            <a:fld id="{BD810619-8C86-4E95-A074-DA0A2010136C}" type="slidenum">
+              <a:rPr lang="de-DE" smtClean="0"/>
+              <a:t>17</a:t>
+            </a:fld>
+            <a:endParaRPr lang="de-DE"/>
+          </a:p>
+        </p:txBody>
+      </p:sp>
+    </p:spTree>
+    <p:extLst>
+      <p:ext uri="{BB962C8B-B14F-4D97-AF65-F5344CB8AC3E}">
+        <p14:creationId xmlns:p14="http://schemas.microsoft.com/office/powerpoint/2010/main" val="4280642311"/>
+      </p:ext>
+    </p:extLst>
+  </p:cSld>
+  <p:clrMapOvr>
+    <a:masterClrMapping/>
+  </p:clrMapOvr>
+</p:notes>
+</file>
+
+<file path=ppt/notesSlides/notesSlide3.xml><?xml version="1.0" encoding="utf-8"?>
+<p:notes xmlns:a="http://schemas.openxmlformats.org/drawingml/2006/main" xmlns:r="http://schemas.openxmlformats.org/officeDocument/2006/relationships" xmlns:p="http://schemas.openxmlformats.org/presentationml/2006/main">
+  <p:cSld>
+    <p:spTree>
+      <p:nvGrpSpPr>
+        <p:cNvPr id="1" name="">
+          <a:extLst>
+            <a:ext uri="{FF2B5EF4-FFF2-40B4-BE49-F238E27FC236}">
+              <a16:creationId xmlns:a16="http://schemas.microsoft.com/office/drawing/2014/main" id="{BE437251-5874-E8FE-B80E-CD410130F9EB}"/>
+            </a:ext>
+          </a:extLst>
+        </p:cNvPr>
+        <p:cNvGrpSpPr/>
+        <p:nvPr/>
+      </p:nvGrpSpPr>
+      <p:grpSpPr>
+        <a:xfrm>
+          <a:off x="0" y="0"/>
+          <a:ext cx="0" cy="0"/>
+          <a:chOff x="0" y="0"/>
+          <a:chExt cx="0" cy="0"/>
+        </a:xfrm>
+      </p:grpSpPr>
+      <p:sp>
+        <p:nvSpPr>
+          <p:cNvPr id="2" name="Folienbildplatzhalter 1">
+            <a:extLst>
+              <a:ext uri="{FF2B5EF4-FFF2-40B4-BE49-F238E27FC236}">
+                <a16:creationId xmlns:a16="http://schemas.microsoft.com/office/drawing/2014/main" id="{A247E48D-B568-7F9E-368A-DED654401997}"/>
+              </a:ext>
+            </a:extLst>
+          </p:cNvPr>
+          <p:cNvSpPr>
+            <a:spLocks noGrp="1" noRot="1" noChangeAspect="1"/>
+          </p:cNvSpPr>
+          <p:nvPr>
+            <p:ph type="sldImg"/>
+          </p:nvPr>
+        </p:nvSpPr>
+        <p:spPr/>
+      </p:sp>
+      <p:sp>
+        <p:nvSpPr>
+          <p:cNvPr id="3" name="Notizenplatzhalter 2">
+            <a:extLst>
+              <a:ext uri="{FF2B5EF4-FFF2-40B4-BE49-F238E27FC236}">
+                <a16:creationId xmlns:a16="http://schemas.microsoft.com/office/drawing/2014/main" id="{343FC30F-FE72-2C10-1BDA-0428F1315EC9}"/>
+              </a:ext>
+            </a:extLst>
+          </p:cNvPr>
+          <p:cNvSpPr>
+            <a:spLocks noGrp="1"/>
+          </p:cNvSpPr>
+          <p:nvPr>
+            <p:ph type="body" idx="1"/>
+          </p:nvPr>
+        </p:nvSpPr>
+        <p:spPr/>
+        <p:txBody>
+          <a:bodyPr/>
+          <a:lstStyle/>
+          <a:p>
+            <a:endParaRPr lang="de-DE" dirty="0"/>
+          </a:p>
+        </p:txBody>
+      </p:sp>
+      <p:sp>
+        <p:nvSpPr>
+          <p:cNvPr id="4" name="Foliennummernplatzhalter 3">
+            <a:extLst>
+              <a:ext uri="{FF2B5EF4-FFF2-40B4-BE49-F238E27FC236}">
+                <a16:creationId xmlns:a16="http://schemas.microsoft.com/office/drawing/2014/main" id="{ACCDC335-589C-4989-5811-131C6EB2A85B}"/>
+              </a:ext>
+            </a:extLst>
+          </p:cNvPr>
+          <p:cNvSpPr>
+            <a:spLocks noGrp="1"/>
+          </p:cNvSpPr>
+          <p:nvPr>
+            <p:ph type="sldNum" sz="quarter" idx="5"/>
+          </p:nvPr>
+        </p:nvSpPr>
+        <p:spPr/>
+        <p:txBody>
+          <a:bodyPr/>
+          <a:lstStyle/>
+          <a:p>
+            <a:fld id="{BD810619-8C86-4E95-A074-DA0A2010136C}" type="slidenum">
+              <a:rPr lang="de-DE" smtClean="0"/>
+              <a:t>18</a:t>
+            </a:fld>
+            <a:endParaRPr lang="de-DE"/>
+          </a:p>
+        </p:txBody>
+      </p:sp>
+    </p:spTree>
+    <p:extLst>
+      <p:ext uri="{BB962C8B-B14F-4D97-AF65-F5344CB8AC3E}">
+        <p14:creationId xmlns:p14="http://schemas.microsoft.com/office/powerpoint/2010/main" val="1918439060"/>
+      </p:ext>
+    </p:extLst>
+  </p:cSld>
+  <p:clrMapOvr>
+    <a:masterClrMapping/>
+  </p:clrMapOvr>
+</p:notes>
+</file>
+
+<file path=ppt/notesSlides/notesSlide4.xml><?xml version="1.0" encoding="utf-8"?>
+<p:notes xmlns:a="http://schemas.openxmlformats.org/drawingml/2006/main" xmlns:r="http://schemas.openxmlformats.org/officeDocument/2006/relationships" xmlns:p="http://schemas.openxmlformats.org/presentationml/2006/main">
+  <p:cSld>
+    <p:spTree>
+      <p:nvGrpSpPr>
+        <p:cNvPr id="1" name="">
+          <a:extLst>
+            <a:ext uri="{FF2B5EF4-FFF2-40B4-BE49-F238E27FC236}">
+              <a16:creationId xmlns:a16="http://schemas.microsoft.com/office/drawing/2014/main" id="{61E0123C-1EEF-A07E-2EC6-C6E9F6D2A5E6}"/>
+            </a:ext>
+          </a:extLst>
+        </p:cNvPr>
+        <p:cNvGrpSpPr/>
+        <p:nvPr/>
+      </p:nvGrpSpPr>
+      <p:grpSpPr>
+        <a:xfrm>
+          <a:off x="0" y="0"/>
+          <a:ext cx="0" cy="0"/>
+          <a:chOff x="0" y="0"/>
+          <a:chExt cx="0" cy="0"/>
+        </a:xfrm>
+      </p:grpSpPr>
+      <p:sp>
+        <p:nvSpPr>
+          <p:cNvPr id="2" name="Folienbildplatzhalter 1">
+            <a:extLst>
+              <a:ext uri="{FF2B5EF4-FFF2-40B4-BE49-F238E27FC236}">
+                <a16:creationId xmlns:a16="http://schemas.microsoft.com/office/drawing/2014/main" id="{F9C48F53-D774-FCA9-9CC1-2FB5CAB6CC8F}"/>
+              </a:ext>
+            </a:extLst>
+          </p:cNvPr>
+          <p:cNvSpPr>
+            <a:spLocks noGrp="1" noRot="1" noChangeAspect="1"/>
+          </p:cNvSpPr>
+          <p:nvPr>
+            <p:ph type="sldImg"/>
+          </p:nvPr>
+        </p:nvSpPr>
+        <p:spPr/>
+      </p:sp>
+      <p:sp>
+        <p:nvSpPr>
+          <p:cNvPr id="3" name="Notizenplatzhalter 2">
+            <a:extLst>
+              <a:ext uri="{FF2B5EF4-FFF2-40B4-BE49-F238E27FC236}">
+                <a16:creationId xmlns:a16="http://schemas.microsoft.com/office/drawing/2014/main" id="{ED45ACB0-4324-1706-89C1-CF89F16C5843}"/>
+              </a:ext>
+            </a:extLst>
+          </p:cNvPr>
+          <p:cNvSpPr>
+            <a:spLocks noGrp="1"/>
+          </p:cNvSpPr>
+          <p:nvPr>
+            <p:ph type="body" idx="1"/>
+          </p:nvPr>
+        </p:nvSpPr>
+        <p:spPr/>
+        <p:txBody>
+          <a:bodyPr/>
+          <a:lstStyle/>
+          <a:p>
+            <a:endParaRPr lang="de-DE" dirty="0"/>
+          </a:p>
+        </p:txBody>
+      </p:sp>
+      <p:sp>
+        <p:nvSpPr>
+          <p:cNvPr id="4" name="Foliennummernplatzhalter 3">
+            <a:extLst>
+              <a:ext uri="{FF2B5EF4-FFF2-40B4-BE49-F238E27FC236}">
+                <a16:creationId xmlns:a16="http://schemas.microsoft.com/office/drawing/2014/main" id="{00F44DE6-FECD-A9F8-80C7-DC703B8CD6A7}"/>
+              </a:ext>
+            </a:extLst>
+          </p:cNvPr>
+          <p:cNvSpPr>
+            <a:spLocks noGrp="1"/>
+          </p:cNvSpPr>
+          <p:nvPr>
+            <p:ph type="sldNum" sz="quarter" idx="5"/>
+          </p:nvPr>
+        </p:nvSpPr>
+        <p:spPr/>
+        <p:txBody>
+          <a:bodyPr/>
+          <a:lstStyle/>
+          <a:p>
+            <a:fld id="{BD810619-8C86-4E95-A074-DA0A2010136C}" type="slidenum">
+              <a:rPr lang="de-DE" smtClean="0"/>
+              <a:t>19</a:t>
+            </a:fld>
+            <a:endParaRPr lang="de-DE"/>
+          </a:p>
+        </p:txBody>
+      </p:sp>
+    </p:spTree>
+    <p:extLst>
+      <p:ext uri="{BB962C8B-B14F-4D97-AF65-F5344CB8AC3E}">
+        <p14:creationId xmlns:p14="http://schemas.microsoft.com/office/powerpoint/2010/main" val="2419741675"/>
+      </p:ext>
+    </p:extLst>
+  </p:cSld>
+  <p:clrMapOvr>
+    <a:masterClrMapping/>
+  </p:clrMapOvr>
+</p:notes>
 </file>
 
 <file path=ppt/slideLayouts/slideLayout1.xml><?xml version="1.0" encoding="utf-8"?>
@@ -2782,12 +3193,55 @@
           <a:chExt cx="0" cy="0"/>
         </a:xfrm>
       </p:grpSpPr>
+      <p:cxnSp>
+        <p:nvCxnSpPr>
+          <p:cNvPr id="11" name="Gerader Verbinder 10">
+            <a:extLst>
+              <a:ext uri="{FF2B5EF4-FFF2-40B4-BE49-F238E27FC236}">
+                <a16:creationId xmlns:a16="http://schemas.microsoft.com/office/drawing/2014/main" id="{2CB23141-E362-ACD3-F7B0-21F08E9D7FDE}"/>
+              </a:ext>
+            </a:extLst>
+          </p:cNvPr>
+          <p:cNvCxnSpPr>
+            <a:cxnSpLocks/>
+          </p:cNvCxnSpPr>
+          <p:nvPr/>
+        </p:nvCxnSpPr>
+        <p:spPr>
+          <a:xfrm>
+            <a:off x="-275771" y="1782769"/>
+            <a:ext cx="12729028" cy="0"/>
+          </a:xfrm>
+          <a:prstGeom prst="line">
+            <a:avLst/>
+          </a:prstGeom>
+          <a:ln w="101600">
+            <a:solidFill>
+              <a:srgbClr val="00336E"/>
+            </a:solidFill>
+          </a:ln>
+        </p:spPr>
+        <p:style>
+          <a:lnRef idx="2">
+            <a:schemeClr val="accent1"/>
+          </a:lnRef>
+          <a:fillRef idx="0">
+            <a:schemeClr val="accent1"/>
+          </a:fillRef>
+          <a:effectRef idx="1">
+            <a:schemeClr val="accent1"/>
+          </a:effectRef>
+          <a:fontRef idx="minor">
+            <a:schemeClr val="tx1"/>
+          </a:fontRef>
+        </p:style>
+      </p:cxnSp>
       <p:sp>
         <p:nvSpPr>
-          <p:cNvPr id="2" name="Textfeld 1">
+          <p:cNvPr id="12" name="Textfeld 11">
             <a:extLst>
               <a:ext uri="{FF2B5EF4-FFF2-40B4-BE49-F238E27FC236}">
-                <a16:creationId xmlns:a16="http://schemas.microsoft.com/office/drawing/2014/main" id="{F338866F-1B0D-C6E9-000E-F2C93E258AEE}"/>
+                <a16:creationId xmlns:a16="http://schemas.microsoft.com/office/drawing/2014/main" id="{522E4EA4-40FF-BFA9-D961-1282DECB22F2}"/>
               </a:ext>
             </a:extLst>
           </p:cNvPr>
@@ -2796,8 +3250,8 @@
         </p:nvSpPr>
         <p:spPr>
           <a:xfrm>
-            <a:off x="4354048" y="552450"/>
-            <a:ext cx="5643148" cy="369332"/>
+            <a:off x="673504" y="2411400"/>
+            <a:ext cx="1719825" cy="1015663"/>
           </a:xfrm>
           <a:prstGeom prst="rect">
             <a:avLst/>
@@ -2805,61 +3259,280 @@
           <a:noFill/>
         </p:spPr>
         <p:txBody>
-          <a:bodyPr wrap="none" rtlCol="0">
+          <a:bodyPr wrap="square" rtlCol="0">
             <a:spAutoFit/>
           </a:bodyPr>
           <a:lstStyle/>
           <a:p>
             <a:r>
-              <a:rPr lang="de-DE" dirty="0"/>
-              <a:t>Current </a:t>
-            </a:r>
-            <a:r>
-              <a:rPr lang="de-DE" dirty="0" err="1"/>
-              <a:t>Results</a:t>
-            </a:r>
-            <a:r>
-              <a:rPr lang="de-DE" dirty="0"/>
-              <a:t> – </a:t>
-            </a:r>
-            <a:r>
-              <a:rPr lang="de-DE" dirty="0" err="1"/>
-              <a:t>Unsupervised</a:t>
-            </a:r>
-            <a:r>
-              <a:rPr lang="de-DE" dirty="0"/>
-              <a:t> </a:t>
-            </a:r>
-            <a:r>
-              <a:rPr lang="de-DE" dirty="0" err="1"/>
-              <a:t>leraning</a:t>
-            </a:r>
-            <a:r>
-              <a:rPr lang="de-DE" dirty="0"/>
-              <a:t> on </a:t>
-            </a:r>
-            <a:r>
-              <a:rPr lang="de-DE" dirty="0" err="1"/>
-              <a:t>static</a:t>
-            </a:r>
-            <a:r>
-              <a:rPr lang="de-DE" dirty="0"/>
-              <a:t> </a:t>
-            </a:r>
-            <a:r>
-              <a:rPr lang="de-DE" dirty="0" err="1"/>
-              <a:t>tasks</a:t>
-            </a:r>
-            <a:endParaRPr lang="de-DE" dirty="0"/>
+              <a:rPr lang="en-US" sz="1200" b="1" noProof="0" dirty="0"/>
+              <a:t>Calibration Phase</a:t>
+            </a:r>
+          </a:p>
+          <a:p>
+            <a:r>
+              <a:rPr lang="en-US" sz="1200" dirty="0"/>
+              <a:t>Train on static task w/ traditional evolution and define adaptability gap</a:t>
+            </a:r>
+            <a:endParaRPr lang="en-US" sz="1200" noProof="0" dirty="0"/>
           </a:p>
         </p:txBody>
       </p:sp>
       <p:sp>
         <p:nvSpPr>
-          <p:cNvPr id="3" name="Textfeld 2">
+          <p:cNvPr id="13" name="Ellipse 12">
             <a:extLst>
               <a:ext uri="{FF2B5EF4-FFF2-40B4-BE49-F238E27FC236}">
-                <a16:creationId xmlns:a16="http://schemas.microsoft.com/office/drawing/2014/main" id="{EE6CACB6-FD47-4188-E3B9-82548044312F}"/>
+                <a16:creationId xmlns:a16="http://schemas.microsoft.com/office/drawing/2014/main" id="{A65FCA2B-308B-6A8A-4B57-83BFEC6C3D3F}"/>
+              </a:ext>
+            </a:extLst>
+          </p:cNvPr>
+          <p:cNvSpPr/>
+          <p:nvPr/>
+        </p:nvSpPr>
+        <p:spPr>
+          <a:xfrm>
+            <a:off x="1071455" y="1320807"/>
+            <a:ext cx="923924" cy="923924"/>
+          </a:xfrm>
+          <a:prstGeom prst="ellipse">
+            <a:avLst/>
+          </a:prstGeom>
+          <a:solidFill>
+            <a:srgbClr val="E3E9EA"/>
+          </a:solidFill>
+          <a:ln>
+            <a:solidFill>
+              <a:srgbClr val="00336E"/>
+            </a:solidFill>
+          </a:ln>
+        </p:spPr>
+        <p:style>
+          <a:lnRef idx="2">
+            <a:schemeClr val="accent1">
+              <a:shade val="15000"/>
+            </a:schemeClr>
+          </a:lnRef>
+          <a:fillRef idx="1">
+            <a:schemeClr val="accent1"/>
+          </a:fillRef>
+          <a:effectRef idx="0">
+            <a:schemeClr val="accent1"/>
+          </a:effectRef>
+          <a:fontRef idx="minor">
+            <a:schemeClr val="lt1"/>
+          </a:fontRef>
+        </p:style>
+        <p:txBody>
+          <a:bodyPr lIns="0" tIns="0" rIns="0" bIns="0" rtlCol="0" anchor="ctr"/>
+          <a:lstStyle/>
+          <a:p>
+            <a:pPr algn="ctr"/>
+            <a:r>
+              <a:rPr lang="de-DE" sz="4000" b="1" dirty="0">
+                <a:solidFill>
+                  <a:schemeClr val="tx1"/>
+                </a:solidFill>
+              </a:rPr>
+              <a:t>1</a:t>
+            </a:r>
+            <a:endParaRPr lang="de-DE" sz="1600" b="1" dirty="0">
+              <a:solidFill>
+                <a:schemeClr val="tx1"/>
+              </a:solidFill>
+            </a:endParaRPr>
+          </a:p>
+        </p:txBody>
+      </p:sp>
+      <p:sp>
+        <p:nvSpPr>
+          <p:cNvPr id="15" name="Ellipse 14">
+            <a:extLst>
+              <a:ext uri="{FF2B5EF4-FFF2-40B4-BE49-F238E27FC236}">
+                <a16:creationId xmlns:a16="http://schemas.microsoft.com/office/drawing/2014/main" id="{A347E990-967E-91F7-152C-9ABBA9724A93}"/>
+              </a:ext>
+            </a:extLst>
+          </p:cNvPr>
+          <p:cNvSpPr/>
+          <p:nvPr/>
+        </p:nvSpPr>
+        <p:spPr>
+          <a:xfrm>
+            <a:off x="4113177" y="1320807"/>
+            <a:ext cx="923924" cy="923924"/>
+          </a:xfrm>
+          <a:prstGeom prst="ellipse">
+            <a:avLst/>
+          </a:prstGeom>
+          <a:solidFill>
+            <a:srgbClr val="E3E9EA"/>
+          </a:solidFill>
+          <a:ln>
+            <a:solidFill>
+              <a:srgbClr val="00336E"/>
+            </a:solidFill>
+          </a:ln>
+        </p:spPr>
+        <p:style>
+          <a:lnRef idx="2">
+            <a:schemeClr val="accent1">
+              <a:shade val="15000"/>
+            </a:schemeClr>
+          </a:lnRef>
+          <a:fillRef idx="1">
+            <a:schemeClr val="accent1"/>
+          </a:fillRef>
+          <a:effectRef idx="0">
+            <a:schemeClr val="accent1"/>
+          </a:effectRef>
+          <a:fontRef idx="minor">
+            <a:schemeClr val="lt1"/>
+          </a:fontRef>
+        </p:style>
+        <p:txBody>
+          <a:bodyPr lIns="0" tIns="0" rIns="0" bIns="0" rtlCol="0" anchor="ctr"/>
+          <a:lstStyle/>
+          <a:p>
+            <a:pPr algn="ctr"/>
+            <a:r>
+              <a:rPr lang="de-DE" sz="4000" b="1" dirty="0">
+                <a:solidFill>
+                  <a:schemeClr val="tx1"/>
+                </a:solidFill>
+              </a:rPr>
+              <a:t>2</a:t>
+            </a:r>
+          </a:p>
+        </p:txBody>
+      </p:sp>
+      <p:sp>
+        <p:nvSpPr>
+          <p:cNvPr id="17" name="Ellipse 16">
+            <a:extLst>
+              <a:ext uri="{FF2B5EF4-FFF2-40B4-BE49-F238E27FC236}">
+                <a16:creationId xmlns:a16="http://schemas.microsoft.com/office/drawing/2014/main" id="{F8526C6F-D07C-B179-E6D5-138F54256EA9}"/>
+              </a:ext>
+            </a:extLst>
+          </p:cNvPr>
+          <p:cNvSpPr/>
+          <p:nvPr/>
+        </p:nvSpPr>
+        <p:spPr>
+          <a:xfrm>
+            <a:off x="7154899" y="1320807"/>
+            <a:ext cx="923924" cy="923924"/>
+          </a:xfrm>
+          <a:prstGeom prst="ellipse">
+            <a:avLst/>
+          </a:prstGeom>
+          <a:solidFill>
+            <a:srgbClr val="E3E9EA"/>
+          </a:solidFill>
+          <a:ln>
+            <a:solidFill>
+              <a:srgbClr val="00336E"/>
+            </a:solidFill>
+          </a:ln>
+        </p:spPr>
+        <p:style>
+          <a:lnRef idx="2">
+            <a:schemeClr val="accent1">
+              <a:shade val="15000"/>
+            </a:schemeClr>
+          </a:lnRef>
+          <a:fillRef idx="1">
+            <a:schemeClr val="accent1"/>
+          </a:fillRef>
+          <a:effectRef idx="0">
+            <a:schemeClr val="accent1"/>
+          </a:effectRef>
+          <a:fontRef idx="minor">
+            <a:schemeClr val="lt1"/>
+          </a:fontRef>
+        </p:style>
+        <p:txBody>
+          <a:bodyPr lIns="0" tIns="0" rIns="0" bIns="0" rtlCol="0" anchor="ctr"/>
+          <a:lstStyle/>
+          <a:p>
+            <a:pPr algn="ctr"/>
+            <a:r>
+              <a:rPr lang="de-DE" sz="4000" b="1" dirty="0">
+                <a:solidFill>
+                  <a:schemeClr val="tx1"/>
+                </a:solidFill>
+              </a:rPr>
+              <a:t>3</a:t>
+            </a:r>
+          </a:p>
+        </p:txBody>
+      </p:sp>
+      <p:sp>
+        <p:nvSpPr>
+          <p:cNvPr id="19" name="Ellipse 18">
+            <a:extLst>
+              <a:ext uri="{FF2B5EF4-FFF2-40B4-BE49-F238E27FC236}">
+                <a16:creationId xmlns:a16="http://schemas.microsoft.com/office/drawing/2014/main" id="{4C441C38-3488-305A-CB22-B506AAE73ED5}"/>
+              </a:ext>
+            </a:extLst>
+          </p:cNvPr>
+          <p:cNvSpPr/>
+          <p:nvPr/>
+        </p:nvSpPr>
+        <p:spPr>
+          <a:xfrm>
+            <a:off x="10196621" y="1320807"/>
+            <a:ext cx="923924" cy="923924"/>
+          </a:xfrm>
+          <a:prstGeom prst="ellipse">
+            <a:avLst/>
+          </a:prstGeom>
+          <a:solidFill>
+            <a:srgbClr val="E3E9EA"/>
+          </a:solidFill>
+          <a:ln>
+            <a:solidFill>
+              <a:srgbClr val="00336E"/>
+            </a:solidFill>
+          </a:ln>
+        </p:spPr>
+        <p:style>
+          <a:lnRef idx="2">
+            <a:schemeClr val="accent1">
+              <a:shade val="15000"/>
+            </a:schemeClr>
+          </a:lnRef>
+          <a:fillRef idx="1">
+            <a:schemeClr val="accent1"/>
+          </a:fillRef>
+          <a:effectRef idx="0">
+            <a:schemeClr val="accent1"/>
+          </a:effectRef>
+          <a:fontRef idx="minor">
+            <a:schemeClr val="lt1"/>
+          </a:fontRef>
+        </p:style>
+        <p:txBody>
+          <a:bodyPr lIns="0" tIns="0" rIns="0" bIns="0" rtlCol="0" anchor="ctr"/>
+          <a:lstStyle/>
+          <a:p>
+            <a:pPr algn="ctr"/>
+            <a:r>
+              <a:rPr lang="de-DE" sz="4000" b="1" dirty="0">
+                <a:solidFill>
+                  <a:schemeClr val="tx1"/>
+                </a:solidFill>
+              </a:rPr>
+              <a:t>4</a:t>
+            </a:r>
+          </a:p>
+        </p:txBody>
+      </p:sp>
+      <p:sp>
+        <p:nvSpPr>
+          <p:cNvPr id="26" name="Textfeld 25">
+            <a:extLst>
+              <a:ext uri="{FF2B5EF4-FFF2-40B4-BE49-F238E27FC236}">
+                <a16:creationId xmlns:a16="http://schemas.microsoft.com/office/drawing/2014/main" id="{13A1CB1A-0757-343B-CB29-E3F77957FADE}"/>
               </a:ext>
             </a:extLst>
           </p:cNvPr>
@@ -2868,8 +3541,8 @@
         </p:nvSpPr>
         <p:spPr>
           <a:xfrm>
-            <a:off x="2362202" y="2717800"/>
-            <a:ext cx="4296625" cy="923330"/>
+            <a:off x="3715226" y="2411399"/>
+            <a:ext cx="1945345" cy="1015663"/>
           </a:xfrm>
           <a:prstGeom prst="rect">
             <a:avLst/>
@@ -2877,134 +3550,113 @@
           <a:noFill/>
         </p:spPr>
         <p:txBody>
-          <a:bodyPr wrap="none" rtlCol="0">
+          <a:bodyPr wrap="square" rtlCol="0">
             <a:spAutoFit/>
           </a:bodyPr>
           <a:lstStyle/>
           <a:p>
             <a:r>
-              <a:rPr lang="de-DE" dirty="0"/>
-              <a:t>Show EA </a:t>
-            </a:r>
-            <a:r>
-              <a:rPr lang="de-DE" dirty="0" err="1"/>
-              <a:t>results</a:t>
-            </a:r>
-            <a:r>
-              <a:rPr lang="de-DE" dirty="0"/>
-              <a:t>, </a:t>
-            </a:r>
-            <a:r>
-              <a:rPr lang="de-DE" dirty="0" err="1"/>
-              <a:t>wiring</a:t>
-            </a:r>
-            <a:r>
-              <a:rPr lang="de-DE" dirty="0"/>
-              <a:t> </a:t>
-            </a:r>
-            <a:r>
-              <a:rPr lang="de-DE" dirty="0" err="1"/>
-              <a:t>of</a:t>
-            </a:r>
-            <a:r>
-              <a:rPr lang="de-DE" dirty="0"/>
-              <a:t> </a:t>
-            </a:r>
-            <a:r>
-              <a:rPr lang="de-DE" dirty="0" err="1"/>
-              <a:t>lookup</a:t>
-            </a:r>
-            <a:r>
-              <a:rPr lang="de-DE" dirty="0"/>
-              <a:t> </a:t>
-            </a:r>
-            <a:r>
-              <a:rPr lang="de-DE" dirty="0" err="1"/>
-              <a:t>solution</a:t>
-            </a:r>
-            <a:endParaRPr lang="de-DE" dirty="0"/>
-          </a:p>
-          <a:p>
-            <a:endParaRPr lang="de-DE" dirty="0"/>
-          </a:p>
-          <a:p>
-            <a:r>
-              <a:rPr lang="de-DE" dirty="0"/>
-              <a:t>EA </a:t>
-            </a:r>
-            <a:r>
-              <a:rPr lang="de-DE" dirty="0" err="1"/>
-              <a:t>solution</a:t>
-            </a:r>
-            <a:r>
-              <a:rPr lang="de-DE" dirty="0"/>
-              <a:t> </a:t>
-            </a:r>
-            <a:r>
-              <a:rPr lang="de-DE" dirty="0" err="1"/>
-              <a:t>beats</a:t>
-            </a:r>
-            <a:r>
-              <a:rPr lang="de-DE" dirty="0"/>
-              <a:t> </a:t>
-            </a:r>
-            <a:r>
-              <a:rPr lang="de-DE" dirty="0" err="1"/>
-              <a:t>lookup</a:t>
-            </a:r>
-            <a:r>
-              <a:rPr lang="de-DE" dirty="0"/>
-              <a:t> – </a:t>
-            </a:r>
-            <a:r>
-              <a:rPr lang="de-DE" dirty="0" err="1"/>
-              <a:t>why</a:t>
-            </a:r>
-            <a:r>
-              <a:rPr lang="de-DE" dirty="0"/>
-              <a:t>?</a:t>
-            </a:r>
+              <a:rPr lang="en-US" sz="1200" b="1" noProof="0" dirty="0"/>
+              <a:t>Training &amp; Testing</a:t>
+            </a:r>
+          </a:p>
+          <a:p>
+            <a:r>
+              <a:rPr lang="en-US" sz="1200" dirty="0"/>
+              <a:t>Train variants w/ variable evolution and test performance and adaptability</a:t>
+            </a:r>
+            <a:endParaRPr lang="en-US" sz="1200" noProof="0" dirty="0"/>
           </a:p>
         </p:txBody>
       </p:sp>
       <p:sp>
         <p:nvSpPr>
-          <p:cNvPr id="5" name="Foliennummernplatzhalter 4">
+          <p:cNvPr id="27" name="Textfeld 26">
             <a:extLst>
               <a:ext uri="{FF2B5EF4-FFF2-40B4-BE49-F238E27FC236}">
-                <a16:creationId xmlns:a16="http://schemas.microsoft.com/office/drawing/2014/main" id="{B50F44B4-89B9-A4E1-D66B-1DE6C63163C2}"/>
+                <a16:creationId xmlns:a16="http://schemas.microsoft.com/office/drawing/2014/main" id="{3C03B70E-AB10-8998-1F7A-B05E6C90849C}"/>
               </a:ext>
             </a:extLst>
           </p:cNvPr>
-          <p:cNvSpPr>
-            <a:spLocks noGrp="1"/>
-          </p:cNvSpPr>
-          <p:nvPr>
-            <p:ph type="sldNum" sz="quarter" idx="4294967295"/>
-          </p:nvPr>
+          <p:cNvSpPr txBox="1"/>
+          <p:nvPr/>
         </p:nvSpPr>
         <p:spPr>
           <a:xfrm>
-            <a:off x="8610600" y="6356350"/>
-            <a:ext cx="2743200" cy="365125"/>
+            <a:off x="6950457" y="2411399"/>
+            <a:ext cx="1945345" cy="1015663"/>
           </a:xfrm>
+          <a:prstGeom prst="rect">
+            <a:avLst/>
+          </a:prstGeom>
+          <a:noFill/>
         </p:spPr>
         <p:txBody>
-          <a:bodyPr/>
+          <a:bodyPr wrap="square" rtlCol="0">
+            <a:spAutoFit/>
+          </a:bodyPr>
           <a:lstStyle/>
           <a:p>
-            <a:fld id="{001D04CD-A18E-4C48-A0D4-2F175BEDACF1}" type="slidenum">
-              <a:rPr lang="de-DE" smtClean="0"/>
-              <a:t>12</a:t>
-            </a:fld>
-            <a:endParaRPr lang="de-DE"/>
+            <a:r>
+              <a:rPr lang="en-US" sz="1200" b="1" noProof="0" dirty="0"/>
+              <a:t>Ablation</a:t>
+            </a:r>
+          </a:p>
+          <a:p>
+            <a:r>
+              <a:rPr lang="en-US" sz="1200" dirty="0"/>
+              <a:t>Ablate to necessary core and test adaptability on withheld scenarios</a:t>
+            </a:r>
+            <a:endParaRPr lang="en-US" sz="1200" noProof="0" dirty="0"/>
+          </a:p>
+        </p:txBody>
+      </p:sp>
+      <p:sp>
+        <p:nvSpPr>
+          <p:cNvPr id="28" name="Textfeld 27">
+            <a:extLst>
+              <a:ext uri="{FF2B5EF4-FFF2-40B4-BE49-F238E27FC236}">
+                <a16:creationId xmlns:a16="http://schemas.microsoft.com/office/drawing/2014/main" id="{D7BEC99A-E069-BD09-FFA4-859838BBD7B6}"/>
+              </a:ext>
+            </a:extLst>
+          </p:cNvPr>
+          <p:cNvSpPr txBox="1"/>
+          <p:nvPr/>
+        </p:nvSpPr>
+        <p:spPr>
+          <a:xfrm>
+            <a:off x="9685910" y="2411399"/>
+            <a:ext cx="1945345" cy="1015663"/>
+          </a:xfrm>
+          <a:prstGeom prst="rect">
+            <a:avLst/>
+          </a:prstGeom>
+          <a:noFill/>
+        </p:spPr>
+        <p:txBody>
+          <a:bodyPr wrap="square" rtlCol="0">
+            <a:spAutoFit/>
+          </a:bodyPr>
+          <a:lstStyle/>
+          <a:p>
+            <a:r>
+              <a:rPr lang="en-US" sz="1200" b="1" noProof="0" dirty="0"/>
+              <a:t>Wiring analysis</a:t>
+            </a:r>
+          </a:p>
+          <a:p>
+            <a:r>
+              <a:rPr lang="en-US" sz="1200" dirty="0"/>
+              <a:t>Analyze common patterns in adaptors and compare with biological wiring patterns</a:t>
+            </a:r>
+            <a:endParaRPr lang="en-US" sz="1200" noProof="0" dirty="0"/>
           </a:p>
         </p:txBody>
       </p:sp>
     </p:spTree>
     <p:extLst>
       <p:ext uri="{BB962C8B-B14F-4D97-AF65-F5344CB8AC3E}">
-        <p14:creationId xmlns:p14="http://schemas.microsoft.com/office/powerpoint/2010/main" val="1168625164"/>
+        <p14:creationId xmlns:p14="http://schemas.microsoft.com/office/powerpoint/2010/main" val="2777632668"/>
       </p:ext>
     </p:extLst>
   </p:cSld>
@@ -3045,7 +3697,7 @@
         </p:nvSpPr>
         <p:spPr>
           <a:xfrm flipH="1">
-            <a:off x="8657661" y="-2930196"/>
+            <a:off x="8657661" y="-2955952"/>
             <a:ext cx="6300782" cy="3481390"/>
           </a:xfrm>
           <a:custGeom>
@@ -3204,7 +3856,7 @@
         </p:nvSpPr>
         <p:spPr>
           <a:xfrm>
-            <a:off x="10287922" y="153126"/>
+            <a:off x="10287922" y="17905"/>
             <a:ext cx="1904078" cy="461665"/>
           </a:xfrm>
           <a:prstGeom prst="rect">
@@ -3300,7 +3952,7 @@
         <p:spPr>
           <a:xfrm>
             <a:off x="3119757" y="5239651"/>
-            <a:ext cx="8120204" cy="1149097"/>
+            <a:ext cx="8120204" cy="1470339"/>
           </a:xfrm>
           <a:prstGeom prst="rect">
             <a:avLst/>
@@ -3351,7 +4003,7 @@
                 <a:ea typeface="MS Mincho" panose="02020609040205080304" pitchFamily="49" charset="-128"/>
                 <a:cs typeface="Times New Roman" panose="02020603050405020304" pitchFamily="18" charset="0"/>
               </a:rPr>
-              <a:t>In generation 0:	mean = 19.5,	median = 19.2,	max = 29.7</a:t>
+              <a:t>In generation 0:	mean = 19.5,		median = 19.2,	max = 29.7</a:t>
             </a:r>
             <a:br>
               <a:rPr lang="en-US" sz="1800" dirty="0">
@@ -3372,6 +4024,72 @@
               <a:effectLst/>
               <a:ea typeface="MS Mincho" panose="02020609040205080304" pitchFamily="49" charset="-128"/>
               <a:cs typeface="Times New Roman" panose="02020603050405020304" pitchFamily="18" charset="0"/>
+            </a:endParaRPr>
+          </a:p>
+        </p:txBody>
+      </p:sp>
+      <p:sp>
+        <p:nvSpPr>
+          <p:cNvPr id="6" name="Ellipse 5">
+            <a:extLst>
+              <a:ext uri="{FF2B5EF4-FFF2-40B4-BE49-F238E27FC236}">
+                <a16:creationId xmlns:a16="http://schemas.microsoft.com/office/drawing/2014/main" id="{544C170F-5CD0-79A4-C493-1392B7DA2501}"/>
+              </a:ext>
+            </a:extLst>
+          </p:cNvPr>
+          <p:cNvSpPr/>
+          <p:nvPr/>
+        </p:nvSpPr>
+        <p:spPr>
+          <a:xfrm>
+            <a:off x="10012084" y="66307"/>
+            <a:ext cx="340233" cy="340233"/>
+          </a:xfrm>
+          <a:prstGeom prst="ellipse">
+            <a:avLst/>
+          </a:prstGeom>
+          <a:solidFill>
+            <a:srgbClr val="E3E9EA"/>
+          </a:solidFill>
+          <a:ln>
+            <a:solidFill>
+              <a:srgbClr val="00336E"/>
+            </a:solidFill>
+          </a:ln>
+        </p:spPr>
+        <p:style>
+          <a:lnRef idx="2">
+            <a:schemeClr val="accent1">
+              <a:shade val="15000"/>
+            </a:schemeClr>
+          </a:lnRef>
+          <a:fillRef idx="1">
+            <a:schemeClr val="accent1"/>
+          </a:fillRef>
+          <a:effectRef idx="0">
+            <a:schemeClr val="accent1"/>
+          </a:effectRef>
+          <a:fontRef idx="minor">
+            <a:schemeClr val="lt1"/>
+          </a:fontRef>
+        </p:style>
+        <p:txBody>
+          <a:bodyPr lIns="0" tIns="0" rIns="0" bIns="0" rtlCol="0" anchor="ctr"/>
+          <a:lstStyle/>
+          <a:p>
+            <a:pPr algn="ctr"/>
+            <a:r>
+              <a:rPr lang="de-DE" b="1" dirty="0">
+                <a:solidFill>
+                  <a:schemeClr val="tx1"/>
+                </a:solidFill>
+              </a:rPr>
+              <a:t>1</a:t>
+            </a:r>
+            <a:endParaRPr lang="de-DE" sz="900" b="1" dirty="0">
+              <a:solidFill>
+                <a:schemeClr val="tx1"/>
+              </a:solidFill>
             </a:endParaRPr>
           </a:p>
         </p:txBody>
@@ -3386,6 +4104,18 @@
   <p:clrMapOvr>
     <a:masterClrMapping/>
   </p:clrMapOvr>
+  <mc:AlternateContent xmlns:mc="http://schemas.openxmlformats.org/markup-compatibility/2006">
+    <mc:Choice xmlns:p159="http://schemas.microsoft.com/office/powerpoint/2015/09/main" Requires="p159">
+      <p:transition xmlns:p14="http://schemas.microsoft.com/office/powerpoint/2010/main" spd="slow" p14:dur="2000">
+        <p159:morph option="byObject"/>
+      </p:transition>
+    </mc:Choice>
+    <mc:Fallback>
+      <p:transition spd="slow">
+        <p:fade/>
+      </p:transition>
+    </mc:Fallback>
+  </mc:AlternateContent>
 </p:sld>
 </file>
 
@@ -3414,10 +4144,628 @@
       </p:grpSpPr>
       <p:sp>
         <p:nvSpPr>
-          <p:cNvPr id="2" name="Freihandform: Form 1">
+          <p:cNvPr id="7" name="Textfeld 6">
             <a:extLst>
               <a:ext uri="{FF2B5EF4-FFF2-40B4-BE49-F238E27FC236}">
-                <a16:creationId xmlns:a16="http://schemas.microsoft.com/office/drawing/2014/main" id="{52F93A49-5049-7E4C-7F4F-9C5919C4B5A5}"/>
+                <a16:creationId xmlns:a16="http://schemas.microsoft.com/office/drawing/2014/main" id="{462CA17C-D3A2-BD63-7ACB-E8ABDA6D8657}"/>
+              </a:ext>
+            </a:extLst>
+          </p:cNvPr>
+          <p:cNvSpPr txBox="1"/>
+          <p:nvPr/>
+        </p:nvSpPr>
+        <p:spPr>
+          <a:xfrm>
+            <a:off x="304129" y="957362"/>
+            <a:ext cx="5674176" cy="2810706"/>
+          </a:xfrm>
+          <a:prstGeom prst="rect">
+            <a:avLst/>
+          </a:prstGeom>
+          <a:noFill/>
+        </p:spPr>
+        <p:txBody>
+          <a:bodyPr wrap="square">
+            <a:spAutoFit/>
+          </a:bodyPr>
+          <a:lstStyle/>
+          <a:p>
+            <a:pPr>
+              <a:lnSpc>
+                <a:spcPct val="115000"/>
+              </a:lnSpc>
+              <a:spcAft>
+                <a:spcPts val="1000"/>
+              </a:spcAft>
+              <a:buNone/>
+            </a:pPr>
+            <a:r>
+              <a:rPr lang="en-US" sz="1800" dirty="0">
+                <a:effectLst/>
+                <a:ea typeface="MS Mincho" panose="02020609040205080304" pitchFamily="49" charset="-128"/>
+                <a:cs typeface="Times New Roman" panose="02020603050405020304" pitchFamily="18" charset="0"/>
+              </a:rPr>
+              <a:t>Optimal solution?</a:t>
+            </a:r>
+          </a:p>
+          <a:p>
+            <a:pPr>
+              <a:lnSpc>
+                <a:spcPct val="115000"/>
+              </a:lnSpc>
+              <a:spcAft>
+                <a:spcPts val="1000"/>
+              </a:spcAft>
+              <a:buNone/>
+            </a:pPr>
+            <a:endParaRPr lang="en-US" dirty="0">
+              <a:ea typeface="MS Mincho" panose="02020609040205080304" pitchFamily="49" charset="-128"/>
+              <a:cs typeface="Times New Roman" panose="02020603050405020304" pitchFamily="18" charset="0"/>
+            </a:endParaRPr>
+          </a:p>
+          <a:p>
+            <a:pPr>
+              <a:lnSpc>
+                <a:spcPct val="115000"/>
+              </a:lnSpc>
+              <a:spcAft>
+                <a:spcPts val="1000"/>
+              </a:spcAft>
+              <a:buNone/>
+            </a:pPr>
+            <a:r>
+              <a:rPr lang="en-US" sz="1800" dirty="0">
+                <a:effectLst/>
+                <a:ea typeface="MS Mincho" panose="02020609040205080304" pitchFamily="49" charset="-128"/>
+                <a:cs typeface="Times New Roman" panose="02020603050405020304" pitchFamily="18" charset="0"/>
+              </a:rPr>
+              <a:t>If on food → stay and eat</a:t>
+            </a:r>
+          </a:p>
+          <a:p>
+            <a:pPr>
+              <a:lnSpc>
+                <a:spcPct val="115000"/>
+              </a:lnSpc>
+              <a:spcAft>
+                <a:spcPts val="1000"/>
+              </a:spcAft>
+              <a:buNone/>
+            </a:pPr>
+            <a:r>
+              <a:rPr lang="en-US" sz="1800" dirty="0">
+                <a:effectLst/>
+                <a:ea typeface="MS Mincho" panose="02020609040205080304" pitchFamily="49" charset="-128"/>
+                <a:cs typeface="Times New Roman" panose="02020603050405020304" pitchFamily="18" charset="0"/>
+              </a:rPr>
+              <a:t>If sensing food in </a:t>
+            </a:r>
+            <a:r>
+              <a:rPr lang="en-US" dirty="0">
+                <a:ea typeface="MS Mincho" panose="02020609040205080304" pitchFamily="49" charset="-128"/>
+                <a:cs typeface="Times New Roman" panose="02020603050405020304" pitchFamily="18" charset="0"/>
+              </a:rPr>
+              <a:t>one direction → move in that direction</a:t>
+            </a:r>
+          </a:p>
+          <a:p>
+            <a:pPr>
+              <a:lnSpc>
+                <a:spcPct val="115000"/>
+              </a:lnSpc>
+              <a:spcAft>
+                <a:spcPts val="1000"/>
+              </a:spcAft>
+              <a:buNone/>
+            </a:pPr>
+            <a:r>
+              <a:rPr lang="en-US" dirty="0">
+                <a:ea typeface="MS Mincho" panose="02020609040205080304" pitchFamily="49" charset="-128"/>
+                <a:cs typeface="Times New Roman" panose="02020603050405020304" pitchFamily="18" charset="0"/>
+              </a:rPr>
+              <a:t>If not sensing any food → move away in random direction  </a:t>
+            </a:r>
+            <a:endParaRPr lang="de-DE" sz="1800" dirty="0">
+              <a:effectLst/>
+              <a:ea typeface="MS Mincho" panose="02020609040205080304" pitchFamily="49" charset="-128"/>
+              <a:cs typeface="Times New Roman" panose="02020603050405020304" pitchFamily="18" charset="0"/>
+            </a:endParaRPr>
+          </a:p>
+        </p:txBody>
+      </p:sp>
+      <p:pic>
+        <p:nvPicPr>
+          <p:cNvPr id="9" name="Grafik 8">
+            <a:extLst>
+              <a:ext uri="{FF2B5EF4-FFF2-40B4-BE49-F238E27FC236}">
+                <a16:creationId xmlns:a16="http://schemas.microsoft.com/office/drawing/2014/main" id="{2CDF4BD9-04AD-868F-5E50-A05E5AF09D15}"/>
+              </a:ext>
+            </a:extLst>
+          </p:cNvPr>
+          <p:cNvPicPr>
+            <a:picLocks noChangeAspect="1"/>
+          </p:cNvPicPr>
+          <p:nvPr/>
+        </p:nvPicPr>
+        <p:blipFill>
+          <a:blip r:embed="rId2">
+            <a:extLst>
+              <a:ext uri="{28A0092B-C50C-407E-A947-70E740481C1C}">
+                <a14:useLocalDpi xmlns:a14="http://schemas.microsoft.com/office/drawing/2010/main" val="0"/>
+              </a:ext>
+            </a:extLst>
+          </a:blip>
+          <a:stretch>
+            <a:fillRect/>
+          </a:stretch>
+        </p:blipFill>
+        <p:spPr>
+          <a:xfrm>
+            <a:off x="5978305" y="857873"/>
+            <a:ext cx="5797649" cy="5289430"/>
+          </a:xfrm>
+          <a:prstGeom prst="rect">
+            <a:avLst/>
+          </a:prstGeom>
+        </p:spPr>
+      </p:pic>
+      <p:sp>
+        <p:nvSpPr>
+          <p:cNvPr id="10" name="Textfeld 9">
+            <a:extLst>
+              <a:ext uri="{FF2B5EF4-FFF2-40B4-BE49-F238E27FC236}">
+                <a16:creationId xmlns:a16="http://schemas.microsoft.com/office/drawing/2014/main" id="{3BE16239-1F16-68AE-0F57-A3946EFBB65B}"/>
+              </a:ext>
+            </a:extLst>
+          </p:cNvPr>
+          <p:cNvSpPr txBox="1"/>
+          <p:nvPr/>
+        </p:nvSpPr>
+        <p:spPr>
+          <a:xfrm>
+            <a:off x="6096000" y="5105227"/>
+            <a:ext cx="736099" cy="369332"/>
+          </a:xfrm>
+          <a:prstGeom prst="rect">
+            <a:avLst/>
+          </a:prstGeom>
+          <a:noFill/>
+        </p:spPr>
+        <p:txBody>
+          <a:bodyPr wrap="none" rtlCol="0">
+            <a:spAutoFit/>
+          </a:bodyPr>
+          <a:lstStyle/>
+          <a:p>
+            <a:r>
+              <a:rPr lang="de-DE" dirty="0" err="1">
+                <a:latin typeface="Courier New" panose="02070309020205020404" pitchFamily="49" charset="0"/>
+                <a:cs typeface="Courier New" panose="02070309020205020404" pitchFamily="49" charset="0"/>
+              </a:rPr>
+              <a:t>stay</a:t>
+            </a:r>
+            <a:endParaRPr lang="de-DE" dirty="0">
+              <a:latin typeface="Courier New" panose="02070309020205020404" pitchFamily="49" charset="0"/>
+              <a:cs typeface="Courier New" panose="02070309020205020404" pitchFamily="49" charset="0"/>
+            </a:endParaRPr>
+          </a:p>
+        </p:txBody>
+      </p:sp>
+      <p:sp>
+        <p:nvSpPr>
+          <p:cNvPr id="11" name="Textfeld 10">
+            <a:extLst>
+              <a:ext uri="{FF2B5EF4-FFF2-40B4-BE49-F238E27FC236}">
+                <a16:creationId xmlns:a16="http://schemas.microsoft.com/office/drawing/2014/main" id="{75587D1E-BB4D-2FFE-382F-9A73D4BE4336}"/>
+              </a:ext>
+            </a:extLst>
+          </p:cNvPr>
+          <p:cNvSpPr txBox="1"/>
+          <p:nvPr/>
+        </p:nvSpPr>
+        <p:spPr>
+          <a:xfrm>
+            <a:off x="7161042" y="5105227"/>
+            <a:ext cx="1011815" cy="369332"/>
+          </a:xfrm>
+          <a:prstGeom prst="rect">
+            <a:avLst/>
+          </a:prstGeom>
+          <a:noFill/>
+        </p:spPr>
+        <p:txBody>
+          <a:bodyPr wrap="none" rtlCol="0">
+            <a:spAutoFit/>
+          </a:bodyPr>
+          <a:lstStyle/>
+          <a:p>
+            <a:r>
+              <a:rPr lang="de-DE" dirty="0" err="1">
+                <a:latin typeface="Courier New" panose="02070309020205020404" pitchFamily="49" charset="0"/>
+                <a:cs typeface="Courier New" panose="02070309020205020404" pitchFamily="49" charset="0"/>
+              </a:rPr>
+              <a:t>move</a:t>
+            </a:r>
+            <a:r>
+              <a:rPr lang="de-DE" dirty="0">
+                <a:latin typeface="Courier New" panose="02070309020205020404" pitchFamily="49" charset="0"/>
+                <a:cs typeface="Courier New" panose="02070309020205020404" pitchFamily="49" charset="0"/>
+              </a:rPr>
+              <a:t> N</a:t>
+            </a:r>
+          </a:p>
+        </p:txBody>
+      </p:sp>
+      <p:sp>
+        <p:nvSpPr>
+          <p:cNvPr id="12" name="Textfeld 11">
+            <a:extLst>
+              <a:ext uri="{FF2B5EF4-FFF2-40B4-BE49-F238E27FC236}">
+                <a16:creationId xmlns:a16="http://schemas.microsoft.com/office/drawing/2014/main" id="{ADDA3C6D-4D64-984D-082E-A43517FF916D}"/>
+              </a:ext>
+            </a:extLst>
+          </p:cNvPr>
+          <p:cNvSpPr txBox="1"/>
+          <p:nvPr/>
+        </p:nvSpPr>
+        <p:spPr>
+          <a:xfrm>
+            <a:off x="8381661" y="5105227"/>
+            <a:ext cx="1011815" cy="369332"/>
+          </a:xfrm>
+          <a:prstGeom prst="rect">
+            <a:avLst/>
+          </a:prstGeom>
+          <a:noFill/>
+        </p:spPr>
+        <p:txBody>
+          <a:bodyPr wrap="none" rtlCol="0">
+            <a:spAutoFit/>
+          </a:bodyPr>
+          <a:lstStyle/>
+          <a:p>
+            <a:r>
+              <a:rPr lang="de-DE" dirty="0" err="1">
+                <a:latin typeface="Courier New" panose="02070309020205020404" pitchFamily="49" charset="0"/>
+                <a:cs typeface="Courier New" panose="02070309020205020404" pitchFamily="49" charset="0"/>
+              </a:rPr>
+              <a:t>move</a:t>
+            </a:r>
+            <a:r>
+              <a:rPr lang="de-DE" dirty="0">
+                <a:latin typeface="Courier New" panose="02070309020205020404" pitchFamily="49" charset="0"/>
+                <a:cs typeface="Courier New" panose="02070309020205020404" pitchFamily="49" charset="0"/>
+              </a:rPr>
+              <a:t> E</a:t>
+            </a:r>
+          </a:p>
+        </p:txBody>
+      </p:sp>
+      <p:sp>
+        <p:nvSpPr>
+          <p:cNvPr id="13" name="Textfeld 12">
+            <a:extLst>
+              <a:ext uri="{FF2B5EF4-FFF2-40B4-BE49-F238E27FC236}">
+                <a16:creationId xmlns:a16="http://schemas.microsoft.com/office/drawing/2014/main" id="{97E61C76-8072-88C4-6EBC-CB651B477053}"/>
+              </a:ext>
+            </a:extLst>
+          </p:cNvPr>
+          <p:cNvSpPr txBox="1"/>
+          <p:nvPr/>
+        </p:nvSpPr>
+        <p:spPr>
+          <a:xfrm>
+            <a:off x="9613021" y="5105227"/>
+            <a:ext cx="1011815" cy="369332"/>
+          </a:xfrm>
+          <a:prstGeom prst="rect">
+            <a:avLst/>
+          </a:prstGeom>
+          <a:noFill/>
+        </p:spPr>
+        <p:txBody>
+          <a:bodyPr wrap="none" rtlCol="0">
+            <a:spAutoFit/>
+          </a:bodyPr>
+          <a:lstStyle/>
+          <a:p>
+            <a:r>
+              <a:rPr lang="de-DE" dirty="0" err="1">
+                <a:latin typeface="Courier New" panose="02070309020205020404" pitchFamily="49" charset="0"/>
+                <a:cs typeface="Courier New" panose="02070309020205020404" pitchFamily="49" charset="0"/>
+              </a:rPr>
+              <a:t>move</a:t>
+            </a:r>
+            <a:r>
+              <a:rPr lang="de-DE" dirty="0">
+                <a:latin typeface="Courier New" panose="02070309020205020404" pitchFamily="49" charset="0"/>
+                <a:cs typeface="Courier New" panose="02070309020205020404" pitchFamily="49" charset="0"/>
+              </a:rPr>
+              <a:t> S</a:t>
+            </a:r>
+          </a:p>
+        </p:txBody>
+      </p:sp>
+      <p:sp>
+        <p:nvSpPr>
+          <p:cNvPr id="14" name="Textfeld 13">
+            <a:extLst>
+              <a:ext uri="{FF2B5EF4-FFF2-40B4-BE49-F238E27FC236}">
+                <a16:creationId xmlns:a16="http://schemas.microsoft.com/office/drawing/2014/main" id="{E12D5DC5-7A66-E0FC-B75F-AB1E87413F17}"/>
+              </a:ext>
+            </a:extLst>
+          </p:cNvPr>
+          <p:cNvSpPr txBox="1"/>
+          <p:nvPr/>
+        </p:nvSpPr>
+        <p:spPr>
+          <a:xfrm>
+            <a:off x="10744365" y="5105227"/>
+            <a:ext cx="1011815" cy="369332"/>
+          </a:xfrm>
+          <a:prstGeom prst="rect">
+            <a:avLst/>
+          </a:prstGeom>
+          <a:noFill/>
+        </p:spPr>
+        <p:txBody>
+          <a:bodyPr wrap="none" rtlCol="0">
+            <a:spAutoFit/>
+          </a:bodyPr>
+          <a:lstStyle/>
+          <a:p>
+            <a:r>
+              <a:rPr lang="de-DE" dirty="0" err="1">
+                <a:latin typeface="Courier New" panose="02070309020205020404" pitchFamily="49" charset="0"/>
+                <a:cs typeface="Courier New" panose="02070309020205020404" pitchFamily="49" charset="0"/>
+              </a:rPr>
+              <a:t>move</a:t>
+            </a:r>
+            <a:r>
+              <a:rPr lang="de-DE" dirty="0">
+                <a:latin typeface="Courier New" panose="02070309020205020404" pitchFamily="49" charset="0"/>
+                <a:cs typeface="Courier New" panose="02070309020205020404" pitchFamily="49" charset="0"/>
+              </a:rPr>
+              <a:t> W</a:t>
+            </a:r>
+          </a:p>
+        </p:txBody>
+      </p:sp>
+      <p:sp>
+        <p:nvSpPr>
+          <p:cNvPr id="15" name="Textfeld 14">
+            <a:extLst>
+              <a:ext uri="{FF2B5EF4-FFF2-40B4-BE49-F238E27FC236}">
+                <a16:creationId xmlns:a16="http://schemas.microsoft.com/office/drawing/2014/main" id="{F1353E1B-0D72-EB8B-A6A2-A31D3D463054}"/>
+              </a:ext>
+            </a:extLst>
+          </p:cNvPr>
+          <p:cNvSpPr txBox="1"/>
+          <p:nvPr/>
+        </p:nvSpPr>
+        <p:spPr>
+          <a:xfrm>
+            <a:off x="6025042" y="1356282"/>
+            <a:ext cx="1149674" cy="369332"/>
+          </a:xfrm>
+          <a:prstGeom prst="rect">
+            <a:avLst/>
+          </a:prstGeom>
+          <a:noFill/>
+        </p:spPr>
+        <p:txBody>
+          <a:bodyPr wrap="none" rtlCol="0">
+            <a:spAutoFit/>
+          </a:bodyPr>
+          <a:lstStyle/>
+          <a:p>
+            <a:r>
+              <a:rPr lang="de-DE" dirty="0">
+                <a:latin typeface="Courier New" panose="02070309020205020404" pitchFamily="49" charset="0"/>
+                <a:cs typeface="Courier New" panose="02070309020205020404" pitchFamily="49" charset="0"/>
+              </a:rPr>
+              <a:t>on </a:t>
+            </a:r>
+            <a:r>
+              <a:rPr lang="de-DE" dirty="0" err="1">
+                <a:latin typeface="Courier New" panose="02070309020205020404" pitchFamily="49" charset="0"/>
+                <a:cs typeface="Courier New" panose="02070309020205020404" pitchFamily="49" charset="0"/>
+              </a:rPr>
+              <a:t>food</a:t>
+            </a:r>
+            <a:endParaRPr lang="de-DE" dirty="0">
+              <a:latin typeface="Courier New" panose="02070309020205020404" pitchFamily="49" charset="0"/>
+              <a:cs typeface="Courier New" panose="02070309020205020404" pitchFamily="49" charset="0"/>
+            </a:endParaRPr>
+          </a:p>
+        </p:txBody>
+      </p:sp>
+      <p:sp>
+        <p:nvSpPr>
+          <p:cNvPr id="16" name="Textfeld 15">
+            <a:extLst>
+              <a:ext uri="{FF2B5EF4-FFF2-40B4-BE49-F238E27FC236}">
+                <a16:creationId xmlns:a16="http://schemas.microsoft.com/office/drawing/2014/main" id="{C330CB92-1783-94C1-A8C6-EFE912692C6F}"/>
+              </a:ext>
+            </a:extLst>
+          </p:cNvPr>
+          <p:cNvSpPr txBox="1"/>
+          <p:nvPr/>
+        </p:nvSpPr>
+        <p:spPr>
+          <a:xfrm>
+            <a:off x="7281837" y="1356282"/>
+            <a:ext cx="1011815" cy="369332"/>
+          </a:xfrm>
+          <a:prstGeom prst="rect">
+            <a:avLst/>
+          </a:prstGeom>
+          <a:noFill/>
+        </p:spPr>
+        <p:txBody>
+          <a:bodyPr wrap="none" rtlCol="0">
+            <a:spAutoFit/>
+          </a:bodyPr>
+          <a:lstStyle/>
+          <a:p>
+            <a:r>
+              <a:rPr lang="de-DE" dirty="0" err="1">
+                <a:latin typeface="Courier New" panose="02070309020205020404" pitchFamily="49" charset="0"/>
+                <a:cs typeface="Courier New" panose="02070309020205020404" pitchFamily="49" charset="0"/>
+              </a:rPr>
+              <a:t>food</a:t>
+            </a:r>
+            <a:r>
+              <a:rPr lang="de-DE" dirty="0">
+                <a:latin typeface="Courier New" panose="02070309020205020404" pitchFamily="49" charset="0"/>
+                <a:cs typeface="Courier New" panose="02070309020205020404" pitchFamily="49" charset="0"/>
+              </a:rPr>
+              <a:t> N</a:t>
+            </a:r>
+          </a:p>
+        </p:txBody>
+      </p:sp>
+      <p:sp>
+        <p:nvSpPr>
+          <p:cNvPr id="17" name="Textfeld 16">
+            <a:extLst>
+              <a:ext uri="{FF2B5EF4-FFF2-40B4-BE49-F238E27FC236}">
+                <a16:creationId xmlns:a16="http://schemas.microsoft.com/office/drawing/2014/main" id="{942A1F51-9153-0948-FD60-C38605FA4317}"/>
+              </a:ext>
+            </a:extLst>
+          </p:cNvPr>
+          <p:cNvSpPr txBox="1"/>
+          <p:nvPr/>
+        </p:nvSpPr>
+        <p:spPr>
+          <a:xfrm>
+            <a:off x="8455099" y="1356282"/>
+            <a:ext cx="1011815" cy="369332"/>
+          </a:xfrm>
+          <a:prstGeom prst="rect">
+            <a:avLst/>
+          </a:prstGeom>
+          <a:noFill/>
+        </p:spPr>
+        <p:txBody>
+          <a:bodyPr wrap="none" rtlCol="0">
+            <a:spAutoFit/>
+          </a:bodyPr>
+          <a:lstStyle/>
+          <a:p>
+            <a:r>
+              <a:rPr lang="de-DE" dirty="0" err="1">
+                <a:latin typeface="Courier New" panose="02070309020205020404" pitchFamily="49" charset="0"/>
+                <a:cs typeface="Courier New" panose="02070309020205020404" pitchFamily="49" charset="0"/>
+              </a:rPr>
+              <a:t>food</a:t>
+            </a:r>
+            <a:r>
+              <a:rPr lang="de-DE" dirty="0">
+                <a:latin typeface="Courier New" panose="02070309020205020404" pitchFamily="49" charset="0"/>
+                <a:cs typeface="Courier New" panose="02070309020205020404" pitchFamily="49" charset="0"/>
+              </a:rPr>
+              <a:t> E</a:t>
+            </a:r>
+          </a:p>
+        </p:txBody>
+      </p:sp>
+      <p:sp>
+        <p:nvSpPr>
+          <p:cNvPr id="18" name="Textfeld 17">
+            <a:extLst>
+              <a:ext uri="{FF2B5EF4-FFF2-40B4-BE49-F238E27FC236}">
+                <a16:creationId xmlns:a16="http://schemas.microsoft.com/office/drawing/2014/main" id="{0654D465-8DF4-5FFE-6158-6FAD28C5C9C3}"/>
+              </a:ext>
+            </a:extLst>
+          </p:cNvPr>
+          <p:cNvSpPr txBox="1"/>
+          <p:nvPr/>
+        </p:nvSpPr>
+        <p:spPr>
+          <a:xfrm>
+            <a:off x="9597184" y="1356282"/>
+            <a:ext cx="1011815" cy="369332"/>
+          </a:xfrm>
+          <a:prstGeom prst="rect">
+            <a:avLst/>
+          </a:prstGeom>
+          <a:noFill/>
+        </p:spPr>
+        <p:txBody>
+          <a:bodyPr wrap="none" rtlCol="0">
+            <a:spAutoFit/>
+          </a:bodyPr>
+          <a:lstStyle/>
+          <a:p>
+            <a:r>
+              <a:rPr lang="de-DE" dirty="0" err="1">
+                <a:latin typeface="Courier New" panose="02070309020205020404" pitchFamily="49" charset="0"/>
+                <a:cs typeface="Courier New" panose="02070309020205020404" pitchFamily="49" charset="0"/>
+              </a:rPr>
+              <a:t>food</a:t>
+            </a:r>
+            <a:r>
+              <a:rPr lang="de-DE" dirty="0">
+                <a:latin typeface="Courier New" panose="02070309020205020404" pitchFamily="49" charset="0"/>
+                <a:cs typeface="Courier New" panose="02070309020205020404" pitchFamily="49" charset="0"/>
+              </a:rPr>
+              <a:t> S</a:t>
+            </a:r>
+          </a:p>
+        </p:txBody>
+      </p:sp>
+      <p:sp>
+        <p:nvSpPr>
+          <p:cNvPr id="19" name="Textfeld 18">
+            <a:extLst>
+              <a:ext uri="{FF2B5EF4-FFF2-40B4-BE49-F238E27FC236}">
+                <a16:creationId xmlns:a16="http://schemas.microsoft.com/office/drawing/2014/main" id="{BD475DCA-C9D5-BE70-081A-B8D088EFAD7F}"/>
+              </a:ext>
+            </a:extLst>
+          </p:cNvPr>
+          <p:cNvSpPr txBox="1"/>
+          <p:nvPr/>
+        </p:nvSpPr>
+        <p:spPr>
+          <a:xfrm>
+            <a:off x="10686569" y="1356282"/>
+            <a:ext cx="1011815" cy="369332"/>
+          </a:xfrm>
+          <a:prstGeom prst="rect">
+            <a:avLst/>
+          </a:prstGeom>
+          <a:noFill/>
+        </p:spPr>
+        <p:txBody>
+          <a:bodyPr wrap="none" rtlCol="0">
+            <a:spAutoFit/>
+          </a:bodyPr>
+          <a:lstStyle/>
+          <a:p>
+            <a:r>
+              <a:rPr lang="de-DE" dirty="0" err="1">
+                <a:latin typeface="Courier New" panose="02070309020205020404" pitchFamily="49" charset="0"/>
+                <a:cs typeface="Courier New" panose="02070309020205020404" pitchFamily="49" charset="0"/>
+              </a:rPr>
+              <a:t>food</a:t>
+            </a:r>
+            <a:r>
+              <a:rPr lang="de-DE" dirty="0">
+                <a:latin typeface="Courier New" panose="02070309020205020404" pitchFamily="49" charset="0"/>
+                <a:cs typeface="Courier New" panose="02070309020205020404" pitchFamily="49" charset="0"/>
+              </a:rPr>
+              <a:t> W</a:t>
+            </a:r>
+          </a:p>
+        </p:txBody>
+      </p:sp>
+      <p:sp>
+        <p:nvSpPr>
+          <p:cNvPr id="4" name="Freihandform: Form 3">
+            <a:extLst>
+              <a:ext uri="{FF2B5EF4-FFF2-40B4-BE49-F238E27FC236}">
+                <a16:creationId xmlns:a16="http://schemas.microsoft.com/office/drawing/2014/main" id="{CCBDF0CD-8F81-C1B3-9B67-A3F0E4D9724B}"/>
               </a:ext>
             </a:extLst>
           </p:cNvPr>
@@ -3426,7 +4774,7 @@
         </p:nvSpPr>
         <p:spPr>
           <a:xfrm flipH="1">
-            <a:off x="8657661" y="-2930196"/>
+            <a:off x="8657661" y="-2955952"/>
             <a:ext cx="6300782" cy="3481390"/>
           </a:xfrm>
           <a:custGeom>
@@ -3573,10 +4921,10 @@
       </p:sp>
       <p:sp>
         <p:nvSpPr>
-          <p:cNvPr id="3" name="Textfeld 2">
+          <p:cNvPr id="5" name="Textfeld 4">
             <a:extLst>
               <a:ext uri="{FF2B5EF4-FFF2-40B4-BE49-F238E27FC236}">
-                <a16:creationId xmlns:a16="http://schemas.microsoft.com/office/drawing/2014/main" id="{8D75CC9B-9E4B-B18B-A128-5BA123A97C84}"/>
+                <a16:creationId xmlns:a16="http://schemas.microsoft.com/office/drawing/2014/main" id="{E1086B25-A2F5-AF30-6D5C-2F5637DED068}"/>
               </a:ext>
             </a:extLst>
           </p:cNvPr>
@@ -3585,7 +4933,7 @@
         </p:nvSpPr>
         <p:spPr>
           <a:xfrm>
-            <a:off x="10287922" y="153126"/>
+            <a:off x="10287922" y="17905"/>
             <a:ext cx="1904078" cy="461665"/>
           </a:xfrm>
           <a:prstGeom prst="rect">
@@ -3632,619 +4980,67 @@
       </p:sp>
       <p:sp>
         <p:nvSpPr>
-          <p:cNvPr id="7" name="Textfeld 6">
+          <p:cNvPr id="6" name="Ellipse 5">
             <a:extLst>
               <a:ext uri="{FF2B5EF4-FFF2-40B4-BE49-F238E27FC236}">
-                <a16:creationId xmlns:a16="http://schemas.microsoft.com/office/drawing/2014/main" id="{462CA17C-D3A2-BD63-7ACB-E8ABDA6D8657}"/>
+                <a16:creationId xmlns:a16="http://schemas.microsoft.com/office/drawing/2014/main" id="{15BE45F7-AB21-1773-773B-E7B2BB23EB30}"/>
               </a:ext>
             </a:extLst>
           </p:cNvPr>
-          <p:cNvSpPr txBox="1"/>
+          <p:cNvSpPr/>
           <p:nvPr/>
         </p:nvSpPr>
         <p:spPr>
           <a:xfrm>
-            <a:off x="304129" y="957362"/>
-            <a:ext cx="5674176" cy="2179315"/>
+            <a:off x="10012084" y="66307"/>
+            <a:ext cx="340233" cy="340233"/>
           </a:xfrm>
-          <a:prstGeom prst="rect">
+          <a:prstGeom prst="ellipse">
             <a:avLst/>
           </a:prstGeom>
-          <a:noFill/>
+          <a:solidFill>
+            <a:srgbClr val="E3E9EA"/>
+          </a:solidFill>
+          <a:ln>
+            <a:solidFill>
+              <a:srgbClr val="00336E"/>
+            </a:solidFill>
+          </a:ln>
         </p:spPr>
+        <p:style>
+          <a:lnRef idx="2">
+            <a:schemeClr val="accent1">
+              <a:shade val="15000"/>
+            </a:schemeClr>
+          </a:lnRef>
+          <a:fillRef idx="1">
+            <a:schemeClr val="accent1"/>
+          </a:fillRef>
+          <a:effectRef idx="0">
+            <a:schemeClr val="accent1"/>
+          </a:effectRef>
+          <a:fontRef idx="minor">
+            <a:schemeClr val="lt1"/>
+          </a:fontRef>
+        </p:style>
         <p:txBody>
-          <a:bodyPr wrap="square">
-            <a:spAutoFit/>
-          </a:bodyPr>
+          <a:bodyPr lIns="0" tIns="0" rIns="0" bIns="0" rtlCol="0" anchor="ctr"/>
           <a:lstStyle/>
           <a:p>
-            <a:pPr>
-              <a:lnSpc>
-                <a:spcPct val="115000"/>
-              </a:lnSpc>
-              <a:spcAft>
-                <a:spcPts val="1000"/>
-              </a:spcAft>
-              <a:buNone/>
-            </a:pPr>
-            <a:r>
-              <a:rPr lang="en-US" sz="1800" dirty="0">
-                <a:effectLst/>
-                <a:ea typeface="MS Mincho" panose="02020609040205080304" pitchFamily="49" charset="-128"/>
-                <a:cs typeface="Times New Roman" panose="02020603050405020304" pitchFamily="18" charset="0"/>
-              </a:rPr>
-              <a:t>Optimal solution?</a:t>
-            </a:r>
-          </a:p>
-          <a:p>
-            <a:pPr>
-              <a:lnSpc>
-                <a:spcPct val="115000"/>
-              </a:lnSpc>
-              <a:spcAft>
-                <a:spcPts val="1000"/>
-              </a:spcAft>
-              <a:buNone/>
-            </a:pPr>
-            <a:endParaRPr lang="en-US" dirty="0">
-              <a:ea typeface="MS Mincho" panose="02020609040205080304" pitchFamily="49" charset="-128"/>
-              <a:cs typeface="Times New Roman" panose="02020603050405020304" pitchFamily="18" charset="0"/>
+            <a:pPr algn="ctr"/>
+            <a:r>
+              <a:rPr lang="de-DE" b="1" dirty="0">
+                <a:solidFill>
+                  <a:schemeClr val="tx1"/>
+                </a:solidFill>
+              </a:rPr>
+              <a:t>1</a:t>
+            </a:r>
+            <a:endParaRPr lang="de-DE" sz="900" b="1" dirty="0">
+              <a:solidFill>
+                <a:schemeClr val="tx1"/>
+              </a:solidFill>
             </a:endParaRPr>
-          </a:p>
-          <a:p>
-            <a:pPr>
-              <a:lnSpc>
-                <a:spcPct val="115000"/>
-              </a:lnSpc>
-              <a:spcAft>
-                <a:spcPts val="1000"/>
-              </a:spcAft>
-              <a:buNone/>
-            </a:pPr>
-            <a:r>
-              <a:rPr lang="en-US" sz="1800" dirty="0">
-                <a:effectLst/>
-                <a:ea typeface="MS Mincho" panose="02020609040205080304" pitchFamily="49" charset="-128"/>
-                <a:cs typeface="Times New Roman" panose="02020603050405020304" pitchFamily="18" charset="0"/>
-              </a:rPr>
-              <a:t>If on food → stay and eat</a:t>
-            </a:r>
-          </a:p>
-          <a:p>
-            <a:pPr>
-              <a:lnSpc>
-                <a:spcPct val="115000"/>
-              </a:lnSpc>
-              <a:spcAft>
-                <a:spcPts val="1000"/>
-              </a:spcAft>
-              <a:buNone/>
-            </a:pPr>
-            <a:r>
-              <a:rPr lang="en-US" sz="1800" dirty="0">
-                <a:effectLst/>
-                <a:ea typeface="MS Mincho" panose="02020609040205080304" pitchFamily="49" charset="-128"/>
-                <a:cs typeface="Times New Roman" panose="02020603050405020304" pitchFamily="18" charset="0"/>
-              </a:rPr>
-              <a:t>If sensing food in </a:t>
-            </a:r>
-            <a:r>
-              <a:rPr lang="en-US" dirty="0">
-                <a:ea typeface="MS Mincho" panose="02020609040205080304" pitchFamily="49" charset="-128"/>
-                <a:cs typeface="Times New Roman" panose="02020603050405020304" pitchFamily="18" charset="0"/>
-              </a:rPr>
-              <a:t>one direction → move in that direction</a:t>
-            </a:r>
-          </a:p>
-          <a:p>
-            <a:pPr>
-              <a:lnSpc>
-                <a:spcPct val="115000"/>
-              </a:lnSpc>
-              <a:spcAft>
-                <a:spcPts val="1000"/>
-              </a:spcAft>
-              <a:buNone/>
-            </a:pPr>
-            <a:r>
-              <a:rPr lang="en-US" dirty="0">
-                <a:ea typeface="MS Mincho" panose="02020609040205080304" pitchFamily="49" charset="-128"/>
-                <a:cs typeface="Times New Roman" panose="02020603050405020304" pitchFamily="18" charset="0"/>
-              </a:rPr>
-              <a:t>If not sensing any food → move away  </a:t>
-            </a:r>
-            <a:endParaRPr lang="de-DE" sz="1800" dirty="0">
-              <a:effectLst/>
-              <a:ea typeface="MS Mincho" panose="02020609040205080304" pitchFamily="49" charset="-128"/>
-              <a:cs typeface="Times New Roman" panose="02020603050405020304" pitchFamily="18" charset="0"/>
-            </a:endParaRPr>
-          </a:p>
-        </p:txBody>
-      </p:sp>
-      <p:pic>
-        <p:nvPicPr>
-          <p:cNvPr id="9" name="Grafik 8">
-            <a:extLst>
-              <a:ext uri="{FF2B5EF4-FFF2-40B4-BE49-F238E27FC236}">
-                <a16:creationId xmlns:a16="http://schemas.microsoft.com/office/drawing/2014/main" id="{2CDF4BD9-04AD-868F-5E50-A05E5AF09D15}"/>
-              </a:ext>
-            </a:extLst>
-          </p:cNvPr>
-          <p:cNvPicPr>
-            <a:picLocks noChangeAspect="1"/>
-          </p:cNvPicPr>
-          <p:nvPr/>
-        </p:nvPicPr>
-        <p:blipFill>
-          <a:blip r:embed="rId2">
-            <a:extLst>
-              <a:ext uri="{28A0092B-C50C-407E-A947-70E740481C1C}">
-                <a14:useLocalDpi xmlns:a14="http://schemas.microsoft.com/office/drawing/2010/main" val="0"/>
-              </a:ext>
-            </a:extLst>
-          </a:blip>
-          <a:stretch>
-            <a:fillRect/>
-          </a:stretch>
-        </p:blipFill>
-        <p:spPr>
-          <a:xfrm>
-            <a:off x="5978305" y="857873"/>
-            <a:ext cx="5797649" cy="5289430"/>
-          </a:xfrm>
-          <a:prstGeom prst="rect">
-            <a:avLst/>
-          </a:prstGeom>
-        </p:spPr>
-      </p:pic>
-      <p:sp>
-        <p:nvSpPr>
-          <p:cNvPr id="10" name="Textfeld 9">
-            <a:extLst>
-              <a:ext uri="{FF2B5EF4-FFF2-40B4-BE49-F238E27FC236}">
-                <a16:creationId xmlns:a16="http://schemas.microsoft.com/office/drawing/2014/main" id="{3BE16239-1F16-68AE-0F57-A3946EFBB65B}"/>
-              </a:ext>
-            </a:extLst>
-          </p:cNvPr>
-          <p:cNvSpPr txBox="1"/>
-          <p:nvPr/>
-        </p:nvSpPr>
-        <p:spPr>
-          <a:xfrm>
-            <a:off x="6096000" y="5105227"/>
-            <a:ext cx="736099" cy="369332"/>
-          </a:xfrm>
-          <a:prstGeom prst="rect">
-            <a:avLst/>
-          </a:prstGeom>
-          <a:noFill/>
-        </p:spPr>
-        <p:txBody>
-          <a:bodyPr wrap="none" rtlCol="0">
-            <a:spAutoFit/>
-          </a:bodyPr>
-          <a:lstStyle/>
-          <a:p>
-            <a:r>
-              <a:rPr lang="de-DE" dirty="0" err="1">
-                <a:latin typeface="Courier New" panose="02070309020205020404" pitchFamily="49" charset="0"/>
-                <a:cs typeface="Courier New" panose="02070309020205020404" pitchFamily="49" charset="0"/>
-              </a:rPr>
-              <a:t>stay</a:t>
-            </a:r>
-            <a:endParaRPr lang="de-DE" dirty="0">
-              <a:latin typeface="Courier New" panose="02070309020205020404" pitchFamily="49" charset="0"/>
-              <a:cs typeface="Courier New" panose="02070309020205020404" pitchFamily="49" charset="0"/>
-            </a:endParaRPr>
-          </a:p>
-        </p:txBody>
-      </p:sp>
-      <p:sp>
-        <p:nvSpPr>
-          <p:cNvPr id="11" name="Textfeld 10">
-            <a:extLst>
-              <a:ext uri="{FF2B5EF4-FFF2-40B4-BE49-F238E27FC236}">
-                <a16:creationId xmlns:a16="http://schemas.microsoft.com/office/drawing/2014/main" id="{75587D1E-BB4D-2FFE-382F-9A73D4BE4336}"/>
-              </a:ext>
-            </a:extLst>
-          </p:cNvPr>
-          <p:cNvSpPr txBox="1"/>
-          <p:nvPr/>
-        </p:nvSpPr>
-        <p:spPr>
-          <a:xfrm>
-            <a:off x="7161042" y="5105227"/>
-            <a:ext cx="1011815" cy="369332"/>
-          </a:xfrm>
-          <a:prstGeom prst="rect">
-            <a:avLst/>
-          </a:prstGeom>
-          <a:noFill/>
-        </p:spPr>
-        <p:txBody>
-          <a:bodyPr wrap="none" rtlCol="0">
-            <a:spAutoFit/>
-          </a:bodyPr>
-          <a:lstStyle/>
-          <a:p>
-            <a:r>
-              <a:rPr lang="de-DE" dirty="0" err="1">
-                <a:latin typeface="Courier New" panose="02070309020205020404" pitchFamily="49" charset="0"/>
-                <a:cs typeface="Courier New" panose="02070309020205020404" pitchFamily="49" charset="0"/>
-              </a:rPr>
-              <a:t>move</a:t>
-            </a:r>
-            <a:r>
-              <a:rPr lang="de-DE" dirty="0">
-                <a:latin typeface="Courier New" panose="02070309020205020404" pitchFamily="49" charset="0"/>
-                <a:cs typeface="Courier New" panose="02070309020205020404" pitchFamily="49" charset="0"/>
-              </a:rPr>
-              <a:t> N</a:t>
-            </a:r>
-          </a:p>
-        </p:txBody>
-      </p:sp>
-      <p:sp>
-        <p:nvSpPr>
-          <p:cNvPr id="12" name="Textfeld 11">
-            <a:extLst>
-              <a:ext uri="{FF2B5EF4-FFF2-40B4-BE49-F238E27FC236}">
-                <a16:creationId xmlns:a16="http://schemas.microsoft.com/office/drawing/2014/main" id="{ADDA3C6D-4D64-984D-082E-A43517FF916D}"/>
-              </a:ext>
-            </a:extLst>
-          </p:cNvPr>
-          <p:cNvSpPr txBox="1"/>
-          <p:nvPr/>
-        </p:nvSpPr>
-        <p:spPr>
-          <a:xfrm>
-            <a:off x="8381661" y="5105227"/>
-            <a:ext cx="1011815" cy="369332"/>
-          </a:xfrm>
-          <a:prstGeom prst="rect">
-            <a:avLst/>
-          </a:prstGeom>
-          <a:noFill/>
-        </p:spPr>
-        <p:txBody>
-          <a:bodyPr wrap="none" rtlCol="0">
-            <a:spAutoFit/>
-          </a:bodyPr>
-          <a:lstStyle/>
-          <a:p>
-            <a:r>
-              <a:rPr lang="de-DE" dirty="0" err="1">
-                <a:latin typeface="Courier New" panose="02070309020205020404" pitchFamily="49" charset="0"/>
-                <a:cs typeface="Courier New" panose="02070309020205020404" pitchFamily="49" charset="0"/>
-              </a:rPr>
-              <a:t>move</a:t>
-            </a:r>
-            <a:r>
-              <a:rPr lang="de-DE" dirty="0">
-                <a:latin typeface="Courier New" panose="02070309020205020404" pitchFamily="49" charset="0"/>
-                <a:cs typeface="Courier New" panose="02070309020205020404" pitchFamily="49" charset="0"/>
-              </a:rPr>
-              <a:t> E</a:t>
-            </a:r>
-          </a:p>
-        </p:txBody>
-      </p:sp>
-      <p:sp>
-        <p:nvSpPr>
-          <p:cNvPr id="13" name="Textfeld 12">
-            <a:extLst>
-              <a:ext uri="{FF2B5EF4-FFF2-40B4-BE49-F238E27FC236}">
-                <a16:creationId xmlns:a16="http://schemas.microsoft.com/office/drawing/2014/main" id="{97E61C76-8072-88C4-6EBC-CB651B477053}"/>
-              </a:ext>
-            </a:extLst>
-          </p:cNvPr>
-          <p:cNvSpPr txBox="1"/>
-          <p:nvPr/>
-        </p:nvSpPr>
-        <p:spPr>
-          <a:xfrm>
-            <a:off x="9613021" y="5105227"/>
-            <a:ext cx="1011815" cy="369332"/>
-          </a:xfrm>
-          <a:prstGeom prst="rect">
-            <a:avLst/>
-          </a:prstGeom>
-          <a:noFill/>
-        </p:spPr>
-        <p:txBody>
-          <a:bodyPr wrap="none" rtlCol="0">
-            <a:spAutoFit/>
-          </a:bodyPr>
-          <a:lstStyle/>
-          <a:p>
-            <a:r>
-              <a:rPr lang="de-DE" dirty="0" err="1">
-                <a:latin typeface="Courier New" panose="02070309020205020404" pitchFamily="49" charset="0"/>
-                <a:cs typeface="Courier New" panose="02070309020205020404" pitchFamily="49" charset="0"/>
-              </a:rPr>
-              <a:t>move</a:t>
-            </a:r>
-            <a:r>
-              <a:rPr lang="de-DE" dirty="0">
-                <a:latin typeface="Courier New" panose="02070309020205020404" pitchFamily="49" charset="0"/>
-                <a:cs typeface="Courier New" panose="02070309020205020404" pitchFamily="49" charset="0"/>
-              </a:rPr>
-              <a:t> S</a:t>
-            </a:r>
-          </a:p>
-        </p:txBody>
-      </p:sp>
-      <p:sp>
-        <p:nvSpPr>
-          <p:cNvPr id="14" name="Textfeld 13">
-            <a:extLst>
-              <a:ext uri="{FF2B5EF4-FFF2-40B4-BE49-F238E27FC236}">
-                <a16:creationId xmlns:a16="http://schemas.microsoft.com/office/drawing/2014/main" id="{E12D5DC5-7A66-E0FC-B75F-AB1E87413F17}"/>
-              </a:ext>
-            </a:extLst>
-          </p:cNvPr>
-          <p:cNvSpPr txBox="1"/>
-          <p:nvPr/>
-        </p:nvSpPr>
-        <p:spPr>
-          <a:xfrm>
-            <a:off x="10744365" y="5105227"/>
-            <a:ext cx="1011815" cy="369332"/>
-          </a:xfrm>
-          <a:prstGeom prst="rect">
-            <a:avLst/>
-          </a:prstGeom>
-          <a:noFill/>
-        </p:spPr>
-        <p:txBody>
-          <a:bodyPr wrap="none" rtlCol="0">
-            <a:spAutoFit/>
-          </a:bodyPr>
-          <a:lstStyle/>
-          <a:p>
-            <a:r>
-              <a:rPr lang="de-DE" dirty="0" err="1">
-                <a:latin typeface="Courier New" panose="02070309020205020404" pitchFamily="49" charset="0"/>
-                <a:cs typeface="Courier New" panose="02070309020205020404" pitchFamily="49" charset="0"/>
-              </a:rPr>
-              <a:t>move</a:t>
-            </a:r>
-            <a:r>
-              <a:rPr lang="de-DE" dirty="0">
-                <a:latin typeface="Courier New" panose="02070309020205020404" pitchFamily="49" charset="0"/>
-                <a:cs typeface="Courier New" panose="02070309020205020404" pitchFamily="49" charset="0"/>
-              </a:rPr>
-              <a:t> W</a:t>
-            </a:r>
-          </a:p>
-        </p:txBody>
-      </p:sp>
-      <p:sp>
-        <p:nvSpPr>
-          <p:cNvPr id="15" name="Textfeld 14">
-            <a:extLst>
-              <a:ext uri="{FF2B5EF4-FFF2-40B4-BE49-F238E27FC236}">
-                <a16:creationId xmlns:a16="http://schemas.microsoft.com/office/drawing/2014/main" id="{F1353E1B-0D72-EB8B-A6A2-A31D3D463054}"/>
-              </a:ext>
-            </a:extLst>
-          </p:cNvPr>
-          <p:cNvSpPr txBox="1"/>
-          <p:nvPr/>
-        </p:nvSpPr>
-        <p:spPr>
-          <a:xfrm>
-            <a:off x="6025042" y="1356282"/>
-            <a:ext cx="1149674" cy="369332"/>
-          </a:xfrm>
-          <a:prstGeom prst="rect">
-            <a:avLst/>
-          </a:prstGeom>
-          <a:noFill/>
-        </p:spPr>
-        <p:txBody>
-          <a:bodyPr wrap="none" rtlCol="0">
-            <a:spAutoFit/>
-          </a:bodyPr>
-          <a:lstStyle/>
-          <a:p>
-            <a:r>
-              <a:rPr lang="de-DE" dirty="0">
-                <a:latin typeface="Courier New" panose="02070309020205020404" pitchFamily="49" charset="0"/>
-                <a:cs typeface="Courier New" panose="02070309020205020404" pitchFamily="49" charset="0"/>
-              </a:rPr>
-              <a:t>on </a:t>
-            </a:r>
-            <a:r>
-              <a:rPr lang="de-DE" dirty="0" err="1">
-                <a:latin typeface="Courier New" panose="02070309020205020404" pitchFamily="49" charset="0"/>
-                <a:cs typeface="Courier New" panose="02070309020205020404" pitchFamily="49" charset="0"/>
-              </a:rPr>
-              <a:t>food</a:t>
-            </a:r>
-            <a:endParaRPr lang="de-DE" dirty="0">
-              <a:latin typeface="Courier New" panose="02070309020205020404" pitchFamily="49" charset="0"/>
-              <a:cs typeface="Courier New" panose="02070309020205020404" pitchFamily="49" charset="0"/>
-            </a:endParaRPr>
-          </a:p>
-        </p:txBody>
-      </p:sp>
-      <p:sp>
-        <p:nvSpPr>
-          <p:cNvPr id="16" name="Textfeld 15">
-            <a:extLst>
-              <a:ext uri="{FF2B5EF4-FFF2-40B4-BE49-F238E27FC236}">
-                <a16:creationId xmlns:a16="http://schemas.microsoft.com/office/drawing/2014/main" id="{C330CB92-1783-94C1-A8C6-EFE912692C6F}"/>
-              </a:ext>
-            </a:extLst>
-          </p:cNvPr>
-          <p:cNvSpPr txBox="1"/>
-          <p:nvPr/>
-        </p:nvSpPr>
-        <p:spPr>
-          <a:xfrm>
-            <a:off x="7281837" y="1356282"/>
-            <a:ext cx="1011815" cy="369332"/>
-          </a:xfrm>
-          <a:prstGeom prst="rect">
-            <a:avLst/>
-          </a:prstGeom>
-          <a:noFill/>
-        </p:spPr>
-        <p:txBody>
-          <a:bodyPr wrap="none" rtlCol="0">
-            <a:spAutoFit/>
-          </a:bodyPr>
-          <a:lstStyle/>
-          <a:p>
-            <a:r>
-              <a:rPr lang="de-DE" dirty="0" err="1">
-                <a:latin typeface="Courier New" panose="02070309020205020404" pitchFamily="49" charset="0"/>
-                <a:cs typeface="Courier New" panose="02070309020205020404" pitchFamily="49" charset="0"/>
-              </a:rPr>
-              <a:t>food</a:t>
-            </a:r>
-            <a:r>
-              <a:rPr lang="de-DE" dirty="0">
-                <a:latin typeface="Courier New" panose="02070309020205020404" pitchFamily="49" charset="0"/>
-                <a:cs typeface="Courier New" panose="02070309020205020404" pitchFamily="49" charset="0"/>
-              </a:rPr>
-              <a:t> N</a:t>
-            </a:r>
-          </a:p>
-        </p:txBody>
-      </p:sp>
-      <p:sp>
-        <p:nvSpPr>
-          <p:cNvPr id="17" name="Textfeld 16">
-            <a:extLst>
-              <a:ext uri="{FF2B5EF4-FFF2-40B4-BE49-F238E27FC236}">
-                <a16:creationId xmlns:a16="http://schemas.microsoft.com/office/drawing/2014/main" id="{942A1F51-9153-0948-FD60-C38605FA4317}"/>
-              </a:ext>
-            </a:extLst>
-          </p:cNvPr>
-          <p:cNvSpPr txBox="1"/>
-          <p:nvPr/>
-        </p:nvSpPr>
-        <p:spPr>
-          <a:xfrm>
-            <a:off x="8455099" y="1356282"/>
-            <a:ext cx="1011815" cy="369332"/>
-          </a:xfrm>
-          <a:prstGeom prst="rect">
-            <a:avLst/>
-          </a:prstGeom>
-          <a:noFill/>
-        </p:spPr>
-        <p:txBody>
-          <a:bodyPr wrap="none" rtlCol="0">
-            <a:spAutoFit/>
-          </a:bodyPr>
-          <a:lstStyle/>
-          <a:p>
-            <a:r>
-              <a:rPr lang="de-DE" dirty="0" err="1">
-                <a:latin typeface="Courier New" panose="02070309020205020404" pitchFamily="49" charset="0"/>
-                <a:cs typeface="Courier New" panose="02070309020205020404" pitchFamily="49" charset="0"/>
-              </a:rPr>
-              <a:t>food</a:t>
-            </a:r>
-            <a:r>
-              <a:rPr lang="de-DE" dirty="0">
-                <a:latin typeface="Courier New" panose="02070309020205020404" pitchFamily="49" charset="0"/>
-                <a:cs typeface="Courier New" panose="02070309020205020404" pitchFamily="49" charset="0"/>
-              </a:rPr>
-              <a:t> E</a:t>
-            </a:r>
-          </a:p>
-        </p:txBody>
-      </p:sp>
-      <p:sp>
-        <p:nvSpPr>
-          <p:cNvPr id="18" name="Textfeld 17">
-            <a:extLst>
-              <a:ext uri="{FF2B5EF4-FFF2-40B4-BE49-F238E27FC236}">
-                <a16:creationId xmlns:a16="http://schemas.microsoft.com/office/drawing/2014/main" id="{0654D465-8DF4-5FFE-6158-6FAD28C5C9C3}"/>
-              </a:ext>
-            </a:extLst>
-          </p:cNvPr>
-          <p:cNvSpPr txBox="1"/>
-          <p:nvPr/>
-        </p:nvSpPr>
-        <p:spPr>
-          <a:xfrm>
-            <a:off x="9597184" y="1356282"/>
-            <a:ext cx="1011815" cy="369332"/>
-          </a:xfrm>
-          <a:prstGeom prst="rect">
-            <a:avLst/>
-          </a:prstGeom>
-          <a:noFill/>
-        </p:spPr>
-        <p:txBody>
-          <a:bodyPr wrap="none" rtlCol="0">
-            <a:spAutoFit/>
-          </a:bodyPr>
-          <a:lstStyle/>
-          <a:p>
-            <a:r>
-              <a:rPr lang="de-DE" dirty="0" err="1">
-                <a:latin typeface="Courier New" panose="02070309020205020404" pitchFamily="49" charset="0"/>
-                <a:cs typeface="Courier New" panose="02070309020205020404" pitchFamily="49" charset="0"/>
-              </a:rPr>
-              <a:t>food</a:t>
-            </a:r>
-            <a:r>
-              <a:rPr lang="de-DE" dirty="0">
-                <a:latin typeface="Courier New" panose="02070309020205020404" pitchFamily="49" charset="0"/>
-                <a:cs typeface="Courier New" panose="02070309020205020404" pitchFamily="49" charset="0"/>
-              </a:rPr>
-              <a:t> S</a:t>
-            </a:r>
-          </a:p>
-        </p:txBody>
-      </p:sp>
-      <p:sp>
-        <p:nvSpPr>
-          <p:cNvPr id="19" name="Textfeld 18">
-            <a:extLst>
-              <a:ext uri="{FF2B5EF4-FFF2-40B4-BE49-F238E27FC236}">
-                <a16:creationId xmlns:a16="http://schemas.microsoft.com/office/drawing/2014/main" id="{BD475DCA-C9D5-BE70-081A-B8D088EFAD7F}"/>
-              </a:ext>
-            </a:extLst>
-          </p:cNvPr>
-          <p:cNvSpPr txBox="1"/>
-          <p:nvPr/>
-        </p:nvSpPr>
-        <p:spPr>
-          <a:xfrm>
-            <a:off x="10686569" y="1356282"/>
-            <a:ext cx="1011815" cy="369332"/>
-          </a:xfrm>
-          <a:prstGeom prst="rect">
-            <a:avLst/>
-          </a:prstGeom>
-          <a:noFill/>
-        </p:spPr>
-        <p:txBody>
-          <a:bodyPr wrap="none" rtlCol="0">
-            <a:spAutoFit/>
-          </a:bodyPr>
-          <a:lstStyle/>
-          <a:p>
-            <a:r>
-              <a:rPr lang="de-DE" dirty="0" err="1">
-                <a:latin typeface="Courier New" panose="02070309020205020404" pitchFamily="49" charset="0"/>
-                <a:cs typeface="Courier New" panose="02070309020205020404" pitchFamily="49" charset="0"/>
-              </a:rPr>
-              <a:t>food</a:t>
-            </a:r>
-            <a:r>
-              <a:rPr lang="de-DE" dirty="0">
-                <a:latin typeface="Courier New" panose="02070309020205020404" pitchFamily="49" charset="0"/>
-                <a:cs typeface="Courier New" panose="02070309020205020404" pitchFamily="49" charset="0"/>
-              </a:rPr>
-              <a:t> W</a:t>
-            </a:r>
           </a:p>
         </p:txBody>
       </p:sp>
@@ -4286,10 +5082,291 @@
       </p:grpSpPr>
       <p:sp>
         <p:nvSpPr>
-          <p:cNvPr id="2" name="Freihandform: Form 1">
+          <p:cNvPr id="7" name="Textfeld 6">
             <a:extLst>
               <a:ext uri="{FF2B5EF4-FFF2-40B4-BE49-F238E27FC236}">
-                <a16:creationId xmlns:a16="http://schemas.microsoft.com/office/drawing/2014/main" id="{6C65E094-D373-3EC1-CA69-7C3E3FB3F81F}"/>
+                <a16:creationId xmlns:a16="http://schemas.microsoft.com/office/drawing/2014/main" id="{5375FF69-E05C-B6D4-58CC-B60D0A366EE3}"/>
+              </a:ext>
+            </a:extLst>
+          </p:cNvPr>
+          <p:cNvSpPr txBox="1"/>
+          <p:nvPr/>
+        </p:nvSpPr>
+        <p:spPr>
+          <a:xfrm>
+            <a:off x="304129" y="957362"/>
+            <a:ext cx="3280900" cy="1917128"/>
+          </a:xfrm>
+          <a:prstGeom prst="rect">
+            <a:avLst/>
+          </a:prstGeom>
+          <a:noFill/>
+        </p:spPr>
+        <p:txBody>
+          <a:bodyPr wrap="square">
+            <a:spAutoFit/>
+          </a:bodyPr>
+          <a:lstStyle/>
+          <a:p>
+            <a:pPr>
+              <a:lnSpc>
+                <a:spcPct val="115000"/>
+              </a:lnSpc>
+              <a:spcAft>
+                <a:spcPts val="1000"/>
+              </a:spcAft>
+              <a:buNone/>
+            </a:pPr>
+            <a:r>
+              <a:rPr lang="en-US" sz="1800" dirty="0">
+                <a:effectLst/>
+                <a:ea typeface="MS Mincho" panose="02020609040205080304" pitchFamily="49" charset="-128"/>
+                <a:cs typeface="Times New Roman" panose="02020603050405020304" pitchFamily="18" charset="0"/>
+              </a:rPr>
+              <a:t>Optimal solution?</a:t>
+            </a:r>
+          </a:p>
+          <a:p>
+            <a:pPr>
+              <a:lnSpc>
+                <a:spcPct val="115000"/>
+              </a:lnSpc>
+              <a:spcAft>
+                <a:spcPts val="1000"/>
+              </a:spcAft>
+              <a:buNone/>
+            </a:pPr>
+            <a:endParaRPr lang="en-US" dirty="0">
+              <a:ea typeface="MS Mincho" panose="02020609040205080304" pitchFamily="49" charset="-128"/>
+              <a:cs typeface="Times New Roman" panose="02020603050405020304" pitchFamily="18" charset="0"/>
+            </a:endParaRPr>
+          </a:p>
+          <a:p>
+            <a:pPr>
+              <a:lnSpc>
+                <a:spcPct val="115000"/>
+              </a:lnSpc>
+              <a:spcAft>
+                <a:spcPts val="1000"/>
+              </a:spcAft>
+              <a:buNone/>
+            </a:pPr>
+            <a:r>
+              <a:rPr lang="en-US" sz="1800" dirty="0">
+                <a:effectLst/>
+                <a:ea typeface="MS Mincho" panose="02020609040205080304" pitchFamily="49" charset="-128"/>
+                <a:cs typeface="Times New Roman" panose="02020603050405020304" pitchFamily="18" charset="0"/>
+              </a:rPr>
+              <a:t>No! </a:t>
+            </a:r>
+            <a:br>
+              <a:rPr lang="en-US" sz="1800" dirty="0">
+                <a:effectLst/>
+                <a:ea typeface="MS Mincho" panose="02020609040205080304" pitchFamily="49" charset="-128"/>
+                <a:cs typeface="Times New Roman" panose="02020603050405020304" pitchFamily="18" charset="0"/>
+              </a:rPr>
+            </a:br>
+            <a:r>
+              <a:rPr lang="en-US" dirty="0">
+                <a:ea typeface="MS Mincho" panose="02020609040205080304" pitchFamily="49" charset="-128"/>
+                <a:cs typeface="Times New Roman" panose="02020603050405020304" pitchFamily="18" charset="0"/>
+              </a:rPr>
+              <a:t>Why not and what did the evolutionary algorithm find?</a:t>
+            </a:r>
+            <a:endParaRPr lang="de-DE" sz="1800" dirty="0">
+              <a:effectLst/>
+              <a:ea typeface="MS Mincho" panose="02020609040205080304" pitchFamily="49" charset="-128"/>
+              <a:cs typeface="Times New Roman" panose="02020603050405020304" pitchFamily="18" charset="0"/>
+            </a:endParaRPr>
+          </a:p>
+        </p:txBody>
+      </p:sp>
+      <p:pic>
+        <p:nvPicPr>
+          <p:cNvPr id="6" name="random">
+            <a:extLst>
+              <a:ext uri="{FF2B5EF4-FFF2-40B4-BE49-F238E27FC236}">
+                <a16:creationId xmlns:a16="http://schemas.microsoft.com/office/drawing/2014/main" id="{7F4154B1-C471-6402-3A60-240A98E45FCE}"/>
+              </a:ext>
+            </a:extLst>
+          </p:cNvPr>
+          <p:cNvPicPr>
+            <a:picLocks noChangeAspect="1"/>
+          </p:cNvPicPr>
+          <p:nvPr/>
+        </p:nvPicPr>
+        <p:blipFill>
+          <a:blip r:embed="rId2">
+            <a:extLst>
+              <a:ext uri="{28A0092B-C50C-407E-A947-70E740481C1C}">
+                <a14:useLocalDpi xmlns:a14="http://schemas.microsoft.com/office/drawing/2010/main" val="0"/>
+              </a:ext>
+            </a:extLst>
+          </a:blip>
+          <a:stretch>
+            <a:fillRect/>
+          </a:stretch>
+        </p:blipFill>
+        <p:spPr>
+          <a:xfrm>
+            <a:off x="3864673" y="957362"/>
+            <a:ext cx="7500940" cy="4973908"/>
+          </a:xfrm>
+          <a:prstGeom prst="rect">
+            <a:avLst/>
+          </a:prstGeom>
+        </p:spPr>
+      </p:pic>
+      <p:pic>
+        <p:nvPicPr>
+          <p:cNvPr id="9" name="hard-coded">
+            <a:extLst>
+              <a:ext uri="{FF2B5EF4-FFF2-40B4-BE49-F238E27FC236}">
+                <a16:creationId xmlns:a16="http://schemas.microsoft.com/office/drawing/2014/main" id="{9306105C-C637-D9DA-7806-209FA268674D}"/>
+              </a:ext>
+            </a:extLst>
+          </p:cNvPr>
+          <p:cNvPicPr>
+            <a:picLocks noChangeAspect="1"/>
+          </p:cNvPicPr>
+          <p:nvPr/>
+        </p:nvPicPr>
+        <p:blipFill>
+          <a:blip r:embed="rId3">
+            <a:extLst>
+              <a:ext uri="{28A0092B-C50C-407E-A947-70E740481C1C}">
+                <a14:useLocalDpi xmlns:a14="http://schemas.microsoft.com/office/drawing/2010/main" val="0"/>
+              </a:ext>
+            </a:extLst>
+          </a:blip>
+          <a:stretch>
+            <a:fillRect/>
+          </a:stretch>
+        </p:blipFill>
+        <p:spPr>
+          <a:xfrm>
+            <a:off x="3855948" y="957362"/>
+            <a:ext cx="7513596" cy="4973908"/>
+          </a:xfrm>
+          <a:prstGeom prst="rect">
+            <a:avLst/>
+          </a:prstGeom>
+        </p:spPr>
+      </p:pic>
+      <p:pic>
+        <p:nvPicPr>
+          <p:cNvPr id="11" name="400">
+            <a:extLst>
+              <a:ext uri="{FF2B5EF4-FFF2-40B4-BE49-F238E27FC236}">
+                <a16:creationId xmlns:a16="http://schemas.microsoft.com/office/drawing/2014/main" id="{232D2439-4785-3558-472B-A602D1604DD3}"/>
+              </a:ext>
+            </a:extLst>
+          </p:cNvPr>
+          <p:cNvPicPr>
+            <a:picLocks noChangeAspect="1"/>
+          </p:cNvPicPr>
+          <p:nvPr/>
+        </p:nvPicPr>
+        <p:blipFill>
+          <a:blip r:embed="rId4">
+            <a:extLst>
+              <a:ext uri="{28A0092B-C50C-407E-A947-70E740481C1C}">
+                <a14:useLocalDpi xmlns:a14="http://schemas.microsoft.com/office/drawing/2010/main" val="0"/>
+              </a:ext>
+            </a:extLst>
+          </a:blip>
+          <a:stretch>
+            <a:fillRect/>
+          </a:stretch>
+        </p:blipFill>
+        <p:spPr>
+          <a:xfrm>
+            <a:off x="3855948" y="957362"/>
+            <a:ext cx="7513596" cy="4973908"/>
+          </a:xfrm>
+          <a:prstGeom prst="rect">
+            <a:avLst/>
+          </a:prstGeom>
+        </p:spPr>
+      </p:pic>
+      <p:pic>
+        <p:nvPicPr>
+          <p:cNvPr id="13" name="600">
+            <a:extLst>
+              <a:ext uri="{FF2B5EF4-FFF2-40B4-BE49-F238E27FC236}">
+                <a16:creationId xmlns:a16="http://schemas.microsoft.com/office/drawing/2014/main" id="{A26D3B41-1DA9-EEA2-5998-E5D7B93A0AB7}"/>
+              </a:ext>
+            </a:extLst>
+          </p:cNvPr>
+          <p:cNvPicPr>
+            <a:picLocks noChangeAspect="1"/>
+          </p:cNvPicPr>
+          <p:nvPr/>
+        </p:nvPicPr>
+        <p:blipFill>
+          <a:blip r:embed="rId5">
+            <a:extLst>
+              <a:ext uri="{28A0092B-C50C-407E-A947-70E740481C1C}">
+                <a14:useLocalDpi xmlns:a14="http://schemas.microsoft.com/office/drawing/2010/main" val="0"/>
+              </a:ext>
+            </a:extLst>
+          </a:blip>
+          <a:stretch>
+            <a:fillRect/>
+          </a:stretch>
+        </p:blipFill>
+        <p:spPr>
+          <a:xfrm>
+            <a:off x="3855948" y="957362"/>
+            <a:ext cx="7513596" cy="4973908"/>
+          </a:xfrm>
+          <a:prstGeom prst="rect">
+            <a:avLst/>
+          </a:prstGeom>
+        </p:spPr>
+      </p:pic>
+      <p:pic>
+        <p:nvPicPr>
+          <p:cNvPr id="15" name="full">
+            <a:extLst>
+              <a:ext uri="{FF2B5EF4-FFF2-40B4-BE49-F238E27FC236}">
+                <a16:creationId xmlns:a16="http://schemas.microsoft.com/office/drawing/2014/main" id="{7CDDE5EA-63F4-299F-164A-BBE45520360C}"/>
+              </a:ext>
+            </a:extLst>
+          </p:cNvPr>
+          <p:cNvPicPr>
+            <a:picLocks noChangeAspect="1"/>
+          </p:cNvPicPr>
+          <p:nvPr/>
+        </p:nvPicPr>
+        <p:blipFill>
+          <a:blip r:embed="rId6">
+            <a:extLst>
+              <a:ext uri="{28A0092B-C50C-407E-A947-70E740481C1C}">
+                <a14:useLocalDpi xmlns:a14="http://schemas.microsoft.com/office/drawing/2010/main" val="0"/>
+              </a:ext>
+            </a:extLst>
+          </a:blip>
+          <a:stretch>
+            <a:fillRect/>
+          </a:stretch>
+        </p:blipFill>
+        <p:spPr>
+          <a:xfrm>
+            <a:off x="3855948" y="957362"/>
+            <a:ext cx="7513596" cy="4973908"/>
+          </a:xfrm>
+          <a:prstGeom prst="rect">
+            <a:avLst/>
+          </a:prstGeom>
+        </p:spPr>
+      </p:pic>
+      <p:sp>
+        <p:nvSpPr>
+          <p:cNvPr id="4" name="Freihandform: Form 3">
+            <a:extLst>
+              <a:ext uri="{FF2B5EF4-FFF2-40B4-BE49-F238E27FC236}">
+                <a16:creationId xmlns:a16="http://schemas.microsoft.com/office/drawing/2014/main" id="{AD811A1B-DCE0-B7CA-7B4D-82C1BB374972}"/>
               </a:ext>
             </a:extLst>
           </p:cNvPr>
@@ -4298,7 +5375,7 @@
         </p:nvSpPr>
         <p:spPr>
           <a:xfrm flipH="1">
-            <a:off x="8657661" y="-2930196"/>
+            <a:off x="8657661" y="-2955952"/>
             <a:ext cx="6300782" cy="3481390"/>
           </a:xfrm>
           <a:custGeom>
@@ -4445,10 +5522,10 @@
       </p:sp>
       <p:sp>
         <p:nvSpPr>
-          <p:cNvPr id="3" name="Textfeld 2">
+          <p:cNvPr id="5" name="Textfeld 4">
             <a:extLst>
               <a:ext uri="{FF2B5EF4-FFF2-40B4-BE49-F238E27FC236}">
-                <a16:creationId xmlns:a16="http://schemas.microsoft.com/office/drawing/2014/main" id="{D27CF4BF-86ED-A0D7-3D85-662FDB7CC8DF}"/>
+                <a16:creationId xmlns:a16="http://schemas.microsoft.com/office/drawing/2014/main" id="{20C86878-4C54-5F44-0EA0-C60D0EA3D5BA}"/>
               </a:ext>
             </a:extLst>
           </p:cNvPr>
@@ -4457,7 +5534,7 @@
         </p:nvSpPr>
         <p:spPr>
           <a:xfrm>
-            <a:off x="10287922" y="153126"/>
+            <a:off x="10287922" y="17905"/>
             <a:ext cx="1904078" cy="461665"/>
           </a:xfrm>
           <a:prstGeom prst="rect">
@@ -4504,134 +5581,70 @@
       </p:sp>
       <p:sp>
         <p:nvSpPr>
-          <p:cNvPr id="7" name="Textfeld 6">
+          <p:cNvPr id="8" name="Ellipse 7">
             <a:extLst>
               <a:ext uri="{FF2B5EF4-FFF2-40B4-BE49-F238E27FC236}">
-                <a16:creationId xmlns:a16="http://schemas.microsoft.com/office/drawing/2014/main" id="{5375FF69-E05C-B6D4-58CC-B60D0A366EE3}"/>
+                <a16:creationId xmlns:a16="http://schemas.microsoft.com/office/drawing/2014/main" id="{3ADB5D7D-FA7F-25BB-994A-D205EDF55B6A}"/>
               </a:ext>
             </a:extLst>
           </p:cNvPr>
-          <p:cNvSpPr txBox="1"/>
+          <p:cNvSpPr/>
           <p:nvPr/>
         </p:nvSpPr>
         <p:spPr>
           <a:xfrm>
-            <a:off x="304129" y="957362"/>
-            <a:ext cx="5674176" cy="1285737"/>
+            <a:off x="10012084" y="66307"/>
+            <a:ext cx="340233" cy="340233"/>
           </a:xfrm>
-          <a:prstGeom prst="rect">
+          <a:prstGeom prst="ellipse">
             <a:avLst/>
           </a:prstGeom>
-          <a:noFill/>
+          <a:solidFill>
+            <a:srgbClr val="E3E9EA"/>
+          </a:solidFill>
+          <a:ln>
+            <a:solidFill>
+              <a:srgbClr val="00336E"/>
+            </a:solidFill>
+          </a:ln>
         </p:spPr>
+        <p:style>
+          <a:lnRef idx="2">
+            <a:schemeClr val="accent1">
+              <a:shade val="15000"/>
+            </a:schemeClr>
+          </a:lnRef>
+          <a:fillRef idx="1">
+            <a:schemeClr val="accent1"/>
+          </a:fillRef>
+          <a:effectRef idx="0">
+            <a:schemeClr val="accent1"/>
+          </a:effectRef>
+          <a:fontRef idx="minor">
+            <a:schemeClr val="lt1"/>
+          </a:fontRef>
+        </p:style>
         <p:txBody>
-          <a:bodyPr wrap="square">
-            <a:spAutoFit/>
-          </a:bodyPr>
+          <a:bodyPr lIns="0" tIns="0" rIns="0" bIns="0" rtlCol="0" anchor="ctr"/>
           <a:lstStyle/>
           <a:p>
-            <a:pPr>
-              <a:lnSpc>
-                <a:spcPct val="115000"/>
-              </a:lnSpc>
-              <a:spcAft>
-                <a:spcPts val="1000"/>
-              </a:spcAft>
-              <a:buNone/>
-            </a:pPr>
-            <a:r>
-              <a:rPr lang="en-US" sz="1800" dirty="0">
-                <a:effectLst/>
-                <a:ea typeface="MS Mincho" panose="02020609040205080304" pitchFamily="49" charset="-128"/>
-                <a:cs typeface="Times New Roman" panose="02020603050405020304" pitchFamily="18" charset="0"/>
-              </a:rPr>
-              <a:t>Optimal solution?</a:t>
-            </a:r>
-          </a:p>
-          <a:p>
-            <a:pPr>
-              <a:lnSpc>
-                <a:spcPct val="115000"/>
-              </a:lnSpc>
-              <a:spcAft>
-                <a:spcPts val="1000"/>
-              </a:spcAft>
-              <a:buNone/>
-            </a:pPr>
-            <a:endParaRPr lang="en-US" dirty="0">
-              <a:ea typeface="MS Mincho" panose="02020609040205080304" pitchFamily="49" charset="-128"/>
-              <a:cs typeface="Times New Roman" panose="02020603050405020304" pitchFamily="18" charset="0"/>
-            </a:endParaRPr>
-          </a:p>
-          <a:p>
-            <a:pPr>
-              <a:lnSpc>
-                <a:spcPct val="115000"/>
-              </a:lnSpc>
-              <a:spcAft>
-                <a:spcPts val="1000"/>
-              </a:spcAft>
-              <a:buNone/>
-            </a:pPr>
-            <a:r>
-              <a:rPr lang="en-US" sz="1800" dirty="0">
-                <a:effectLst/>
-                <a:ea typeface="MS Mincho" panose="02020609040205080304" pitchFamily="49" charset="-128"/>
-                <a:cs typeface="Times New Roman" panose="02020603050405020304" pitchFamily="18" charset="0"/>
-              </a:rPr>
-              <a:t>No! </a:t>
-            </a:r>
-            <a:r>
-              <a:rPr lang="en-US" dirty="0">
-                <a:ea typeface="MS Mincho" panose="02020609040205080304" pitchFamily="49" charset="-128"/>
-                <a:cs typeface="Times New Roman" panose="02020603050405020304" pitchFamily="18" charset="0"/>
-              </a:rPr>
-              <a:t>Why?</a:t>
-            </a:r>
-            <a:endParaRPr lang="de-DE" sz="1800" dirty="0">
-              <a:effectLst/>
-              <a:ea typeface="MS Mincho" panose="02020609040205080304" pitchFamily="49" charset="-128"/>
-              <a:cs typeface="Times New Roman" panose="02020603050405020304" pitchFamily="18" charset="0"/>
+            <a:pPr algn="ctr"/>
+            <a:r>
+              <a:rPr lang="de-DE" b="1" dirty="0">
+                <a:solidFill>
+                  <a:schemeClr val="tx1"/>
+                </a:solidFill>
+              </a:rPr>
+              <a:t>1</a:t>
+            </a:r>
+            <a:endParaRPr lang="de-DE" sz="900" b="1" dirty="0">
+              <a:solidFill>
+                <a:schemeClr val="tx1"/>
+              </a:solidFill>
             </a:endParaRPr>
           </a:p>
         </p:txBody>
       </p:sp>
-      <p:pic>
-        <p:nvPicPr>
-          <p:cNvPr id="5" name="Grafik 4">
-            <a:extLst>
-              <a:ext uri="{FF2B5EF4-FFF2-40B4-BE49-F238E27FC236}">
-                <a16:creationId xmlns:a16="http://schemas.microsoft.com/office/drawing/2014/main" id="{5A6EBD22-5AEA-EC11-6FD8-B3D2E33611D7}"/>
-              </a:ext>
-            </a:extLst>
-          </p:cNvPr>
-          <p:cNvPicPr>
-            <a:picLocks noChangeAspect="1"/>
-          </p:cNvPicPr>
-          <p:nvPr/>
-        </p:nvPicPr>
-        <p:blipFill>
-          <a:blip r:embed="rId2">
-            <a:extLst>
-              <a:ext uri="{28A0092B-C50C-407E-A947-70E740481C1C}">
-                <a14:useLocalDpi xmlns:a14="http://schemas.microsoft.com/office/drawing/2010/main" val="0"/>
-              </a:ext>
-            </a:extLst>
-          </a:blip>
-          <a:stretch>
-            <a:fillRect/>
-          </a:stretch>
-        </p:blipFill>
-        <p:spPr>
-          <a:xfrm>
-            <a:off x="4381500" y="1157736"/>
-            <a:ext cx="7152505" cy="4742902"/>
-          </a:xfrm>
-          <a:prstGeom prst="rect">
-            <a:avLst/>
-          </a:prstGeom>
-        </p:spPr>
-      </p:pic>
     </p:spTree>
     <p:extLst>
       <p:ext uri="{BB962C8B-B14F-4D97-AF65-F5344CB8AC3E}">
@@ -4663,7 +5676,7 @@
                             </p:stCondLst>
                             <p:childTnLst>
                               <p:par>
-                                <p:cTn id="5" presetID="1" presetClass="entr" presetSubtype="0" fill="hold" nodeType="clickEffect">
+                                <p:cTn id="5" presetID="10" presetClass="entr" presetSubtype="0" fill="hold" nodeType="clickEffect">
                                   <p:stCondLst>
                                     <p:cond delay="0"/>
                                   </p:stCondLst>
@@ -4671,6 +5684,200 @@
                                     <p:set>
                                       <p:cBhvr>
                                         <p:cTn id="6" dur="1" fill="hold">
+                                          <p:stCondLst>
+                                            <p:cond delay="0"/>
+                                          </p:stCondLst>
+                                        </p:cTn>
+                                        <p:tgtEl>
+                                          <p:spTgt spid="9"/>
+                                        </p:tgtEl>
+                                        <p:attrNameLst>
+                                          <p:attrName>style.visibility</p:attrName>
+                                        </p:attrNameLst>
+                                      </p:cBhvr>
+                                      <p:to>
+                                        <p:strVal val="visible"/>
+                                      </p:to>
+                                    </p:set>
+                                    <p:animEffect transition="in" filter="fade">
+                                      <p:cBhvr>
+                                        <p:cTn id="7" dur="500"/>
+                                        <p:tgtEl>
+                                          <p:spTgt spid="9"/>
+                                        </p:tgtEl>
+                                      </p:cBhvr>
+                                    </p:animEffect>
+                                  </p:childTnLst>
+                                </p:cTn>
+                              </p:par>
+                            </p:childTnLst>
+                          </p:cTn>
+                        </p:par>
+                      </p:childTnLst>
+                    </p:cTn>
+                  </p:par>
+                  <p:par>
+                    <p:cTn id="8" fill="hold">
+                      <p:stCondLst>
+                        <p:cond delay="indefinite"/>
+                      </p:stCondLst>
+                      <p:childTnLst>
+                        <p:par>
+                          <p:cTn id="9" fill="hold">
+                            <p:stCondLst>
+                              <p:cond delay="0"/>
+                            </p:stCondLst>
+                            <p:childTnLst>
+                              <p:par>
+                                <p:cTn id="10" presetID="10" presetClass="entr" presetSubtype="0" fill="hold" nodeType="clickEffect">
+                                  <p:stCondLst>
+                                    <p:cond delay="0"/>
+                                  </p:stCondLst>
+                                  <p:childTnLst>
+                                    <p:set>
+                                      <p:cBhvr>
+                                        <p:cTn id="11" dur="1" fill="hold">
+                                          <p:stCondLst>
+                                            <p:cond delay="0"/>
+                                          </p:stCondLst>
+                                        </p:cTn>
+                                        <p:tgtEl>
+                                          <p:spTgt spid="11"/>
+                                        </p:tgtEl>
+                                        <p:attrNameLst>
+                                          <p:attrName>style.visibility</p:attrName>
+                                        </p:attrNameLst>
+                                      </p:cBhvr>
+                                      <p:to>
+                                        <p:strVal val="visible"/>
+                                      </p:to>
+                                    </p:set>
+                                    <p:animEffect transition="in" filter="fade">
+                                      <p:cBhvr>
+                                        <p:cTn id="12" dur="500"/>
+                                        <p:tgtEl>
+                                          <p:spTgt spid="11"/>
+                                        </p:tgtEl>
+                                      </p:cBhvr>
+                                    </p:animEffect>
+                                  </p:childTnLst>
+                                </p:cTn>
+                              </p:par>
+                            </p:childTnLst>
+                          </p:cTn>
+                        </p:par>
+                      </p:childTnLst>
+                    </p:cTn>
+                  </p:par>
+                  <p:par>
+                    <p:cTn id="13" fill="hold">
+                      <p:stCondLst>
+                        <p:cond delay="indefinite"/>
+                      </p:stCondLst>
+                      <p:childTnLst>
+                        <p:par>
+                          <p:cTn id="14" fill="hold">
+                            <p:stCondLst>
+                              <p:cond delay="0"/>
+                            </p:stCondLst>
+                            <p:childTnLst>
+                              <p:par>
+                                <p:cTn id="15" presetID="10" presetClass="entr" presetSubtype="0" fill="hold" nodeType="clickEffect">
+                                  <p:stCondLst>
+                                    <p:cond delay="0"/>
+                                  </p:stCondLst>
+                                  <p:childTnLst>
+                                    <p:set>
+                                      <p:cBhvr>
+                                        <p:cTn id="16" dur="1" fill="hold">
+                                          <p:stCondLst>
+                                            <p:cond delay="0"/>
+                                          </p:stCondLst>
+                                        </p:cTn>
+                                        <p:tgtEl>
+                                          <p:spTgt spid="13"/>
+                                        </p:tgtEl>
+                                        <p:attrNameLst>
+                                          <p:attrName>style.visibility</p:attrName>
+                                        </p:attrNameLst>
+                                      </p:cBhvr>
+                                      <p:to>
+                                        <p:strVal val="visible"/>
+                                      </p:to>
+                                    </p:set>
+                                    <p:animEffect transition="in" filter="fade">
+                                      <p:cBhvr>
+                                        <p:cTn id="17" dur="500"/>
+                                        <p:tgtEl>
+                                          <p:spTgt spid="13"/>
+                                        </p:tgtEl>
+                                      </p:cBhvr>
+                                    </p:animEffect>
+                                  </p:childTnLst>
+                                </p:cTn>
+                              </p:par>
+                            </p:childTnLst>
+                          </p:cTn>
+                        </p:par>
+                      </p:childTnLst>
+                    </p:cTn>
+                  </p:par>
+                  <p:par>
+                    <p:cTn id="18" fill="hold">
+                      <p:stCondLst>
+                        <p:cond delay="indefinite"/>
+                      </p:stCondLst>
+                      <p:childTnLst>
+                        <p:par>
+                          <p:cTn id="19" fill="hold">
+                            <p:stCondLst>
+                              <p:cond delay="0"/>
+                            </p:stCondLst>
+                            <p:childTnLst>
+                              <p:par>
+                                <p:cTn id="20" presetID="10" presetClass="entr" presetSubtype="0" fill="hold" nodeType="clickEffect">
+                                  <p:stCondLst>
+                                    <p:cond delay="0"/>
+                                  </p:stCondLst>
+                                  <p:childTnLst>
+                                    <p:set>
+                                      <p:cBhvr>
+                                        <p:cTn id="21" dur="1" fill="hold">
+                                          <p:stCondLst>
+                                            <p:cond delay="0"/>
+                                          </p:stCondLst>
+                                        </p:cTn>
+                                        <p:tgtEl>
+                                          <p:spTgt spid="15"/>
+                                        </p:tgtEl>
+                                        <p:attrNameLst>
+                                          <p:attrName>style.visibility</p:attrName>
+                                        </p:attrNameLst>
+                                      </p:cBhvr>
+                                      <p:to>
+                                        <p:strVal val="visible"/>
+                                      </p:to>
+                                    </p:set>
+                                    <p:animEffect transition="in" filter="fade">
+                                      <p:cBhvr>
+                                        <p:cTn id="22" dur="500"/>
+                                        <p:tgtEl>
+                                          <p:spTgt spid="15"/>
+                                        </p:tgtEl>
+                                      </p:cBhvr>
+                                    </p:animEffect>
+                                  </p:childTnLst>
+                                </p:cTn>
+                              </p:par>
+                              <p:par>
+                                <p:cTn id="23" presetID="1" presetClass="entr" presetSubtype="0" fill="hold" nodeType="withEffect">
+                                  <p:stCondLst>
+                                    <p:cond delay="0"/>
+                                  </p:stCondLst>
+                                  <p:childTnLst>
+                                    <p:set>
+                                      <p:cBhvr>
+                                        <p:cTn id="24" dur="1" fill="hold">
                                           <p:stCondLst>
                                             <p:cond delay="0"/>
                                           </p:stCondLst>
@@ -4732,7 +5939,7 @@
         <p:cNvPr id="1" name="">
           <a:extLst>
             <a:ext uri="{FF2B5EF4-FFF2-40B4-BE49-F238E27FC236}">
-              <a16:creationId xmlns:a16="http://schemas.microsoft.com/office/drawing/2014/main" id="{EC898806-010B-C150-EF54-E021DF146C9B}"/>
+              <a16:creationId xmlns:a16="http://schemas.microsoft.com/office/drawing/2014/main" id="{5B73E0B3-398C-C973-0901-374D1813582B}"/>
             </a:ext>
           </a:extLst>
         </p:cNvPr>
@@ -4749,10 +5956,10 @@
       </p:grpSpPr>
       <p:sp>
         <p:nvSpPr>
-          <p:cNvPr id="2" name="Textfeld 1">
+          <p:cNvPr id="23" name="Textfeld 22">
             <a:extLst>
               <a:ext uri="{FF2B5EF4-FFF2-40B4-BE49-F238E27FC236}">
-                <a16:creationId xmlns:a16="http://schemas.microsoft.com/office/drawing/2014/main" id="{C2EC67F4-2EFC-1353-53A6-3D1EC34CED8B}"/>
+                <a16:creationId xmlns:a16="http://schemas.microsoft.com/office/drawing/2014/main" id="{DB3BA8BE-34B8-36EC-A8C6-FE3DD1920D3A}"/>
               </a:ext>
             </a:extLst>
           </p:cNvPr>
@@ -4761,8 +5968,8 @@
         </p:nvSpPr>
         <p:spPr>
           <a:xfrm>
-            <a:off x="4354048" y="552450"/>
-            <a:ext cx="5643148" cy="369332"/>
+            <a:off x="370804" y="1692847"/>
+            <a:ext cx="3280900" cy="1023550"/>
           </a:xfrm>
           <a:prstGeom prst="rect">
             <a:avLst/>
@@ -4770,61 +5977,870 @@
           <a:noFill/>
         </p:spPr>
         <p:txBody>
-          <a:bodyPr wrap="none" rtlCol="0">
+          <a:bodyPr wrap="square">
             <a:spAutoFit/>
           </a:bodyPr>
           <a:lstStyle/>
           <a:p>
-            <a:r>
-              <a:rPr lang="de-DE" dirty="0"/>
-              <a:t>Current </a:t>
-            </a:r>
-            <a:r>
-              <a:rPr lang="de-DE" dirty="0" err="1"/>
-              <a:t>Results</a:t>
-            </a:r>
-            <a:r>
-              <a:rPr lang="de-DE" dirty="0"/>
-              <a:t> – </a:t>
-            </a:r>
-            <a:r>
-              <a:rPr lang="de-DE" dirty="0" err="1"/>
-              <a:t>Unsupervised</a:t>
-            </a:r>
-            <a:r>
-              <a:rPr lang="de-DE" dirty="0"/>
-              <a:t> </a:t>
-            </a:r>
-            <a:r>
-              <a:rPr lang="de-DE" dirty="0" err="1"/>
-              <a:t>leraning</a:t>
-            </a:r>
-            <a:r>
-              <a:rPr lang="de-DE" dirty="0"/>
-              <a:t> on </a:t>
-            </a:r>
-            <a:r>
-              <a:rPr lang="de-DE" dirty="0" err="1"/>
-              <a:t>static</a:t>
-            </a:r>
-            <a:r>
-              <a:rPr lang="de-DE" dirty="0"/>
-              <a:t> </a:t>
-            </a:r>
-            <a:r>
-              <a:rPr lang="de-DE" dirty="0" err="1"/>
-              <a:t>tasks</a:t>
-            </a:r>
-            <a:endParaRPr lang="de-DE" dirty="0"/>
+            <a:pPr>
+              <a:lnSpc>
+                <a:spcPct val="115000"/>
+              </a:lnSpc>
+              <a:spcAft>
+                <a:spcPts val="1000"/>
+              </a:spcAft>
+              <a:buNone/>
+            </a:pPr>
+            <a:r>
+              <a:rPr lang="en-US" sz="1800" dirty="0">
+                <a:effectLst/>
+                <a:ea typeface="MS Mincho" panose="02020609040205080304" pitchFamily="49" charset="-128"/>
+                <a:cs typeface="Times New Roman" panose="02020603050405020304" pitchFamily="18" charset="0"/>
+              </a:rPr>
+              <a:t>The evolved variants found </a:t>
+            </a:r>
+            <a:r>
+              <a:rPr lang="en-US" b="1" dirty="0">
+                <a:ea typeface="MS Mincho" panose="02020609040205080304" pitchFamily="49" charset="-128"/>
+                <a:cs typeface="Times New Roman" panose="02020603050405020304" pitchFamily="18" charset="0"/>
+              </a:rPr>
+              <a:t>15</a:t>
+            </a:r>
+            <a:r>
+              <a:rPr lang="en-US" sz="1800" b="1" dirty="0">
+                <a:effectLst/>
+                <a:ea typeface="MS Mincho" panose="02020609040205080304" pitchFamily="49" charset="-128"/>
+                <a:cs typeface="Times New Roman" panose="02020603050405020304" pitchFamily="18" charset="0"/>
+              </a:rPr>
+              <a:t> times </a:t>
+            </a:r>
+            <a:r>
+              <a:rPr lang="en-US" sz="1800" dirty="0">
+                <a:effectLst/>
+                <a:ea typeface="MS Mincho" panose="02020609040205080304" pitchFamily="49" charset="-128"/>
+                <a:cs typeface="Times New Roman" panose="02020603050405020304" pitchFamily="18" charset="0"/>
+              </a:rPr>
+              <a:t>more food than the random variants!</a:t>
+            </a:r>
+            <a:endParaRPr lang="de-DE" sz="1800" dirty="0">
+              <a:effectLst/>
+              <a:ea typeface="MS Mincho" panose="02020609040205080304" pitchFamily="49" charset="-128"/>
+              <a:cs typeface="Times New Roman" panose="02020603050405020304" pitchFamily="18" charset="0"/>
+            </a:endParaRPr>
+          </a:p>
+        </p:txBody>
+      </p:sp>
+      <p:grpSp>
+        <p:nvGrpSpPr>
+          <p:cNvPr id="42" name="Gruppieren 41">
+            <a:extLst>
+              <a:ext uri="{FF2B5EF4-FFF2-40B4-BE49-F238E27FC236}">
+                <a16:creationId xmlns:a16="http://schemas.microsoft.com/office/drawing/2014/main" id="{61D35B51-BC7E-C69E-726A-D2E8E7263E08}"/>
+              </a:ext>
+            </a:extLst>
+          </p:cNvPr>
+          <p:cNvGrpSpPr/>
+          <p:nvPr/>
+        </p:nvGrpSpPr>
+        <p:grpSpPr>
+          <a:xfrm>
+            <a:off x="4195989" y="735357"/>
+            <a:ext cx="10203543" cy="6057826"/>
+            <a:chOff x="4195989" y="735357"/>
+            <a:chExt cx="10203543" cy="6057826"/>
+          </a:xfrm>
+        </p:grpSpPr>
+        <p:sp>
+          <p:nvSpPr>
+            <p:cNvPr id="8" name="Textfeld 7">
+              <a:extLst>
+                <a:ext uri="{FF2B5EF4-FFF2-40B4-BE49-F238E27FC236}">
+                  <a16:creationId xmlns:a16="http://schemas.microsoft.com/office/drawing/2014/main" id="{39415EE7-D00F-C603-EEA2-139BA96482FE}"/>
+                </a:ext>
+              </a:extLst>
+            </p:cNvPr>
+            <p:cNvSpPr txBox="1"/>
+            <p:nvPr/>
+          </p:nvSpPr>
+          <p:spPr>
+            <a:xfrm>
+              <a:off x="4195989" y="5605807"/>
+              <a:ext cx="10203543" cy="1187376"/>
+            </a:xfrm>
+            <a:prstGeom prst="rect">
+              <a:avLst/>
+            </a:prstGeom>
+            <a:noFill/>
+          </p:spPr>
+          <p:txBody>
+            <a:bodyPr wrap="square">
+              <a:spAutoFit/>
+            </a:bodyPr>
+            <a:lstStyle/>
+            <a:p>
+              <a:pPr defTabSz="288000">
+                <a:lnSpc>
+                  <a:spcPct val="115000"/>
+                </a:lnSpc>
+                <a:spcAft>
+                  <a:spcPts val="1000"/>
+                </a:spcAft>
+                <a:buNone/>
+              </a:pPr>
+              <a:r>
+                <a:rPr lang="en-US" sz="800" dirty="0">
+                  <a:effectLst/>
+                  <a:ea typeface="MS Mincho" panose="02020609040205080304" pitchFamily="49" charset="-128"/>
+                  <a:cs typeface="Times New Roman" panose="02020603050405020304" pitchFamily="18" charset="0"/>
+                </a:rPr>
+                <a:t>Kruskal-Wallis: p &lt;&lt; 0.01; </a:t>
+              </a:r>
+              <a:r>
+                <a:rPr lang="el-GR" sz="800" dirty="0">
+                  <a:effectLst/>
+                  <a:ea typeface="MS Mincho" panose="02020609040205080304" pitchFamily="49" charset="-128"/>
+                  <a:cs typeface="Times New Roman" panose="02020603050405020304" pitchFamily="18" charset="0"/>
+                </a:rPr>
+                <a:t>ε</a:t>
+              </a:r>
+              <a:r>
+                <a:rPr lang="de-DE" sz="800" baseline="30000" dirty="0">
+                  <a:effectLst/>
+                  <a:ea typeface="MS Mincho" panose="02020609040205080304" pitchFamily="49" charset="-128"/>
+                  <a:cs typeface="Times New Roman" panose="02020603050405020304" pitchFamily="18" charset="0"/>
+                </a:rPr>
+                <a:t>2</a:t>
+              </a:r>
+              <a:r>
+                <a:rPr lang="de-DE" sz="800" dirty="0">
+                  <a:effectLst/>
+                  <a:ea typeface="MS Mincho" panose="02020609040205080304" pitchFamily="49" charset="-128"/>
+                  <a:cs typeface="Times New Roman" panose="02020603050405020304" pitchFamily="18" charset="0"/>
+                </a:rPr>
+                <a:t> = 0.4 (large </a:t>
+              </a:r>
+              <a:r>
+                <a:rPr lang="de-DE" sz="800" dirty="0" err="1">
+                  <a:effectLst/>
+                  <a:ea typeface="MS Mincho" panose="02020609040205080304" pitchFamily="49" charset="-128"/>
+                  <a:cs typeface="Times New Roman" panose="02020603050405020304" pitchFamily="18" charset="0"/>
+                </a:rPr>
+                <a:t>effect</a:t>
+              </a:r>
+              <a:r>
+                <a:rPr lang="de-DE" sz="800" dirty="0">
+                  <a:effectLst/>
+                  <a:ea typeface="MS Mincho" panose="02020609040205080304" pitchFamily="49" charset="-128"/>
+                  <a:cs typeface="Times New Roman" panose="02020603050405020304" pitchFamily="18" charset="0"/>
+                </a:rPr>
+                <a:t> </a:t>
+              </a:r>
+              <a:r>
+                <a:rPr lang="de-DE" sz="800" dirty="0" err="1">
+                  <a:effectLst/>
+                  <a:ea typeface="MS Mincho" panose="02020609040205080304" pitchFamily="49" charset="-128"/>
+                  <a:cs typeface="Times New Roman" panose="02020603050405020304" pitchFamily="18" charset="0"/>
+                </a:rPr>
+                <a:t>size</a:t>
+              </a:r>
+              <a:r>
+                <a:rPr lang="de-DE" sz="800" dirty="0">
+                  <a:effectLst/>
+                  <a:ea typeface="MS Mincho" panose="02020609040205080304" pitchFamily="49" charset="-128"/>
+                  <a:cs typeface="Times New Roman" panose="02020603050405020304" pitchFamily="18" charset="0"/>
+                </a:rPr>
+                <a:t>)</a:t>
+              </a:r>
+              <a:endParaRPr lang="en-US" sz="800" dirty="0">
+                <a:effectLst/>
+                <a:ea typeface="MS Mincho" panose="02020609040205080304" pitchFamily="49" charset="-128"/>
+                <a:cs typeface="Times New Roman" panose="02020603050405020304" pitchFamily="18" charset="0"/>
+              </a:endParaRPr>
+            </a:p>
+            <a:p>
+              <a:pPr defTabSz="288000">
+                <a:lnSpc>
+                  <a:spcPct val="115000"/>
+                </a:lnSpc>
+                <a:spcAft>
+                  <a:spcPts val="1000"/>
+                </a:spcAft>
+                <a:buNone/>
+              </a:pPr>
+              <a:r>
+                <a:rPr lang="en-US" sz="800" dirty="0">
+                  <a:ea typeface="MS Mincho" panose="02020609040205080304" pitchFamily="49" charset="-128"/>
+                  <a:cs typeface="Times New Roman" panose="02020603050405020304" pitchFamily="18" charset="0"/>
+                </a:rPr>
+                <a:t>MWU + Holm-Bonferroni: </a:t>
+              </a:r>
+              <a:br>
+                <a:rPr lang="en-US" sz="800" dirty="0">
+                  <a:ea typeface="MS Mincho" panose="02020609040205080304" pitchFamily="49" charset="-128"/>
+                  <a:cs typeface="Times New Roman" panose="02020603050405020304" pitchFamily="18" charset="0"/>
+                </a:rPr>
+              </a:br>
+              <a:r>
+                <a:rPr lang="en-US" sz="800" dirty="0">
+                  <a:ea typeface="MS Mincho" panose="02020609040205080304" pitchFamily="49" charset="-128"/>
+                  <a:cs typeface="Times New Roman" panose="02020603050405020304" pitchFamily="18" charset="0"/>
+                </a:rPr>
+                <a:t>Hard-Coded vs Random:	p &lt;&lt; 0.01;	r = -0.87 (large effect size)</a:t>
+              </a:r>
+              <a:br>
+                <a:rPr lang="en-US" sz="800" dirty="0">
+                  <a:ea typeface="MS Mincho" panose="02020609040205080304" pitchFamily="49" charset="-128"/>
+                  <a:cs typeface="Times New Roman" panose="02020603050405020304" pitchFamily="18" charset="0"/>
+                </a:rPr>
+              </a:br>
+              <a:r>
+                <a:rPr lang="en-US" sz="800" dirty="0">
+                  <a:ea typeface="MS Mincho" panose="02020609040205080304" pitchFamily="49" charset="-128"/>
+                  <a:cs typeface="Times New Roman" panose="02020603050405020304" pitchFamily="18" charset="0"/>
+                </a:rPr>
+                <a:t>EA vs Random:			p &lt;&lt; 0.01; 	r = -0.97 (large effect size)</a:t>
+              </a:r>
+              <a:br>
+                <a:rPr lang="en-US" sz="800" dirty="0">
+                  <a:ea typeface="MS Mincho" panose="02020609040205080304" pitchFamily="49" charset="-128"/>
+                  <a:cs typeface="Times New Roman" panose="02020603050405020304" pitchFamily="18" charset="0"/>
+                </a:rPr>
+              </a:br>
+              <a:r>
+                <a:rPr lang="en-US" sz="800" dirty="0">
+                  <a:effectLst/>
+                  <a:ea typeface="MS Mincho" panose="02020609040205080304" pitchFamily="49" charset="-128"/>
+                  <a:cs typeface="Times New Roman" panose="02020603050405020304" pitchFamily="18" charset="0"/>
+                </a:rPr>
+                <a:t>EA vs Hard-Coded</a:t>
+              </a:r>
+              <a:r>
+                <a:rPr lang="en-US" sz="800" dirty="0">
+                  <a:ea typeface="MS Mincho" panose="02020609040205080304" pitchFamily="49" charset="-128"/>
+                  <a:cs typeface="Times New Roman" panose="02020603050405020304" pitchFamily="18" charset="0"/>
+                </a:rPr>
+                <a:t>:		</a:t>
+              </a:r>
+              <a:r>
+                <a:rPr lang="en-US" sz="800" dirty="0">
+                  <a:effectLst/>
+                  <a:ea typeface="MS Mincho" panose="02020609040205080304" pitchFamily="49" charset="-128"/>
+                  <a:cs typeface="Times New Roman" panose="02020603050405020304" pitchFamily="18" charset="0"/>
+                </a:rPr>
+                <a:t>p = 9*10</a:t>
+              </a:r>
+              <a:r>
+                <a:rPr lang="en-US" sz="800" baseline="30000" dirty="0">
+                  <a:effectLst/>
+                  <a:ea typeface="MS Mincho" panose="02020609040205080304" pitchFamily="49" charset="-128"/>
+                  <a:cs typeface="Times New Roman" panose="02020603050405020304" pitchFamily="18" charset="0"/>
+                </a:rPr>
+                <a:t>-</a:t>
+              </a:r>
+              <a:r>
+                <a:rPr lang="en-US" sz="800" baseline="30000" dirty="0">
+                  <a:ea typeface="MS Mincho" panose="02020609040205080304" pitchFamily="49" charset="-128"/>
+                  <a:cs typeface="Times New Roman" panose="02020603050405020304" pitchFamily="18" charset="0"/>
+                </a:rPr>
+                <a:t>90</a:t>
+              </a:r>
+              <a:r>
+                <a:rPr lang="en-US" sz="800" dirty="0">
+                  <a:ea typeface="MS Mincho" panose="02020609040205080304" pitchFamily="49" charset="-128"/>
+                  <a:cs typeface="Times New Roman" panose="02020603050405020304" pitchFamily="18" charset="0"/>
+                </a:rPr>
+                <a:t>;	r = -0.7 (large effect size)</a:t>
+              </a:r>
+              <a:endParaRPr lang="en-US" sz="800" dirty="0">
+                <a:effectLst/>
+                <a:ea typeface="MS Mincho" panose="02020609040205080304" pitchFamily="49" charset="-128"/>
+                <a:cs typeface="Times New Roman" panose="02020603050405020304" pitchFamily="18" charset="0"/>
+              </a:endParaRPr>
+            </a:p>
+            <a:p>
+              <a:pPr>
+                <a:lnSpc>
+                  <a:spcPct val="115000"/>
+                </a:lnSpc>
+                <a:spcAft>
+                  <a:spcPts val="1000"/>
+                </a:spcAft>
+                <a:buNone/>
+              </a:pPr>
+              <a:endParaRPr lang="de-DE" sz="800" dirty="0">
+                <a:effectLst/>
+                <a:ea typeface="MS Mincho" panose="02020609040205080304" pitchFamily="49" charset="-128"/>
+                <a:cs typeface="Times New Roman" panose="02020603050405020304" pitchFamily="18" charset="0"/>
+              </a:endParaRPr>
+            </a:p>
+          </p:txBody>
+        </p:sp>
+        <p:grpSp>
+          <p:nvGrpSpPr>
+            <p:cNvPr id="41" name="Gruppieren 40">
+              <a:extLst>
+                <a:ext uri="{FF2B5EF4-FFF2-40B4-BE49-F238E27FC236}">
+                  <a16:creationId xmlns:a16="http://schemas.microsoft.com/office/drawing/2014/main" id="{F204B855-5563-7A74-7C69-6AE301321926}"/>
+                </a:ext>
+              </a:extLst>
+            </p:cNvPr>
+            <p:cNvGrpSpPr/>
+            <p:nvPr/>
+          </p:nvGrpSpPr>
+          <p:grpSpPr>
+            <a:xfrm>
+              <a:off x="4195989" y="735357"/>
+              <a:ext cx="6957786" cy="4870450"/>
+              <a:chOff x="4195989" y="735357"/>
+              <a:chExt cx="6957786" cy="4870450"/>
+            </a:xfrm>
+          </p:grpSpPr>
+          <p:pic>
+            <p:nvPicPr>
+              <p:cNvPr id="25" name="Grafik 24">
+                <a:extLst>
+                  <a:ext uri="{FF2B5EF4-FFF2-40B4-BE49-F238E27FC236}">
+                    <a16:creationId xmlns:a16="http://schemas.microsoft.com/office/drawing/2014/main" id="{A16FEB82-BC73-606C-8212-BB85B7519BAE}"/>
+                  </a:ext>
+                </a:extLst>
+              </p:cNvPr>
+              <p:cNvPicPr>
+                <a:picLocks noChangeAspect="1"/>
+              </p:cNvPicPr>
+              <p:nvPr/>
+            </p:nvPicPr>
+            <p:blipFill>
+              <a:blip r:embed="rId3">
+                <a:extLst>
+                  <a:ext uri="{28A0092B-C50C-407E-A947-70E740481C1C}">
+                    <a14:useLocalDpi xmlns:a14="http://schemas.microsoft.com/office/drawing/2010/main" val="0"/>
+                  </a:ext>
+                </a:extLst>
+              </a:blip>
+              <a:stretch>
+                <a:fillRect/>
+              </a:stretch>
+            </p:blipFill>
+            <p:spPr>
+              <a:xfrm>
+                <a:off x="4195989" y="735357"/>
+                <a:ext cx="6957786" cy="4870450"/>
+              </a:xfrm>
+              <a:prstGeom prst="rect">
+                <a:avLst/>
+              </a:prstGeom>
+            </p:spPr>
+          </p:pic>
+          <p:grpSp>
+            <p:nvGrpSpPr>
+              <p:cNvPr id="40" name="Gruppieren 39">
+                <a:extLst>
+                  <a:ext uri="{FF2B5EF4-FFF2-40B4-BE49-F238E27FC236}">
+                    <a16:creationId xmlns:a16="http://schemas.microsoft.com/office/drawing/2014/main" id="{6F99784B-DEAC-D516-FD5C-D2F68B99A8D7}"/>
+                  </a:ext>
+                </a:extLst>
+              </p:cNvPr>
+              <p:cNvGrpSpPr/>
+              <p:nvPr/>
+            </p:nvGrpSpPr>
+            <p:grpSpPr>
+              <a:xfrm>
+                <a:off x="5795963" y="1196059"/>
+                <a:ext cx="4205287" cy="429366"/>
+                <a:chOff x="5795963" y="1196059"/>
+                <a:chExt cx="4205287" cy="429366"/>
+              </a:xfrm>
+            </p:grpSpPr>
+            <p:grpSp>
+              <p:nvGrpSpPr>
+                <p:cNvPr id="39" name="Gruppieren 38">
+                  <a:extLst>
+                    <a:ext uri="{FF2B5EF4-FFF2-40B4-BE49-F238E27FC236}">
+                      <a16:creationId xmlns:a16="http://schemas.microsoft.com/office/drawing/2014/main" id="{928CD72C-2642-FB87-37C5-11001206F7B3}"/>
+                    </a:ext>
+                  </a:extLst>
+                </p:cNvPr>
+                <p:cNvGrpSpPr/>
+                <p:nvPr/>
+              </p:nvGrpSpPr>
+              <p:grpSpPr>
+                <a:xfrm>
+                  <a:off x="5795963" y="1196059"/>
+                  <a:ext cx="4205287" cy="153888"/>
+                  <a:chOff x="5795963" y="1196059"/>
+                  <a:chExt cx="4205287" cy="153888"/>
+                </a:xfrm>
+              </p:grpSpPr>
+              <p:cxnSp>
+                <p:nvCxnSpPr>
+                  <p:cNvPr id="28" name="Gerader Verbinder 27">
+                    <a:extLst>
+                      <a:ext uri="{FF2B5EF4-FFF2-40B4-BE49-F238E27FC236}">
+                        <a16:creationId xmlns:a16="http://schemas.microsoft.com/office/drawing/2014/main" id="{33F3B53C-D96D-7C07-B258-EC028CF36C3C}"/>
+                      </a:ext>
+                    </a:extLst>
+                  </p:cNvPr>
+                  <p:cNvCxnSpPr>
+                    <a:cxnSpLocks/>
+                  </p:cNvCxnSpPr>
+                  <p:nvPr/>
+                </p:nvCxnSpPr>
+                <p:spPr>
+                  <a:xfrm>
+                    <a:off x="5795963" y="1295998"/>
+                    <a:ext cx="4205287" cy="0"/>
+                  </a:xfrm>
+                  <a:prstGeom prst="line">
+                    <a:avLst/>
+                  </a:prstGeom>
+                  <a:ln w="9525">
+                    <a:solidFill>
+                      <a:schemeClr val="tx1"/>
+                    </a:solidFill>
+                    <a:headEnd type="diamond" w="sm" len="sm"/>
+                    <a:tailEnd type="diamond" w="sm" len="sm"/>
+                  </a:ln>
+                </p:spPr>
+                <p:style>
+                  <a:lnRef idx="2">
+                    <a:schemeClr val="accent1"/>
+                  </a:lnRef>
+                  <a:fillRef idx="0">
+                    <a:schemeClr val="accent1"/>
+                  </a:fillRef>
+                  <a:effectRef idx="1">
+                    <a:schemeClr val="accent1"/>
+                  </a:effectRef>
+                  <a:fontRef idx="minor">
+                    <a:schemeClr val="tx1"/>
+                  </a:fontRef>
+                </p:style>
+              </p:cxnSp>
+              <p:sp>
+                <p:nvSpPr>
+                  <p:cNvPr id="34" name="Textfeld 33">
+                    <a:extLst>
+                      <a:ext uri="{FF2B5EF4-FFF2-40B4-BE49-F238E27FC236}">
+                        <a16:creationId xmlns:a16="http://schemas.microsoft.com/office/drawing/2014/main" id="{BFD885DD-9D36-4AE2-BE1F-226E80B6FF12}"/>
+                      </a:ext>
+                    </a:extLst>
+                  </p:cNvPr>
+                  <p:cNvSpPr txBox="1"/>
+                  <p:nvPr/>
+                </p:nvSpPr>
+                <p:spPr>
+                  <a:xfrm>
+                    <a:off x="7770366" y="1196059"/>
+                    <a:ext cx="256480" cy="153888"/>
+                  </a:xfrm>
+                  <a:prstGeom prst="rect">
+                    <a:avLst/>
+                  </a:prstGeom>
+                  <a:noFill/>
+                  <a:ln>
+                    <a:noFill/>
+                  </a:ln>
+                </p:spPr>
+                <p:txBody>
+                  <a:bodyPr wrap="none" lIns="0" tIns="0" rIns="0" bIns="0" rtlCol="0" anchor="b">
+                    <a:spAutoFit/>
+                  </a:bodyPr>
+                  <a:lstStyle/>
+                  <a:p>
+                    <a:r>
+                      <a:rPr lang="de-DE" sz="1000" dirty="0">
+                        <a:latin typeface="+mj-lt"/>
+                        <a:ea typeface="Cormorant Garamond" pitchFamily="2" charset="0"/>
+                        <a:cs typeface="Cormorant Garamond" pitchFamily="2" charset="0"/>
+                      </a:rPr>
+                      <a:t>****</a:t>
+                    </a:r>
+                  </a:p>
+                </p:txBody>
+              </p:sp>
+            </p:grpSp>
+            <p:grpSp>
+              <p:nvGrpSpPr>
+                <p:cNvPr id="37" name="Gruppieren 36">
+                  <a:extLst>
+                    <a:ext uri="{FF2B5EF4-FFF2-40B4-BE49-F238E27FC236}">
+                      <a16:creationId xmlns:a16="http://schemas.microsoft.com/office/drawing/2014/main" id="{40A8EA23-B109-136D-9368-BB6AE23A6140}"/>
+                    </a:ext>
+                  </a:extLst>
+                </p:cNvPr>
+                <p:cNvGrpSpPr/>
+                <p:nvPr/>
+              </p:nvGrpSpPr>
+              <p:grpSpPr>
+                <a:xfrm>
+                  <a:off x="5795963" y="1471537"/>
+                  <a:ext cx="2095500" cy="153888"/>
+                  <a:chOff x="5795963" y="1471537"/>
+                  <a:chExt cx="2095500" cy="153888"/>
+                </a:xfrm>
+              </p:grpSpPr>
+              <p:cxnSp>
+                <p:nvCxnSpPr>
+                  <p:cNvPr id="27" name="Gerader Verbinder 26">
+                    <a:extLst>
+                      <a:ext uri="{FF2B5EF4-FFF2-40B4-BE49-F238E27FC236}">
+                        <a16:creationId xmlns:a16="http://schemas.microsoft.com/office/drawing/2014/main" id="{16B4C276-179F-43B7-247E-E4F362A8E68C}"/>
+                      </a:ext>
+                    </a:extLst>
+                  </p:cNvPr>
+                  <p:cNvCxnSpPr/>
+                  <p:nvPr/>
+                </p:nvCxnSpPr>
+                <p:spPr>
+                  <a:xfrm>
+                    <a:off x="5795963" y="1567797"/>
+                    <a:ext cx="2095500" cy="0"/>
+                  </a:xfrm>
+                  <a:prstGeom prst="line">
+                    <a:avLst/>
+                  </a:prstGeom>
+                  <a:ln w="9525">
+                    <a:solidFill>
+                      <a:schemeClr val="tx1"/>
+                    </a:solidFill>
+                    <a:headEnd type="diamond" w="sm" len="sm"/>
+                    <a:tailEnd type="diamond" w="sm" len="sm"/>
+                  </a:ln>
+                </p:spPr>
+                <p:style>
+                  <a:lnRef idx="2">
+                    <a:schemeClr val="accent1"/>
+                  </a:lnRef>
+                  <a:fillRef idx="0">
+                    <a:schemeClr val="accent1"/>
+                  </a:fillRef>
+                  <a:effectRef idx="1">
+                    <a:schemeClr val="accent1"/>
+                  </a:effectRef>
+                  <a:fontRef idx="minor">
+                    <a:schemeClr val="tx1"/>
+                  </a:fontRef>
+                </p:style>
+              </p:cxnSp>
+              <p:sp>
+                <p:nvSpPr>
+                  <p:cNvPr id="35" name="Textfeld 34">
+                    <a:extLst>
+                      <a:ext uri="{FF2B5EF4-FFF2-40B4-BE49-F238E27FC236}">
+                        <a16:creationId xmlns:a16="http://schemas.microsoft.com/office/drawing/2014/main" id="{C218FAF5-7FBA-89F4-D1BB-A0AA365621B1}"/>
+                      </a:ext>
+                    </a:extLst>
+                  </p:cNvPr>
+                  <p:cNvSpPr txBox="1"/>
+                  <p:nvPr/>
+                </p:nvSpPr>
+                <p:spPr>
+                  <a:xfrm>
+                    <a:off x="6715473" y="1471537"/>
+                    <a:ext cx="256480" cy="153888"/>
+                  </a:xfrm>
+                  <a:prstGeom prst="rect">
+                    <a:avLst/>
+                  </a:prstGeom>
+                  <a:noFill/>
+                  <a:ln>
+                    <a:noFill/>
+                  </a:ln>
+                </p:spPr>
+                <p:txBody>
+                  <a:bodyPr wrap="none" lIns="0" tIns="0" rIns="0" bIns="0" rtlCol="0">
+                    <a:spAutoFit/>
+                  </a:bodyPr>
+                  <a:lstStyle/>
+                  <a:p>
+                    <a:r>
+                      <a:rPr lang="de-DE" sz="1000" dirty="0">
+                        <a:latin typeface="+mj-lt"/>
+                        <a:ea typeface="Cormorant Garamond" pitchFamily="2" charset="0"/>
+                        <a:cs typeface="Cormorant Garamond" pitchFamily="2" charset="0"/>
+                      </a:rPr>
+                      <a:t>****</a:t>
+                    </a:r>
+                  </a:p>
+                </p:txBody>
+              </p:sp>
+            </p:grpSp>
+            <p:grpSp>
+              <p:nvGrpSpPr>
+                <p:cNvPr id="38" name="Gruppieren 37">
+                  <a:extLst>
+                    <a:ext uri="{FF2B5EF4-FFF2-40B4-BE49-F238E27FC236}">
+                      <a16:creationId xmlns:a16="http://schemas.microsoft.com/office/drawing/2014/main" id="{0C164916-B0E8-1C90-62B6-FEAD759E7EEF}"/>
+                    </a:ext>
+                  </a:extLst>
+                </p:cNvPr>
+                <p:cNvGrpSpPr/>
+                <p:nvPr/>
+              </p:nvGrpSpPr>
+              <p:grpSpPr>
+                <a:xfrm>
+                  <a:off x="7891463" y="1327944"/>
+                  <a:ext cx="2109787" cy="153888"/>
+                  <a:chOff x="7891463" y="1327944"/>
+                  <a:chExt cx="2109787" cy="153888"/>
+                </a:xfrm>
+              </p:grpSpPr>
+              <p:cxnSp>
+                <p:nvCxnSpPr>
+                  <p:cNvPr id="31" name="Gerader Verbinder 30">
+                    <a:extLst>
+                      <a:ext uri="{FF2B5EF4-FFF2-40B4-BE49-F238E27FC236}">
+                        <a16:creationId xmlns:a16="http://schemas.microsoft.com/office/drawing/2014/main" id="{A56BB575-0721-5FCE-8A49-835914027559}"/>
+                      </a:ext>
+                    </a:extLst>
+                  </p:cNvPr>
+                  <p:cNvCxnSpPr>
+                    <a:cxnSpLocks/>
+                  </p:cNvCxnSpPr>
+                  <p:nvPr/>
+                </p:nvCxnSpPr>
+                <p:spPr>
+                  <a:xfrm>
+                    <a:off x="7891463" y="1432903"/>
+                    <a:ext cx="2109787" cy="0"/>
+                  </a:xfrm>
+                  <a:prstGeom prst="line">
+                    <a:avLst/>
+                  </a:prstGeom>
+                  <a:ln w="9525">
+                    <a:solidFill>
+                      <a:schemeClr val="tx1"/>
+                    </a:solidFill>
+                    <a:headEnd type="diamond" w="sm" len="sm"/>
+                    <a:tailEnd type="diamond" w="sm" len="sm"/>
+                  </a:ln>
+                </p:spPr>
+                <p:style>
+                  <a:lnRef idx="2">
+                    <a:schemeClr val="accent1"/>
+                  </a:lnRef>
+                  <a:fillRef idx="0">
+                    <a:schemeClr val="accent1"/>
+                  </a:fillRef>
+                  <a:effectRef idx="1">
+                    <a:schemeClr val="accent1"/>
+                  </a:effectRef>
+                  <a:fontRef idx="minor">
+                    <a:schemeClr val="tx1"/>
+                  </a:fontRef>
+                </p:style>
+              </p:cxnSp>
+              <p:sp>
+                <p:nvSpPr>
+                  <p:cNvPr id="36" name="Textfeld 35">
+                    <a:extLst>
+                      <a:ext uri="{FF2B5EF4-FFF2-40B4-BE49-F238E27FC236}">
+                        <a16:creationId xmlns:a16="http://schemas.microsoft.com/office/drawing/2014/main" id="{1C59633D-AE3D-345A-EA3E-8EFBA03EDB18}"/>
+                      </a:ext>
+                    </a:extLst>
+                  </p:cNvPr>
+                  <p:cNvSpPr txBox="1"/>
+                  <p:nvPr/>
+                </p:nvSpPr>
+                <p:spPr>
+                  <a:xfrm>
+                    <a:off x="8818116" y="1327944"/>
+                    <a:ext cx="256480" cy="153888"/>
+                  </a:xfrm>
+                  <a:prstGeom prst="rect">
+                    <a:avLst/>
+                  </a:prstGeom>
+                  <a:noFill/>
+                  <a:ln>
+                    <a:noFill/>
+                  </a:ln>
+                </p:spPr>
+                <p:txBody>
+                  <a:bodyPr wrap="none" lIns="0" tIns="0" rIns="0" bIns="0" rtlCol="0">
+                    <a:spAutoFit/>
+                  </a:bodyPr>
+                  <a:lstStyle/>
+                  <a:p>
+                    <a:r>
+                      <a:rPr lang="de-DE" sz="1000" dirty="0">
+                        <a:latin typeface="+mj-lt"/>
+                        <a:ea typeface="Cormorant Garamond" pitchFamily="2" charset="0"/>
+                        <a:cs typeface="Cormorant Garamond" pitchFamily="2" charset="0"/>
+                      </a:rPr>
+                      <a:t>****</a:t>
+                    </a:r>
+                  </a:p>
+                </p:txBody>
+              </p:sp>
+            </p:grpSp>
+          </p:grpSp>
+        </p:grpSp>
+      </p:grpSp>
+      <p:sp>
+        <p:nvSpPr>
+          <p:cNvPr id="4" name="Freihandform: Form 3">
+            <a:extLst>
+              <a:ext uri="{FF2B5EF4-FFF2-40B4-BE49-F238E27FC236}">
+                <a16:creationId xmlns:a16="http://schemas.microsoft.com/office/drawing/2014/main" id="{63959786-A60C-D090-9CD3-BC5BBB4873B4}"/>
+              </a:ext>
+            </a:extLst>
+          </p:cNvPr>
+          <p:cNvSpPr/>
+          <p:nvPr/>
+        </p:nvSpPr>
+        <p:spPr>
+          <a:xfrm flipH="1">
+            <a:off x="8657661" y="-2955952"/>
+            <a:ext cx="6300782" cy="3481390"/>
+          </a:xfrm>
+          <a:custGeom>
+            <a:avLst/>
+            <a:gdLst>
+              <a:gd name="csX0" fmla="*/ 0 w 6300782"/>
+              <a:gd name="csY0" fmla="*/ 0 h 3481390"/>
+              <a:gd name="csX1" fmla="*/ 4560087 w 6300782"/>
+              <a:gd name="csY1" fmla="*/ 0 h 3481390"/>
+              <a:gd name="csX2" fmla="*/ 4562473 w 6300782"/>
+              <a:gd name="csY2" fmla="*/ 0 h 3481390"/>
+              <a:gd name="csX3" fmla="*/ 4562473 w 6300782"/>
+              <a:gd name="csY3" fmla="*/ 121 h 3481390"/>
+              <a:gd name="csX4" fmla="*/ 4738063 w 6300782"/>
+              <a:gd name="csY4" fmla="*/ 8987 h 3481390"/>
+              <a:gd name="csX5" fmla="*/ 6300782 w 6300782"/>
+              <a:gd name="csY5" fmla="*/ 1740695 h 3481390"/>
+              <a:gd name="csX6" fmla="*/ 4738063 w 6300782"/>
+              <a:gd name="csY6" fmla="*/ 3472403 h 3481390"/>
+              <a:gd name="csX7" fmla="*/ 4562473 w 6300782"/>
+              <a:gd name="csY7" fmla="*/ 3481270 h 3481390"/>
+              <a:gd name="csX8" fmla="*/ 4562473 w 6300782"/>
+              <a:gd name="csY8" fmla="*/ 3481390 h 3481390"/>
+              <a:gd name="csX9" fmla="*/ 4560087 w 6300782"/>
+              <a:gd name="csY9" fmla="*/ 3481390 h 3481390"/>
+              <a:gd name="csX10" fmla="*/ 0 w 6300782"/>
+              <a:gd name="csY10" fmla="*/ 3481390 h 3481390"/>
+            </a:gdLst>
+            <a:ahLst/>
+            <a:cxnLst>
+              <a:cxn ang="0">
+                <a:pos x="csX0" y="csY0"/>
+              </a:cxn>
+              <a:cxn ang="0">
+                <a:pos x="csX1" y="csY1"/>
+              </a:cxn>
+              <a:cxn ang="0">
+                <a:pos x="csX2" y="csY2"/>
+              </a:cxn>
+              <a:cxn ang="0">
+                <a:pos x="csX3" y="csY3"/>
+              </a:cxn>
+              <a:cxn ang="0">
+                <a:pos x="csX4" y="csY4"/>
+              </a:cxn>
+              <a:cxn ang="0">
+                <a:pos x="csX5" y="csY5"/>
+              </a:cxn>
+              <a:cxn ang="0">
+                <a:pos x="csX6" y="csY6"/>
+              </a:cxn>
+              <a:cxn ang="0">
+                <a:pos x="csX7" y="csY7"/>
+              </a:cxn>
+              <a:cxn ang="0">
+                <a:pos x="csX8" y="csY8"/>
+              </a:cxn>
+              <a:cxn ang="0">
+                <a:pos x="csX9" y="csY9"/>
+              </a:cxn>
+              <a:cxn ang="0">
+                <a:pos x="csX10" y="csY10"/>
+              </a:cxn>
+            </a:cxnLst>
+            <a:rect l="l" t="t" r="r" b="b"/>
+            <a:pathLst>
+              <a:path w="6300782" h="3481390">
+                <a:moveTo>
+                  <a:pt x="0" y="0"/>
+                </a:moveTo>
+                <a:lnTo>
+                  <a:pt x="4560087" y="0"/>
+                </a:lnTo>
+                <a:lnTo>
+                  <a:pt x="4562473" y="0"/>
+                </a:lnTo>
+                <a:lnTo>
+                  <a:pt x="4562473" y="121"/>
+                </a:lnTo>
+                <a:lnTo>
+                  <a:pt x="4738063" y="8987"/>
+                </a:lnTo>
+                <a:cubicBezTo>
+                  <a:pt x="5615819" y="98128"/>
+                  <a:pt x="6300782" y="839421"/>
+                  <a:pt x="6300782" y="1740695"/>
+                </a:cubicBezTo>
+                <a:cubicBezTo>
+                  <a:pt x="6300782" y="2641969"/>
+                  <a:pt x="5615819" y="3383262"/>
+                  <a:pt x="4738063" y="3472403"/>
+                </a:cubicBezTo>
+                <a:lnTo>
+                  <a:pt x="4562473" y="3481270"/>
+                </a:lnTo>
+                <a:lnTo>
+                  <a:pt x="4562473" y="3481390"/>
+                </a:lnTo>
+                <a:lnTo>
+                  <a:pt x="4560087" y="3481390"/>
+                </a:lnTo>
+                <a:lnTo>
+                  <a:pt x="0" y="3481390"/>
+                </a:lnTo>
+                <a:close/>
+              </a:path>
+            </a:pathLst>
+          </a:custGeom>
+          <a:solidFill>
+            <a:srgbClr val="E3E9EA"/>
+          </a:solidFill>
+          <a:ln>
+            <a:noFill/>
+          </a:ln>
+        </p:spPr>
+        <p:style>
+          <a:lnRef idx="2">
+            <a:schemeClr val="accent1">
+              <a:shade val="15000"/>
+            </a:schemeClr>
+          </a:lnRef>
+          <a:fillRef idx="1">
+            <a:schemeClr val="accent1"/>
+          </a:fillRef>
+          <a:effectRef idx="0">
+            <a:schemeClr val="accent1"/>
+          </a:effectRef>
+          <a:fontRef idx="minor">
+            <a:schemeClr val="lt1"/>
+          </a:fontRef>
+        </p:style>
+        <p:txBody>
+          <a:bodyPr lIns="0" tIns="0" rIns="0" bIns="0" rtlCol="0" anchor="ctr"/>
+          <a:lstStyle/>
+          <a:p>
+            <a:pPr algn="ctr"/>
+            <a:endParaRPr lang="de-DE" sz="1600" b="1">
+              <a:solidFill>
+                <a:schemeClr val="tx1"/>
+              </a:solidFill>
+            </a:endParaRPr>
           </a:p>
         </p:txBody>
       </p:sp>
       <p:sp>
         <p:nvSpPr>
-          <p:cNvPr id="3" name="Textfeld 2">
+          <p:cNvPr id="5" name="Textfeld 4">
             <a:extLst>
               <a:ext uri="{FF2B5EF4-FFF2-40B4-BE49-F238E27FC236}">
-                <a16:creationId xmlns:a16="http://schemas.microsoft.com/office/drawing/2014/main" id="{B3E27FEC-CF18-B41E-767F-E067590DAD6A}"/>
+                <a16:creationId xmlns:a16="http://schemas.microsoft.com/office/drawing/2014/main" id="{9463FABB-C411-9F70-E3B3-E5E3CEEC0D68}"/>
               </a:ext>
             </a:extLst>
           </p:cNvPr>
@@ -4833,8 +6849,8 @@
         </p:nvSpPr>
         <p:spPr>
           <a:xfrm>
-            <a:off x="2362200" y="2717800"/>
-            <a:ext cx="8461996" cy="1477328"/>
+            <a:off x="10287922" y="17905"/>
+            <a:ext cx="1904078" cy="461665"/>
           </a:xfrm>
           <a:prstGeom prst="rect">
             <a:avLst/>
@@ -4842,233 +6858,112 @@
           <a:noFill/>
         </p:spPr>
         <p:txBody>
-          <a:bodyPr wrap="none" rtlCol="0">
+          <a:bodyPr wrap="square" rtlCol="0">
             <a:spAutoFit/>
           </a:bodyPr>
           <a:lstStyle/>
           <a:p>
-            <a:r>
-              <a:rPr lang="de-DE" dirty="0"/>
-              <a:t>Reason: </a:t>
-            </a:r>
-            <a:r>
-              <a:rPr lang="de-DE" dirty="0" err="1"/>
-              <a:t>local</a:t>
-            </a:r>
-            <a:r>
-              <a:rPr lang="de-DE" dirty="0"/>
-              <a:t> </a:t>
-            </a:r>
-            <a:r>
-              <a:rPr lang="de-DE" dirty="0" err="1"/>
-              <a:t>exhaustion</a:t>
-            </a:r>
-            <a:r>
-              <a:rPr lang="de-DE" dirty="0"/>
-              <a:t> – </a:t>
-            </a:r>
-            <a:r>
-              <a:rPr lang="de-DE" dirty="0" err="1"/>
-              <a:t>exploitation</a:t>
-            </a:r>
-            <a:r>
-              <a:rPr lang="de-DE" dirty="0"/>
-              <a:t> </a:t>
-            </a:r>
-            <a:r>
-              <a:rPr lang="de-DE" dirty="0" err="1"/>
-              <a:t>vs</a:t>
-            </a:r>
-            <a:r>
-              <a:rPr lang="de-DE" dirty="0"/>
-              <a:t> </a:t>
-            </a:r>
-            <a:r>
-              <a:rPr lang="de-DE" dirty="0" err="1"/>
-              <a:t>exploration</a:t>
-            </a:r>
-            <a:r>
-              <a:rPr lang="de-DE" dirty="0"/>
-              <a:t> not optimal in </a:t>
-            </a:r>
-            <a:r>
-              <a:rPr lang="de-DE" dirty="0" err="1"/>
-              <a:t>lookup</a:t>
-            </a:r>
-            <a:r>
-              <a:rPr lang="de-DE" dirty="0"/>
-              <a:t> </a:t>
-            </a:r>
-            <a:r>
-              <a:rPr lang="de-DE" dirty="0" err="1"/>
-              <a:t>solution</a:t>
-            </a:r>
-            <a:endParaRPr lang="de-DE" dirty="0"/>
-          </a:p>
-          <a:p>
-            <a:endParaRPr lang="de-DE" dirty="0"/>
-          </a:p>
-          <a:p>
-            <a:r>
-              <a:rPr lang="de-DE" dirty="0"/>
-              <a:t>Show </a:t>
-            </a:r>
-            <a:r>
-              <a:rPr lang="de-DE" dirty="0" err="1"/>
-              <a:t>how</a:t>
-            </a:r>
-            <a:r>
-              <a:rPr lang="de-DE" dirty="0"/>
-              <a:t> EA </a:t>
-            </a:r>
-            <a:r>
-              <a:rPr lang="de-DE" dirty="0" err="1"/>
-              <a:t>solutions</a:t>
-            </a:r>
-            <a:r>
-              <a:rPr lang="de-DE" dirty="0"/>
-              <a:t> </a:t>
-            </a:r>
-            <a:r>
-              <a:rPr lang="de-DE" dirty="0" err="1"/>
-              <a:t>solve</a:t>
-            </a:r>
-            <a:r>
-              <a:rPr lang="de-DE" dirty="0"/>
-              <a:t> </a:t>
-            </a:r>
-            <a:r>
-              <a:rPr lang="de-DE" dirty="0" err="1"/>
-              <a:t>it</a:t>
-            </a:r>
-            <a:endParaRPr lang="de-DE" dirty="0"/>
-          </a:p>
-          <a:p>
-            <a:endParaRPr lang="de-DE" dirty="0"/>
-          </a:p>
-          <a:p>
-            <a:r>
-              <a:rPr lang="de-DE" dirty="0" err="1"/>
-              <a:t>Calculate</a:t>
-            </a:r>
-            <a:r>
-              <a:rPr lang="de-DE" dirty="0"/>
-              <a:t> </a:t>
-            </a:r>
-            <a:r>
-              <a:rPr lang="de-DE" dirty="0" err="1"/>
-              <a:t>exploitation</a:t>
-            </a:r>
-            <a:r>
-              <a:rPr lang="de-DE" dirty="0"/>
-              <a:t> </a:t>
-            </a:r>
-            <a:r>
-              <a:rPr lang="de-DE" dirty="0" err="1"/>
-              <a:t>vs</a:t>
-            </a:r>
-            <a:r>
-              <a:rPr lang="de-DE" dirty="0"/>
-              <a:t> </a:t>
-            </a:r>
-            <a:r>
-              <a:rPr lang="de-DE" dirty="0" err="1"/>
-              <a:t>exploration</a:t>
-            </a:r>
-            <a:r>
-              <a:rPr lang="de-DE" dirty="0"/>
-              <a:t> and </a:t>
-            </a:r>
-            <a:r>
-              <a:rPr lang="de-DE" dirty="0" err="1"/>
-              <a:t>show</a:t>
-            </a:r>
-            <a:r>
-              <a:rPr lang="de-DE" dirty="0"/>
-              <a:t> </a:t>
-            </a:r>
-            <a:r>
-              <a:rPr lang="de-DE" dirty="0" err="1"/>
-              <a:t>comparison</a:t>
-            </a:r>
-            <a:endParaRPr lang="de-DE" dirty="0"/>
+            <a:pPr algn="ctr"/>
+            <a:r>
+              <a:rPr lang="de-DE" sz="2400" dirty="0">
+                <a:solidFill>
+                  <a:srgbClr val="00336E"/>
+                </a:solidFill>
+                <a:ea typeface="Cormorant Garamond" pitchFamily="2" charset="0"/>
+                <a:cs typeface="Cormorant Garamond" pitchFamily="2" charset="0"/>
+              </a:rPr>
+              <a:t>First </a:t>
+            </a:r>
+            <a:r>
+              <a:rPr lang="de-DE" sz="2400" dirty="0" err="1">
+                <a:solidFill>
+                  <a:srgbClr val="00336E"/>
+                </a:solidFill>
+                <a:ea typeface="Cormorant Garamond" pitchFamily="2" charset="0"/>
+                <a:cs typeface="Cormorant Garamond" pitchFamily="2" charset="0"/>
+              </a:rPr>
+              <a:t>results</a:t>
+            </a:r>
+            <a:endParaRPr lang="de-DE" sz="2400" b="1" dirty="0">
+              <a:solidFill>
+                <a:srgbClr val="00336E"/>
+              </a:solidFill>
+              <a:ea typeface="Cormorant Garamond" pitchFamily="2" charset="0"/>
+              <a:cs typeface="Cormorant Garamond" pitchFamily="2" charset="0"/>
+            </a:endParaRPr>
           </a:p>
         </p:txBody>
       </p:sp>
       <p:sp>
         <p:nvSpPr>
-          <p:cNvPr id="4" name="Fußzeilenplatzhalter 3">
+          <p:cNvPr id="6" name="Ellipse 5">
             <a:extLst>
               <a:ext uri="{FF2B5EF4-FFF2-40B4-BE49-F238E27FC236}">
-                <a16:creationId xmlns:a16="http://schemas.microsoft.com/office/drawing/2014/main" id="{D7513EDA-5644-4A58-4861-5C9FA0103B8E}"/>
+                <a16:creationId xmlns:a16="http://schemas.microsoft.com/office/drawing/2014/main" id="{EC01C0AD-4883-6901-BC52-5F3B93D98D2F}"/>
               </a:ext>
             </a:extLst>
           </p:cNvPr>
-          <p:cNvSpPr>
-            <a:spLocks noGrp="1"/>
-          </p:cNvSpPr>
-          <p:nvPr>
-            <p:ph type="ftr" sz="quarter" idx="4294967295"/>
-          </p:nvPr>
+          <p:cNvSpPr/>
+          <p:nvPr/>
         </p:nvSpPr>
         <p:spPr>
           <a:xfrm>
-            <a:off x="4038600" y="6356350"/>
-            <a:ext cx="4114800" cy="365125"/>
+            <a:off x="10012084" y="66307"/>
+            <a:ext cx="340233" cy="340233"/>
           </a:xfrm>
-          <a:prstGeom prst="rect">
+          <a:prstGeom prst="ellipse">
             <a:avLst/>
           </a:prstGeom>
+          <a:solidFill>
+            <a:srgbClr val="E3E9EA"/>
+          </a:solidFill>
+          <a:ln>
+            <a:solidFill>
+              <a:srgbClr val="00336E"/>
+            </a:solidFill>
+          </a:ln>
         </p:spPr>
+        <p:style>
+          <a:lnRef idx="2">
+            <a:schemeClr val="accent1">
+              <a:shade val="15000"/>
+            </a:schemeClr>
+          </a:lnRef>
+          <a:fillRef idx="1">
+            <a:schemeClr val="accent1"/>
+          </a:fillRef>
+          <a:effectRef idx="0">
+            <a:schemeClr val="accent1"/>
+          </a:effectRef>
+          <a:fontRef idx="minor">
+            <a:schemeClr val="lt1"/>
+          </a:fontRef>
+        </p:style>
         <p:txBody>
-          <a:bodyPr/>
+          <a:bodyPr lIns="0" tIns="0" rIns="0" bIns="0" rtlCol="0" anchor="ctr"/>
           <a:lstStyle/>
           <a:p>
-            <a:r>
-              <a:rPr lang="de-DE"/>
-              <a:t>Dr. Jana Dahlmanns – Jana.Dahlmanns@fau.de</a:t>
-            </a:r>
-          </a:p>
-        </p:txBody>
-      </p:sp>
-      <p:sp>
-        <p:nvSpPr>
-          <p:cNvPr id="5" name="Foliennummernplatzhalter 4">
-            <a:extLst>
-              <a:ext uri="{FF2B5EF4-FFF2-40B4-BE49-F238E27FC236}">
-                <a16:creationId xmlns:a16="http://schemas.microsoft.com/office/drawing/2014/main" id="{EC29F392-6C6B-B07A-5B7C-0B2452FE0D58}"/>
-              </a:ext>
-            </a:extLst>
-          </p:cNvPr>
-          <p:cNvSpPr>
-            <a:spLocks noGrp="1"/>
-          </p:cNvSpPr>
-          <p:nvPr>
-            <p:ph type="sldNum" sz="quarter" idx="4294967295"/>
-          </p:nvPr>
-        </p:nvSpPr>
-        <p:spPr>
-          <a:xfrm>
-            <a:off x="8610600" y="6356350"/>
-            <a:ext cx="2743200" cy="365125"/>
-          </a:xfrm>
-        </p:spPr>
-        <p:txBody>
-          <a:bodyPr/>
-          <a:lstStyle/>
-          <a:p>
-            <a:fld id="{001D04CD-A18E-4C48-A0D4-2F175BEDACF1}" type="slidenum">
-              <a:rPr lang="de-DE" smtClean="0"/>
-              <a:t>16</a:t>
-            </a:fld>
-            <a:endParaRPr lang="de-DE"/>
+            <a:pPr algn="ctr"/>
+            <a:r>
+              <a:rPr lang="de-DE" b="1" dirty="0">
+                <a:solidFill>
+                  <a:schemeClr val="tx1"/>
+                </a:solidFill>
+              </a:rPr>
+              <a:t>1</a:t>
+            </a:r>
+            <a:endParaRPr lang="de-DE" sz="900" b="1" dirty="0">
+              <a:solidFill>
+                <a:schemeClr val="tx1"/>
+              </a:solidFill>
+            </a:endParaRPr>
           </a:p>
         </p:txBody>
       </p:sp>
     </p:spTree>
     <p:extLst>
       <p:ext uri="{BB962C8B-B14F-4D97-AF65-F5344CB8AC3E}">
-        <p14:creationId xmlns:p14="http://schemas.microsoft.com/office/powerpoint/2010/main" val="3669627290"/>
+        <p14:creationId xmlns:p14="http://schemas.microsoft.com/office/powerpoint/2010/main" val="231398814"/>
       </p:ext>
     </p:extLst>
   </p:cSld>
@@ -5083,7 +6978,13 @@
   <p:cSld>
     <p:spTree>
       <p:nvGrpSpPr>
-        <p:cNvPr id="1" name=""/>
+        <p:cNvPr id="1" name="">
+          <a:extLst>
+            <a:ext uri="{FF2B5EF4-FFF2-40B4-BE49-F238E27FC236}">
+              <a16:creationId xmlns:a16="http://schemas.microsoft.com/office/drawing/2014/main" id="{2DEDDD56-5017-5E3B-A022-E3626EF24A64}"/>
+            </a:ext>
+          </a:extLst>
+        </p:cNvPr>
         <p:cNvGrpSpPr/>
         <p:nvPr/>
       </p:nvGrpSpPr>
@@ -5097,10 +6998,10 @@
       </p:grpSpPr>
       <p:sp>
         <p:nvSpPr>
-          <p:cNvPr id="2" name="Textfeld 1">
+          <p:cNvPr id="23" name="Textfeld 22">
             <a:extLst>
               <a:ext uri="{FF2B5EF4-FFF2-40B4-BE49-F238E27FC236}">
-                <a16:creationId xmlns:a16="http://schemas.microsoft.com/office/drawing/2014/main" id="{5731082E-4466-5528-BC28-6E3503A92BB2}"/>
+                <a16:creationId xmlns:a16="http://schemas.microsoft.com/office/drawing/2014/main" id="{C497F9BB-5826-9B4D-46D9-7FA08DB98963}"/>
               </a:ext>
             </a:extLst>
           </p:cNvPr>
@@ -5109,8 +7010,8 @@
         </p:nvSpPr>
         <p:spPr>
           <a:xfrm>
-            <a:off x="5114643" y="495300"/>
-            <a:ext cx="981359" cy="369332"/>
+            <a:off x="370804" y="1692847"/>
+            <a:ext cx="3280900" cy="1470339"/>
           </a:xfrm>
           <a:prstGeom prst="rect">
             <a:avLst/>
@@ -5118,24 +7019,293 @@
           <a:noFill/>
         </p:spPr>
         <p:txBody>
-          <a:bodyPr wrap="none" rtlCol="0">
+          <a:bodyPr wrap="square">
             <a:spAutoFit/>
           </a:bodyPr>
           <a:lstStyle/>
           <a:p>
-            <a:r>
-              <a:rPr lang="de-DE" dirty="0"/>
-              <a:t>Outlook</a:t>
-            </a:r>
+            <a:pPr>
+              <a:lnSpc>
+                <a:spcPct val="115000"/>
+              </a:lnSpc>
+              <a:spcAft>
+                <a:spcPts val="1000"/>
+              </a:spcAft>
+              <a:buNone/>
+            </a:pPr>
+            <a:r>
+              <a:rPr lang="en-US" sz="1800" dirty="0">
+                <a:effectLst/>
+                <a:ea typeface="MS Mincho" panose="02020609040205080304" pitchFamily="49" charset="-128"/>
+                <a:cs typeface="Times New Roman" panose="02020603050405020304" pitchFamily="18" charset="0"/>
+              </a:rPr>
+              <a:t>In this scenario food once consumed does not regrow.</a:t>
+            </a:r>
+          </a:p>
+          <a:p>
+            <a:pPr>
+              <a:lnSpc>
+                <a:spcPct val="115000"/>
+              </a:lnSpc>
+              <a:spcAft>
+                <a:spcPts val="1000"/>
+              </a:spcAft>
+              <a:buNone/>
+            </a:pPr>
+            <a:r>
+              <a:rPr lang="en-US" b="1" dirty="0">
+                <a:ea typeface="MS Mincho" panose="02020609040205080304" pitchFamily="49" charset="-128"/>
+                <a:cs typeface="Times New Roman" panose="02020603050405020304" pitchFamily="18" charset="0"/>
+              </a:rPr>
+              <a:t>Randomly moving variants deplete their local supply.</a:t>
+            </a:r>
+            <a:endParaRPr lang="de-DE" sz="1800" b="1" dirty="0">
+              <a:effectLst/>
+              <a:ea typeface="MS Mincho" panose="02020609040205080304" pitchFamily="49" charset="-128"/>
+              <a:cs typeface="Times New Roman" panose="02020603050405020304" pitchFamily="18" charset="0"/>
+            </a:endParaRPr>
+          </a:p>
+        </p:txBody>
+      </p:sp>
+      <p:pic>
+        <p:nvPicPr>
+          <p:cNvPr id="6" name="Grafik 5">
+            <a:extLst>
+              <a:ext uri="{FF2B5EF4-FFF2-40B4-BE49-F238E27FC236}">
+                <a16:creationId xmlns:a16="http://schemas.microsoft.com/office/drawing/2014/main" id="{8EE3B172-5283-F1E4-D279-BA2376454400}"/>
+              </a:ext>
+            </a:extLst>
+          </p:cNvPr>
+          <p:cNvPicPr>
+            <a:picLocks noChangeAspect="1"/>
+          </p:cNvPicPr>
+          <p:nvPr/>
+        </p:nvPicPr>
+        <p:blipFill>
+          <a:blip r:embed="rId3">
+            <a:extLst>
+              <a:ext uri="{28A0092B-C50C-407E-A947-70E740481C1C}">
+                <a14:useLocalDpi xmlns:a14="http://schemas.microsoft.com/office/drawing/2010/main" val="0"/>
+              </a:ext>
+            </a:extLst>
+          </a:blip>
+          <a:srcRect r="33108"/>
+          <a:stretch>
+            <a:fillRect/>
+          </a:stretch>
+        </p:blipFill>
+        <p:spPr>
+          <a:xfrm>
+            <a:off x="3541691" y="1388321"/>
+            <a:ext cx="5238320" cy="3147134"/>
+          </a:xfrm>
+          <a:prstGeom prst="rect">
+            <a:avLst/>
+          </a:prstGeom>
+        </p:spPr>
+      </p:pic>
+      <p:pic>
+        <p:nvPicPr>
+          <p:cNvPr id="9" name="Grafik 8">
+            <a:extLst>
+              <a:ext uri="{FF2B5EF4-FFF2-40B4-BE49-F238E27FC236}">
+                <a16:creationId xmlns:a16="http://schemas.microsoft.com/office/drawing/2014/main" id="{2169F886-1023-3CB3-32B5-1788DA0CEF4F}"/>
+              </a:ext>
+            </a:extLst>
+          </p:cNvPr>
+          <p:cNvPicPr>
+            <a:picLocks noChangeAspect="1"/>
+          </p:cNvPicPr>
+          <p:nvPr/>
+        </p:nvPicPr>
+        <p:blipFill>
+          <a:blip r:embed="rId4">
+            <a:extLst>
+              <a:ext uri="{28A0092B-C50C-407E-A947-70E740481C1C}">
+                <a14:useLocalDpi xmlns:a14="http://schemas.microsoft.com/office/drawing/2010/main" val="0"/>
+              </a:ext>
+            </a:extLst>
+          </a:blip>
+          <a:srcRect r="66514"/>
+          <a:stretch>
+            <a:fillRect/>
+          </a:stretch>
+        </p:blipFill>
+        <p:spPr>
+          <a:xfrm>
+            <a:off x="9326644" y="1388321"/>
+            <a:ext cx="2624254" cy="3149516"/>
+          </a:xfrm>
+          <a:prstGeom prst="rect">
+            <a:avLst/>
+          </a:prstGeom>
+        </p:spPr>
+      </p:pic>
+      <p:sp>
+        <p:nvSpPr>
+          <p:cNvPr id="4" name="Freihandform: Form 3">
+            <a:extLst>
+              <a:ext uri="{FF2B5EF4-FFF2-40B4-BE49-F238E27FC236}">
+                <a16:creationId xmlns:a16="http://schemas.microsoft.com/office/drawing/2014/main" id="{93E78693-B4AC-BE5F-A959-732D7FD42E59}"/>
+              </a:ext>
+            </a:extLst>
+          </p:cNvPr>
+          <p:cNvSpPr/>
+          <p:nvPr/>
+        </p:nvSpPr>
+        <p:spPr>
+          <a:xfrm flipH="1">
+            <a:off x="8657661" y="-2955952"/>
+            <a:ext cx="6300782" cy="3481390"/>
+          </a:xfrm>
+          <a:custGeom>
+            <a:avLst/>
+            <a:gdLst>
+              <a:gd name="csX0" fmla="*/ 0 w 6300782"/>
+              <a:gd name="csY0" fmla="*/ 0 h 3481390"/>
+              <a:gd name="csX1" fmla="*/ 4560087 w 6300782"/>
+              <a:gd name="csY1" fmla="*/ 0 h 3481390"/>
+              <a:gd name="csX2" fmla="*/ 4562473 w 6300782"/>
+              <a:gd name="csY2" fmla="*/ 0 h 3481390"/>
+              <a:gd name="csX3" fmla="*/ 4562473 w 6300782"/>
+              <a:gd name="csY3" fmla="*/ 121 h 3481390"/>
+              <a:gd name="csX4" fmla="*/ 4738063 w 6300782"/>
+              <a:gd name="csY4" fmla="*/ 8987 h 3481390"/>
+              <a:gd name="csX5" fmla="*/ 6300782 w 6300782"/>
+              <a:gd name="csY5" fmla="*/ 1740695 h 3481390"/>
+              <a:gd name="csX6" fmla="*/ 4738063 w 6300782"/>
+              <a:gd name="csY6" fmla="*/ 3472403 h 3481390"/>
+              <a:gd name="csX7" fmla="*/ 4562473 w 6300782"/>
+              <a:gd name="csY7" fmla="*/ 3481270 h 3481390"/>
+              <a:gd name="csX8" fmla="*/ 4562473 w 6300782"/>
+              <a:gd name="csY8" fmla="*/ 3481390 h 3481390"/>
+              <a:gd name="csX9" fmla="*/ 4560087 w 6300782"/>
+              <a:gd name="csY9" fmla="*/ 3481390 h 3481390"/>
+              <a:gd name="csX10" fmla="*/ 0 w 6300782"/>
+              <a:gd name="csY10" fmla="*/ 3481390 h 3481390"/>
+            </a:gdLst>
+            <a:ahLst/>
+            <a:cxnLst>
+              <a:cxn ang="0">
+                <a:pos x="csX0" y="csY0"/>
+              </a:cxn>
+              <a:cxn ang="0">
+                <a:pos x="csX1" y="csY1"/>
+              </a:cxn>
+              <a:cxn ang="0">
+                <a:pos x="csX2" y="csY2"/>
+              </a:cxn>
+              <a:cxn ang="0">
+                <a:pos x="csX3" y="csY3"/>
+              </a:cxn>
+              <a:cxn ang="0">
+                <a:pos x="csX4" y="csY4"/>
+              </a:cxn>
+              <a:cxn ang="0">
+                <a:pos x="csX5" y="csY5"/>
+              </a:cxn>
+              <a:cxn ang="0">
+                <a:pos x="csX6" y="csY6"/>
+              </a:cxn>
+              <a:cxn ang="0">
+                <a:pos x="csX7" y="csY7"/>
+              </a:cxn>
+              <a:cxn ang="0">
+                <a:pos x="csX8" y="csY8"/>
+              </a:cxn>
+              <a:cxn ang="0">
+                <a:pos x="csX9" y="csY9"/>
+              </a:cxn>
+              <a:cxn ang="0">
+                <a:pos x="csX10" y="csY10"/>
+              </a:cxn>
+            </a:cxnLst>
+            <a:rect l="l" t="t" r="r" b="b"/>
+            <a:pathLst>
+              <a:path w="6300782" h="3481390">
+                <a:moveTo>
+                  <a:pt x="0" y="0"/>
+                </a:moveTo>
+                <a:lnTo>
+                  <a:pt x="4560087" y="0"/>
+                </a:lnTo>
+                <a:lnTo>
+                  <a:pt x="4562473" y="0"/>
+                </a:lnTo>
+                <a:lnTo>
+                  <a:pt x="4562473" y="121"/>
+                </a:lnTo>
+                <a:lnTo>
+                  <a:pt x="4738063" y="8987"/>
+                </a:lnTo>
+                <a:cubicBezTo>
+                  <a:pt x="5615819" y="98128"/>
+                  <a:pt x="6300782" y="839421"/>
+                  <a:pt x="6300782" y="1740695"/>
+                </a:cubicBezTo>
+                <a:cubicBezTo>
+                  <a:pt x="6300782" y="2641969"/>
+                  <a:pt x="5615819" y="3383262"/>
+                  <a:pt x="4738063" y="3472403"/>
+                </a:cubicBezTo>
+                <a:lnTo>
+                  <a:pt x="4562473" y="3481270"/>
+                </a:lnTo>
+                <a:lnTo>
+                  <a:pt x="4562473" y="3481390"/>
+                </a:lnTo>
+                <a:lnTo>
+                  <a:pt x="4560087" y="3481390"/>
+                </a:lnTo>
+                <a:lnTo>
+                  <a:pt x="0" y="3481390"/>
+                </a:lnTo>
+                <a:close/>
+              </a:path>
+            </a:pathLst>
+          </a:custGeom>
+          <a:solidFill>
+            <a:srgbClr val="E3E9EA"/>
+          </a:solidFill>
+          <a:ln>
+            <a:noFill/>
+          </a:ln>
+        </p:spPr>
+        <p:style>
+          <a:lnRef idx="2">
+            <a:schemeClr val="accent1">
+              <a:shade val="15000"/>
+            </a:schemeClr>
+          </a:lnRef>
+          <a:fillRef idx="1">
+            <a:schemeClr val="accent1"/>
+          </a:fillRef>
+          <a:effectRef idx="0">
+            <a:schemeClr val="accent1"/>
+          </a:effectRef>
+          <a:fontRef idx="minor">
+            <a:schemeClr val="lt1"/>
+          </a:fontRef>
+        </p:style>
+        <p:txBody>
+          <a:bodyPr lIns="0" tIns="0" rIns="0" bIns="0" rtlCol="0" anchor="ctr"/>
+          <a:lstStyle/>
+          <a:p>
+            <a:pPr algn="ctr"/>
+            <a:endParaRPr lang="de-DE" sz="1600" b="1">
+              <a:solidFill>
+                <a:schemeClr val="tx1"/>
+              </a:solidFill>
+            </a:endParaRPr>
           </a:p>
         </p:txBody>
       </p:sp>
       <p:sp>
         <p:nvSpPr>
-          <p:cNvPr id="3" name="Textfeld 2">
+          <p:cNvPr id="5" name="Textfeld 4">
             <a:extLst>
               <a:ext uri="{FF2B5EF4-FFF2-40B4-BE49-F238E27FC236}">
-                <a16:creationId xmlns:a16="http://schemas.microsoft.com/office/drawing/2014/main" id="{9CAD1419-0DA4-6952-9705-FC6DE9F77D12}"/>
+                <a16:creationId xmlns:a16="http://schemas.microsoft.com/office/drawing/2014/main" id="{FF6DD5DD-4B6B-9C4B-A1F2-DA5B55564AB6}"/>
               </a:ext>
             </a:extLst>
           </p:cNvPr>
@@ -5144,8 +7314,8 @@
         </p:nvSpPr>
         <p:spPr>
           <a:xfrm>
-            <a:off x="1587501" y="1435100"/>
-            <a:ext cx="7440590" cy="2308324"/>
+            <a:off x="10287922" y="17905"/>
+            <a:ext cx="1904078" cy="461665"/>
           </a:xfrm>
           <a:prstGeom prst="rect">
             <a:avLst/>
@@ -5158,449 +7328,1494 @@
           </a:bodyPr>
           <a:lstStyle/>
           <a:p>
-            <a:r>
-              <a:rPr lang="de-DE" dirty="0" err="1"/>
-              <a:t>Build</a:t>
-            </a:r>
-            <a:r>
-              <a:rPr lang="de-DE" dirty="0"/>
-              <a:t> minimal </a:t>
-            </a:r>
-            <a:r>
-              <a:rPr lang="de-DE" dirty="0" err="1"/>
-              <a:t>networks</a:t>
-            </a:r>
-            <a:r>
-              <a:rPr lang="de-DE" dirty="0"/>
-              <a:t> </a:t>
-            </a:r>
-            <a:r>
-              <a:rPr lang="de-DE" dirty="0" err="1"/>
-              <a:t>that</a:t>
-            </a:r>
-            <a:r>
-              <a:rPr lang="de-DE" dirty="0"/>
-              <a:t> </a:t>
-            </a:r>
-            <a:r>
-              <a:rPr lang="de-DE" dirty="0" err="1"/>
-              <a:t>can</a:t>
-            </a:r>
-            <a:r>
-              <a:rPr lang="de-DE" dirty="0"/>
-              <a:t> </a:t>
-            </a:r>
-            <a:r>
-              <a:rPr lang="de-DE" dirty="0" err="1"/>
-              <a:t>adapt</a:t>
-            </a:r>
-            <a:r>
-              <a:rPr lang="de-DE" dirty="0"/>
-              <a:t> </a:t>
-            </a:r>
-            <a:r>
-              <a:rPr lang="de-DE" dirty="0" err="1"/>
-              <a:t>to</a:t>
-            </a:r>
-            <a:r>
-              <a:rPr lang="de-DE" dirty="0"/>
-              <a:t> </a:t>
-            </a:r>
-            <a:r>
-              <a:rPr lang="de-DE" dirty="0" err="1"/>
-              <a:t>tasks</a:t>
-            </a:r>
-            <a:r>
-              <a:rPr lang="de-DE" dirty="0"/>
-              <a:t> </a:t>
-            </a:r>
-            <a:r>
-              <a:rPr lang="de-DE" dirty="0" err="1"/>
-              <a:t>they</a:t>
-            </a:r>
-            <a:r>
-              <a:rPr lang="de-DE" dirty="0"/>
-              <a:t> </a:t>
-            </a:r>
-            <a:r>
-              <a:rPr lang="de-DE" dirty="0" err="1"/>
-              <a:t>were</a:t>
-            </a:r>
-            <a:r>
-              <a:rPr lang="de-DE" dirty="0"/>
-              <a:t> </a:t>
-            </a:r>
-            <a:r>
-              <a:rPr lang="de-DE" dirty="0" err="1"/>
-              <a:t>never</a:t>
-            </a:r>
-            <a:r>
-              <a:rPr lang="de-DE" dirty="0"/>
-              <a:t> </a:t>
-            </a:r>
-            <a:r>
-              <a:rPr lang="de-DE" dirty="0" err="1"/>
-              <a:t>explicitly</a:t>
-            </a:r>
-            <a:r>
-              <a:rPr lang="de-DE" dirty="0"/>
-              <a:t> </a:t>
-            </a:r>
-            <a:r>
-              <a:rPr lang="de-DE" dirty="0" err="1"/>
-              <a:t>trained</a:t>
-            </a:r>
-            <a:r>
-              <a:rPr lang="de-DE" dirty="0"/>
-              <a:t> on, and </a:t>
-            </a:r>
-            <a:r>
-              <a:rPr lang="de-DE" dirty="0" err="1"/>
-              <a:t>characterize</a:t>
-            </a:r>
-            <a:r>
-              <a:rPr lang="de-DE" dirty="0"/>
-              <a:t> </a:t>
-            </a:r>
-            <a:r>
-              <a:rPr lang="de-DE" dirty="0" err="1"/>
-              <a:t>what</a:t>
-            </a:r>
-            <a:r>
-              <a:rPr lang="de-DE" dirty="0"/>
-              <a:t> </a:t>
-            </a:r>
-            <a:r>
-              <a:rPr lang="de-DE" dirty="0" err="1"/>
-              <a:t>structural</a:t>
-            </a:r>
-            <a:r>
-              <a:rPr lang="de-DE" dirty="0"/>
-              <a:t> </a:t>
-            </a:r>
-            <a:r>
-              <a:rPr lang="de-DE" dirty="0" err="1"/>
-              <a:t>properties</a:t>
-            </a:r>
-            <a:r>
-              <a:rPr lang="de-DE" dirty="0"/>
-              <a:t> </a:t>
-            </a:r>
-            <a:r>
-              <a:rPr lang="de-DE" dirty="0" err="1"/>
-              <a:t>make</a:t>
-            </a:r>
-            <a:r>
-              <a:rPr lang="de-DE" dirty="0"/>
-              <a:t> </a:t>
-            </a:r>
-            <a:r>
-              <a:rPr lang="de-DE" dirty="0" err="1"/>
-              <a:t>that</a:t>
-            </a:r>
-            <a:r>
-              <a:rPr lang="de-DE" dirty="0"/>
-              <a:t> possible.</a:t>
-            </a:r>
-          </a:p>
-          <a:p>
-            <a:endParaRPr lang="de-DE" dirty="0"/>
-          </a:p>
-          <a:p>
-            <a:endParaRPr lang="de-DE" dirty="0"/>
-          </a:p>
-          <a:p>
-            <a:pPr marL="285750" indent="-285750">
-              <a:buFont typeface="Wingdings" panose="05000000000000000000" pitchFamily="2" charset="2"/>
-              <a:buChar char="à"/>
-            </a:pPr>
-            <a:r>
-              <a:rPr lang="de-DE" dirty="0" err="1">
-                <a:sym typeface="Wingdings" panose="05000000000000000000" pitchFamily="2" charset="2"/>
-              </a:rPr>
-              <a:t>Candidate</a:t>
-            </a:r>
-            <a:r>
-              <a:rPr lang="de-DE" dirty="0">
-                <a:sym typeface="Wingdings" panose="05000000000000000000" pitchFamily="2" charset="2"/>
-              </a:rPr>
-              <a:t> </a:t>
-            </a:r>
-            <a:r>
-              <a:rPr lang="de-DE" dirty="0" err="1">
-                <a:sym typeface="Wingdings" panose="05000000000000000000" pitchFamily="2" charset="2"/>
-              </a:rPr>
-              <a:t>wiring</a:t>
-            </a:r>
-            <a:r>
-              <a:rPr lang="de-DE" dirty="0">
-                <a:sym typeface="Wingdings" panose="05000000000000000000" pitchFamily="2" charset="2"/>
-              </a:rPr>
-              <a:t> </a:t>
-            </a:r>
-            <a:r>
-              <a:rPr lang="de-DE" dirty="0" err="1">
-                <a:sym typeface="Wingdings" panose="05000000000000000000" pitchFamily="2" charset="2"/>
-              </a:rPr>
-              <a:t>motifs</a:t>
-            </a:r>
-            <a:r>
-              <a:rPr lang="de-DE" dirty="0">
-                <a:sym typeface="Wingdings" panose="05000000000000000000" pitchFamily="2" charset="2"/>
-              </a:rPr>
-              <a:t> </a:t>
-            </a:r>
-            <a:r>
-              <a:rPr lang="de-DE" dirty="0" err="1">
-                <a:sym typeface="Wingdings" panose="05000000000000000000" pitchFamily="2" charset="2"/>
-              </a:rPr>
-              <a:t>for</a:t>
-            </a:r>
-            <a:r>
-              <a:rPr lang="de-DE" dirty="0">
-                <a:sym typeface="Wingdings" panose="05000000000000000000" pitchFamily="2" charset="2"/>
-              </a:rPr>
-              <a:t> </a:t>
-            </a:r>
-            <a:r>
-              <a:rPr lang="de-DE" dirty="0" err="1">
-                <a:sym typeface="Wingdings" panose="05000000000000000000" pitchFamily="2" charset="2"/>
-              </a:rPr>
-              <a:t>targeted</a:t>
-            </a:r>
-            <a:r>
-              <a:rPr lang="de-DE" dirty="0">
-                <a:sym typeface="Wingdings" panose="05000000000000000000" pitchFamily="2" charset="2"/>
-              </a:rPr>
-              <a:t> </a:t>
-            </a:r>
-            <a:r>
-              <a:rPr lang="de-DE" dirty="0" err="1">
-                <a:sym typeface="Wingdings" panose="05000000000000000000" pitchFamily="2" charset="2"/>
-              </a:rPr>
-              <a:t>investigation</a:t>
-            </a:r>
-            <a:r>
-              <a:rPr lang="de-DE" dirty="0">
-                <a:sym typeface="Wingdings" panose="05000000000000000000" pitchFamily="2" charset="2"/>
-              </a:rPr>
-              <a:t> in </a:t>
-            </a:r>
-            <a:r>
-              <a:rPr lang="de-DE" dirty="0" err="1">
-                <a:sym typeface="Wingdings" panose="05000000000000000000" pitchFamily="2" charset="2"/>
-              </a:rPr>
-              <a:t>biological</a:t>
-            </a:r>
-            <a:r>
-              <a:rPr lang="de-DE" dirty="0">
-                <a:sym typeface="Wingdings" panose="05000000000000000000" pitchFamily="2" charset="2"/>
-              </a:rPr>
-              <a:t> </a:t>
-            </a:r>
-            <a:r>
-              <a:rPr lang="de-DE" dirty="0" err="1">
-                <a:sym typeface="Wingdings" panose="05000000000000000000" pitchFamily="2" charset="2"/>
-              </a:rPr>
-              <a:t>circuits</a:t>
-            </a:r>
-            <a:r>
-              <a:rPr lang="de-DE" dirty="0">
-                <a:sym typeface="Wingdings" panose="05000000000000000000" pitchFamily="2" charset="2"/>
-              </a:rPr>
-              <a:t> / </a:t>
-            </a:r>
-            <a:r>
-              <a:rPr lang="de-DE" dirty="0" err="1">
-                <a:sym typeface="Wingdings" panose="05000000000000000000" pitchFamily="2" charset="2"/>
-              </a:rPr>
-              <a:t>networks</a:t>
-            </a:r>
-            <a:endParaRPr lang="de-DE" dirty="0">
-              <a:sym typeface="Wingdings" panose="05000000000000000000" pitchFamily="2" charset="2"/>
-            </a:endParaRPr>
-          </a:p>
-          <a:p>
-            <a:pPr marL="285750" indent="-285750">
-              <a:buFont typeface="Wingdings" panose="05000000000000000000" pitchFamily="2" charset="2"/>
-              <a:buChar char="à"/>
-            </a:pPr>
-            <a:r>
-              <a:rPr lang="de-DE" dirty="0">
-                <a:sym typeface="Wingdings" panose="05000000000000000000" pitchFamily="2" charset="2"/>
-              </a:rPr>
-              <a:t>Model </a:t>
-            </a:r>
-            <a:r>
-              <a:rPr lang="de-DE" dirty="0" err="1">
-                <a:sym typeface="Wingdings" panose="05000000000000000000" pitchFamily="2" charset="2"/>
-              </a:rPr>
-              <a:t>for</a:t>
-            </a:r>
-            <a:r>
-              <a:rPr lang="de-DE" dirty="0">
-                <a:sym typeface="Wingdings" panose="05000000000000000000" pitchFamily="2" charset="2"/>
-              </a:rPr>
-              <a:t> </a:t>
-            </a:r>
-            <a:r>
-              <a:rPr lang="de-DE" dirty="0" err="1">
-                <a:sym typeface="Wingdings" panose="05000000000000000000" pitchFamily="2" charset="2"/>
-              </a:rPr>
-              <a:t>interpretation</a:t>
-            </a:r>
-            <a:r>
-              <a:rPr lang="de-DE" dirty="0">
-                <a:sym typeface="Wingdings" panose="05000000000000000000" pitchFamily="2" charset="2"/>
-              </a:rPr>
-              <a:t> </a:t>
-            </a:r>
-            <a:r>
-              <a:rPr lang="de-DE" dirty="0" err="1">
-                <a:sym typeface="Wingdings" panose="05000000000000000000" pitchFamily="2" charset="2"/>
-              </a:rPr>
-              <a:t>of</a:t>
-            </a:r>
-            <a:r>
-              <a:rPr lang="de-DE" dirty="0">
-                <a:sym typeface="Wingdings" panose="05000000000000000000" pitchFamily="2" charset="2"/>
-              </a:rPr>
-              <a:t> </a:t>
-            </a:r>
-            <a:r>
-              <a:rPr lang="de-DE" dirty="0" err="1">
-                <a:sym typeface="Wingdings" panose="05000000000000000000" pitchFamily="2" charset="2"/>
-              </a:rPr>
-              <a:t>data</a:t>
-            </a:r>
-            <a:r>
-              <a:rPr lang="de-DE" dirty="0">
-                <a:sym typeface="Wingdings" panose="05000000000000000000" pitchFamily="2" charset="2"/>
-              </a:rPr>
-              <a:t> </a:t>
-            </a:r>
-            <a:r>
-              <a:rPr lang="de-DE" dirty="0" err="1">
-                <a:sym typeface="Wingdings" panose="05000000000000000000" pitchFamily="2" charset="2"/>
-              </a:rPr>
-              <a:t>from</a:t>
-            </a:r>
-            <a:r>
-              <a:rPr lang="de-DE" dirty="0">
-                <a:sym typeface="Wingdings" panose="05000000000000000000" pitchFamily="2" charset="2"/>
-              </a:rPr>
-              <a:t> </a:t>
-            </a:r>
-            <a:r>
-              <a:rPr lang="de-DE" dirty="0" err="1">
-                <a:sym typeface="Wingdings" panose="05000000000000000000" pitchFamily="2" charset="2"/>
-              </a:rPr>
-              <a:t>complex</a:t>
-            </a:r>
-            <a:r>
-              <a:rPr lang="de-DE" dirty="0">
-                <a:sym typeface="Wingdings" panose="05000000000000000000" pitchFamily="2" charset="2"/>
-              </a:rPr>
-              <a:t> </a:t>
-            </a:r>
-            <a:r>
-              <a:rPr lang="de-DE" dirty="0" err="1">
-                <a:sym typeface="Wingdings" panose="05000000000000000000" pitchFamily="2" charset="2"/>
-              </a:rPr>
-              <a:t>circuits</a:t>
-            </a:r>
-            <a:r>
-              <a:rPr lang="de-DE" dirty="0">
-                <a:sym typeface="Wingdings" panose="05000000000000000000" pitchFamily="2" charset="2"/>
-              </a:rPr>
-              <a:t> and </a:t>
-            </a:r>
-            <a:r>
-              <a:rPr lang="de-DE" dirty="0" err="1">
-                <a:sym typeface="Wingdings" panose="05000000000000000000" pitchFamily="2" charset="2"/>
-              </a:rPr>
-              <a:t>brains</a:t>
-            </a:r>
-            <a:endParaRPr lang="de-DE" dirty="0">
-              <a:sym typeface="Wingdings" panose="05000000000000000000" pitchFamily="2" charset="2"/>
+            <a:pPr algn="ctr"/>
+            <a:r>
+              <a:rPr lang="de-DE" sz="2400" dirty="0">
+                <a:solidFill>
+                  <a:srgbClr val="00336E"/>
+                </a:solidFill>
+                <a:ea typeface="Cormorant Garamond" pitchFamily="2" charset="0"/>
+                <a:cs typeface="Cormorant Garamond" pitchFamily="2" charset="0"/>
+              </a:rPr>
+              <a:t>First </a:t>
+            </a:r>
+            <a:r>
+              <a:rPr lang="de-DE" sz="2400" dirty="0" err="1">
+                <a:solidFill>
+                  <a:srgbClr val="00336E"/>
+                </a:solidFill>
+                <a:ea typeface="Cormorant Garamond" pitchFamily="2" charset="0"/>
+                <a:cs typeface="Cormorant Garamond" pitchFamily="2" charset="0"/>
+              </a:rPr>
+              <a:t>results</a:t>
+            </a:r>
+            <a:endParaRPr lang="de-DE" sz="2400" b="1" dirty="0">
+              <a:solidFill>
+                <a:srgbClr val="00336E"/>
+              </a:solidFill>
+              <a:ea typeface="Cormorant Garamond" pitchFamily="2" charset="0"/>
+              <a:cs typeface="Cormorant Garamond" pitchFamily="2" charset="0"/>
             </a:endParaRPr>
           </a:p>
         </p:txBody>
       </p:sp>
       <p:sp>
         <p:nvSpPr>
-          <p:cNvPr id="4" name="Fußzeilenplatzhalter 3">
+          <p:cNvPr id="7" name="Ellipse 6">
             <a:extLst>
               <a:ext uri="{FF2B5EF4-FFF2-40B4-BE49-F238E27FC236}">
-                <a16:creationId xmlns:a16="http://schemas.microsoft.com/office/drawing/2014/main" id="{5D92CC30-3ED4-325B-1A7F-27E0E5EAEA68}"/>
+                <a16:creationId xmlns:a16="http://schemas.microsoft.com/office/drawing/2014/main" id="{82E019AC-83E9-B93B-AD8C-25062873A54B}"/>
               </a:ext>
             </a:extLst>
           </p:cNvPr>
-          <p:cNvSpPr>
-            <a:spLocks noGrp="1"/>
-          </p:cNvSpPr>
-          <p:nvPr>
-            <p:ph type="ftr" sz="quarter" idx="4294967295"/>
-          </p:nvPr>
+          <p:cNvSpPr/>
+          <p:nvPr/>
         </p:nvSpPr>
         <p:spPr>
           <a:xfrm>
-            <a:off x="4038600" y="6356350"/>
-            <a:ext cx="4114800" cy="365125"/>
+            <a:off x="10012084" y="66307"/>
+            <a:ext cx="340233" cy="340233"/>
+          </a:xfrm>
+          <a:prstGeom prst="ellipse">
+            <a:avLst/>
+          </a:prstGeom>
+          <a:solidFill>
+            <a:srgbClr val="E3E9EA"/>
+          </a:solidFill>
+          <a:ln>
+            <a:solidFill>
+              <a:srgbClr val="00336E"/>
+            </a:solidFill>
+          </a:ln>
+        </p:spPr>
+        <p:style>
+          <a:lnRef idx="2">
+            <a:schemeClr val="accent1">
+              <a:shade val="15000"/>
+            </a:schemeClr>
+          </a:lnRef>
+          <a:fillRef idx="1">
+            <a:schemeClr val="accent1"/>
+          </a:fillRef>
+          <a:effectRef idx="0">
+            <a:schemeClr val="accent1"/>
+          </a:effectRef>
+          <a:fontRef idx="minor">
+            <a:schemeClr val="lt1"/>
+          </a:fontRef>
+        </p:style>
+        <p:txBody>
+          <a:bodyPr lIns="0" tIns="0" rIns="0" bIns="0" rtlCol="0" anchor="ctr"/>
+          <a:lstStyle/>
+          <a:p>
+            <a:pPr algn="ctr"/>
+            <a:r>
+              <a:rPr lang="de-DE" b="1" dirty="0">
+                <a:solidFill>
+                  <a:schemeClr val="tx1"/>
+                </a:solidFill>
+              </a:rPr>
+              <a:t>1</a:t>
+            </a:r>
+            <a:endParaRPr lang="de-DE" sz="900" b="1" dirty="0">
+              <a:solidFill>
+                <a:schemeClr val="tx1"/>
+              </a:solidFill>
+            </a:endParaRPr>
+          </a:p>
+        </p:txBody>
+      </p:sp>
+    </p:spTree>
+    <p:extLst>
+      <p:ext uri="{BB962C8B-B14F-4D97-AF65-F5344CB8AC3E}">
+        <p14:creationId xmlns:p14="http://schemas.microsoft.com/office/powerpoint/2010/main" val="2601626041"/>
+      </p:ext>
+    </p:extLst>
+  </p:cSld>
+  <p:clrMapOvr>
+    <a:masterClrMapping/>
+  </p:clrMapOvr>
+</p:sld>
+</file>
+
+<file path=ppt/slides/slide18.xml><?xml version="1.0" encoding="utf-8"?>
+<p:sld xmlns:a="http://schemas.openxmlformats.org/drawingml/2006/main" xmlns:r="http://schemas.openxmlformats.org/officeDocument/2006/relationships" xmlns:p="http://schemas.openxmlformats.org/presentationml/2006/main">
+  <p:cSld>
+    <p:spTree>
+      <p:nvGrpSpPr>
+        <p:cNvPr id="1" name="">
+          <a:extLst>
+            <a:ext uri="{FF2B5EF4-FFF2-40B4-BE49-F238E27FC236}">
+              <a16:creationId xmlns:a16="http://schemas.microsoft.com/office/drawing/2014/main" id="{1137512E-97DE-ED28-79D6-F68A3ACFF21E}"/>
+            </a:ext>
+          </a:extLst>
+        </p:cNvPr>
+        <p:cNvGrpSpPr/>
+        <p:nvPr/>
+      </p:nvGrpSpPr>
+      <p:grpSpPr>
+        <a:xfrm>
+          <a:off x="0" y="0"/>
+          <a:ext cx="0" cy="0"/>
+          <a:chOff x="0" y="0"/>
+          <a:chExt cx="0" cy="0"/>
+        </a:xfrm>
+      </p:grpSpPr>
+      <p:sp>
+        <p:nvSpPr>
+          <p:cNvPr id="23" name="Textfeld 22">
+            <a:extLst>
+              <a:ext uri="{FF2B5EF4-FFF2-40B4-BE49-F238E27FC236}">
+                <a16:creationId xmlns:a16="http://schemas.microsoft.com/office/drawing/2014/main" id="{8BBCDE86-0CC2-BF35-FD6C-5BF859FC1B4B}"/>
+              </a:ext>
+            </a:extLst>
+          </p:cNvPr>
+          <p:cNvSpPr txBox="1"/>
+          <p:nvPr/>
+        </p:nvSpPr>
+        <p:spPr>
+          <a:xfrm>
+            <a:off x="370804" y="1692847"/>
+            <a:ext cx="3280900" cy="705001"/>
+          </a:xfrm>
+          <a:prstGeom prst="rect">
+            <a:avLst/>
+          </a:prstGeom>
+          <a:noFill/>
+        </p:spPr>
+        <p:txBody>
+          <a:bodyPr wrap="square">
+            <a:spAutoFit/>
+          </a:bodyPr>
+          <a:lstStyle/>
+          <a:p>
+            <a:pPr>
+              <a:lnSpc>
+                <a:spcPct val="115000"/>
+              </a:lnSpc>
+              <a:spcAft>
+                <a:spcPts val="1000"/>
+              </a:spcAft>
+              <a:buNone/>
+            </a:pPr>
+            <a:r>
+              <a:rPr lang="en-US" sz="1800" dirty="0">
+                <a:effectLst/>
+                <a:ea typeface="MS Mincho" panose="02020609040205080304" pitchFamily="49" charset="-128"/>
+                <a:cs typeface="Times New Roman" panose="02020603050405020304" pitchFamily="18" charset="0"/>
+              </a:rPr>
+              <a:t>Evolved variants developed a </a:t>
+            </a:r>
+            <a:r>
+              <a:rPr lang="en-US" sz="1800" b="1" dirty="0">
+                <a:effectLst/>
+                <a:ea typeface="MS Mincho" panose="02020609040205080304" pitchFamily="49" charset="-128"/>
+                <a:cs typeface="Times New Roman" panose="02020603050405020304" pitchFamily="18" charset="0"/>
+              </a:rPr>
+              <a:t>directional preference</a:t>
+            </a:r>
+            <a:r>
+              <a:rPr lang="en-US" sz="1800" dirty="0">
+                <a:effectLst/>
+                <a:ea typeface="MS Mincho" panose="02020609040205080304" pitchFamily="49" charset="-128"/>
+                <a:cs typeface="Times New Roman" panose="02020603050405020304" pitchFamily="18" charset="0"/>
+              </a:rPr>
+              <a:t>.</a:t>
+            </a:r>
+            <a:endParaRPr lang="de-DE" sz="1800" b="1" dirty="0">
+              <a:effectLst/>
+              <a:ea typeface="MS Mincho" panose="02020609040205080304" pitchFamily="49" charset="-128"/>
+              <a:cs typeface="Times New Roman" panose="02020603050405020304" pitchFamily="18" charset="0"/>
+            </a:endParaRPr>
+          </a:p>
+        </p:txBody>
+      </p:sp>
+      <p:pic>
+        <p:nvPicPr>
+          <p:cNvPr id="5" name="Grafik 4">
+            <a:extLst>
+              <a:ext uri="{FF2B5EF4-FFF2-40B4-BE49-F238E27FC236}">
+                <a16:creationId xmlns:a16="http://schemas.microsoft.com/office/drawing/2014/main" id="{8F681BF1-707A-CCEC-0584-1C2128935255}"/>
+              </a:ext>
+            </a:extLst>
+          </p:cNvPr>
+          <p:cNvPicPr>
+            <a:picLocks noChangeAspect="1"/>
+          </p:cNvPicPr>
+          <p:nvPr/>
+        </p:nvPicPr>
+        <p:blipFill>
+          <a:blip r:embed="rId3">
+            <a:extLst>
+              <a:ext uri="{28A0092B-C50C-407E-A947-70E740481C1C}">
+                <a14:useLocalDpi xmlns:a14="http://schemas.microsoft.com/office/drawing/2010/main" val="0"/>
+              </a:ext>
+            </a:extLst>
+          </a:blip>
+          <a:stretch>
+            <a:fillRect/>
+          </a:stretch>
+        </p:blipFill>
+        <p:spPr>
+          <a:xfrm>
+            <a:off x="3541691" y="1388321"/>
+            <a:ext cx="7838940" cy="3150340"/>
           </a:xfrm>
           <a:prstGeom prst="rect">
             <a:avLst/>
           </a:prstGeom>
         </p:spPr>
+      </p:pic>
+      <p:sp>
+        <p:nvSpPr>
+          <p:cNvPr id="4" name="Freihandform: Form 3">
+            <a:extLst>
+              <a:ext uri="{FF2B5EF4-FFF2-40B4-BE49-F238E27FC236}">
+                <a16:creationId xmlns:a16="http://schemas.microsoft.com/office/drawing/2014/main" id="{DE7294F9-7BF2-73B6-CC2F-E6812D29F904}"/>
+              </a:ext>
+            </a:extLst>
+          </p:cNvPr>
+          <p:cNvSpPr/>
+          <p:nvPr/>
+        </p:nvSpPr>
+        <p:spPr>
+          <a:xfrm flipH="1">
+            <a:off x="8657661" y="-2955952"/>
+            <a:ext cx="6300782" cy="3481390"/>
+          </a:xfrm>
+          <a:custGeom>
+            <a:avLst/>
+            <a:gdLst>
+              <a:gd name="csX0" fmla="*/ 0 w 6300782"/>
+              <a:gd name="csY0" fmla="*/ 0 h 3481390"/>
+              <a:gd name="csX1" fmla="*/ 4560087 w 6300782"/>
+              <a:gd name="csY1" fmla="*/ 0 h 3481390"/>
+              <a:gd name="csX2" fmla="*/ 4562473 w 6300782"/>
+              <a:gd name="csY2" fmla="*/ 0 h 3481390"/>
+              <a:gd name="csX3" fmla="*/ 4562473 w 6300782"/>
+              <a:gd name="csY3" fmla="*/ 121 h 3481390"/>
+              <a:gd name="csX4" fmla="*/ 4738063 w 6300782"/>
+              <a:gd name="csY4" fmla="*/ 8987 h 3481390"/>
+              <a:gd name="csX5" fmla="*/ 6300782 w 6300782"/>
+              <a:gd name="csY5" fmla="*/ 1740695 h 3481390"/>
+              <a:gd name="csX6" fmla="*/ 4738063 w 6300782"/>
+              <a:gd name="csY6" fmla="*/ 3472403 h 3481390"/>
+              <a:gd name="csX7" fmla="*/ 4562473 w 6300782"/>
+              <a:gd name="csY7" fmla="*/ 3481270 h 3481390"/>
+              <a:gd name="csX8" fmla="*/ 4562473 w 6300782"/>
+              <a:gd name="csY8" fmla="*/ 3481390 h 3481390"/>
+              <a:gd name="csX9" fmla="*/ 4560087 w 6300782"/>
+              <a:gd name="csY9" fmla="*/ 3481390 h 3481390"/>
+              <a:gd name="csX10" fmla="*/ 0 w 6300782"/>
+              <a:gd name="csY10" fmla="*/ 3481390 h 3481390"/>
+            </a:gdLst>
+            <a:ahLst/>
+            <a:cxnLst>
+              <a:cxn ang="0">
+                <a:pos x="csX0" y="csY0"/>
+              </a:cxn>
+              <a:cxn ang="0">
+                <a:pos x="csX1" y="csY1"/>
+              </a:cxn>
+              <a:cxn ang="0">
+                <a:pos x="csX2" y="csY2"/>
+              </a:cxn>
+              <a:cxn ang="0">
+                <a:pos x="csX3" y="csY3"/>
+              </a:cxn>
+              <a:cxn ang="0">
+                <a:pos x="csX4" y="csY4"/>
+              </a:cxn>
+              <a:cxn ang="0">
+                <a:pos x="csX5" y="csY5"/>
+              </a:cxn>
+              <a:cxn ang="0">
+                <a:pos x="csX6" y="csY6"/>
+              </a:cxn>
+              <a:cxn ang="0">
+                <a:pos x="csX7" y="csY7"/>
+              </a:cxn>
+              <a:cxn ang="0">
+                <a:pos x="csX8" y="csY8"/>
+              </a:cxn>
+              <a:cxn ang="0">
+                <a:pos x="csX9" y="csY9"/>
+              </a:cxn>
+              <a:cxn ang="0">
+                <a:pos x="csX10" y="csY10"/>
+              </a:cxn>
+            </a:cxnLst>
+            <a:rect l="l" t="t" r="r" b="b"/>
+            <a:pathLst>
+              <a:path w="6300782" h="3481390">
+                <a:moveTo>
+                  <a:pt x="0" y="0"/>
+                </a:moveTo>
+                <a:lnTo>
+                  <a:pt x="4560087" y="0"/>
+                </a:lnTo>
+                <a:lnTo>
+                  <a:pt x="4562473" y="0"/>
+                </a:lnTo>
+                <a:lnTo>
+                  <a:pt x="4562473" y="121"/>
+                </a:lnTo>
+                <a:lnTo>
+                  <a:pt x="4738063" y="8987"/>
+                </a:lnTo>
+                <a:cubicBezTo>
+                  <a:pt x="5615819" y="98128"/>
+                  <a:pt x="6300782" y="839421"/>
+                  <a:pt x="6300782" y="1740695"/>
+                </a:cubicBezTo>
+                <a:cubicBezTo>
+                  <a:pt x="6300782" y="2641969"/>
+                  <a:pt x="5615819" y="3383262"/>
+                  <a:pt x="4738063" y="3472403"/>
+                </a:cubicBezTo>
+                <a:lnTo>
+                  <a:pt x="4562473" y="3481270"/>
+                </a:lnTo>
+                <a:lnTo>
+                  <a:pt x="4562473" y="3481390"/>
+                </a:lnTo>
+                <a:lnTo>
+                  <a:pt x="4560087" y="3481390"/>
+                </a:lnTo>
+                <a:lnTo>
+                  <a:pt x="0" y="3481390"/>
+                </a:lnTo>
+                <a:close/>
+              </a:path>
+            </a:pathLst>
+          </a:custGeom>
+          <a:solidFill>
+            <a:srgbClr val="E3E9EA"/>
+          </a:solidFill>
+          <a:ln>
+            <a:noFill/>
+          </a:ln>
+        </p:spPr>
+        <p:style>
+          <a:lnRef idx="2">
+            <a:schemeClr val="accent1">
+              <a:shade val="15000"/>
+            </a:schemeClr>
+          </a:lnRef>
+          <a:fillRef idx="1">
+            <a:schemeClr val="accent1"/>
+          </a:fillRef>
+          <a:effectRef idx="0">
+            <a:schemeClr val="accent1"/>
+          </a:effectRef>
+          <a:fontRef idx="minor">
+            <a:schemeClr val="lt1"/>
+          </a:fontRef>
+        </p:style>
         <p:txBody>
-          <a:bodyPr/>
+          <a:bodyPr lIns="0" tIns="0" rIns="0" bIns="0" rtlCol="0" anchor="ctr"/>
           <a:lstStyle/>
           <a:p>
-            <a:r>
-              <a:rPr lang="de-DE"/>
-              <a:t>Dr. Jana Dahlmanns – Jana.Dahlmanns@fau.de</a:t>
-            </a:r>
+            <a:pPr algn="ctr"/>
+            <a:endParaRPr lang="de-DE" sz="1600" b="1">
+              <a:solidFill>
+                <a:schemeClr val="tx1"/>
+              </a:solidFill>
+            </a:endParaRPr>
           </a:p>
         </p:txBody>
       </p:sp>
       <p:sp>
         <p:nvSpPr>
-          <p:cNvPr id="5" name="Foliennummernplatzhalter 4">
+          <p:cNvPr id="6" name="Textfeld 5">
             <a:extLst>
               <a:ext uri="{FF2B5EF4-FFF2-40B4-BE49-F238E27FC236}">
-                <a16:creationId xmlns:a16="http://schemas.microsoft.com/office/drawing/2014/main" id="{5F4DE647-8299-3C1B-11AC-698E405F9A0E}"/>
+                <a16:creationId xmlns:a16="http://schemas.microsoft.com/office/drawing/2014/main" id="{60A42DF9-6726-4F05-3740-B83811791921}"/>
               </a:ext>
             </a:extLst>
           </p:cNvPr>
-          <p:cNvSpPr>
-            <a:spLocks noGrp="1"/>
-          </p:cNvSpPr>
-          <p:nvPr>
-            <p:ph type="sldNum" sz="quarter" idx="4294967295"/>
-          </p:nvPr>
+          <p:cNvSpPr txBox="1"/>
+          <p:nvPr/>
         </p:nvSpPr>
         <p:spPr>
           <a:xfrm>
-            <a:off x="8610600" y="6356350"/>
-            <a:ext cx="2743200" cy="365125"/>
+            <a:off x="10287922" y="17905"/>
+            <a:ext cx="1904078" cy="461665"/>
           </a:xfrm>
+          <a:prstGeom prst="rect">
+            <a:avLst/>
+          </a:prstGeom>
+          <a:noFill/>
         </p:spPr>
         <p:txBody>
-          <a:bodyPr/>
+          <a:bodyPr wrap="square" rtlCol="0">
+            <a:spAutoFit/>
+          </a:bodyPr>
           <a:lstStyle/>
           <a:p>
-            <a:fld id="{001D04CD-A18E-4C48-A0D4-2F175BEDACF1}" type="slidenum">
-              <a:rPr lang="de-DE" smtClean="0"/>
-              <a:t>17</a:t>
-            </a:fld>
-            <a:endParaRPr lang="de-DE"/>
+            <a:pPr algn="ctr"/>
+            <a:r>
+              <a:rPr lang="de-DE" sz="2400" dirty="0">
+                <a:solidFill>
+                  <a:srgbClr val="00336E"/>
+                </a:solidFill>
+                <a:ea typeface="Cormorant Garamond" pitchFamily="2" charset="0"/>
+                <a:cs typeface="Cormorant Garamond" pitchFamily="2" charset="0"/>
+              </a:rPr>
+              <a:t>First </a:t>
+            </a:r>
+            <a:r>
+              <a:rPr lang="de-DE" sz="2400" dirty="0" err="1">
+                <a:solidFill>
+                  <a:srgbClr val="00336E"/>
+                </a:solidFill>
+                <a:ea typeface="Cormorant Garamond" pitchFamily="2" charset="0"/>
+                <a:cs typeface="Cormorant Garamond" pitchFamily="2" charset="0"/>
+              </a:rPr>
+              <a:t>results</a:t>
+            </a:r>
+            <a:endParaRPr lang="de-DE" sz="2400" b="1" dirty="0">
+              <a:solidFill>
+                <a:srgbClr val="00336E"/>
+              </a:solidFill>
+              <a:ea typeface="Cormorant Garamond" pitchFamily="2" charset="0"/>
+              <a:cs typeface="Cormorant Garamond" pitchFamily="2" charset="0"/>
+            </a:endParaRPr>
+          </a:p>
+        </p:txBody>
+      </p:sp>
+      <p:sp>
+        <p:nvSpPr>
+          <p:cNvPr id="7" name="Ellipse 6">
+            <a:extLst>
+              <a:ext uri="{FF2B5EF4-FFF2-40B4-BE49-F238E27FC236}">
+                <a16:creationId xmlns:a16="http://schemas.microsoft.com/office/drawing/2014/main" id="{6D3DB673-3D4B-0DA5-D27B-A5F78EE5F0E8}"/>
+              </a:ext>
+            </a:extLst>
+          </p:cNvPr>
+          <p:cNvSpPr/>
+          <p:nvPr/>
+        </p:nvSpPr>
+        <p:spPr>
+          <a:xfrm>
+            <a:off x="10012084" y="66307"/>
+            <a:ext cx="340233" cy="340233"/>
+          </a:xfrm>
+          <a:prstGeom prst="ellipse">
+            <a:avLst/>
+          </a:prstGeom>
+          <a:solidFill>
+            <a:srgbClr val="E3E9EA"/>
+          </a:solidFill>
+          <a:ln>
+            <a:solidFill>
+              <a:srgbClr val="00336E"/>
+            </a:solidFill>
+          </a:ln>
+        </p:spPr>
+        <p:style>
+          <a:lnRef idx="2">
+            <a:schemeClr val="accent1">
+              <a:shade val="15000"/>
+            </a:schemeClr>
+          </a:lnRef>
+          <a:fillRef idx="1">
+            <a:schemeClr val="accent1"/>
+          </a:fillRef>
+          <a:effectRef idx="0">
+            <a:schemeClr val="accent1"/>
+          </a:effectRef>
+          <a:fontRef idx="minor">
+            <a:schemeClr val="lt1"/>
+          </a:fontRef>
+        </p:style>
+        <p:txBody>
+          <a:bodyPr lIns="0" tIns="0" rIns="0" bIns="0" rtlCol="0" anchor="ctr"/>
+          <a:lstStyle/>
+          <a:p>
+            <a:pPr algn="ctr"/>
+            <a:r>
+              <a:rPr lang="de-DE" b="1" dirty="0">
+                <a:solidFill>
+                  <a:schemeClr val="tx1"/>
+                </a:solidFill>
+              </a:rPr>
+              <a:t>1</a:t>
+            </a:r>
+            <a:endParaRPr lang="de-DE" sz="900" b="1" dirty="0">
+              <a:solidFill>
+                <a:schemeClr val="tx1"/>
+              </a:solidFill>
+            </a:endParaRPr>
           </a:p>
         </p:txBody>
       </p:sp>
     </p:spTree>
     <p:extLst>
       <p:ext uri="{BB962C8B-B14F-4D97-AF65-F5344CB8AC3E}">
-        <p14:creationId xmlns:p14="http://schemas.microsoft.com/office/powerpoint/2010/main" val="1692034232"/>
+        <p14:creationId xmlns:p14="http://schemas.microsoft.com/office/powerpoint/2010/main" val="223752335"/>
+      </p:ext>
+    </p:extLst>
+  </p:cSld>
+  <p:clrMapOvr>
+    <a:masterClrMapping/>
+  </p:clrMapOvr>
+</p:sld>
+</file>
+
+<file path=ppt/slides/slide19.xml><?xml version="1.0" encoding="utf-8"?>
+<p:sld xmlns:a="http://schemas.openxmlformats.org/drawingml/2006/main" xmlns:r="http://schemas.openxmlformats.org/officeDocument/2006/relationships" xmlns:p="http://schemas.openxmlformats.org/presentationml/2006/main">
+  <p:cSld>
+    <p:spTree>
+      <p:nvGrpSpPr>
+        <p:cNvPr id="1" name="">
+          <a:extLst>
+            <a:ext uri="{FF2B5EF4-FFF2-40B4-BE49-F238E27FC236}">
+              <a16:creationId xmlns:a16="http://schemas.microsoft.com/office/drawing/2014/main" id="{7BDAA14D-B68F-246E-21BC-CB876542FA9B}"/>
+            </a:ext>
+          </a:extLst>
+        </p:cNvPr>
+        <p:cNvGrpSpPr/>
+        <p:nvPr/>
+      </p:nvGrpSpPr>
+      <p:grpSpPr>
+        <a:xfrm>
+          <a:off x="0" y="0"/>
+          <a:ext cx="0" cy="0"/>
+          <a:chOff x="0" y="0"/>
+          <a:chExt cx="0" cy="0"/>
+        </a:xfrm>
+      </p:grpSpPr>
+      <p:sp>
+        <p:nvSpPr>
+          <p:cNvPr id="23" name="Textfeld 22">
+            <a:extLst>
+              <a:ext uri="{FF2B5EF4-FFF2-40B4-BE49-F238E27FC236}">
+                <a16:creationId xmlns:a16="http://schemas.microsoft.com/office/drawing/2014/main" id="{3354E721-6CC4-95C8-D234-F2A1B95ED766}"/>
+              </a:ext>
+            </a:extLst>
+          </p:cNvPr>
+          <p:cNvSpPr txBox="1"/>
+          <p:nvPr/>
+        </p:nvSpPr>
+        <p:spPr>
+          <a:xfrm>
+            <a:off x="370804" y="1692847"/>
+            <a:ext cx="3280900" cy="705001"/>
+          </a:xfrm>
+          <a:prstGeom prst="rect">
+            <a:avLst/>
+          </a:prstGeom>
+          <a:noFill/>
+        </p:spPr>
+        <p:txBody>
+          <a:bodyPr wrap="square">
+            <a:spAutoFit/>
+          </a:bodyPr>
+          <a:lstStyle/>
+          <a:p>
+            <a:pPr>
+              <a:lnSpc>
+                <a:spcPct val="115000"/>
+              </a:lnSpc>
+              <a:spcAft>
+                <a:spcPts val="1000"/>
+              </a:spcAft>
+              <a:buNone/>
+            </a:pPr>
+            <a:r>
+              <a:rPr lang="en-US" dirty="0">
+                <a:ea typeface="MS Mincho" panose="02020609040205080304" pitchFamily="49" charset="-128"/>
+                <a:cs typeface="Times New Roman" panose="02020603050405020304" pitchFamily="18" charset="0"/>
+              </a:rPr>
+              <a:t>Evolved variants developed a </a:t>
+            </a:r>
+            <a:r>
+              <a:rPr lang="en-US" b="1" dirty="0">
+                <a:ea typeface="MS Mincho" panose="02020609040205080304" pitchFamily="49" charset="-128"/>
+                <a:cs typeface="Times New Roman" panose="02020603050405020304" pitchFamily="18" charset="0"/>
+              </a:rPr>
+              <a:t>directional preference</a:t>
+            </a:r>
+            <a:r>
+              <a:rPr lang="en-US" dirty="0">
+                <a:ea typeface="MS Mincho" panose="02020609040205080304" pitchFamily="49" charset="-128"/>
+                <a:cs typeface="Times New Roman" panose="02020603050405020304" pitchFamily="18" charset="0"/>
+              </a:rPr>
+              <a:t>.</a:t>
+            </a:r>
+            <a:endParaRPr lang="de-DE" b="1" dirty="0">
+              <a:ea typeface="MS Mincho" panose="02020609040205080304" pitchFamily="49" charset="-128"/>
+              <a:cs typeface="Times New Roman" panose="02020603050405020304" pitchFamily="18" charset="0"/>
+            </a:endParaRPr>
+          </a:p>
+        </p:txBody>
+      </p:sp>
+      <p:pic>
+        <p:nvPicPr>
+          <p:cNvPr id="25" name="Grafik 24">
+            <a:extLst>
+              <a:ext uri="{FF2B5EF4-FFF2-40B4-BE49-F238E27FC236}">
+                <a16:creationId xmlns:a16="http://schemas.microsoft.com/office/drawing/2014/main" id="{B1AA7B24-544A-E253-63A0-5B315A1A36A2}"/>
+              </a:ext>
+            </a:extLst>
+          </p:cNvPr>
+          <p:cNvPicPr>
+            <a:picLocks noChangeAspect="1"/>
+          </p:cNvPicPr>
+          <p:nvPr/>
+        </p:nvPicPr>
+        <p:blipFill>
+          <a:blip r:embed="rId3">
+            <a:extLst>
+              <a:ext uri="{28A0092B-C50C-407E-A947-70E740481C1C}">
+                <a14:useLocalDpi xmlns:a14="http://schemas.microsoft.com/office/drawing/2010/main" val="0"/>
+              </a:ext>
+            </a:extLst>
+          </a:blip>
+          <a:srcRect/>
+          <a:stretch/>
+        </p:blipFill>
+        <p:spPr>
+          <a:xfrm>
+            <a:off x="4195989" y="1141228"/>
+            <a:ext cx="6957786" cy="4058708"/>
+          </a:xfrm>
+          <a:prstGeom prst="rect">
+            <a:avLst/>
+          </a:prstGeom>
+        </p:spPr>
+      </p:pic>
+      <p:sp>
+        <p:nvSpPr>
+          <p:cNvPr id="8" name="Textfeld 7">
+            <a:extLst>
+              <a:ext uri="{FF2B5EF4-FFF2-40B4-BE49-F238E27FC236}">
+                <a16:creationId xmlns:a16="http://schemas.microsoft.com/office/drawing/2014/main" id="{7F2EAC8A-C7FA-8B1C-EDBB-7E9BA740CBF1}"/>
+              </a:ext>
+            </a:extLst>
+          </p:cNvPr>
+          <p:cNvSpPr txBox="1"/>
+          <p:nvPr/>
+        </p:nvSpPr>
+        <p:spPr>
+          <a:xfrm>
+            <a:off x="4906662" y="5234289"/>
+            <a:ext cx="2378676" cy="1483868"/>
+          </a:xfrm>
+          <a:prstGeom prst="rect">
+            <a:avLst/>
+          </a:prstGeom>
+          <a:noFill/>
+        </p:spPr>
+        <p:txBody>
+          <a:bodyPr wrap="square">
+            <a:spAutoFit/>
+          </a:bodyPr>
+          <a:lstStyle>
+            <a:defPPr>
+              <a:defRPr lang="en-US"/>
+            </a:defPPr>
+            <a:lvl1pPr defTabSz="288000">
+              <a:lnSpc>
+                <a:spcPct val="115000"/>
+              </a:lnSpc>
+              <a:spcAft>
+                <a:spcPts val="1000"/>
+              </a:spcAft>
+              <a:buNone/>
+              <a:defRPr sz="800">
+                <a:effectLst/>
+                <a:ea typeface="MS Mincho" panose="02020609040205080304" pitchFamily="49" charset="-128"/>
+                <a:cs typeface="Times New Roman" panose="02020603050405020304" pitchFamily="18" charset="0"/>
+              </a:defRPr>
+            </a:lvl1pPr>
+          </a:lstStyle>
+          <a:p>
+            <a:pPr defTabSz="216000"/>
+            <a:r>
+              <a:rPr lang="en-US" b="1" dirty="0"/>
+              <a:t>Random:</a:t>
+            </a:r>
+            <a:br>
+              <a:rPr lang="en-US" dirty="0"/>
+            </a:br>
+            <a:r>
+              <a:rPr lang="en-US" dirty="0"/>
+              <a:t>Kruskal-Wallis p = 10-40; </a:t>
+            </a:r>
+            <a:r>
+              <a:rPr lang="el-GR" dirty="0"/>
+              <a:t>ε</a:t>
+            </a:r>
+            <a:r>
+              <a:rPr lang="de-DE" dirty="0"/>
+              <a:t>2 &lt; 0.01 (</a:t>
+            </a:r>
+            <a:r>
+              <a:rPr lang="de-DE" dirty="0" err="1"/>
+              <a:t>n.s</a:t>
+            </a:r>
+            <a:r>
+              <a:rPr lang="de-DE" dirty="0"/>
+              <a:t>. ES)</a:t>
+            </a:r>
+            <a:endParaRPr lang="en-US" dirty="0"/>
+          </a:p>
+          <a:p>
+            <a:pPr defTabSz="216000"/>
+            <a:r>
+              <a:rPr lang="en-US" dirty="0">
+                <a:solidFill>
+                  <a:schemeClr val="tx1">
+                    <a:lumMod val="50000"/>
+                    <a:lumOff val="50000"/>
+                  </a:schemeClr>
+                </a:solidFill>
+              </a:rPr>
+              <a:t>MWU + Holm-Bonferroni: </a:t>
+            </a:r>
+            <a:br>
+              <a:rPr lang="en-US" dirty="0">
+                <a:solidFill>
+                  <a:schemeClr val="tx1">
+                    <a:lumMod val="50000"/>
+                    <a:lumOff val="50000"/>
+                  </a:schemeClr>
+                </a:solidFill>
+              </a:rPr>
+            </a:br>
+            <a:r>
+              <a:rPr lang="en-US" dirty="0">
+                <a:solidFill>
+                  <a:schemeClr val="tx1">
+                    <a:lumMod val="50000"/>
+                    <a:lumOff val="50000"/>
+                  </a:schemeClr>
+                </a:solidFill>
+              </a:rPr>
+              <a:t>N vs. E</a:t>
+            </a:r>
+            <a:r>
+              <a:rPr lang="de-DE" dirty="0">
+                <a:solidFill>
+                  <a:schemeClr val="tx1">
+                    <a:lumMod val="50000"/>
+                    <a:lumOff val="50000"/>
+                  </a:schemeClr>
+                </a:solidFill>
+              </a:rPr>
+              <a:t>:	</a:t>
+            </a:r>
+            <a:r>
+              <a:rPr lang="en-US" dirty="0">
+                <a:solidFill>
+                  <a:schemeClr val="tx1">
+                    <a:lumMod val="50000"/>
+                    <a:lumOff val="50000"/>
+                  </a:schemeClr>
+                </a:solidFill>
+              </a:rPr>
+              <a:t>p ~ 0.1;		r &lt; -0.01 (</a:t>
+            </a:r>
+            <a:r>
+              <a:rPr lang="en-US" dirty="0" err="1">
+                <a:solidFill>
+                  <a:schemeClr val="tx1">
+                    <a:lumMod val="50000"/>
+                    <a:lumOff val="50000"/>
+                  </a:schemeClr>
+                </a:solidFill>
+              </a:rPr>
+              <a:t>n.s</a:t>
+            </a:r>
+            <a:r>
+              <a:rPr lang="en-US" dirty="0">
+                <a:solidFill>
+                  <a:schemeClr val="tx1">
+                    <a:lumMod val="50000"/>
+                    <a:lumOff val="50000"/>
+                  </a:schemeClr>
+                </a:solidFill>
+              </a:rPr>
+              <a:t>. ES)</a:t>
+            </a:r>
+            <a:br>
+              <a:rPr lang="en-US" dirty="0">
+                <a:solidFill>
+                  <a:schemeClr val="tx1">
+                    <a:lumMod val="50000"/>
+                    <a:lumOff val="50000"/>
+                  </a:schemeClr>
+                </a:solidFill>
+              </a:rPr>
+            </a:br>
+            <a:r>
+              <a:rPr lang="en-US" dirty="0">
+                <a:solidFill>
+                  <a:schemeClr val="tx1">
+                    <a:lumMod val="50000"/>
+                    <a:lumOff val="50000"/>
+                  </a:schemeClr>
+                </a:solidFill>
+              </a:rPr>
+              <a:t>N vs. S:	p ~ 0.6;		r &lt; -0.01 (</a:t>
+            </a:r>
+            <a:r>
+              <a:rPr lang="en-US" dirty="0" err="1">
+                <a:solidFill>
+                  <a:schemeClr val="tx1">
+                    <a:lumMod val="50000"/>
+                    <a:lumOff val="50000"/>
+                  </a:schemeClr>
+                </a:solidFill>
+              </a:rPr>
+              <a:t>n.s</a:t>
+            </a:r>
+            <a:r>
+              <a:rPr lang="en-US" dirty="0">
+                <a:solidFill>
+                  <a:schemeClr val="tx1">
+                    <a:lumMod val="50000"/>
+                    <a:lumOff val="50000"/>
+                  </a:schemeClr>
+                </a:solidFill>
+              </a:rPr>
+              <a:t>. ES)</a:t>
+            </a:r>
+            <a:br>
+              <a:rPr lang="en-US" dirty="0">
+                <a:solidFill>
+                  <a:schemeClr val="tx1">
+                    <a:lumMod val="50000"/>
+                    <a:lumOff val="50000"/>
+                  </a:schemeClr>
+                </a:solidFill>
+              </a:rPr>
+            </a:br>
+            <a:r>
+              <a:rPr lang="en-US" dirty="0"/>
+              <a:t>N vs. W:	p ~ 4*10-29;	r ~ -0.05 (</a:t>
+            </a:r>
+            <a:r>
+              <a:rPr lang="en-US" dirty="0" err="1"/>
+              <a:t>n.s</a:t>
+            </a:r>
+            <a:r>
+              <a:rPr lang="en-US" dirty="0"/>
+              <a:t>. ES)</a:t>
+            </a:r>
+            <a:br>
+              <a:rPr lang="en-US" dirty="0">
+                <a:solidFill>
+                  <a:schemeClr val="tx1">
+                    <a:lumMod val="50000"/>
+                    <a:lumOff val="50000"/>
+                  </a:schemeClr>
+                </a:solidFill>
+              </a:rPr>
+            </a:br>
+            <a:r>
+              <a:rPr lang="en-US" dirty="0"/>
+              <a:t>E vs. S:	p ~ 0.003;	r ~ -0.01 (</a:t>
+            </a:r>
+            <a:r>
+              <a:rPr lang="en-US" dirty="0" err="1"/>
+              <a:t>n.s</a:t>
+            </a:r>
+            <a:r>
+              <a:rPr lang="en-US" dirty="0"/>
+              <a:t>. ES)</a:t>
+            </a:r>
+            <a:br>
+              <a:rPr lang="en-US" dirty="0">
+                <a:solidFill>
+                  <a:schemeClr val="tx1">
+                    <a:lumMod val="50000"/>
+                    <a:lumOff val="50000"/>
+                  </a:schemeClr>
+                </a:solidFill>
+              </a:rPr>
+            </a:br>
+            <a:r>
+              <a:rPr lang="en-US" dirty="0"/>
+              <a:t>E vs. W:	p ~ 2*10-20;	r ~ -0.04 (</a:t>
+            </a:r>
+            <a:r>
+              <a:rPr lang="en-US" dirty="0" err="1"/>
+              <a:t>n.s</a:t>
+            </a:r>
+            <a:r>
+              <a:rPr lang="en-US" dirty="0"/>
+              <a:t>. ES)</a:t>
+            </a:r>
+            <a:br>
+              <a:rPr lang="en-US" dirty="0"/>
+            </a:br>
+            <a:r>
+              <a:rPr lang="en-US" dirty="0"/>
+              <a:t>S vs. W:	p ~ 3*10-32;	r ~ -0.06 (</a:t>
+            </a:r>
+            <a:r>
+              <a:rPr lang="en-US" dirty="0" err="1"/>
+              <a:t>n.s</a:t>
+            </a:r>
+            <a:r>
+              <a:rPr lang="en-US" dirty="0"/>
+              <a:t>. ES)</a:t>
+            </a:r>
+            <a:endParaRPr lang="de-DE" dirty="0"/>
+          </a:p>
+        </p:txBody>
+      </p:sp>
+      <p:sp>
+        <p:nvSpPr>
+          <p:cNvPr id="4" name="Textfeld 3">
+            <a:extLst>
+              <a:ext uri="{FF2B5EF4-FFF2-40B4-BE49-F238E27FC236}">
+                <a16:creationId xmlns:a16="http://schemas.microsoft.com/office/drawing/2014/main" id="{E4534F96-7150-EC65-EA28-EFFE3F21833B}"/>
+              </a:ext>
+            </a:extLst>
+          </p:cNvPr>
+          <p:cNvSpPr txBox="1"/>
+          <p:nvPr/>
+        </p:nvSpPr>
+        <p:spPr>
+          <a:xfrm>
+            <a:off x="7171344" y="5234289"/>
+            <a:ext cx="2378676" cy="364587"/>
+          </a:xfrm>
+          <a:prstGeom prst="rect">
+            <a:avLst/>
+          </a:prstGeom>
+          <a:noFill/>
+        </p:spPr>
+        <p:txBody>
+          <a:bodyPr wrap="square">
+            <a:spAutoFit/>
+          </a:bodyPr>
+          <a:lstStyle>
+            <a:defPPr>
+              <a:defRPr lang="en-US"/>
+            </a:defPPr>
+            <a:lvl1pPr defTabSz="216000">
+              <a:lnSpc>
+                <a:spcPct val="115000"/>
+              </a:lnSpc>
+              <a:spcAft>
+                <a:spcPts val="1000"/>
+              </a:spcAft>
+              <a:buNone/>
+              <a:defRPr sz="800" b="1">
+                <a:effectLst/>
+                <a:ea typeface="MS Mincho" panose="02020609040205080304" pitchFamily="49" charset="-128"/>
+                <a:cs typeface="Times New Roman" panose="02020603050405020304" pitchFamily="18" charset="0"/>
+              </a:defRPr>
+            </a:lvl1pPr>
+          </a:lstStyle>
+          <a:p>
+            <a:r>
+              <a:rPr lang="en-US" dirty="0"/>
+              <a:t>Hard-Coded:</a:t>
+            </a:r>
+            <a:br>
+              <a:rPr lang="en-US" dirty="0"/>
+            </a:br>
+            <a:r>
+              <a:rPr lang="en-US" b="0" dirty="0">
+                <a:solidFill>
+                  <a:schemeClr val="tx1">
+                    <a:lumMod val="50000"/>
+                    <a:lumOff val="50000"/>
+                  </a:schemeClr>
+                </a:solidFill>
+              </a:rPr>
+              <a:t>Kruskal-Wallis p = 0.65; </a:t>
+            </a:r>
+            <a:r>
+              <a:rPr lang="el-GR" b="0" dirty="0">
+                <a:solidFill>
+                  <a:schemeClr val="tx1">
+                    <a:lumMod val="50000"/>
+                    <a:lumOff val="50000"/>
+                  </a:schemeClr>
+                </a:solidFill>
+              </a:rPr>
+              <a:t>ε</a:t>
+            </a:r>
+            <a:r>
+              <a:rPr lang="de-DE" b="0" baseline="30000" dirty="0">
+                <a:solidFill>
+                  <a:schemeClr val="tx1">
+                    <a:lumMod val="50000"/>
+                    <a:lumOff val="50000"/>
+                  </a:schemeClr>
+                </a:solidFill>
+              </a:rPr>
+              <a:t>2</a:t>
+            </a:r>
+            <a:r>
+              <a:rPr lang="de-DE" b="0" dirty="0">
+                <a:solidFill>
+                  <a:schemeClr val="tx1">
+                    <a:lumMod val="50000"/>
+                    <a:lumOff val="50000"/>
+                  </a:schemeClr>
+                </a:solidFill>
+              </a:rPr>
+              <a:t> &lt; 0.01 (</a:t>
+            </a:r>
+            <a:r>
+              <a:rPr lang="de-DE" b="0" dirty="0" err="1">
+                <a:solidFill>
+                  <a:schemeClr val="tx1">
+                    <a:lumMod val="50000"/>
+                    <a:lumOff val="50000"/>
+                  </a:schemeClr>
+                </a:solidFill>
+              </a:rPr>
+              <a:t>n.s</a:t>
+            </a:r>
+            <a:r>
+              <a:rPr lang="de-DE" b="0" dirty="0">
+                <a:solidFill>
+                  <a:schemeClr val="tx1">
+                    <a:lumMod val="50000"/>
+                    <a:lumOff val="50000"/>
+                  </a:schemeClr>
+                </a:solidFill>
+              </a:rPr>
+              <a:t>. ES)</a:t>
+            </a:r>
+            <a:endParaRPr lang="en-US" b="0" dirty="0">
+              <a:solidFill>
+                <a:schemeClr val="tx1">
+                  <a:lumMod val="50000"/>
+                  <a:lumOff val="50000"/>
+                </a:schemeClr>
+              </a:solidFill>
+            </a:endParaRPr>
+          </a:p>
+        </p:txBody>
+      </p:sp>
+      <p:sp>
+        <p:nvSpPr>
+          <p:cNvPr id="5" name="Textfeld 4">
+            <a:extLst>
+              <a:ext uri="{FF2B5EF4-FFF2-40B4-BE49-F238E27FC236}">
+                <a16:creationId xmlns:a16="http://schemas.microsoft.com/office/drawing/2014/main" id="{21F9AC27-E80F-7675-0413-B98670459D8C}"/>
+              </a:ext>
+            </a:extLst>
+          </p:cNvPr>
+          <p:cNvSpPr txBox="1"/>
+          <p:nvPr/>
+        </p:nvSpPr>
+        <p:spPr>
+          <a:xfrm>
+            <a:off x="9469880" y="5234289"/>
+            <a:ext cx="2378676" cy="1483868"/>
+          </a:xfrm>
+          <a:prstGeom prst="rect">
+            <a:avLst/>
+          </a:prstGeom>
+          <a:noFill/>
+        </p:spPr>
+        <p:txBody>
+          <a:bodyPr wrap="square">
+            <a:spAutoFit/>
+          </a:bodyPr>
+          <a:lstStyle>
+            <a:defPPr>
+              <a:defRPr lang="en-US"/>
+            </a:defPPr>
+            <a:lvl1pPr defTabSz="216000">
+              <a:lnSpc>
+                <a:spcPct val="115000"/>
+              </a:lnSpc>
+              <a:spcAft>
+                <a:spcPts val="1000"/>
+              </a:spcAft>
+              <a:buNone/>
+              <a:defRPr sz="800" b="1">
+                <a:effectLst/>
+                <a:ea typeface="MS Mincho" panose="02020609040205080304" pitchFamily="49" charset="-128"/>
+                <a:cs typeface="Times New Roman" panose="02020603050405020304" pitchFamily="18" charset="0"/>
+              </a:defRPr>
+            </a:lvl1pPr>
+          </a:lstStyle>
+          <a:p>
+            <a:r>
+              <a:rPr lang="en-US" dirty="0"/>
+              <a:t>EA from Random:</a:t>
+            </a:r>
+            <a:br>
+              <a:rPr lang="en-US" dirty="0"/>
+            </a:br>
+            <a:r>
+              <a:rPr lang="en-US" b="0" dirty="0"/>
+              <a:t>Kruskal-Wallis p&lt;&lt; 0.001; </a:t>
+            </a:r>
+            <a:r>
+              <a:rPr lang="el-GR" b="0" dirty="0"/>
+              <a:t>ε</a:t>
+            </a:r>
+            <a:r>
+              <a:rPr lang="de-DE" b="0" baseline="30000" dirty="0"/>
+              <a:t>2</a:t>
+            </a:r>
+            <a:r>
+              <a:rPr lang="de-DE" b="0" dirty="0"/>
+              <a:t> = 0.6 (large ES)</a:t>
+            </a:r>
+            <a:endParaRPr lang="en-US" b="0" dirty="0"/>
+          </a:p>
+          <a:p>
+            <a:r>
+              <a:rPr lang="en-US" b="0" dirty="0"/>
+              <a:t>MWU + Holm-Bonferroni: </a:t>
+            </a:r>
+            <a:br>
+              <a:rPr lang="en-US" b="0" dirty="0"/>
+            </a:br>
+            <a:r>
+              <a:rPr lang="en-US" b="0" dirty="0"/>
+              <a:t>N vs. E:	p&lt;&lt; 0.001;	r = -0.7(large ES)</a:t>
+            </a:r>
+            <a:br>
+              <a:rPr lang="en-US" b="0" dirty="0"/>
+            </a:br>
+            <a:r>
+              <a:rPr lang="en-US" b="0" dirty="0"/>
+              <a:t>N vs. S:	p&lt;&lt; 0.001;	r = -0.99 (large ES)</a:t>
+            </a:r>
+            <a:br>
+              <a:rPr lang="en-US" b="0" dirty="0"/>
+            </a:br>
+            <a:r>
+              <a:rPr lang="en-US" b="0" dirty="0"/>
+              <a:t>N vs. W:	p&lt;&lt; 0.001;	r = -0.92 (large ES)</a:t>
+            </a:r>
+            <a:br>
+              <a:rPr lang="en-US" b="0" dirty="0"/>
+            </a:br>
+            <a:r>
+              <a:rPr lang="en-US" b="0" dirty="0"/>
+              <a:t>E vs. S:	p&lt;&lt; 0.001;	r = -0.7 (large ES)</a:t>
+            </a:r>
+            <a:br>
+              <a:rPr lang="en-US" b="0" dirty="0"/>
+            </a:br>
+            <a:r>
+              <a:rPr lang="en-US" b="0" dirty="0"/>
+              <a:t>E vs. W:	p ~ 6*10</a:t>
+            </a:r>
+            <a:r>
+              <a:rPr lang="en-US" b="0" baseline="30000" dirty="0"/>
+              <a:t>-142</a:t>
+            </a:r>
+            <a:r>
+              <a:rPr lang="en-US" b="0" dirty="0"/>
+              <a:t>;	r = - 0.4 (medium ES)</a:t>
+            </a:r>
+            <a:br>
+              <a:rPr lang="en-US" b="0" dirty="0"/>
+            </a:br>
+            <a:r>
+              <a:rPr lang="en-US" b="0" dirty="0"/>
+              <a:t>S vs. W:	p&lt;&lt; 0.001;	r = 0.6 (large ES)</a:t>
+            </a:r>
+            <a:endParaRPr lang="de-DE" b="0" dirty="0"/>
+          </a:p>
+        </p:txBody>
+      </p:sp>
+      <p:sp>
+        <p:nvSpPr>
+          <p:cNvPr id="6" name="Freihandform: Form 5">
+            <a:extLst>
+              <a:ext uri="{FF2B5EF4-FFF2-40B4-BE49-F238E27FC236}">
+                <a16:creationId xmlns:a16="http://schemas.microsoft.com/office/drawing/2014/main" id="{7F494A5F-1E9A-5445-6CB6-951071E79CB0}"/>
+              </a:ext>
+            </a:extLst>
+          </p:cNvPr>
+          <p:cNvSpPr/>
+          <p:nvPr/>
+        </p:nvSpPr>
+        <p:spPr>
+          <a:xfrm flipH="1">
+            <a:off x="8657661" y="-2955952"/>
+            <a:ext cx="6300782" cy="3481390"/>
+          </a:xfrm>
+          <a:custGeom>
+            <a:avLst/>
+            <a:gdLst>
+              <a:gd name="csX0" fmla="*/ 0 w 6300782"/>
+              <a:gd name="csY0" fmla="*/ 0 h 3481390"/>
+              <a:gd name="csX1" fmla="*/ 4560087 w 6300782"/>
+              <a:gd name="csY1" fmla="*/ 0 h 3481390"/>
+              <a:gd name="csX2" fmla="*/ 4562473 w 6300782"/>
+              <a:gd name="csY2" fmla="*/ 0 h 3481390"/>
+              <a:gd name="csX3" fmla="*/ 4562473 w 6300782"/>
+              <a:gd name="csY3" fmla="*/ 121 h 3481390"/>
+              <a:gd name="csX4" fmla="*/ 4738063 w 6300782"/>
+              <a:gd name="csY4" fmla="*/ 8987 h 3481390"/>
+              <a:gd name="csX5" fmla="*/ 6300782 w 6300782"/>
+              <a:gd name="csY5" fmla="*/ 1740695 h 3481390"/>
+              <a:gd name="csX6" fmla="*/ 4738063 w 6300782"/>
+              <a:gd name="csY6" fmla="*/ 3472403 h 3481390"/>
+              <a:gd name="csX7" fmla="*/ 4562473 w 6300782"/>
+              <a:gd name="csY7" fmla="*/ 3481270 h 3481390"/>
+              <a:gd name="csX8" fmla="*/ 4562473 w 6300782"/>
+              <a:gd name="csY8" fmla="*/ 3481390 h 3481390"/>
+              <a:gd name="csX9" fmla="*/ 4560087 w 6300782"/>
+              <a:gd name="csY9" fmla="*/ 3481390 h 3481390"/>
+              <a:gd name="csX10" fmla="*/ 0 w 6300782"/>
+              <a:gd name="csY10" fmla="*/ 3481390 h 3481390"/>
+            </a:gdLst>
+            <a:ahLst/>
+            <a:cxnLst>
+              <a:cxn ang="0">
+                <a:pos x="csX0" y="csY0"/>
+              </a:cxn>
+              <a:cxn ang="0">
+                <a:pos x="csX1" y="csY1"/>
+              </a:cxn>
+              <a:cxn ang="0">
+                <a:pos x="csX2" y="csY2"/>
+              </a:cxn>
+              <a:cxn ang="0">
+                <a:pos x="csX3" y="csY3"/>
+              </a:cxn>
+              <a:cxn ang="0">
+                <a:pos x="csX4" y="csY4"/>
+              </a:cxn>
+              <a:cxn ang="0">
+                <a:pos x="csX5" y="csY5"/>
+              </a:cxn>
+              <a:cxn ang="0">
+                <a:pos x="csX6" y="csY6"/>
+              </a:cxn>
+              <a:cxn ang="0">
+                <a:pos x="csX7" y="csY7"/>
+              </a:cxn>
+              <a:cxn ang="0">
+                <a:pos x="csX8" y="csY8"/>
+              </a:cxn>
+              <a:cxn ang="0">
+                <a:pos x="csX9" y="csY9"/>
+              </a:cxn>
+              <a:cxn ang="0">
+                <a:pos x="csX10" y="csY10"/>
+              </a:cxn>
+            </a:cxnLst>
+            <a:rect l="l" t="t" r="r" b="b"/>
+            <a:pathLst>
+              <a:path w="6300782" h="3481390">
+                <a:moveTo>
+                  <a:pt x="0" y="0"/>
+                </a:moveTo>
+                <a:lnTo>
+                  <a:pt x="4560087" y="0"/>
+                </a:lnTo>
+                <a:lnTo>
+                  <a:pt x="4562473" y="0"/>
+                </a:lnTo>
+                <a:lnTo>
+                  <a:pt x="4562473" y="121"/>
+                </a:lnTo>
+                <a:lnTo>
+                  <a:pt x="4738063" y="8987"/>
+                </a:lnTo>
+                <a:cubicBezTo>
+                  <a:pt x="5615819" y="98128"/>
+                  <a:pt x="6300782" y="839421"/>
+                  <a:pt x="6300782" y="1740695"/>
+                </a:cubicBezTo>
+                <a:cubicBezTo>
+                  <a:pt x="6300782" y="2641969"/>
+                  <a:pt x="5615819" y="3383262"/>
+                  <a:pt x="4738063" y="3472403"/>
+                </a:cubicBezTo>
+                <a:lnTo>
+                  <a:pt x="4562473" y="3481270"/>
+                </a:lnTo>
+                <a:lnTo>
+                  <a:pt x="4562473" y="3481390"/>
+                </a:lnTo>
+                <a:lnTo>
+                  <a:pt x="4560087" y="3481390"/>
+                </a:lnTo>
+                <a:lnTo>
+                  <a:pt x="0" y="3481390"/>
+                </a:lnTo>
+                <a:close/>
+              </a:path>
+            </a:pathLst>
+          </a:custGeom>
+          <a:solidFill>
+            <a:srgbClr val="E3E9EA"/>
+          </a:solidFill>
+          <a:ln>
+            <a:noFill/>
+          </a:ln>
+        </p:spPr>
+        <p:style>
+          <a:lnRef idx="2">
+            <a:schemeClr val="accent1">
+              <a:shade val="15000"/>
+            </a:schemeClr>
+          </a:lnRef>
+          <a:fillRef idx="1">
+            <a:schemeClr val="accent1"/>
+          </a:fillRef>
+          <a:effectRef idx="0">
+            <a:schemeClr val="accent1"/>
+          </a:effectRef>
+          <a:fontRef idx="minor">
+            <a:schemeClr val="lt1"/>
+          </a:fontRef>
+        </p:style>
+        <p:txBody>
+          <a:bodyPr lIns="0" tIns="0" rIns="0" bIns="0" rtlCol="0" anchor="ctr"/>
+          <a:lstStyle/>
+          <a:p>
+            <a:pPr algn="ctr"/>
+            <a:endParaRPr lang="de-DE" sz="1600" b="1">
+              <a:solidFill>
+                <a:schemeClr val="tx1"/>
+              </a:solidFill>
+            </a:endParaRPr>
+          </a:p>
+        </p:txBody>
+      </p:sp>
+      <p:sp>
+        <p:nvSpPr>
+          <p:cNvPr id="7" name="Textfeld 6">
+            <a:extLst>
+              <a:ext uri="{FF2B5EF4-FFF2-40B4-BE49-F238E27FC236}">
+                <a16:creationId xmlns:a16="http://schemas.microsoft.com/office/drawing/2014/main" id="{9F60FC65-39EB-21FA-6A94-54DBC626EA69}"/>
+              </a:ext>
+            </a:extLst>
+          </p:cNvPr>
+          <p:cNvSpPr txBox="1"/>
+          <p:nvPr/>
+        </p:nvSpPr>
+        <p:spPr>
+          <a:xfrm>
+            <a:off x="10287922" y="17905"/>
+            <a:ext cx="1904078" cy="461665"/>
+          </a:xfrm>
+          <a:prstGeom prst="rect">
+            <a:avLst/>
+          </a:prstGeom>
+          <a:noFill/>
+        </p:spPr>
+        <p:txBody>
+          <a:bodyPr wrap="square" rtlCol="0">
+            <a:spAutoFit/>
+          </a:bodyPr>
+          <a:lstStyle/>
+          <a:p>
+            <a:pPr algn="ctr"/>
+            <a:r>
+              <a:rPr lang="de-DE" sz="2400" dirty="0">
+                <a:solidFill>
+                  <a:srgbClr val="00336E"/>
+                </a:solidFill>
+                <a:ea typeface="Cormorant Garamond" pitchFamily="2" charset="0"/>
+                <a:cs typeface="Cormorant Garamond" pitchFamily="2" charset="0"/>
+              </a:rPr>
+              <a:t>First </a:t>
+            </a:r>
+            <a:r>
+              <a:rPr lang="de-DE" sz="2400" dirty="0" err="1">
+                <a:solidFill>
+                  <a:srgbClr val="00336E"/>
+                </a:solidFill>
+                <a:ea typeface="Cormorant Garamond" pitchFamily="2" charset="0"/>
+                <a:cs typeface="Cormorant Garamond" pitchFamily="2" charset="0"/>
+              </a:rPr>
+              <a:t>results</a:t>
+            </a:r>
+            <a:endParaRPr lang="de-DE" sz="2400" b="1" dirty="0">
+              <a:solidFill>
+                <a:srgbClr val="00336E"/>
+              </a:solidFill>
+              <a:ea typeface="Cormorant Garamond" pitchFamily="2" charset="0"/>
+              <a:cs typeface="Cormorant Garamond" pitchFamily="2" charset="0"/>
+            </a:endParaRPr>
+          </a:p>
+        </p:txBody>
+      </p:sp>
+      <p:sp>
+        <p:nvSpPr>
+          <p:cNvPr id="9" name="Ellipse 8">
+            <a:extLst>
+              <a:ext uri="{FF2B5EF4-FFF2-40B4-BE49-F238E27FC236}">
+                <a16:creationId xmlns:a16="http://schemas.microsoft.com/office/drawing/2014/main" id="{127D3BBA-15AB-5B9B-BB3C-97F3AABA41AF}"/>
+              </a:ext>
+            </a:extLst>
+          </p:cNvPr>
+          <p:cNvSpPr/>
+          <p:nvPr/>
+        </p:nvSpPr>
+        <p:spPr>
+          <a:xfrm>
+            <a:off x="10012084" y="66307"/>
+            <a:ext cx="340233" cy="340233"/>
+          </a:xfrm>
+          <a:prstGeom prst="ellipse">
+            <a:avLst/>
+          </a:prstGeom>
+          <a:solidFill>
+            <a:srgbClr val="E3E9EA"/>
+          </a:solidFill>
+          <a:ln>
+            <a:solidFill>
+              <a:srgbClr val="00336E"/>
+            </a:solidFill>
+          </a:ln>
+        </p:spPr>
+        <p:style>
+          <a:lnRef idx="2">
+            <a:schemeClr val="accent1">
+              <a:shade val="15000"/>
+            </a:schemeClr>
+          </a:lnRef>
+          <a:fillRef idx="1">
+            <a:schemeClr val="accent1"/>
+          </a:fillRef>
+          <a:effectRef idx="0">
+            <a:schemeClr val="accent1"/>
+          </a:effectRef>
+          <a:fontRef idx="minor">
+            <a:schemeClr val="lt1"/>
+          </a:fontRef>
+        </p:style>
+        <p:txBody>
+          <a:bodyPr lIns="0" tIns="0" rIns="0" bIns="0" rtlCol="0" anchor="ctr"/>
+          <a:lstStyle/>
+          <a:p>
+            <a:pPr algn="ctr"/>
+            <a:r>
+              <a:rPr lang="de-DE" b="1" dirty="0">
+                <a:solidFill>
+                  <a:schemeClr val="tx1"/>
+                </a:solidFill>
+              </a:rPr>
+              <a:t>1</a:t>
+            </a:r>
+            <a:endParaRPr lang="de-DE" sz="900" b="1" dirty="0">
+              <a:solidFill>
+                <a:schemeClr val="tx1"/>
+              </a:solidFill>
+            </a:endParaRPr>
+          </a:p>
+        </p:txBody>
+      </p:sp>
+    </p:spTree>
+    <p:extLst>
+      <p:ext uri="{BB962C8B-B14F-4D97-AF65-F5344CB8AC3E}">
+        <p14:creationId xmlns:p14="http://schemas.microsoft.com/office/powerpoint/2010/main" val="498882151"/>
       </p:ext>
     </p:extLst>
   </p:cSld>
@@ -5787,6 +9002,538 @@
     <p:extLst>
       <p:ext uri="{BB962C8B-B14F-4D97-AF65-F5344CB8AC3E}">
         <p14:creationId xmlns:p14="http://schemas.microsoft.com/office/powerpoint/2010/main" val="3159537428"/>
+      </p:ext>
+    </p:extLst>
+  </p:cSld>
+  <p:clrMapOvr>
+    <a:masterClrMapping/>
+  </p:clrMapOvr>
+</p:sld>
+</file>
+
+<file path=ppt/slides/slide20.xml><?xml version="1.0" encoding="utf-8"?>
+<p:sld xmlns:a="http://schemas.openxmlformats.org/drawingml/2006/main" xmlns:r="http://schemas.openxmlformats.org/officeDocument/2006/relationships" xmlns:p="http://schemas.openxmlformats.org/presentationml/2006/main">
+  <p:cSld>
+    <p:spTree>
+      <p:nvGrpSpPr>
+        <p:cNvPr id="1" name=""/>
+        <p:cNvGrpSpPr/>
+        <p:nvPr/>
+      </p:nvGrpSpPr>
+      <p:grpSpPr>
+        <a:xfrm>
+          <a:off x="0" y="0"/>
+          <a:ext cx="0" cy="0"/>
+          <a:chOff x="0" y="0"/>
+          <a:chExt cx="0" cy="0"/>
+        </a:xfrm>
+      </p:grpSpPr>
+      <p:sp>
+        <p:nvSpPr>
+          <p:cNvPr id="2" name="Textfeld 1">
+            <a:extLst>
+              <a:ext uri="{FF2B5EF4-FFF2-40B4-BE49-F238E27FC236}">
+                <a16:creationId xmlns:a16="http://schemas.microsoft.com/office/drawing/2014/main" id="{5731082E-4466-5528-BC28-6E3503A92BB2}"/>
+              </a:ext>
+            </a:extLst>
+          </p:cNvPr>
+          <p:cNvSpPr txBox="1"/>
+          <p:nvPr/>
+        </p:nvSpPr>
+        <p:spPr>
+          <a:xfrm>
+            <a:off x="5114643" y="495300"/>
+            <a:ext cx="981359" cy="369332"/>
+          </a:xfrm>
+          <a:prstGeom prst="rect">
+            <a:avLst/>
+          </a:prstGeom>
+          <a:noFill/>
+        </p:spPr>
+        <p:txBody>
+          <a:bodyPr wrap="none" rtlCol="0">
+            <a:spAutoFit/>
+          </a:bodyPr>
+          <a:lstStyle/>
+          <a:p>
+            <a:r>
+              <a:rPr lang="de-DE" dirty="0"/>
+              <a:t>Outlook</a:t>
+            </a:r>
+          </a:p>
+        </p:txBody>
+      </p:sp>
+      <p:sp>
+        <p:nvSpPr>
+          <p:cNvPr id="3" name="Textfeld 2">
+            <a:extLst>
+              <a:ext uri="{FF2B5EF4-FFF2-40B4-BE49-F238E27FC236}">
+                <a16:creationId xmlns:a16="http://schemas.microsoft.com/office/drawing/2014/main" id="{9CAD1419-0DA4-6952-9705-FC6DE9F77D12}"/>
+              </a:ext>
+            </a:extLst>
+          </p:cNvPr>
+          <p:cNvSpPr txBox="1"/>
+          <p:nvPr/>
+        </p:nvSpPr>
+        <p:spPr>
+          <a:xfrm>
+            <a:off x="1587501" y="1435100"/>
+            <a:ext cx="7440590" cy="2308324"/>
+          </a:xfrm>
+          <a:prstGeom prst="rect">
+            <a:avLst/>
+          </a:prstGeom>
+          <a:noFill/>
+        </p:spPr>
+        <p:txBody>
+          <a:bodyPr wrap="square" rtlCol="0">
+            <a:spAutoFit/>
+          </a:bodyPr>
+          <a:lstStyle/>
+          <a:p>
+            <a:r>
+              <a:rPr lang="de-DE" dirty="0" err="1"/>
+              <a:t>Build</a:t>
+            </a:r>
+            <a:r>
+              <a:rPr lang="de-DE" dirty="0"/>
+              <a:t> minimal </a:t>
+            </a:r>
+            <a:r>
+              <a:rPr lang="de-DE" dirty="0" err="1"/>
+              <a:t>networks</a:t>
+            </a:r>
+            <a:r>
+              <a:rPr lang="de-DE" dirty="0"/>
+              <a:t> </a:t>
+            </a:r>
+            <a:r>
+              <a:rPr lang="de-DE" dirty="0" err="1"/>
+              <a:t>that</a:t>
+            </a:r>
+            <a:r>
+              <a:rPr lang="de-DE" dirty="0"/>
+              <a:t> </a:t>
+            </a:r>
+            <a:r>
+              <a:rPr lang="de-DE" dirty="0" err="1"/>
+              <a:t>can</a:t>
+            </a:r>
+            <a:r>
+              <a:rPr lang="de-DE" dirty="0"/>
+              <a:t> </a:t>
+            </a:r>
+            <a:r>
+              <a:rPr lang="de-DE" dirty="0" err="1"/>
+              <a:t>adapt</a:t>
+            </a:r>
+            <a:r>
+              <a:rPr lang="de-DE" dirty="0"/>
+              <a:t> </a:t>
+            </a:r>
+            <a:r>
+              <a:rPr lang="de-DE" dirty="0" err="1"/>
+              <a:t>to</a:t>
+            </a:r>
+            <a:r>
+              <a:rPr lang="de-DE" dirty="0"/>
+              <a:t> </a:t>
+            </a:r>
+            <a:r>
+              <a:rPr lang="de-DE" dirty="0" err="1"/>
+              <a:t>tasks</a:t>
+            </a:r>
+            <a:r>
+              <a:rPr lang="de-DE" dirty="0"/>
+              <a:t> </a:t>
+            </a:r>
+            <a:r>
+              <a:rPr lang="de-DE" dirty="0" err="1"/>
+              <a:t>they</a:t>
+            </a:r>
+            <a:r>
+              <a:rPr lang="de-DE" dirty="0"/>
+              <a:t> </a:t>
+            </a:r>
+            <a:r>
+              <a:rPr lang="de-DE" dirty="0" err="1"/>
+              <a:t>were</a:t>
+            </a:r>
+            <a:r>
+              <a:rPr lang="de-DE" dirty="0"/>
+              <a:t> </a:t>
+            </a:r>
+            <a:r>
+              <a:rPr lang="de-DE" dirty="0" err="1"/>
+              <a:t>never</a:t>
+            </a:r>
+            <a:r>
+              <a:rPr lang="de-DE" dirty="0"/>
+              <a:t> </a:t>
+            </a:r>
+            <a:r>
+              <a:rPr lang="de-DE" dirty="0" err="1"/>
+              <a:t>explicitly</a:t>
+            </a:r>
+            <a:r>
+              <a:rPr lang="de-DE" dirty="0"/>
+              <a:t> </a:t>
+            </a:r>
+            <a:r>
+              <a:rPr lang="de-DE" dirty="0" err="1"/>
+              <a:t>trained</a:t>
+            </a:r>
+            <a:r>
+              <a:rPr lang="de-DE" dirty="0"/>
+              <a:t> on, and </a:t>
+            </a:r>
+            <a:r>
+              <a:rPr lang="de-DE" dirty="0" err="1"/>
+              <a:t>characterize</a:t>
+            </a:r>
+            <a:r>
+              <a:rPr lang="de-DE" dirty="0"/>
+              <a:t> </a:t>
+            </a:r>
+            <a:r>
+              <a:rPr lang="de-DE" dirty="0" err="1"/>
+              <a:t>what</a:t>
+            </a:r>
+            <a:r>
+              <a:rPr lang="de-DE" dirty="0"/>
+              <a:t> </a:t>
+            </a:r>
+            <a:r>
+              <a:rPr lang="de-DE" dirty="0" err="1"/>
+              <a:t>structural</a:t>
+            </a:r>
+            <a:r>
+              <a:rPr lang="de-DE" dirty="0"/>
+              <a:t> </a:t>
+            </a:r>
+            <a:r>
+              <a:rPr lang="de-DE" dirty="0" err="1"/>
+              <a:t>properties</a:t>
+            </a:r>
+            <a:r>
+              <a:rPr lang="de-DE" dirty="0"/>
+              <a:t> </a:t>
+            </a:r>
+            <a:r>
+              <a:rPr lang="de-DE" dirty="0" err="1"/>
+              <a:t>make</a:t>
+            </a:r>
+            <a:r>
+              <a:rPr lang="de-DE" dirty="0"/>
+              <a:t> </a:t>
+            </a:r>
+            <a:r>
+              <a:rPr lang="de-DE" dirty="0" err="1"/>
+              <a:t>that</a:t>
+            </a:r>
+            <a:r>
+              <a:rPr lang="de-DE" dirty="0"/>
+              <a:t> possible.</a:t>
+            </a:r>
+          </a:p>
+          <a:p>
+            <a:endParaRPr lang="de-DE" dirty="0"/>
+          </a:p>
+          <a:p>
+            <a:endParaRPr lang="de-DE" dirty="0"/>
+          </a:p>
+          <a:p>
+            <a:pPr marL="285750" indent="-285750">
+              <a:buFont typeface="Wingdings" panose="05000000000000000000" pitchFamily="2" charset="2"/>
+              <a:buChar char="à"/>
+            </a:pPr>
+            <a:r>
+              <a:rPr lang="de-DE" dirty="0" err="1">
+                <a:sym typeface="Wingdings" panose="05000000000000000000" pitchFamily="2" charset="2"/>
+              </a:rPr>
+              <a:t>Candidate</a:t>
+            </a:r>
+            <a:r>
+              <a:rPr lang="de-DE" dirty="0">
+                <a:sym typeface="Wingdings" panose="05000000000000000000" pitchFamily="2" charset="2"/>
+              </a:rPr>
+              <a:t> </a:t>
+            </a:r>
+            <a:r>
+              <a:rPr lang="de-DE" dirty="0" err="1">
+                <a:sym typeface="Wingdings" panose="05000000000000000000" pitchFamily="2" charset="2"/>
+              </a:rPr>
+              <a:t>wiring</a:t>
+            </a:r>
+            <a:r>
+              <a:rPr lang="de-DE" dirty="0">
+                <a:sym typeface="Wingdings" panose="05000000000000000000" pitchFamily="2" charset="2"/>
+              </a:rPr>
+              <a:t> </a:t>
+            </a:r>
+            <a:r>
+              <a:rPr lang="de-DE" dirty="0" err="1">
+                <a:sym typeface="Wingdings" panose="05000000000000000000" pitchFamily="2" charset="2"/>
+              </a:rPr>
+              <a:t>motifs</a:t>
+            </a:r>
+            <a:r>
+              <a:rPr lang="de-DE" dirty="0">
+                <a:sym typeface="Wingdings" panose="05000000000000000000" pitchFamily="2" charset="2"/>
+              </a:rPr>
+              <a:t> </a:t>
+            </a:r>
+            <a:r>
+              <a:rPr lang="de-DE" dirty="0" err="1">
+                <a:sym typeface="Wingdings" panose="05000000000000000000" pitchFamily="2" charset="2"/>
+              </a:rPr>
+              <a:t>for</a:t>
+            </a:r>
+            <a:r>
+              <a:rPr lang="de-DE" dirty="0">
+                <a:sym typeface="Wingdings" panose="05000000000000000000" pitchFamily="2" charset="2"/>
+              </a:rPr>
+              <a:t> </a:t>
+            </a:r>
+            <a:r>
+              <a:rPr lang="de-DE" dirty="0" err="1">
+                <a:sym typeface="Wingdings" panose="05000000000000000000" pitchFamily="2" charset="2"/>
+              </a:rPr>
+              <a:t>targeted</a:t>
+            </a:r>
+            <a:r>
+              <a:rPr lang="de-DE" dirty="0">
+                <a:sym typeface="Wingdings" panose="05000000000000000000" pitchFamily="2" charset="2"/>
+              </a:rPr>
+              <a:t> </a:t>
+            </a:r>
+            <a:r>
+              <a:rPr lang="de-DE" dirty="0" err="1">
+                <a:sym typeface="Wingdings" panose="05000000000000000000" pitchFamily="2" charset="2"/>
+              </a:rPr>
+              <a:t>investigation</a:t>
+            </a:r>
+            <a:r>
+              <a:rPr lang="de-DE" dirty="0">
+                <a:sym typeface="Wingdings" panose="05000000000000000000" pitchFamily="2" charset="2"/>
+              </a:rPr>
+              <a:t> in </a:t>
+            </a:r>
+            <a:r>
+              <a:rPr lang="de-DE" dirty="0" err="1">
+                <a:sym typeface="Wingdings" panose="05000000000000000000" pitchFamily="2" charset="2"/>
+              </a:rPr>
+              <a:t>biological</a:t>
+            </a:r>
+            <a:r>
+              <a:rPr lang="de-DE" dirty="0">
+                <a:sym typeface="Wingdings" panose="05000000000000000000" pitchFamily="2" charset="2"/>
+              </a:rPr>
+              <a:t> </a:t>
+            </a:r>
+            <a:r>
+              <a:rPr lang="de-DE" dirty="0" err="1">
+                <a:sym typeface="Wingdings" panose="05000000000000000000" pitchFamily="2" charset="2"/>
+              </a:rPr>
+              <a:t>circuits</a:t>
+            </a:r>
+            <a:r>
+              <a:rPr lang="de-DE" dirty="0">
+                <a:sym typeface="Wingdings" panose="05000000000000000000" pitchFamily="2" charset="2"/>
+              </a:rPr>
+              <a:t> / </a:t>
+            </a:r>
+            <a:r>
+              <a:rPr lang="de-DE" dirty="0" err="1">
+                <a:sym typeface="Wingdings" panose="05000000000000000000" pitchFamily="2" charset="2"/>
+              </a:rPr>
+              <a:t>networks</a:t>
+            </a:r>
+            <a:endParaRPr lang="de-DE" dirty="0">
+              <a:sym typeface="Wingdings" panose="05000000000000000000" pitchFamily="2" charset="2"/>
+            </a:endParaRPr>
+          </a:p>
+          <a:p>
+            <a:pPr marL="285750" indent="-285750">
+              <a:buFont typeface="Wingdings" panose="05000000000000000000" pitchFamily="2" charset="2"/>
+              <a:buChar char="à"/>
+            </a:pPr>
+            <a:r>
+              <a:rPr lang="de-DE" dirty="0">
+                <a:sym typeface="Wingdings" panose="05000000000000000000" pitchFamily="2" charset="2"/>
+              </a:rPr>
+              <a:t>Model </a:t>
+            </a:r>
+            <a:r>
+              <a:rPr lang="de-DE" dirty="0" err="1">
+                <a:sym typeface="Wingdings" panose="05000000000000000000" pitchFamily="2" charset="2"/>
+              </a:rPr>
+              <a:t>for</a:t>
+            </a:r>
+            <a:r>
+              <a:rPr lang="de-DE" dirty="0">
+                <a:sym typeface="Wingdings" panose="05000000000000000000" pitchFamily="2" charset="2"/>
+              </a:rPr>
+              <a:t> </a:t>
+            </a:r>
+            <a:r>
+              <a:rPr lang="de-DE" dirty="0" err="1">
+                <a:sym typeface="Wingdings" panose="05000000000000000000" pitchFamily="2" charset="2"/>
+              </a:rPr>
+              <a:t>interpretation</a:t>
+            </a:r>
+            <a:r>
+              <a:rPr lang="de-DE" dirty="0">
+                <a:sym typeface="Wingdings" panose="05000000000000000000" pitchFamily="2" charset="2"/>
+              </a:rPr>
+              <a:t> </a:t>
+            </a:r>
+            <a:r>
+              <a:rPr lang="de-DE" dirty="0" err="1">
+                <a:sym typeface="Wingdings" panose="05000000000000000000" pitchFamily="2" charset="2"/>
+              </a:rPr>
+              <a:t>of</a:t>
+            </a:r>
+            <a:r>
+              <a:rPr lang="de-DE" dirty="0">
+                <a:sym typeface="Wingdings" panose="05000000000000000000" pitchFamily="2" charset="2"/>
+              </a:rPr>
+              <a:t> </a:t>
+            </a:r>
+            <a:r>
+              <a:rPr lang="de-DE" dirty="0" err="1">
+                <a:sym typeface="Wingdings" panose="05000000000000000000" pitchFamily="2" charset="2"/>
+              </a:rPr>
+              <a:t>data</a:t>
+            </a:r>
+            <a:r>
+              <a:rPr lang="de-DE" dirty="0">
+                <a:sym typeface="Wingdings" panose="05000000000000000000" pitchFamily="2" charset="2"/>
+              </a:rPr>
+              <a:t> </a:t>
+            </a:r>
+            <a:r>
+              <a:rPr lang="de-DE" dirty="0" err="1">
+                <a:sym typeface="Wingdings" panose="05000000000000000000" pitchFamily="2" charset="2"/>
+              </a:rPr>
+              <a:t>from</a:t>
+            </a:r>
+            <a:r>
+              <a:rPr lang="de-DE" dirty="0">
+                <a:sym typeface="Wingdings" panose="05000000000000000000" pitchFamily="2" charset="2"/>
+              </a:rPr>
+              <a:t> </a:t>
+            </a:r>
+            <a:r>
+              <a:rPr lang="de-DE" dirty="0" err="1">
+                <a:sym typeface="Wingdings" panose="05000000000000000000" pitchFamily="2" charset="2"/>
+              </a:rPr>
+              <a:t>complex</a:t>
+            </a:r>
+            <a:r>
+              <a:rPr lang="de-DE" dirty="0">
+                <a:sym typeface="Wingdings" panose="05000000000000000000" pitchFamily="2" charset="2"/>
+              </a:rPr>
+              <a:t> </a:t>
+            </a:r>
+            <a:r>
+              <a:rPr lang="de-DE" dirty="0" err="1">
+                <a:sym typeface="Wingdings" panose="05000000000000000000" pitchFamily="2" charset="2"/>
+              </a:rPr>
+              <a:t>circuits</a:t>
+            </a:r>
+            <a:r>
+              <a:rPr lang="de-DE" dirty="0">
+                <a:sym typeface="Wingdings" panose="05000000000000000000" pitchFamily="2" charset="2"/>
+              </a:rPr>
+              <a:t> and </a:t>
+            </a:r>
+            <a:r>
+              <a:rPr lang="de-DE" dirty="0" err="1">
+                <a:sym typeface="Wingdings" panose="05000000000000000000" pitchFamily="2" charset="2"/>
+              </a:rPr>
+              <a:t>brains</a:t>
+            </a:r>
+            <a:endParaRPr lang="de-DE" dirty="0">
+              <a:sym typeface="Wingdings" panose="05000000000000000000" pitchFamily="2" charset="2"/>
+            </a:endParaRPr>
+          </a:p>
+        </p:txBody>
+      </p:sp>
+      <p:sp>
+        <p:nvSpPr>
+          <p:cNvPr id="4" name="Fußzeilenplatzhalter 3">
+            <a:extLst>
+              <a:ext uri="{FF2B5EF4-FFF2-40B4-BE49-F238E27FC236}">
+                <a16:creationId xmlns:a16="http://schemas.microsoft.com/office/drawing/2014/main" id="{5D92CC30-3ED4-325B-1A7F-27E0E5EAEA68}"/>
+              </a:ext>
+            </a:extLst>
+          </p:cNvPr>
+          <p:cNvSpPr>
+            <a:spLocks noGrp="1"/>
+          </p:cNvSpPr>
+          <p:nvPr>
+            <p:ph type="ftr" sz="quarter" idx="4294967295"/>
+          </p:nvPr>
+        </p:nvSpPr>
+        <p:spPr>
+          <a:xfrm>
+            <a:off x="4038600" y="6356350"/>
+            <a:ext cx="4114800" cy="365125"/>
+          </a:xfrm>
+          <a:prstGeom prst="rect">
+            <a:avLst/>
+          </a:prstGeom>
+        </p:spPr>
+        <p:txBody>
+          <a:bodyPr/>
+          <a:lstStyle/>
+          <a:p>
+            <a:r>
+              <a:rPr lang="de-DE"/>
+              <a:t>Dr. Jana Dahlmanns – Jana.Dahlmanns@fau.de</a:t>
+            </a:r>
+          </a:p>
+        </p:txBody>
+      </p:sp>
+      <p:sp>
+        <p:nvSpPr>
+          <p:cNvPr id="5" name="Foliennummernplatzhalter 4">
+            <a:extLst>
+              <a:ext uri="{FF2B5EF4-FFF2-40B4-BE49-F238E27FC236}">
+                <a16:creationId xmlns:a16="http://schemas.microsoft.com/office/drawing/2014/main" id="{5F4DE647-8299-3C1B-11AC-698E405F9A0E}"/>
+              </a:ext>
+            </a:extLst>
+          </p:cNvPr>
+          <p:cNvSpPr>
+            <a:spLocks noGrp="1"/>
+          </p:cNvSpPr>
+          <p:nvPr>
+            <p:ph type="sldNum" sz="quarter" idx="4294967295"/>
+          </p:nvPr>
+        </p:nvSpPr>
+        <p:spPr>
+          <a:xfrm>
+            <a:off x="8610600" y="6356350"/>
+            <a:ext cx="2743200" cy="365125"/>
+          </a:xfrm>
+        </p:spPr>
+        <p:txBody>
+          <a:bodyPr/>
+          <a:lstStyle/>
+          <a:p>
+            <a:fld id="{001D04CD-A18E-4C48-A0D4-2F175BEDACF1}" type="slidenum">
+              <a:rPr lang="de-DE" smtClean="0"/>
+              <a:t>20</a:t>
+            </a:fld>
+            <a:endParaRPr lang="de-DE"/>
+          </a:p>
+        </p:txBody>
+      </p:sp>
+    </p:spTree>
+    <p:extLst>
+      <p:ext uri="{BB962C8B-B14F-4D97-AF65-F5344CB8AC3E}">
+        <p14:creationId xmlns:p14="http://schemas.microsoft.com/office/powerpoint/2010/main" val="1692034232"/>
       </p:ext>
     </p:extLst>
   </p:cSld>

--- a/scicom/skeleton_presentation.pptx
+++ b/scicom/skeleton_presentation.pptx
@@ -5,7 +5,7 @@
     <p:sldMasterId id="2147483672" r:id="rId1"/>
   </p:sldMasterIdLst>
   <p:notesMasterIdLst>
-    <p:notesMasterId r:id="rId22"/>
+    <p:notesMasterId r:id="rId24"/>
   </p:notesMasterIdLst>
   <p:sldIdLst>
     <p:sldId id="256" r:id="rId2"/>
@@ -27,7 +27,9 @@
     <p:sldId id="281" r:id="rId18"/>
     <p:sldId id="282" r:id="rId19"/>
     <p:sldId id="284" r:id="rId20"/>
-    <p:sldId id="268" r:id="rId21"/>
+    <p:sldId id="286" r:id="rId21"/>
+    <p:sldId id="285" r:id="rId22"/>
+    <p:sldId id="268" r:id="rId23"/>
   </p:sldIdLst>
   <p:sldSz cx="12192000" cy="6858000"/>
   <p:notesSz cx="6858000" cy="9144000"/>
@@ -216,7 +218,7 @@
           <a:p>
             <a:fld id="{D45AE30C-70B0-42A3-87DE-9CC4A3E6D756}" type="datetimeFigureOut">
               <a:rPr lang="de-DE" smtClean="0"/>
-              <a:t>26.05.2026</a:t>
+              <a:t>27.05.2026</a:t>
             </a:fld>
             <a:endParaRPr lang="de-DE"/>
           </a:p>
@@ -882,6 +884,114 @@
     <p:extLst>
       <p:ext uri="{BB962C8B-B14F-4D97-AF65-F5344CB8AC3E}">
         <p14:creationId xmlns:p14="http://schemas.microsoft.com/office/powerpoint/2010/main" val="2419741675"/>
+      </p:ext>
+    </p:extLst>
+  </p:cSld>
+  <p:clrMapOvr>
+    <a:masterClrMapping/>
+  </p:clrMapOvr>
+</p:notes>
+</file>
+
+<file path=ppt/notesSlides/notesSlide5.xml><?xml version="1.0" encoding="utf-8"?>
+<p:notes xmlns:a="http://schemas.openxmlformats.org/drawingml/2006/main" xmlns:r="http://schemas.openxmlformats.org/officeDocument/2006/relationships" xmlns:p="http://schemas.openxmlformats.org/presentationml/2006/main">
+  <p:cSld>
+    <p:spTree>
+      <p:nvGrpSpPr>
+        <p:cNvPr id="1" name="">
+          <a:extLst>
+            <a:ext uri="{FF2B5EF4-FFF2-40B4-BE49-F238E27FC236}">
+              <a16:creationId xmlns:a16="http://schemas.microsoft.com/office/drawing/2014/main" id="{9134F01B-DE0E-3C64-9D06-6DCBDD650B15}"/>
+            </a:ext>
+          </a:extLst>
+        </p:cNvPr>
+        <p:cNvGrpSpPr/>
+        <p:nvPr/>
+      </p:nvGrpSpPr>
+      <p:grpSpPr>
+        <a:xfrm>
+          <a:off x="0" y="0"/>
+          <a:ext cx="0" cy="0"/>
+          <a:chOff x="0" y="0"/>
+          <a:chExt cx="0" cy="0"/>
+        </a:xfrm>
+      </p:grpSpPr>
+      <p:sp>
+        <p:nvSpPr>
+          <p:cNvPr id="2" name="Folienbildplatzhalter 1">
+            <a:extLst>
+              <a:ext uri="{FF2B5EF4-FFF2-40B4-BE49-F238E27FC236}">
+                <a16:creationId xmlns:a16="http://schemas.microsoft.com/office/drawing/2014/main" id="{9B359431-5298-F755-9B31-A53A9EBD4155}"/>
+              </a:ext>
+            </a:extLst>
+          </p:cNvPr>
+          <p:cNvSpPr>
+            <a:spLocks noGrp="1" noRot="1" noChangeAspect="1"/>
+          </p:cNvSpPr>
+          <p:nvPr>
+            <p:ph type="sldImg"/>
+          </p:nvPr>
+        </p:nvSpPr>
+        <p:spPr/>
+      </p:sp>
+      <p:sp>
+        <p:nvSpPr>
+          <p:cNvPr id="3" name="Notizenplatzhalter 2">
+            <a:extLst>
+              <a:ext uri="{FF2B5EF4-FFF2-40B4-BE49-F238E27FC236}">
+                <a16:creationId xmlns:a16="http://schemas.microsoft.com/office/drawing/2014/main" id="{5ECD6EA3-CC9E-EB77-CAE5-D712167DE44B}"/>
+              </a:ext>
+            </a:extLst>
+          </p:cNvPr>
+          <p:cNvSpPr>
+            <a:spLocks noGrp="1"/>
+          </p:cNvSpPr>
+          <p:nvPr>
+            <p:ph type="body" idx="1"/>
+          </p:nvPr>
+        </p:nvSpPr>
+        <p:spPr/>
+        <p:txBody>
+          <a:bodyPr/>
+          <a:lstStyle/>
+          <a:p>
+            <a:endParaRPr lang="de-DE" dirty="0"/>
+          </a:p>
+        </p:txBody>
+      </p:sp>
+      <p:sp>
+        <p:nvSpPr>
+          <p:cNvPr id="4" name="Foliennummernplatzhalter 3">
+            <a:extLst>
+              <a:ext uri="{FF2B5EF4-FFF2-40B4-BE49-F238E27FC236}">
+                <a16:creationId xmlns:a16="http://schemas.microsoft.com/office/drawing/2014/main" id="{A1451646-C5C2-A8F6-2239-1BFB668E9675}"/>
+              </a:ext>
+            </a:extLst>
+          </p:cNvPr>
+          <p:cNvSpPr>
+            <a:spLocks noGrp="1"/>
+          </p:cNvSpPr>
+          <p:nvPr>
+            <p:ph type="sldNum" sz="quarter" idx="5"/>
+          </p:nvPr>
+        </p:nvSpPr>
+        <p:spPr/>
+        <p:txBody>
+          <a:bodyPr/>
+          <a:lstStyle/>
+          <a:p>
+            <a:fld id="{BD810619-8C86-4E95-A074-DA0A2010136C}" type="slidenum">
+              <a:rPr lang="de-DE" smtClean="0"/>
+              <a:t>20</a:t>
+            </a:fld>
+            <a:endParaRPr lang="de-DE"/>
+          </a:p>
+        </p:txBody>
+      </p:sp>
+    </p:spTree>
+    <p:extLst>
+      <p:ext uri="{BB962C8B-B14F-4D97-AF65-F5344CB8AC3E}">
+        <p14:creationId xmlns:p14="http://schemas.microsoft.com/office/powerpoint/2010/main" val="1491723569"/>
       </p:ext>
     </p:extLst>
   </p:cSld>
@@ -4104,13 +4214,13 @@
   <p:clrMapOvr>
     <a:masterClrMapping/>
   </p:clrMapOvr>
-  <mc:AlternateContent xmlns:mc="http://schemas.openxmlformats.org/markup-compatibility/2006">
-    <mc:Choice xmlns:p159="http://schemas.microsoft.com/office/powerpoint/2015/09/main" Requires="p159">
+  <mc:AlternateContent xmlns:mc="http://schemas.openxmlformats.org/markup-compatibility/2006" xmlns:p159="http://schemas.microsoft.com/office/powerpoint/2015/09/main">
+    <mc:Choice Requires="p159">
       <p:transition xmlns:p14="http://schemas.microsoft.com/office/powerpoint/2010/main" spd="slow" p14:dur="2000">
         <p159:morph option="byObject"/>
       </p:transition>
     </mc:Choice>
-    <mc:Fallback>
+    <mc:Fallback xmlns="">
       <p:transition spd="slow">
         <p:fade/>
       </p:transition>
@@ -5203,14 +5313,13 @@
               </a:ext>
             </a:extLst>
           </a:blip>
-          <a:stretch>
-            <a:fillRect/>
-          </a:stretch>
+          <a:srcRect/>
+          <a:stretch/>
         </p:blipFill>
         <p:spPr>
           <a:xfrm>
-            <a:off x="3864673" y="957362"/>
-            <a:ext cx="7500940" cy="4973908"/>
+            <a:off x="3864673" y="961551"/>
+            <a:ext cx="7500940" cy="4965529"/>
           </a:xfrm>
           <a:prstGeom prst="rect">
             <a:avLst/>
@@ -5239,14 +5348,13 @@
               </a:ext>
             </a:extLst>
           </a:blip>
-          <a:stretch>
-            <a:fillRect/>
-          </a:stretch>
+          <a:srcRect/>
+          <a:stretch/>
         </p:blipFill>
         <p:spPr>
           <a:xfrm>
             <a:off x="3855948" y="957362"/>
-            <a:ext cx="7513596" cy="4973908"/>
+            <a:ext cx="7513595" cy="4973908"/>
           </a:xfrm>
           <a:prstGeom prst="rect">
             <a:avLst/>
@@ -5275,14 +5383,13 @@
               </a:ext>
             </a:extLst>
           </a:blip>
-          <a:stretch>
-            <a:fillRect/>
-          </a:stretch>
+          <a:srcRect/>
+          <a:stretch/>
         </p:blipFill>
         <p:spPr>
           <a:xfrm>
             <a:off x="3855948" y="957362"/>
-            <a:ext cx="7513596" cy="4973908"/>
+            <a:ext cx="7513595" cy="4973908"/>
           </a:xfrm>
           <a:prstGeom prst="rect">
             <a:avLst/>
@@ -5311,14 +5418,13 @@
               </a:ext>
             </a:extLst>
           </a:blip>
-          <a:stretch>
-            <a:fillRect/>
-          </a:stretch>
+          <a:srcRect/>
+          <a:stretch/>
         </p:blipFill>
         <p:spPr>
           <a:xfrm>
             <a:off x="3855948" y="957362"/>
-            <a:ext cx="7513596" cy="4973908"/>
+            <a:ext cx="7513595" cy="4973908"/>
           </a:xfrm>
           <a:prstGeom prst="rect">
             <a:avLst/>
@@ -5347,14 +5453,13 @@
               </a:ext>
             </a:extLst>
           </a:blip>
-          <a:stretch>
-            <a:fillRect/>
-          </a:stretch>
+          <a:srcRect/>
+          <a:stretch/>
         </p:blipFill>
         <p:spPr>
           <a:xfrm>
             <a:off x="3855948" y="957362"/>
-            <a:ext cx="7513596" cy="4973908"/>
+            <a:ext cx="7513595" cy="4973908"/>
           </a:xfrm>
           <a:prstGeom prst="rect">
             <a:avLst/>
@@ -6030,12 +6135,237 @@
           </a:p>
         </p:txBody>
       </p:sp>
+      <p:sp>
+        <p:nvSpPr>
+          <p:cNvPr id="8" name="Textfeld 7">
+            <a:extLst>
+              <a:ext uri="{FF2B5EF4-FFF2-40B4-BE49-F238E27FC236}">
+                <a16:creationId xmlns:a16="http://schemas.microsoft.com/office/drawing/2014/main" id="{39415EE7-D00F-C603-EEA2-139BA96482FE}"/>
+              </a:ext>
+            </a:extLst>
+          </p:cNvPr>
+          <p:cNvSpPr txBox="1"/>
+          <p:nvPr/>
+        </p:nvSpPr>
+        <p:spPr>
+          <a:xfrm>
+            <a:off x="4195989" y="5605807"/>
+            <a:ext cx="10203543" cy="1187376"/>
+          </a:xfrm>
+          <a:prstGeom prst="rect">
+            <a:avLst/>
+          </a:prstGeom>
+          <a:noFill/>
+        </p:spPr>
+        <p:txBody>
+          <a:bodyPr wrap="square">
+            <a:spAutoFit/>
+          </a:bodyPr>
+          <a:lstStyle/>
+          <a:p>
+            <a:pPr defTabSz="288000">
+              <a:lnSpc>
+                <a:spcPct val="115000"/>
+              </a:lnSpc>
+              <a:spcAft>
+                <a:spcPts val="1000"/>
+              </a:spcAft>
+              <a:buNone/>
+            </a:pPr>
+            <a:r>
+              <a:rPr lang="en-US" sz="800" dirty="0">
+                <a:effectLst/>
+                <a:ea typeface="MS Mincho" panose="02020609040205080304" pitchFamily="49" charset="-128"/>
+                <a:cs typeface="Times New Roman" panose="02020603050405020304" pitchFamily="18" charset="0"/>
+              </a:rPr>
+              <a:t>Kruskal-Wallis: p &lt;&lt; 0.01; </a:t>
+            </a:r>
+            <a:r>
+              <a:rPr lang="el-GR" sz="800" dirty="0">
+                <a:effectLst/>
+                <a:ea typeface="MS Mincho" panose="02020609040205080304" pitchFamily="49" charset="-128"/>
+                <a:cs typeface="Times New Roman" panose="02020603050405020304" pitchFamily="18" charset="0"/>
+              </a:rPr>
+              <a:t>ε</a:t>
+            </a:r>
+            <a:r>
+              <a:rPr lang="de-DE" sz="800" baseline="30000" dirty="0">
+                <a:effectLst/>
+                <a:ea typeface="MS Mincho" panose="02020609040205080304" pitchFamily="49" charset="-128"/>
+                <a:cs typeface="Times New Roman" panose="02020603050405020304" pitchFamily="18" charset="0"/>
+              </a:rPr>
+              <a:t>2</a:t>
+            </a:r>
+            <a:r>
+              <a:rPr lang="de-DE" sz="800" dirty="0">
+                <a:effectLst/>
+                <a:ea typeface="MS Mincho" panose="02020609040205080304" pitchFamily="49" charset="-128"/>
+                <a:cs typeface="Times New Roman" panose="02020603050405020304" pitchFamily="18" charset="0"/>
+              </a:rPr>
+              <a:t> = 0.4 (large </a:t>
+            </a:r>
+            <a:r>
+              <a:rPr lang="de-DE" sz="800" dirty="0" err="1">
+                <a:effectLst/>
+                <a:ea typeface="MS Mincho" panose="02020609040205080304" pitchFamily="49" charset="-128"/>
+                <a:cs typeface="Times New Roman" panose="02020603050405020304" pitchFamily="18" charset="0"/>
+              </a:rPr>
+              <a:t>effect</a:t>
+            </a:r>
+            <a:r>
+              <a:rPr lang="de-DE" sz="800" dirty="0">
+                <a:effectLst/>
+                <a:ea typeface="MS Mincho" panose="02020609040205080304" pitchFamily="49" charset="-128"/>
+                <a:cs typeface="Times New Roman" panose="02020603050405020304" pitchFamily="18" charset="0"/>
+              </a:rPr>
+              <a:t> </a:t>
+            </a:r>
+            <a:r>
+              <a:rPr lang="de-DE" sz="800" dirty="0" err="1">
+                <a:effectLst/>
+                <a:ea typeface="MS Mincho" panose="02020609040205080304" pitchFamily="49" charset="-128"/>
+                <a:cs typeface="Times New Roman" panose="02020603050405020304" pitchFamily="18" charset="0"/>
+              </a:rPr>
+              <a:t>size</a:t>
+            </a:r>
+            <a:r>
+              <a:rPr lang="de-DE" sz="800" dirty="0">
+                <a:effectLst/>
+                <a:ea typeface="MS Mincho" panose="02020609040205080304" pitchFamily="49" charset="-128"/>
+                <a:cs typeface="Times New Roman" panose="02020603050405020304" pitchFamily="18" charset="0"/>
+              </a:rPr>
+              <a:t>)</a:t>
+            </a:r>
+            <a:endParaRPr lang="en-US" sz="800" dirty="0">
+              <a:effectLst/>
+              <a:ea typeface="MS Mincho" panose="02020609040205080304" pitchFamily="49" charset="-128"/>
+              <a:cs typeface="Times New Roman" panose="02020603050405020304" pitchFamily="18" charset="0"/>
+            </a:endParaRPr>
+          </a:p>
+          <a:p>
+            <a:pPr defTabSz="288000">
+              <a:lnSpc>
+                <a:spcPct val="115000"/>
+              </a:lnSpc>
+              <a:spcAft>
+                <a:spcPts val="1000"/>
+              </a:spcAft>
+              <a:buNone/>
+            </a:pPr>
+            <a:r>
+              <a:rPr lang="en-US" sz="800" dirty="0">
+                <a:ea typeface="MS Mincho" panose="02020609040205080304" pitchFamily="49" charset="-128"/>
+                <a:cs typeface="Times New Roman" panose="02020603050405020304" pitchFamily="18" charset="0"/>
+              </a:rPr>
+              <a:t>MWU + Holm-Bonferroni: </a:t>
+            </a:r>
+            <a:br>
+              <a:rPr lang="en-US" sz="800" dirty="0">
+                <a:ea typeface="MS Mincho" panose="02020609040205080304" pitchFamily="49" charset="-128"/>
+                <a:cs typeface="Times New Roman" panose="02020603050405020304" pitchFamily="18" charset="0"/>
+              </a:rPr>
+            </a:br>
+            <a:r>
+              <a:rPr lang="en-US" sz="800" dirty="0">
+                <a:ea typeface="MS Mincho" panose="02020609040205080304" pitchFamily="49" charset="-128"/>
+                <a:cs typeface="Times New Roman" panose="02020603050405020304" pitchFamily="18" charset="0"/>
+              </a:rPr>
+              <a:t>Hard-Coded vs Random:	p &lt;&lt; 0.01;	r = -0.87 (large effect size)</a:t>
+            </a:r>
+            <a:br>
+              <a:rPr lang="en-US" sz="800" dirty="0">
+                <a:ea typeface="MS Mincho" panose="02020609040205080304" pitchFamily="49" charset="-128"/>
+                <a:cs typeface="Times New Roman" panose="02020603050405020304" pitchFamily="18" charset="0"/>
+              </a:rPr>
+            </a:br>
+            <a:r>
+              <a:rPr lang="en-US" sz="800" dirty="0">
+                <a:ea typeface="MS Mincho" panose="02020609040205080304" pitchFamily="49" charset="-128"/>
+                <a:cs typeface="Times New Roman" panose="02020603050405020304" pitchFamily="18" charset="0"/>
+              </a:rPr>
+              <a:t>EA vs Random:			p &lt;&lt; 0.01; 	r = -0.97 (large effect size)</a:t>
+            </a:r>
+            <a:br>
+              <a:rPr lang="en-US" sz="800" dirty="0">
+                <a:ea typeface="MS Mincho" panose="02020609040205080304" pitchFamily="49" charset="-128"/>
+                <a:cs typeface="Times New Roman" panose="02020603050405020304" pitchFamily="18" charset="0"/>
+              </a:rPr>
+            </a:br>
+            <a:r>
+              <a:rPr lang="en-US" sz="800" dirty="0">
+                <a:effectLst/>
+                <a:ea typeface="MS Mincho" panose="02020609040205080304" pitchFamily="49" charset="-128"/>
+                <a:cs typeface="Times New Roman" panose="02020603050405020304" pitchFamily="18" charset="0"/>
+              </a:rPr>
+              <a:t>EA vs Hard-Coded</a:t>
+            </a:r>
+            <a:r>
+              <a:rPr lang="en-US" sz="800" dirty="0">
+                <a:ea typeface="MS Mincho" panose="02020609040205080304" pitchFamily="49" charset="-128"/>
+                <a:cs typeface="Times New Roman" panose="02020603050405020304" pitchFamily="18" charset="0"/>
+              </a:rPr>
+              <a:t>:		</a:t>
+            </a:r>
+            <a:r>
+              <a:rPr lang="en-US" sz="800" dirty="0">
+                <a:effectLst/>
+                <a:ea typeface="MS Mincho" panose="02020609040205080304" pitchFamily="49" charset="-128"/>
+                <a:cs typeface="Times New Roman" panose="02020603050405020304" pitchFamily="18" charset="0"/>
+              </a:rPr>
+              <a:t>p = 9*10</a:t>
+            </a:r>
+            <a:r>
+              <a:rPr lang="en-US" sz="800" baseline="30000" dirty="0">
+                <a:effectLst/>
+                <a:ea typeface="MS Mincho" panose="02020609040205080304" pitchFamily="49" charset="-128"/>
+                <a:cs typeface="Times New Roman" panose="02020603050405020304" pitchFamily="18" charset="0"/>
+              </a:rPr>
+              <a:t>-</a:t>
+            </a:r>
+            <a:r>
+              <a:rPr lang="en-US" sz="800" baseline="30000" dirty="0">
+                <a:ea typeface="MS Mincho" panose="02020609040205080304" pitchFamily="49" charset="-128"/>
+                <a:cs typeface="Times New Roman" panose="02020603050405020304" pitchFamily="18" charset="0"/>
+              </a:rPr>
+              <a:t>90</a:t>
+            </a:r>
+            <a:r>
+              <a:rPr lang="en-US" sz="800" dirty="0">
+                <a:ea typeface="MS Mincho" panose="02020609040205080304" pitchFamily="49" charset="-128"/>
+                <a:cs typeface="Times New Roman" panose="02020603050405020304" pitchFamily="18" charset="0"/>
+              </a:rPr>
+              <a:t>;	r = -0.7 (large effect size)</a:t>
+            </a:r>
+            <a:endParaRPr lang="en-US" sz="800" dirty="0">
+              <a:effectLst/>
+              <a:ea typeface="MS Mincho" panose="02020609040205080304" pitchFamily="49" charset="-128"/>
+              <a:cs typeface="Times New Roman" panose="02020603050405020304" pitchFamily="18" charset="0"/>
+            </a:endParaRPr>
+          </a:p>
+          <a:p>
+            <a:pPr>
+              <a:lnSpc>
+                <a:spcPct val="115000"/>
+              </a:lnSpc>
+              <a:spcAft>
+                <a:spcPts val="1000"/>
+              </a:spcAft>
+              <a:buNone/>
+            </a:pPr>
+            <a:endParaRPr lang="de-DE" sz="800" dirty="0">
+              <a:effectLst/>
+              <a:ea typeface="MS Mincho" panose="02020609040205080304" pitchFamily="49" charset="-128"/>
+              <a:cs typeface="Times New Roman" panose="02020603050405020304" pitchFamily="18" charset="0"/>
+            </a:endParaRPr>
+          </a:p>
+        </p:txBody>
+      </p:sp>
       <p:grpSp>
         <p:nvGrpSpPr>
-          <p:cNvPr id="42" name="Gruppieren 41">
+          <p:cNvPr id="2" name="Gruppieren 1">
             <a:extLst>
               <a:ext uri="{FF2B5EF4-FFF2-40B4-BE49-F238E27FC236}">
-                <a16:creationId xmlns:a16="http://schemas.microsoft.com/office/drawing/2014/main" id="{61D35B51-BC7E-C69E-726A-D2E8E7263E08}"/>
+                <a16:creationId xmlns:a16="http://schemas.microsoft.com/office/drawing/2014/main" id="{51F5124E-F9D2-D2B1-077A-EF7659D5F3A4}"/>
               </a:ext>
             </a:extLst>
           </p:cNvPr>
@@ -6045,242 +6375,52 @@
         <p:grpSpPr>
           <a:xfrm>
             <a:off x="4195989" y="735357"/>
-            <a:ext cx="10203543" cy="6057826"/>
+            <a:ext cx="6957785" cy="4870450"/>
             <a:chOff x="4195989" y="735357"/>
-            <a:chExt cx="10203543" cy="6057826"/>
+            <a:chExt cx="6957785" cy="4870450"/>
           </a:xfrm>
         </p:grpSpPr>
-        <p:sp>
-          <p:nvSpPr>
-            <p:cNvPr id="8" name="Textfeld 7">
+        <p:pic>
+          <p:nvPicPr>
+            <p:cNvPr id="25" name="Grafik 24">
               <a:extLst>
                 <a:ext uri="{FF2B5EF4-FFF2-40B4-BE49-F238E27FC236}">
-                  <a16:creationId xmlns:a16="http://schemas.microsoft.com/office/drawing/2014/main" id="{39415EE7-D00F-C603-EEA2-139BA96482FE}"/>
+                  <a16:creationId xmlns:a16="http://schemas.microsoft.com/office/drawing/2014/main" id="{A16FEB82-BC73-606C-8212-BB85B7519BAE}"/>
                 </a:ext>
               </a:extLst>
             </p:cNvPr>
-            <p:cNvSpPr txBox="1"/>
+            <p:cNvPicPr>
+              <a:picLocks noChangeAspect="1"/>
+            </p:cNvPicPr>
             <p:nvPr/>
-          </p:nvSpPr>
+          </p:nvPicPr>
+          <p:blipFill>
+            <a:blip r:embed="rId3">
+              <a:extLst>
+                <a:ext uri="{28A0092B-C50C-407E-A947-70E740481C1C}">
+                  <a14:useLocalDpi xmlns:a14="http://schemas.microsoft.com/office/drawing/2010/main" val="0"/>
+                </a:ext>
+              </a:extLst>
+            </a:blip>
+            <a:srcRect/>
+            <a:stretch/>
+          </p:blipFill>
           <p:spPr>
             <a:xfrm>
-              <a:off x="4195989" y="5605807"/>
-              <a:ext cx="10203543" cy="1187376"/>
+              <a:off x="4195989" y="735357"/>
+              <a:ext cx="6957785" cy="4870450"/>
             </a:xfrm>
             <a:prstGeom prst="rect">
               <a:avLst/>
             </a:prstGeom>
-            <a:noFill/>
           </p:spPr>
-          <p:txBody>
-            <a:bodyPr wrap="square">
-              <a:spAutoFit/>
-            </a:bodyPr>
-            <a:lstStyle/>
-            <a:p>
-              <a:pPr defTabSz="288000">
-                <a:lnSpc>
-                  <a:spcPct val="115000"/>
-                </a:lnSpc>
-                <a:spcAft>
-                  <a:spcPts val="1000"/>
-                </a:spcAft>
-                <a:buNone/>
-              </a:pPr>
-              <a:r>
-                <a:rPr lang="en-US" sz="800" dirty="0">
-                  <a:effectLst/>
-                  <a:ea typeface="MS Mincho" panose="02020609040205080304" pitchFamily="49" charset="-128"/>
-                  <a:cs typeface="Times New Roman" panose="02020603050405020304" pitchFamily="18" charset="0"/>
-                </a:rPr>
-                <a:t>Kruskal-Wallis: p &lt;&lt; 0.01; </a:t>
-              </a:r>
-              <a:r>
-                <a:rPr lang="el-GR" sz="800" dirty="0">
-                  <a:effectLst/>
-                  <a:ea typeface="MS Mincho" panose="02020609040205080304" pitchFamily="49" charset="-128"/>
-                  <a:cs typeface="Times New Roman" panose="02020603050405020304" pitchFamily="18" charset="0"/>
-                </a:rPr>
-                <a:t>ε</a:t>
-              </a:r>
-              <a:r>
-                <a:rPr lang="de-DE" sz="800" baseline="30000" dirty="0">
-                  <a:effectLst/>
-                  <a:ea typeface="MS Mincho" panose="02020609040205080304" pitchFamily="49" charset="-128"/>
-                  <a:cs typeface="Times New Roman" panose="02020603050405020304" pitchFamily="18" charset="0"/>
-                </a:rPr>
-                <a:t>2</a:t>
-              </a:r>
-              <a:r>
-                <a:rPr lang="de-DE" sz="800" dirty="0">
-                  <a:effectLst/>
-                  <a:ea typeface="MS Mincho" panose="02020609040205080304" pitchFamily="49" charset="-128"/>
-                  <a:cs typeface="Times New Roman" panose="02020603050405020304" pitchFamily="18" charset="0"/>
-                </a:rPr>
-                <a:t> = 0.4 (large </a:t>
-              </a:r>
-              <a:r>
-                <a:rPr lang="de-DE" sz="800" dirty="0" err="1">
-                  <a:effectLst/>
-                  <a:ea typeface="MS Mincho" panose="02020609040205080304" pitchFamily="49" charset="-128"/>
-                  <a:cs typeface="Times New Roman" panose="02020603050405020304" pitchFamily="18" charset="0"/>
-                </a:rPr>
-                <a:t>effect</a:t>
-              </a:r>
-              <a:r>
-                <a:rPr lang="de-DE" sz="800" dirty="0">
-                  <a:effectLst/>
-                  <a:ea typeface="MS Mincho" panose="02020609040205080304" pitchFamily="49" charset="-128"/>
-                  <a:cs typeface="Times New Roman" panose="02020603050405020304" pitchFamily="18" charset="0"/>
-                </a:rPr>
-                <a:t> </a:t>
-              </a:r>
-              <a:r>
-                <a:rPr lang="de-DE" sz="800" dirty="0" err="1">
-                  <a:effectLst/>
-                  <a:ea typeface="MS Mincho" panose="02020609040205080304" pitchFamily="49" charset="-128"/>
-                  <a:cs typeface="Times New Roman" panose="02020603050405020304" pitchFamily="18" charset="0"/>
-                </a:rPr>
-                <a:t>size</a:t>
-              </a:r>
-              <a:r>
-                <a:rPr lang="de-DE" sz="800" dirty="0">
-                  <a:effectLst/>
-                  <a:ea typeface="MS Mincho" panose="02020609040205080304" pitchFamily="49" charset="-128"/>
-                  <a:cs typeface="Times New Roman" panose="02020603050405020304" pitchFamily="18" charset="0"/>
-                </a:rPr>
-                <a:t>)</a:t>
-              </a:r>
-              <a:endParaRPr lang="en-US" sz="800" dirty="0">
-                <a:effectLst/>
-                <a:ea typeface="MS Mincho" panose="02020609040205080304" pitchFamily="49" charset="-128"/>
-                <a:cs typeface="Times New Roman" panose="02020603050405020304" pitchFamily="18" charset="0"/>
-              </a:endParaRPr>
-            </a:p>
-            <a:p>
-              <a:pPr defTabSz="288000">
-                <a:lnSpc>
-                  <a:spcPct val="115000"/>
-                </a:lnSpc>
-                <a:spcAft>
-                  <a:spcPts val="1000"/>
-                </a:spcAft>
-                <a:buNone/>
-              </a:pPr>
-              <a:r>
-                <a:rPr lang="en-US" sz="800" dirty="0">
-                  <a:ea typeface="MS Mincho" panose="02020609040205080304" pitchFamily="49" charset="-128"/>
-                  <a:cs typeface="Times New Roman" panose="02020603050405020304" pitchFamily="18" charset="0"/>
-                </a:rPr>
-                <a:t>MWU + Holm-Bonferroni: </a:t>
-              </a:r>
-              <a:br>
-                <a:rPr lang="en-US" sz="800" dirty="0">
-                  <a:ea typeface="MS Mincho" panose="02020609040205080304" pitchFamily="49" charset="-128"/>
-                  <a:cs typeface="Times New Roman" panose="02020603050405020304" pitchFamily="18" charset="0"/>
-                </a:rPr>
-              </a:br>
-              <a:r>
-                <a:rPr lang="en-US" sz="800" dirty="0">
-                  <a:ea typeface="MS Mincho" panose="02020609040205080304" pitchFamily="49" charset="-128"/>
-                  <a:cs typeface="Times New Roman" panose="02020603050405020304" pitchFamily="18" charset="0"/>
-                </a:rPr>
-                <a:t>Hard-Coded vs Random:	p &lt;&lt; 0.01;	r = -0.87 (large effect size)</a:t>
-              </a:r>
-              <a:br>
-                <a:rPr lang="en-US" sz="800" dirty="0">
-                  <a:ea typeface="MS Mincho" panose="02020609040205080304" pitchFamily="49" charset="-128"/>
-                  <a:cs typeface="Times New Roman" panose="02020603050405020304" pitchFamily="18" charset="0"/>
-                </a:rPr>
-              </a:br>
-              <a:r>
-                <a:rPr lang="en-US" sz="800" dirty="0">
-                  <a:ea typeface="MS Mincho" panose="02020609040205080304" pitchFamily="49" charset="-128"/>
-                  <a:cs typeface="Times New Roman" panose="02020603050405020304" pitchFamily="18" charset="0"/>
-                </a:rPr>
-                <a:t>EA vs Random:			p &lt;&lt; 0.01; 	r = -0.97 (large effect size)</a:t>
-              </a:r>
-              <a:br>
-                <a:rPr lang="en-US" sz="800" dirty="0">
-                  <a:ea typeface="MS Mincho" panose="02020609040205080304" pitchFamily="49" charset="-128"/>
-                  <a:cs typeface="Times New Roman" panose="02020603050405020304" pitchFamily="18" charset="0"/>
-                </a:rPr>
-              </a:br>
-              <a:r>
-                <a:rPr lang="en-US" sz="800" dirty="0">
-                  <a:effectLst/>
-                  <a:ea typeface="MS Mincho" panose="02020609040205080304" pitchFamily="49" charset="-128"/>
-                  <a:cs typeface="Times New Roman" panose="02020603050405020304" pitchFamily="18" charset="0"/>
-                </a:rPr>
-                <a:t>EA vs Hard-Coded</a:t>
-              </a:r>
-              <a:r>
-                <a:rPr lang="en-US" sz="800" dirty="0">
-                  <a:ea typeface="MS Mincho" panose="02020609040205080304" pitchFamily="49" charset="-128"/>
-                  <a:cs typeface="Times New Roman" panose="02020603050405020304" pitchFamily="18" charset="0"/>
-                </a:rPr>
-                <a:t>:		</a:t>
-              </a:r>
-              <a:r>
-                <a:rPr lang="en-US" sz="800" dirty="0">
-                  <a:effectLst/>
-                  <a:ea typeface="MS Mincho" panose="02020609040205080304" pitchFamily="49" charset="-128"/>
-                  <a:cs typeface="Times New Roman" panose="02020603050405020304" pitchFamily="18" charset="0"/>
-                </a:rPr>
-                <a:t>p = 9*10</a:t>
-              </a:r>
-              <a:r>
-                <a:rPr lang="en-US" sz="800" baseline="30000" dirty="0">
-                  <a:effectLst/>
-                  <a:ea typeface="MS Mincho" panose="02020609040205080304" pitchFamily="49" charset="-128"/>
-                  <a:cs typeface="Times New Roman" panose="02020603050405020304" pitchFamily="18" charset="0"/>
-                </a:rPr>
-                <a:t>-</a:t>
-              </a:r>
-              <a:r>
-                <a:rPr lang="en-US" sz="800" baseline="30000" dirty="0">
-                  <a:ea typeface="MS Mincho" panose="02020609040205080304" pitchFamily="49" charset="-128"/>
-                  <a:cs typeface="Times New Roman" panose="02020603050405020304" pitchFamily="18" charset="0"/>
-                </a:rPr>
-                <a:t>90</a:t>
-              </a:r>
-              <a:r>
-                <a:rPr lang="en-US" sz="800" dirty="0">
-                  <a:ea typeface="MS Mincho" panose="02020609040205080304" pitchFamily="49" charset="-128"/>
-                  <a:cs typeface="Times New Roman" panose="02020603050405020304" pitchFamily="18" charset="0"/>
-                </a:rPr>
-                <a:t>;	r = -0.7 (large effect size)</a:t>
-              </a:r>
-              <a:endParaRPr lang="en-US" sz="800" dirty="0">
-                <a:effectLst/>
-                <a:ea typeface="MS Mincho" panose="02020609040205080304" pitchFamily="49" charset="-128"/>
-                <a:cs typeface="Times New Roman" panose="02020603050405020304" pitchFamily="18" charset="0"/>
-              </a:endParaRPr>
-            </a:p>
-            <a:p>
-              <a:pPr>
-                <a:lnSpc>
-                  <a:spcPct val="115000"/>
-                </a:lnSpc>
-                <a:spcAft>
-                  <a:spcPts val="1000"/>
-                </a:spcAft>
-                <a:buNone/>
-              </a:pPr>
-              <a:endParaRPr lang="de-DE" sz="800" dirty="0">
-                <a:effectLst/>
-                <a:ea typeface="MS Mincho" panose="02020609040205080304" pitchFamily="49" charset="-128"/>
-                <a:cs typeface="Times New Roman" panose="02020603050405020304" pitchFamily="18" charset="0"/>
-              </a:endParaRPr>
-            </a:p>
-          </p:txBody>
-        </p:sp>
+        </p:pic>
         <p:grpSp>
           <p:nvGrpSpPr>
-            <p:cNvPr id="41" name="Gruppieren 40">
+            <p:cNvPr id="40" name="Gruppieren 39">
               <a:extLst>
                 <a:ext uri="{FF2B5EF4-FFF2-40B4-BE49-F238E27FC236}">
-                  <a16:creationId xmlns:a16="http://schemas.microsoft.com/office/drawing/2014/main" id="{F204B855-5563-7A74-7C69-6AE301321926}"/>
+                  <a16:creationId xmlns:a16="http://schemas.microsoft.com/office/drawing/2014/main" id="{6F99784B-DEAC-D516-FD5C-D2F68B99A8D7}"/>
                 </a:ext>
               </a:extLst>
             </p:cNvPr>
@@ -6289,54 +6429,18 @@
           </p:nvGrpSpPr>
           <p:grpSpPr>
             <a:xfrm>
-              <a:off x="4195989" y="735357"/>
-              <a:ext cx="6957786" cy="4870450"/>
-              <a:chOff x="4195989" y="735357"/>
-              <a:chExt cx="6957786" cy="4870450"/>
+              <a:off x="5795963" y="1196059"/>
+              <a:ext cx="4205287" cy="429366"/>
+              <a:chOff x="5795963" y="1196059"/>
+              <a:chExt cx="4205287" cy="429366"/>
             </a:xfrm>
           </p:grpSpPr>
-          <p:pic>
-            <p:nvPicPr>
-              <p:cNvPr id="25" name="Grafik 24">
+          <p:grpSp>
+            <p:nvGrpSpPr>
+              <p:cNvPr id="39" name="Gruppieren 38">
                 <a:extLst>
                   <a:ext uri="{FF2B5EF4-FFF2-40B4-BE49-F238E27FC236}">
-                    <a16:creationId xmlns:a16="http://schemas.microsoft.com/office/drawing/2014/main" id="{A16FEB82-BC73-606C-8212-BB85B7519BAE}"/>
-                  </a:ext>
-                </a:extLst>
-              </p:cNvPr>
-              <p:cNvPicPr>
-                <a:picLocks noChangeAspect="1"/>
-              </p:cNvPicPr>
-              <p:nvPr/>
-            </p:nvPicPr>
-            <p:blipFill>
-              <a:blip r:embed="rId3">
-                <a:extLst>
-                  <a:ext uri="{28A0092B-C50C-407E-A947-70E740481C1C}">
-                    <a14:useLocalDpi xmlns:a14="http://schemas.microsoft.com/office/drawing/2010/main" val="0"/>
-                  </a:ext>
-                </a:extLst>
-              </a:blip>
-              <a:stretch>
-                <a:fillRect/>
-              </a:stretch>
-            </p:blipFill>
-            <p:spPr>
-              <a:xfrm>
-                <a:off x="4195989" y="735357"/>
-                <a:ext cx="6957786" cy="4870450"/>
-              </a:xfrm>
-              <a:prstGeom prst="rect">
-                <a:avLst/>
-              </a:prstGeom>
-            </p:spPr>
-          </p:pic>
-          <p:grpSp>
-            <p:nvGrpSpPr>
-              <p:cNvPr id="40" name="Gruppieren 39">
-                <a:extLst>
-                  <a:ext uri="{FF2B5EF4-FFF2-40B4-BE49-F238E27FC236}">
-                    <a16:creationId xmlns:a16="http://schemas.microsoft.com/office/drawing/2014/main" id="{6F99784B-DEAC-D516-FD5C-D2F68B99A8D7}"/>
+                    <a16:creationId xmlns:a16="http://schemas.microsoft.com/office/drawing/2014/main" id="{928CD72C-2642-FB87-37C5-11001206F7B3}"/>
                   </a:ext>
                 </a:extLst>
               </p:cNvPr>
@@ -6346,333 +6450,312 @@
             <p:grpSpPr>
               <a:xfrm>
                 <a:off x="5795963" y="1196059"/>
-                <a:ext cx="4205287" cy="429366"/>
+                <a:ext cx="4205287" cy="153888"/>
                 <a:chOff x="5795963" y="1196059"/>
-                <a:chExt cx="4205287" cy="429366"/>
+                <a:chExt cx="4205287" cy="153888"/>
               </a:xfrm>
             </p:grpSpPr>
-            <p:grpSp>
-              <p:nvGrpSpPr>
-                <p:cNvPr id="39" name="Gruppieren 38">
+            <p:cxnSp>
+              <p:nvCxnSpPr>
+                <p:cNvPr id="28" name="Gerader Verbinder 27">
                   <a:extLst>
                     <a:ext uri="{FF2B5EF4-FFF2-40B4-BE49-F238E27FC236}">
-                      <a16:creationId xmlns:a16="http://schemas.microsoft.com/office/drawing/2014/main" id="{928CD72C-2642-FB87-37C5-11001206F7B3}"/>
+                      <a16:creationId xmlns:a16="http://schemas.microsoft.com/office/drawing/2014/main" id="{33F3B53C-D96D-7C07-B258-EC028CF36C3C}"/>
                     </a:ext>
                   </a:extLst>
                 </p:cNvPr>
-                <p:cNvGrpSpPr/>
+                <p:cNvCxnSpPr>
+                  <a:cxnSpLocks/>
+                </p:cNvCxnSpPr>
                 <p:nvPr/>
-              </p:nvGrpSpPr>
-              <p:grpSpPr>
+              </p:nvCxnSpPr>
+              <p:spPr>
                 <a:xfrm>
-                  <a:off x="5795963" y="1196059"/>
-                  <a:ext cx="4205287" cy="153888"/>
-                  <a:chOff x="5795963" y="1196059"/>
-                  <a:chExt cx="4205287" cy="153888"/>
+                  <a:off x="5795963" y="1295998"/>
+                  <a:ext cx="4205287" cy="0"/>
                 </a:xfrm>
-              </p:grpSpPr>
-              <p:cxnSp>
-                <p:nvCxnSpPr>
-                  <p:cNvPr id="28" name="Gerader Verbinder 27">
-                    <a:extLst>
-                      <a:ext uri="{FF2B5EF4-FFF2-40B4-BE49-F238E27FC236}">
-                        <a16:creationId xmlns:a16="http://schemas.microsoft.com/office/drawing/2014/main" id="{33F3B53C-D96D-7C07-B258-EC028CF36C3C}"/>
-                      </a:ext>
-                    </a:extLst>
-                  </p:cNvPr>
-                  <p:cNvCxnSpPr>
-                    <a:cxnSpLocks/>
-                  </p:cNvCxnSpPr>
-                  <p:nvPr/>
-                </p:nvCxnSpPr>
-                <p:spPr>
-                  <a:xfrm>
-                    <a:off x="5795963" y="1295998"/>
-                    <a:ext cx="4205287" cy="0"/>
-                  </a:xfrm>
-                  <a:prstGeom prst="line">
-                    <a:avLst/>
-                  </a:prstGeom>
-                  <a:ln w="9525">
-                    <a:solidFill>
-                      <a:schemeClr val="tx1"/>
-                    </a:solidFill>
-                    <a:headEnd type="diamond" w="sm" len="sm"/>
-                    <a:tailEnd type="diamond" w="sm" len="sm"/>
-                  </a:ln>
-                </p:spPr>
-                <p:style>
-                  <a:lnRef idx="2">
-                    <a:schemeClr val="accent1"/>
-                  </a:lnRef>
-                  <a:fillRef idx="0">
-                    <a:schemeClr val="accent1"/>
-                  </a:fillRef>
-                  <a:effectRef idx="1">
-                    <a:schemeClr val="accent1"/>
-                  </a:effectRef>
-                  <a:fontRef idx="minor">
+                <a:prstGeom prst="line">
+                  <a:avLst/>
+                </a:prstGeom>
+                <a:ln w="9525">
+                  <a:solidFill>
                     <a:schemeClr val="tx1"/>
-                  </a:fontRef>
-                </p:style>
-              </p:cxnSp>
-              <p:sp>
-                <p:nvSpPr>
-                  <p:cNvPr id="34" name="Textfeld 33">
-                    <a:extLst>
-                      <a:ext uri="{FF2B5EF4-FFF2-40B4-BE49-F238E27FC236}">
-                        <a16:creationId xmlns:a16="http://schemas.microsoft.com/office/drawing/2014/main" id="{BFD885DD-9D36-4AE2-BE1F-226E80B6FF12}"/>
-                      </a:ext>
-                    </a:extLst>
-                  </p:cNvPr>
-                  <p:cNvSpPr txBox="1"/>
-                  <p:nvPr/>
-                </p:nvSpPr>
-                <p:spPr>
-                  <a:xfrm>
-                    <a:off x="7770366" y="1196059"/>
-                    <a:ext cx="256480" cy="153888"/>
-                  </a:xfrm>
-                  <a:prstGeom prst="rect">
-                    <a:avLst/>
-                  </a:prstGeom>
-                  <a:noFill/>
-                  <a:ln>
-                    <a:noFill/>
-                  </a:ln>
-                </p:spPr>
-                <p:txBody>
-                  <a:bodyPr wrap="none" lIns="0" tIns="0" rIns="0" bIns="0" rtlCol="0" anchor="b">
-                    <a:spAutoFit/>
-                  </a:bodyPr>
-                  <a:lstStyle/>
-                  <a:p>
-                    <a:r>
-                      <a:rPr lang="de-DE" sz="1000" dirty="0">
-                        <a:latin typeface="+mj-lt"/>
-                        <a:ea typeface="Cormorant Garamond" pitchFamily="2" charset="0"/>
-                        <a:cs typeface="Cormorant Garamond" pitchFamily="2" charset="0"/>
-                      </a:rPr>
-                      <a:t>****</a:t>
-                    </a:r>
-                  </a:p>
-                </p:txBody>
-              </p:sp>
-            </p:grpSp>
-            <p:grpSp>
-              <p:nvGrpSpPr>
-                <p:cNvPr id="37" name="Gruppieren 36">
+                  </a:solidFill>
+                  <a:headEnd type="diamond" w="sm" len="sm"/>
+                  <a:tailEnd type="diamond" w="sm" len="sm"/>
+                </a:ln>
+              </p:spPr>
+              <p:style>
+                <a:lnRef idx="2">
+                  <a:schemeClr val="accent1"/>
+                </a:lnRef>
+                <a:fillRef idx="0">
+                  <a:schemeClr val="accent1"/>
+                </a:fillRef>
+                <a:effectRef idx="1">
+                  <a:schemeClr val="accent1"/>
+                </a:effectRef>
+                <a:fontRef idx="minor">
+                  <a:schemeClr val="tx1"/>
+                </a:fontRef>
+              </p:style>
+            </p:cxnSp>
+            <p:sp>
+              <p:nvSpPr>
+                <p:cNvPr id="34" name="Textfeld 33">
                   <a:extLst>
                     <a:ext uri="{FF2B5EF4-FFF2-40B4-BE49-F238E27FC236}">
-                      <a16:creationId xmlns:a16="http://schemas.microsoft.com/office/drawing/2014/main" id="{40A8EA23-B109-136D-9368-BB6AE23A6140}"/>
+                      <a16:creationId xmlns:a16="http://schemas.microsoft.com/office/drawing/2014/main" id="{BFD885DD-9D36-4AE2-BE1F-226E80B6FF12}"/>
                     </a:ext>
                   </a:extLst>
                 </p:cNvPr>
-                <p:cNvGrpSpPr/>
+                <p:cNvSpPr txBox="1"/>
                 <p:nvPr/>
-              </p:nvGrpSpPr>
-              <p:grpSpPr>
+              </p:nvSpPr>
+              <p:spPr>
                 <a:xfrm>
-                  <a:off x="5795963" y="1471537"/>
-                  <a:ext cx="2095500" cy="153888"/>
-                  <a:chOff x="5795963" y="1471537"/>
-                  <a:chExt cx="2095500" cy="153888"/>
+                  <a:off x="7770366" y="1196059"/>
+                  <a:ext cx="256480" cy="153888"/>
                 </a:xfrm>
-              </p:grpSpPr>
-              <p:cxnSp>
-                <p:nvCxnSpPr>
-                  <p:cNvPr id="27" name="Gerader Verbinder 26">
-                    <a:extLst>
-                      <a:ext uri="{FF2B5EF4-FFF2-40B4-BE49-F238E27FC236}">
-                        <a16:creationId xmlns:a16="http://schemas.microsoft.com/office/drawing/2014/main" id="{16B4C276-179F-43B7-247E-E4F362A8E68C}"/>
-                      </a:ext>
-                    </a:extLst>
-                  </p:cNvPr>
-                  <p:cNvCxnSpPr/>
-                  <p:nvPr/>
-                </p:nvCxnSpPr>
-                <p:spPr>
-                  <a:xfrm>
-                    <a:off x="5795963" y="1567797"/>
-                    <a:ext cx="2095500" cy="0"/>
-                  </a:xfrm>
-                  <a:prstGeom prst="line">
-                    <a:avLst/>
-                  </a:prstGeom>
-                  <a:ln w="9525">
-                    <a:solidFill>
-                      <a:schemeClr val="tx1"/>
-                    </a:solidFill>
-                    <a:headEnd type="diamond" w="sm" len="sm"/>
-                    <a:tailEnd type="diamond" w="sm" len="sm"/>
-                  </a:ln>
-                </p:spPr>
-                <p:style>
-                  <a:lnRef idx="2">
-                    <a:schemeClr val="accent1"/>
-                  </a:lnRef>
-                  <a:fillRef idx="0">
-                    <a:schemeClr val="accent1"/>
-                  </a:fillRef>
-                  <a:effectRef idx="1">
-                    <a:schemeClr val="accent1"/>
-                  </a:effectRef>
-                  <a:fontRef idx="minor">
-                    <a:schemeClr val="tx1"/>
-                  </a:fontRef>
-                </p:style>
-              </p:cxnSp>
-              <p:sp>
-                <p:nvSpPr>
-                  <p:cNvPr id="35" name="Textfeld 34">
-                    <a:extLst>
-                      <a:ext uri="{FF2B5EF4-FFF2-40B4-BE49-F238E27FC236}">
-                        <a16:creationId xmlns:a16="http://schemas.microsoft.com/office/drawing/2014/main" id="{C218FAF5-7FBA-89F4-D1BB-A0AA365621B1}"/>
-                      </a:ext>
-                    </a:extLst>
-                  </p:cNvPr>
-                  <p:cNvSpPr txBox="1"/>
-                  <p:nvPr/>
-                </p:nvSpPr>
-                <p:spPr>
-                  <a:xfrm>
-                    <a:off x="6715473" y="1471537"/>
-                    <a:ext cx="256480" cy="153888"/>
-                  </a:xfrm>
-                  <a:prstGeom prst="rect">
-                    <a:avLst/>
-                  </a:prstGeom>
+                <a:prstGeom prst="rect">
+                  <a:avLst/>
+                </a:prstGeom>
+                <a:noFill/>
+                <a:ln>
                   <a:noFill/>
-                  <a:ln>
-                    <a:noFill/>
-                  </a:ln>
-                </p:spPr>
-                <p:txBody>
-                  <a:bodyPr wrap="none" lIns="0" tIns="0" rIns="0" bIns="0" rtlCol="0">
-                    <a:spAutoFit/>
-                  </a:bodyPr>
-                  <a:lstStyle/>
-                  <a:p>
-                    <a:r>
-                      <a:rPr lang="de-DE" sz="1000" dirty="0">
-                        <a:latin typeface="+mj-lt"/>
-                        <a:ea typeface="Cormorant Garamond" pitchFamily="2" charset="0"/>
-                        <a:cs typeface="Cormorant Garamond" pitchFamily="2" charset="0"/>
-                      </a:rPr>
-                      <a:t>****</a:t>
-                    </a:r>
-                  </a:p>
-                </p:txBody>
-              </p:sp>
-            </p:grpSp>
-            <p:grpSp>
-              <p:nvGrpSpPr>
-                <p:cNvPr id="38" name="Gruppieren 37">
+                </a:ln>
+              </p:spPr>
+              <p:txBody>
+                <a:bodyPr wrap="none" lIns="0" tIns="0" rIns="0" bIns="0" rtlCol="0" anchor="b">
+                  <a:spAutoFit/>
+                </a:bodyPr>
+                <a:lstStyle/>
+                <a:p>
+                  <a:r>
+                    <a:rPr lang="de-DE" sz="1000" dirty="0">
+                      <a:latin typeface="+mj-lt"/>
+                      <a:ea typeface="Cormorant Garamond" pitchFamily="2" charset="0"/>
+                      <a:cs typeface="Cormorant Garamond" pitchFamily="2" charset="0"/>
+                    </a:rPr>
+                    <a:t>****</a:t>
+                  </a:r>
+                </a:p>
+              </p:txBody>
+            </p:sp>
+          </p:grpSp>
+          <p:grpSp>
+            <p:nvGrpSpPr>
+              <p:cNvPr id="37" name="Gruppieren 36">
+                <a:extLst>
+                  <a:ext uri="{FF2B5EF4-FFF2-40B4-BE49-F238E27FC236}">
+                    <a16:creationId xmlns:a16="http://schemas.microsoft.com/office/drawing/2014/main" id="{40A8EA23-B109-136D-9368-BB6AE23A6140}"/>
+                  </a:ext>
+                </a:extLst>
+              </p:cNvPr>
+              <p:cNvGrpSpPr/>
+              <p:nvPr/>
+            </p:nvGrpSpPr>
+            <p:grpSpPr>
+              <a:xfrm>
+                <a:off x="5795963" y="1471537"/>
+                <a:ext cx="2095500" cy="153888"/>
+                <a:chOff x="5795963" y="1471537"/>
+                <a:chExt cx="2095500" cy="153888"/>
+              </a:xfrm>
+            </p:grpSpPr>
+            <p:cxnSp>
+              <p:nvCxnSpPr>
+                <p:cNvPr id="27" name="Gerader Verbinder 26">
                   <a:extLst>
                     <a:ext uri="{FF2B5EF4-FFF2-40B4-BE49-F238E27FC236}">
-                      <a16:creationId xmlns:a16="http://schemas.microsoft.com/office/drawing/2014/main" id="{0C164916-B0E8-1C90-62B6-FEAD759E7EEF}"/>
+                      <a16:creationId xmlns:a16="http://schemas.microsoft.com/office/drawing/2014/main" id="{16B4C276-179F-43B7-247E-E4F362A8E68C}"/>
                     </a:ext>
                   </a:extLst>
                 </p:cNvPr>
-                <p:cNvGrpSpPr/>
+                <p:cNvCxnSpPr/>
                 <p:nvPr/>
-              </p:nvGrpSpPr>
-              <p:grpSpPr>
+              </p:nvCxnSpPr>
+              <p:spPr>
                 <a:xfrm>
-                  <a:off x="7891463" y="1327944"/>
-                  <a:ext cx="2109787" cy="153888"/>
-                  <a:chOff x="7891463" y="1327944"/>
-                  <a:chExt cx="2109787" cy="153888"/>
+                  <a:off x="5795963" y="1567797"/>
+                  <a:ext cx="2095500" cy="0"/>
                 </a:xfrm>
-              </p:grpSpPr>
-              <p:cxnSp>
-                <p:nvCxnSpPr>
-                  <p:cNvPr id="31" name="Gerader Verbinder 30">
-                    <a:extLst>
-                      <a:ext uri="{FF2B5EF4-FFF2-40B4-BE49-F238E27FC236}">
-                        <a16:creationId xmlns:a16="http://schemas.microsoft.com/office/drawing/2014/main" id="{A56BB575-0721-5FCE-8A49-835914027559}"/>
-                      </a:ext>
-                    </a:extLst>
-                  </p:cNvPr>
-                  <p:cNvCxnSpPr>
-                    <a:cxnSpLocks/>
-                  </p:cNvCxnSpPr>
-                  <p:nvPr/>
-                </p:nvCxnSpPr>
-                <p:spPr>
-                  <a:xfrm>
-                    <a:off x="7891463" y="1432903"/>
-                    <a:ext cx="2109787" cy="0"/>
-                  </a:xfrm>
-                  <a:prstGeom prst="line">
-                    <a:avLst/>
-                  </a:prstGeom>
-                  <a:ln w="9525">
-                    <a:solidFill>
-                      <a:schemeClr val="tx1"/>
-                    </a:solidFill>
-                    <a:headEnd type="diamond" w="sm" len="sm"/>
-                    <a:tailEnd type="diamond" w="sm" len="sm"/>
-                  </a:ln>
-                </p:spPr>
-                <p:style>
-                  <a:lnRef idx="2">
-                    <a:schemeClr val="accent1"/>
-                  </a:lnRef>
-                  <a:fillRef idx="0">
-                    <a:schemeClr val="accent1"/>
-                  </a:fillRef>
-                  <a:effectRef idx="1">
-                    <a:schemeClr val="accent1"/>
-                  </a:effectRef>
-                  <a:fontRef idx="minor">
+                <a:prstGeom prst="line">
+                  <a:avLst/>
+                </a:prstGeom>
+                <a:ln w="9525">
+                  <a:solidFill>
                     <a:schemeClr val="tx1"/>
-                  </a:fontRef>
-                </p:style>
-              </p:cxnSp>
-              <p:sp>
-                <p:nvSpPr>
-                  <p:cNvPr id="36" name="Textfeld 35">
-                    <a:extLst>
-                      <a:ext uri="{FF2B5EF4-FFF2-40B4-BE49-F238E27FC236}">
-                        <a16:creationId xmlns:a16="http://schemas.microsoft.com/office/drawing/2014/main" id="{1C59633D-AE3D-345A-EA3E-8EFBA03EDB18}"/>
-                      </a:ext>
-                    </a:extLst>
-                  </p:cNvPr>
-                  <p:cNvSpPr txBox="1"/>
-                  <p:nvPr/>
-                </p:nvSpPr>
-                <p:spPr>
-                  <a:xfrm>
-                    <a:off x="8818116" y="1327944"/>
-                    <a:ext cx="256480" cy="153888"/>
-                  </a:xfrm>
-                  <a:prstGeom prst="rect">
-                    <a:avLst/>
-                  </a:prstGeom>
+                  </a:solidFill>
+                  <a:headEnd type="diamond" w="sm" len="sm"/>
+                  <a:tailEnd type="diamond" w="sm" len="sm"/>
+                </a:ln>
+              </p:spPr>
+              <p:style>
+                <a:lnRef idx="2">
+                  <a:schemeClr val="accent1"/>
+                </a:lnRef>
+                <a:fillRef idx="0">
+                  <a:schemeClr val="accent1"/>
+                </a:fillRef>
+                <a:effectRef idx="1">
+                  <a:schemeClr val="accent1"/>
+                </a:effectRef>
+                <a:fontRef idx="minor">
+                  <a:schemeClr val="tx1"/>
+                </a:fontRef>
+              </p:style>
+            </p:cxnSp>
+            <p:sp>
+              <p:nvSpPr>
+                <p:cNvPr id="35" name="Textfeld 34">
+                  <a:extLst>
+                    <a:ext uri="{FF2B5EF4-FFF2-40B4-BE49-F238E27FC236}">
+                      <a16:creationId xmlns:a16="http://schemas.microsoft.com/office/drawing/2014/main" id="{C218FAF5-7FBA-89F4-D1BB-A0AA365621B1}"/>
+                    </a:ext>
+                  </a:extLst>
+                </p:cNvPr>
+                <p:cNvSpPr txBox="1"/>
+                <p:nvPr/>
+              </p:nvSpPr>
+              <p:spPr>
+                <a:xfrm>
+                  <a:off x="6715473" y="1471537"/>
+                  <a:ext cx="256480" cy="153888"/>
+                </a:xfrm>
+                <a:prstGeom prst="rect">
+                  <a:avLst/>
+                </a:prstGeom>
+                <a:noFill/>
+                <a:ln>
                   <a:noFill/>
-                  <a:ln>
-                    <a:noFill/>
-                  </a:ln>
-                </p:spPr>
-                <p:txBody>
-                  <a:bodyPr wrap="none" lIns="0" tIns="0" rIns="0" bIns="0" rtlCol="0">
-                    <a:spAutoFit/>
-                  </a:bodyPr>
-                  <a:lstStyle/>
-                  <a:p>
-                    <a:r>
-                      <a:rPr lang="de-DE" sz="1000" dirty="0">
-                        <a:latin typeface="+mj-lt"/>
-                        <a:ea typeface="Cormorant Garamond" pitchFamily="2" charset="0"/>
-                        <a:cs typeface="Cormorant Garamond" pitchFamily="2" charset="0"/>
-                      </a:rPr>
-                      <a:t>****</a:t>
-                    </a:r>
-                  </a:p>
-                </p:txBody>
-              </p:sp>
-            </p:grpSp>
+                </a:ln>
+              </p:spPr>
+              <p:txBody>
+                <a:bodyPr wrap="none" lIns="0" tIns="0" rIns="0" bIns="0" rtlCol="0">
+                  <a:spAutoFit/>
+                </a:bodyPr>
+                <a:lstStyle/>
+                <a:p>
+                  <a:r>
+                    <a:rPr lang="de-DE" sz="1000" dirty="0">
+                      <a:latin typeface="+mj-lt"/>
+                      <a:ea typeface="Cormorant Garamond" pitchFamily="2" charset="0"/>
+                      <a:cs typeface="Cormorant Garamond" pitchFamily="2" charset="0"/>
+                    </a:rPr>
+                    <a:t>****</a:t>
+                  </a:r>
+                </a:p>
+              </p:txBody>
+            </p:sp>
+          </p:grpSp>
+          <p:grpSp>
+            <p:nvGrpSpPr>
+              <p:cNvPr id="38" name="Gruppieren 37">
+                <a:extLst>
+                  <a:ext uri="{FF2B5EF4-FFF2-40B4-BE49-F238E27FC236}">
+                    <a16:creationId xmlns:a16="http://schemas.microsoft.com/office/drawing/2014/main" id="{0C164916-B0E8-1C90-62B6-FEAD759E7EEF}"/>
+                  </a:ext>
+                </a:extLst>
+              </p:cNvPr>
+              <p:cNvGrpSpPr/>
+              <p:nvPr/>
+            </p:nvGrpSpPr>
+            <p:grpSpPr>
+              <a:xfrm>
+                <a:off x="7891463" y="1327944"/>
+                <a:ext cx="2109787" cy="153888"/>
+                <a:chOff x="7891463" y="1327944"/>
+                <a:chExt cx="2109787" cy="153888"/>
+              </a:xfrm>
+            </p:grpSpPr>
+            <p:cxnSp>
+              <p:nvCxnSpPr>
+                <p:cNvPr id="31" name="Gerader Verbinder 30">
+                  <a:extLst>
+                    <a:ext uri="{FF2B5EF4-FFF2-40B4-BE49-F238E27FC236}">
+                      <a16:creationId xmlns:a16="http://schemas.microsoft.com/office/drawing/2014/main" id="{A56BB575-0721-5FCE-8A49-835914027559}"/>
+                    </a:ext>
+                  </a:extLst>
+                </p:cNvPr>
+                <p:cNvCxnSpPr>
+                  <a:cxnSpLocks/>
+                </p:cNvCxnSpPr>
+                <p:nvPr/>
+              </p:nvCxnSpPr>
+              <p:spPr>
+                <a:xfrm>
+                  <a:off x="7891463" y="1432903"/>
+                  <a:ext cx="2109787" cy="0"/>
+                </a:xfrm>
+                <a:prstGeom prst="line">
+                  <a:avLst/>
+                </a:prstGeom>
+                <a:ln w="9525">
+                  <a:solidFill>
+                    <a:schemeClr val="tx1"/>
+                  </a:solidFill>
+                  <a:headEnd type="diamond" w="sm" len="sm"/>
+                  <a:tailEnd type="diamond" w="sm" len="sm"/>
+                </a:ln>
+              </p:spPr>
+              <p:style>
+                <a:lnRef idx="2">
+                  <a:schemeClr val="accent1"/>
+                </a:lnRef>
+                <a:fillRef idx="0">
+                  <a:schemeClr val="accent1"/>
+                </a:fillRef>
+                <a:effectRef idx="1">
+                  <a:schemeClr val="accent1"/>
+                </a:effectRef>
+                <a:fontRef idx="minor">
+                  <a:schemeClr val="tx1"/>
+                </a:fontRef>
+              </p:style>
+            </p:cxnSp>
+            <p:sp>
+              <p:nvSpPr>
+                <p:cNvPr id="36" name="Textfeld 35">
+                  <a:extLst>
+                    <a:ext uri="{FF2B5EF4-FFF2-40B4-BE49-F238E27FC236}">
+                      <a16:creationId xmlns:a16="http://schemas.microsoft.com/office/drawing/2014/main" id="{1C59633D-AE3D-345A-EA3E-8EFBA03EDB18}"/>
+                    </a:ext>
+                  </a:extLst>
+                </p:cNvPr>
+                <p:cNvSpPr txBox="1"/>
+                <p:nvPr/>
+              </p:nvSpPr>
+              <p:spPr>
+                <a:xfrm>
+                  <a:off x="8818116" y="1327944"/>
+                  <a:ext cx="256480" cy="153888"/>
+                </a:xfrm>
+                <a:prstGeom prst="rect">
+                  <a:avLst/>
+                </a:prstGeom>
+                <a:noFill/>
+                <a:ln>
+                  <a:noFill/>
+                </a:ln>
+              </p:spPr>
+              <p:txBody>
+                <a:bodyPr wrap="none" lIns="0" tIns="0" rIns="0" bIns="0" rtlCol="0">
+                  <a:spAutoFit/>
+                </a:bodyPr>
+                <a:lstStyle/>
+                <a:p>
+                  <a:r>
+                    <a:rPr lang="de-DE" sz="1000" dirty="0">
+                      <a:latin typeface="+mj-lt"/>
+                      <a:ea typeface="Cormorant Garamond" pitchFamily="2" charset="0"/>
+                      <a:cs typeface="Cormorant Garamond" pitchFamily="2" charset="0"/>
+                    </a:rPr>
+                    <a:t>****</a:t>
+                  </a:r>
+                </a:p>
+              </p:txBody>
+            </p:sp>
           </p:grpSp>
         </p:grpSp>
       </p:grpSp>
@@ -7979,7 +8062,7 @@
         <p:spPr>
           <a:xfrm>
             <a:off x="4195989" y="1141228"/>
-            <a:ext cx="6957786" cy="4058708"/>
+            <a:ext cx="6957785" cy="4058708"/>
           </a:xfrm>
           <a:prstGeom prst="rect">
             <a:avLst/>
@@ -9016,6 +9099,414 @@
   <p:cSld>
     <p:spTree>
       <p:nvGrpSpPr>
+        <p:cNvPr id="1" name="">
+          <a:extLst>
+            <a:ext uri="{FF2B5EF4-FFF2-40B4-BE49-F238E27FC236}">
+              <a16:creationId xmlns:a16="http://schemas.microsoft.com/office/drawing/2014/main" id="{0406C8DC-15EF-F850-DEF6-A9A3F6948B02}"/>
+            </a:ext>
+          </a:extLst>
+        </p:cNvPr>
+        <p:cNvGrpSpPr/>
+        <p:nvPr/>
+      </p:nvGrpSpPr>
+      <p:grpSpPr>
+        <a:xfrm>
+          <a:off x="0" y="0"/>
+          <a:ext cx="0" cy="0"/>
+          <a:chOff x="0" y="0"/>
+          <a:chExt cx="0" cy="0"/>
+        </a:xfrm>
+      </p:grpSpPr>
+      <p:sp>
+        <p:nvSpPr>
+          <p:cNvPr id="6" name="Freihandform: Form 5">
+            <a:extLst>
+              <a:ext uri="{FF2B5EF4-FFF2-40B4-BE49-F238E27FC236}">
+                <a16:creationId xmlns:a16="http://schemas.microsoft.com/office/drawing/2014/main" id="{ABEBB741-0364-004B-2D02-E82F306C82FD}"/>
+              </a:ext>
+            </a:extLst>
+          </p:cNvPr>
+          <p:cNvSpPr/>
+          <p:nvPr/>
+        </p:nvSpPr>
+        <p:spPr>
+          <a:xfrm flipH="1">
+            <a:off x="8657661" y="-2955952"/>
+            <a:ext cx="6300782" cy="3481390"/>
+          </a:xfrm>
+          <a:custGeom>
+            <a:avLst/>
+            <a:gdLst>
+              <a:gd name="csX0" fmla="*/ 0 w 6300782"/>
+              <a:gd name="csY0" fmla="*/ 0 h 3481390"/>
+              <a:gd name="csX1" fmla="*/ 4560087 w 6300782"/>
+              <a:gd name="csY1" fmla="*/ 0 h 3481390"/>
+              <a:gd name="csX2" fmla="*/ 4562473 w 6300782"/>
+              <a:gd name="csY2" fmla="*/ 0 h 3481390"/>
+              <a:gd name="csX3" fmla="*/ 4562473 w 6300782"/>
+              <a:gd name="csY3" fmla="*/ 121 h 3481390"/>
+              <a:gd name="csX4" fmla="*/ 4738063 w 6300782"/>
+              <a:gd name="csY4" fmla="*/ 8987 h 3481390"/>
+              <a:gd name="csX5" fmla="*/ 6300782 w 6300782"/>
+              <a:gd name="csY5" fmla="*/ 1740695 h 3481390"/>
+              <a:gd name="csX6" fmla="*/ 4738063 w 6300782"/>
+              <a:gd name="csY6" fmla="*/ 3472403 h 3481390"/>
+              <a:gd name="csX7" fmla="*/ 4562473 w 6300782"/>
+              <a:gd name="csY7" fmla="*/ 3481270 h 3481390"/>
+              <a:gd name="csX8" fmla="*/ 4562473 w 6300782"/>
+              <a:gd name="csY8" fmla="*/ 3481390 h 3481390"/>
+              <a:gd name="csX9" fmla="*/ 4560087 w 6300782"/>
+              <a:gd name="csY9" fmla="*/ 3481390 h 3481390"/>
+              <a:gd name="csX10" fmla="*/ 0 w 6300782"/>
+              <a:gd name="csY10" fmla="*/ 3481390 h 3481390"/>
+            </a:gdLst>
+            <a:ahLst/>
+            <a:cxnLst>
+              <a:cxn ang="0">
+                <a:pos x="csX0" y="csY0"/>
+              </a:cxn>
+              <a:cxn ang="0">
+                <a:pos x="csX1" y="csY1"/>
+              </a:cxn>
+              <a:cxn ang="0">
+                <a:pos x="csX2" y="csY2"/>
+              </a:cxn>
+              <a:cxn ang="0">
+                <a:pos x="csX3" y="csY3"/>
+              </a:cxn>
+              <a:cxn ang="0">
+                <a:pos x="csX4" y="csY4"/>
+              </a:cxn>
+              <a:cxn ang="0">
+                <a:pos x="csX5" y="csY5"/>
+              </a:cxn>
+              <a:cxn ang="0">
+                <a:pos x="csX6" y="csY6"/>
+              </a:cxn>
+              <a:cxn ang="0">
+                <a:pos x="csX7" y="csY7"/>
+              </a:cxn>
+              <a:cxn ang="0">
+                <a:pos x="csX8" y="csY8"/>
+              </a:cxn>
+              <a:cxn ang="0">
+                <a:pos x="csX9" y="csY9"/>
+              </a:cxn>
+              <a:cxn ang="0">
+                <a:pos x="csX10" y="csY10"/>
+              </a:cxn>
+            </a:cxnLst>
+            <a:rect l="l" t="t" r="r" b="b"/>
+            <a:pathLst>
+              <a:path w="6300782" h="3481390">
+                <a:moveTo>
+                  <a:pt x="0" y="0"/>
+                </a:moveTo>
+                <a:lnTo>
+                  <a:pt x="4560087" y="0"/>
+                </a:lnTo>
+                <a:lnTo>
+                  <a:pt x="4562473" y="0"/>
+                </a:lnTo>
+                <a:lnTo>
+                  <a:pt x="4562473" y="121"/>
+                </a:lnTo>
+                <a:lnTo>
+                  <a:pt x="4738063" y="8987"/>
+                </a:lnTo>
+                <a:cubicBezTo>
+                  <a:pt x="5615819" y="98128"/>
+                  <a:pt x="6300782" y="839421"/>
+                  <a:pt x="6300782" y="1740695"/>
+                </a:cubicBezTo>
+                <a:cubicBezTo>
+                  <a:pt x="6300782" y="2641969"/>
+                  <a:pt x="5615819" y="3383262"/>
+                  <a:pt x="4738063" y="3472403"/>
+                </a:cubicBezTo>
+                <a:lnTo>
+                  <a:pt x="4562473" y="3481270"/>
+                </a:lnTo>
+                <a:lnTo>
+                  <a:pt x="4562473" y="3481390"/>
+                </a:lnTo>
+                <a:lnTo>
+                  <a:pt x="4560087" y="3481390"/>
+                </a:lnTo>
+                <a:lnTo>
+                  <a:pt x="0" y="3481390"/>
+                </a:lnTo>
+                <a:close/>
+              </a:path>
+            </a:pathLst>
+          </a:custGeom>
+          <a:solidFill>
+            <a:srgbClr val="E3E9EA"/>
+          </a:solidFill>
+          <a:ln>
+            <a:noFill/>
+          </a:ln>
+        </p:spPr>
+        <p:style>
+          <a:lnRef idx="2">
+            <a:schemeClr val="accent1">
+              <a:shade val="15000"/>
+            </a:schemeClr>
+          </a:lnRef>
+          <a:fillRef idx="1">
+            <a:schemeClr val="accent1"/>
+          </a:fillRef>
+          <a:effectRef idx="0">
+            <a:schemeClr val="accent1"/>
+          </a:effectRef>
+          <a:fontRef idx="minor">
+            <a:schemeClr val="lt1"/>
+          </a:fontRef>
+        </p:style>
+        <p:txBody>
+          <a:bodyPr lIns="0" tIns="0" rIns="0" bIns="0" rtlCol="0" anchor="ctr"/>
+          <a:lstStyle/>
+          <a:p>
+            <a:pPr algn="ctr"/>
+            <a:endParaRPr lang="de-DE" sz="1600" b="1">
+              <a:solidFill>
+                <a:schemeClr val="tx1"/>
+              </a:solidFill>
+            </a:endParaRPr>
+          </a:p>
+        </p:txBody>
+      </p:sp>
+      <p:sp>
+        <p:nvSpPr>
+          <p:cNvPr id="7" name="Textfeld 6">
+            <a:extLst>
+              <a:ext uri="{FF2B5EF4-FFF2-40B4-BE49-F238E27FC236}">
+                <a16:creationId xmlns:a16="http://schemas.microsoft.com/office/drawing/2014/main" id="{8853670F-8444-2F05-CBDB-F72F6F8198A6}"/>
+              </a:ext>
+            </a:extLst>
+          </p:cNvPr>
+          <p:cNvSpPr txBox="1"/>
+          <p:nvPr/>
+        </p:nvSpPr>
+        <p:spPr>
+          <a:xfrm>
+            <a:off x="10287922" y="17905"/>
+            <a:ext cx="1904078" cy="461665"/>
+          </a:xfrm>
+          <a:prstGeom prst="rect">
+            <a:avLst/>
+          </a:prstGeom>
+          <a:noFill/>
+        </p:spPr>
+        <p:txBody>
+          <a:bodyPr wrap="square" rtlCol="0">
+            <a:spAutoFit/>
+          </a:bodyPr>
+          <a:lstStyle/>
+          <a:p>
+            <a:pPr algn="ctr"/>
+            <a:r>
+              <a:rPr lang="de-DE" sz="2400" dirty="0">
+                <a:solidFill>
+                  <a:srgbClr val="00336E"/>
+                </a:solidFill>
+                <a:ea typeface="Cormorant Garamond" pitchFamily="2" charset="0"/>
+                <a:cs typeface="Cormorant Garamond" pitchFamily="2" charset="0"/>
+              </a:rPr>
+              <a:t>First </a:t>
+            </a:r>
+            <a:r>
+              <a:rPr lang="de-DE" sz="2400" dirty="0" err="1">
+                <a:solidFill>
+                  <a:srgbClr val="00336E"/>
+                </a:solidFill>
+                <a:ea typeface="Cormorant Garamond" pitchFamily="2" charset="0"/>
+                <a:cs typeface="Cormorant Garamond" pitchFamily="2" charset="0"/>
+              </a:rPr>
+              <a:t>results</a:t>
+            </a:r>
+            <a:endParaRPr lang="de-DE" sz="2400" b="1" dirty="0">
+              <a:solidFill>
+                <a:srgbClr val="00336E"/>
+              </a:solidFill>
+              <a:ea typeface="Cormorant Garamond" pitchFamily="2" charset="0"/>
+              <a:cs typeface="Cormorant Garamond" pitchFamily="2" charset="0"/>
+            </a:endParaRPr>
+          </a:p>
+        </p:txBody>
+      </p:sp>
+      <p:sp>
+        <p:nvSpPr>
+          <p:cNvPr id="9" name="Ellipse 8">
+            <a:extLst>
+              <a:ext uri="{FF2B5EF4-FFF2-40B4-BE49-F238E27FC236}">
+                <a16:creationId xmlns:a16="http://schemas.microsoft.com/office/drawing/2014/main" id="{0C73F85F-C108-F261-F028-8C58D068EDEA}"/>
+              </a:ext>
+            </a:extLst>
+          </p:cNvPr>
+          <p:cNvSpPr/>
+          <p:nvPr/>
+        </p:nvSpPr>
+        <p:spPr>
+          <a:xfrm>
+            <a:off x="10012084" y="66307"/>
+            <a:ext cx="340233" cy="340233"/>
+          </a:xfrm>
+          <a:prstGeom prst="ellipse">
+            <a:avLst/>
+          </a:prstGeom>
+          <a:solidFill>
+            <a:srgbClr val="E3E9EA"/>
+          </a:solidFill>
+          <a:ln>
+            <a:solidFill>
+              <a:srgbClr val="00336E"/>
+            </a:solidFill>
+          </a:ln>
+        </p:spPr>
+        <p:style>
+          <a:lnRef idx="2">
+            <a:schemeClr val="accent1">
+              <a:shade val="15000"/>
+            </a:schemeClr>
+          </a:lnRef>
+          <a:fillRef idx="1">
+            <a:schemeClr val="accent1"/>
+          </a:fillRef>
+          <a:effectRef idx="0">
+            <a:schemeClr val="accent1"/>
+          </a:effectRef>
+          <a:fontRef idx="minor">
+            <a:schemeClr val="lt1"/>
+          </a:fontRef>
+        </p:style>
+        <p:txBody>
+          <a:bodyPr lIns="0" tIns="0" rIns="0" bIns="0" rtlCol="0" anchor="ctr"/>
+          <a:lstStyle/>
+          <a:p>
+            <a:pPr algn="ctr"/>
+            <a:r>
+              <a:rPr lang="de-DE" b="1" dirty="0">
+                <a:solidFill>
+                  <a:schemeClr val="tx1"/>
+                </a:solidFill>
+              </a:rPr>
+              <a:t>1</a:t>
+            </a:r>
+            <a:endParaRPr lang="de-DE" sz="900" b="1" dirty="0">
+              <a:solidFill>
+                <a:schemeClr val="tx1"/>
+              </a:solidFill>
+            </a:endParaRPr>
+          </a:p>
+        </p:txBody>
+      </p:sp>
+      <p:sp>
+        <p:nvSpPr>
+          <p:cNvPr id="2" name="Textfeld 1">
+            <a:extLst>
+              <a:ext uri="{FF2B5EF4-FFF2-40B4-BE49-F238E27FC236}">
+                <a16:creationId xmlns:a16="http://schemas.microsoft.com/office/drawing/2014/main" id="{39C1E9E8-8660-D120-53F2-7E4406178B30}"/>
+              </a:ext>
+            </a:extLst>
+          </p:cNvPr>
+          <p:cNvSpPr txBox="1"/>
+          <p:nvPr/>
+        </p:nvSpPr>
+        <p:spPr>
+          <a:xfrm>
+            <a:off x="2665712" y="1539240"/>
+            <a:ext cx="6860576" cy="1045414"/>
+          </a:xfrm>
+          <a:prstGeom prst="rect">
+            <a:avLst/>
+          </a:prstGeom>
+          <a:noFill/>
+        </p:spPr>
+        <p:txBody>
+          <a:bodyPr wrap="square">
+            <a:spAutoFit/>
+          </a:bodyPr>
+          <a:lstStyle/>
+          <a:p>
+            <a:pPr>
+              <a:lnSpc>
+                <a:spcPct val="115000"/>
+              </a:lnSpc>
+              <a:spcAft>
+                <a:spcPts val="1000"/>
+              </a:spcAft>
+              <a:buNone/>
+            </a:pPr>
+            <a:r>
+              <a:rPr lang="en-US" sz="2800" b="1" dirty="0">
+                <a:ea typeface="MS Mincho" panose="02020609040205080304" pitchFamily="49" charset="-128"/>
+                <a:cs typeface="Times New Roman" panose="02020603050405020304" pitchFamily="18" charset="0"/>
+              </a:rPr>
+              <a:t>Milestone</a:t>
+            </a:r>
+            <a:r>
+              <a:rPr lang="en-US" sz="2800" dirty="0">
+                <a:ea typeface="MS Mincho" panose="02020609040205080304" pitchFamily="49" charset="-128"/>
+                <a:cs typeface="Times New Roman" panose="02020603050405020304" pitchFamily="18" charset="0"/>
+              </a:rPr>
+              <a:t>: Evolutionary algorithm finds successful solutions to static tasks. </a:t>
+            </a:r>
+            <a:endParaRPr lang="de-DE" sz="2800" b="1" dirty="0">
+              <a:ea typeface="MS Mincho" panose="02020609040205080304" pitchFamily="49" charset="-128"/>
+              <a:cs typeface="Times New Roman" panose="02020603050405020304" pitchFamily="18" charset="0"/>
+            </a:endParaRPr>
+          </a:p>
+        </p:txBody>
+      </p:sp>
+    </p:spTree>
+    <p:extLst>
+      <p:ext uri="{BB962C8B-B14F-4D97-AF65-F5344CB8AC3E}">
+        <p14:creationId xmlns:p14="http://schemas.microsoft.com/office/powerpoint/2010/main" val="553160395"/>
+      </p:ext>
+    </p:extLst>
+  </p:cSld>
+  <p:clrMapOvr>
+    <a:masterClrMapping/>
+  </p:clrMapOvr>
+</p:sld>
+</file>
+
+<file path=ppt/slides/slide21.xml><?xml version="1.0" encoding="utf-8"?>
+<p:sld xmlns:a="http://schemas.openxmlformats.org/drawingml/2006/main" xmlns:r="http://schemas.openxmlformats.org/officeDocument/2006/relationships" xmlns:p="http://schemas.openxmlformats.org/presentationml/2006/main">
+  <p:cSld>
+    <p:spTree>
+      <p:nvGrpSpPr>
+        <p:cNvPr id="1" name=""/>
+        <p:cNvGrpSpPr/>
+        <p:nvPr/>
+      </p:nvGrpSpPr>
+      <p:grpSpPr>
+        <a:xfrm>
+          <a:off x="0" y="0"/>
+          <a:ext cx="0" cy="0"/>
+          <a:chOff x="0" y="0"/>
+          <a:chExt cx="0" cy="0"/>
+        </a:xfrm>
+      </p:grpSpPr>
+    </p:spTree>
+    <p:extLst>
+      <p:ext uri="{BB962C8B-B14F-4D97-AF65-F5344CB8AC3E}">
+        <p14:creationId xmlns:p14="http://schemas.microsoft.com/office/powerpoint/2010/main" val="3176741396"/>
+      </p:ext>
+    </p:extLst>
+  </p:cSld>
+  <p:clrMapOvr>
+    <a:masterClrMapping/>
+  </p:clrMapOvr>
+</p:sld>
+</file>
+
+<file path=ppt/slides/slide22.xml><?xml version="1.0" encoding="utf-8"?>
+<p:sld xmlns:a="http://schemas.openxmlformats.org/drawingml/2006/main" xmlns:r="http://schemas.openxmlformats.org/officeDocument/2006/relationships" xmlns:p="http://schemas.openxmlformats.org/presentationml/2006/main">
+  <p:cSld>
+    <p:spTree>
+      <p:nvGrpSpPr>
         <p:cNvPr id="1" name=""/>
         <p:cNvGrpSpPr/>
         <p:nvPr/>
@@ -9524,7 +10015,7 @@
           <a:p>
             <a:fld id="{001D04CD-A18E-4C48-A0D4-2F175BEDACF1}" type="slidenum">
               <a:rPr lang="de-DE" smtClean="0"/>
-              <a:t>20</a:t>
+              <a:t>22</a:t>
             </a:fld>
             <a:endParaRPr lang="de-DE"/>
           </a:p>
